--- a/Presentation template.pptx
+++ b/Presentation template.pptx
@@ -5,14 +5,22 @@
     <p:sldMasterId id="2147483648" r:id="rId4"/>
   </p:sldMasterIdLst>
   <p:notesMasterIdLst>
-    <p:notesMasterId r:id="rId7"/>
+    <p:notesMasterId r:id="rId15"/>
   </p:notesMasterIdLst>
   <p:handoutMasterIdLst>
-    <p:handoutMasterId r:id="rId8"/>
+    <p:handoutMasterId r:id="rId16"/>
   </p:handoutMasterIdLst>
   <p:sldIdLst>
     <p:sldId id="256" r:id="rId5"/>
-    <p:sldId id="258" r:id="rId6"/>
+    <p:sldId id="259" r:id="rId6"/>
+    <p:sldId id="260" r:id="rId7"/>
+    <p:sldId id="261" r:id="rId8"/>
+    <p:sldId id="262" r:id="rId9"/>
+    <p:sldId id="263" r:id="rId10"/>
+    <p:sldId id="264" r:id="rId11"/>
+    <p:sldId id="265" r:id="rId12"/>
+    <p:sldId id="266" r:id="rId13"/>
+    <p:sldId id="267" r:id="rId14"/>
   </p:sldIdLst>
   <p:sldSz cx="12192000" cy="6858000"/>
   <p:notesSz cx="6858000" cy="9144000"/>
@@ -115,6 +123,9 @@
     <p:ext uri="{EFAFB233-063F-42B5-8137-9DF3F51BA10A}">
       <p15:sldGuideLst xmlns:p15="http://schemas.microsoft.com/office/powerpoint/2012/main"/>
     </p:ext>
+    <p:ext uri="{2D200454-40CA-4A62-9FC3-DE9A4176ACB9}">
+      <p15:notesGuideLst xmlns:p15="http://schemas.microsoft.com/office/powerpoint/2012/main"/>
+    </p:ext>
   </p:extLst>
 </p:presentation>
 </file>
@@ -123,8 +134,1274 @@
 <p1510:revInfo xmlns:a="http://schemas.openxmlformats.org/drawingml/2006/main" xmlns:r="http://schemas.openxmlformats.org/officeDocument/2006/relationships" xmlns:p1510="http://schemas.microsoft.com/office/powerpoint/2015/10/main">
   <p1510:revLst>
     <p1510:client id="{663A8FC1-0418-4C52-B852-F65FF6F71283}" v="32" dt="2025-10-11T09:24:03.501"/>
+    <p1510:client id="{7EC91AD0-C4BA-4F73-B943-0241CE9C142B}" v="440" dt="2025-10-11T11:11:11.724"/>
   </p1510:revLst>
 </p1510:revInfo>
+</file>
+
+<file path=ppt/changesInfos/changesInfo1.xml><?xml version="1.0" encoding="utf-8"?>
+<pc:chgInfo xmlns:a="http://schemas.openxmlformats.org/drawingml/2006/main" xmlns:r="http://schemas.openxmlformats.org/officeDocument/2006/relationships" xmlns:ac="http://schemas.microsoft.com/office/drawing/2013/main/command" xmlns:pc="http://schemas.microsoft.com/office/powerpoint/2013/main/command">
+  <pc:docChgLst>
+    <pc:chgData name="Federico De Mita" userId="6ce638df-d46f-4fb8-b9fa-d85fcdec2cd5" providerId="ADAL" clId="{08362040-18E5-4911-871A-90A5BB37375A}"/>
+    <pc:docChg chg="undo custSel addSld delSld modSld">
+      <pc:chgData name="Federico De Mita" userId="6ce638df-d46f-4fb8-b9fa-d85fcdec2cd5" providerId="ADAL" clId="{08362040-18E5-4911-871A-90A5BB37375A}" dt="2025-10-11T11:11:11.724" v="3123"/>
+      <pc:docMkLst>
+        <pc:docMk/>
+      </pc:docMkLst>
+      <pc:sldChg chg="modSp mod">
+        <pc:chgData name="Federico De Mita" userId="6ce638df-d46f-4fb8-b9fa-d85fcdec2cd5" providerId="ADAL" clId="{08362040-18E5-4911-871A-90A5BB37375A}" dt="2025-10-11T11:09:48.103" v="3101" actId="1076"/>
+        <pc:sldMkLst>
+          <pc:docMk/>
+          <pc:sldMk cId="2491019271" sldId="256"/>
+        </pc:sldMkLst>
+        <pc:spChg chg="mod">
+          <ac:chgData name="Federico De Mita" userId="6ce638df-d46f-4fb8-b9fa-d85fcdec2cd5" providerId="ADAL" clId="{08362040-18E5-4911-871A-90A5BB37375A}" dt="2025-10-11T09:29:01.142" v="20" actId="20577"/>
+          <ac:spMkLst>
+            <pc:docMk/>
+            <pc:sldMk cId="2491019271" sldId="256"/>
+            <ac:spMk id="2" creationId="{F1190EAC-756A-60B6-38CA-FEA221960A0A}"/>
+          </ac:spMkLst>
+        </pc:spChg>
+        <pc:spChg chg="mod">
+          <ac:chgData name="Federico De Mita" userId="6ce638df-d46f-4fb8-b9fa-d85fcdec2cd5" providerId="ADAL" clId="{08362040-18E5-4911-871A-90A5BB37375A}" dt="2025-10-11T09:29:41.099" v="89" actId="20577"/>
+          <ac:spMkLst>
+            <pc:docMk/>
+            <pc:sldMk cId="2491019271" sldId="256"/>
+            <ac:spMk id="3" creationId="{7D8C6B3A-051D-D11E-4616-09A53BDD142B}"/>
+          </ac:spMkLst>
+        </pc:spChg>
+        <pc:spChg chg="mod">
+          <ac:chgData name="Federico De Mita" userId="6ce638df-d46f-4fb8-b9fa-d85fcdec2cd5" providerId="ADAL" clId="{08362040-18E5-4911-871A-90A5BB37375A}" dt="2025-10-11T11:09:48.103" v="3101" actId="1076"/>
+          <ac:spMkLst>
+            <pc:docMk/>
+            <pc:sldMk cId="2491019271" sldId="256"/>
+            <ac:spMk id="5" creationId="{D8FF91B6-526A-391E-8A13-F0DE0ACCC936}"/>
+          </ac:spMkLst>
+        </pc:spChg>
+        <pc:spChg chg="mod">
+          <ac:chgData name="Federico De Mita" userId="6ce638df-d46f-4fb8-b9fa-d85fcdec2cd5" providerId="ADAL" clId="{08362040-18E5-4911-871A-90A5BB37375A}" dt="2025-10-11T11:09:42.064" v="3099" actId="14100"/>
+          <ac:spMkLst>
+            <pc:docMk/>
+            <pc:sldMk cId="2491019271" sldId="256"/>
+            <ac:spMk id="6" creationId="{3E386A1C-5B8D-4356-0704-541B778073F5}"/>
+          </ac:spMkLst>
+        </pc:spChg>
+      </pc:sldChg>
+      <pc:sldChg chg="del">
+        <pc:chgData name="Federico De Mita" userId="6ce638df-d46f-4fb8-b9fa-d85fcdec2cd5" providerId="ADAL" clId="{08362040-18E5-4911-871A-90A5BB37375A}" dt="2025-10-11T09:30:00.499" v="91" actId="47"/>
+        <pc:sldMkLst>
+          <pc:docMk/>
+          <pc:sldMk cId="3817345829" sldId="258"/>
+        </pc:sldMkLst>
+      </pc:sldChg>
+      <pc:sldChg chg="addSp delSp modSp new mod">
+        <pc:chgData name="Federico De Mita" userId="6ce638df-d46f-4fb8-b9fa-d85fcdec2cd5" providerId="ADAL" clId="{08362040-18E5-4911-871A-90A5BB37375A}" dt="2025-10-11T11:09:56.217" v="3105"/>
+        <pc:sldMkLst>
+          <pc:docMk/>
+          <pc:sldMk cId="3199336296" sldId="259"/>
+        </pc:sldMkLst>
+        <pc:spChg chg="mod">
+          <ac:chgData name="Federico De Mita" userId="6ce638df-d46f-4fb8-b9fa-d85fcdec2cd5" providerId="ADAL" clId="{08362040-18E5-4911-871A-90A5BB37375A}" dt="2025-10-11T09:34:09.695" v="178" actId="14100"/>
+          <ac:spMkLst>
+            <pc:docMk/>
+            <pc:sldMk cId="3199336296" sldId="259"/>
+            <ac:spMk id="2" creationId="{9B30E08B-F779-A8D8-4857-18AE607A146F}"/>
+          </ac:spMkLst>
+        </pc:spChg>
+        <pc:spChg chg="mod">
+          <ac:chgData name="Federico De Mita" userId="6ce638df-d46f-4fb8-b9fa-d85fcdec2cd5" providerId="ADAL" clId="{08362040-18E5-4911-871A-90A5BB37375A}" dt="2025-10-11T09:55:02.898" v="638" actId="20577"/>
+          <ac:spMkLst>
+            <pc:docMk/>
+            <pc:sldMk cId="3199336296" sldId="259"/>
+            <ac:spMk id="3" creationId="{616A8F45-0137-9670-0923-3C7C7D97EBC6}"/>
+          </ac:spMkLst>
+        </pc:spChg>
+        <pc:spChg chg="del">
+          <ac:chgData name="Federico De Mita" userId="6ce638df-d46f-4fb8-b9fa-d85fcdec2cd5" providerId="ADAL" clId="{08362040-18E5-4911-871A-90A5BB37375A}" dt="2025-10-11T11:09:55.779" v="3104" actId="478"/>
+          <ac:spMkLst>
+            <pc:docMk/>
+            <pc:sldMk cId="3199336296" sldId="259"/>
+            <ac:spMk id="5" creationId="{67AEA230-39DC-E4BE-A801-22A09A753871}"/>
+          </ac:spMkLst>
+        </pc:spChg>
+        <pc:spChg chg="add mod">
+          <ac:chgData name="Federico De Mita" userId="6ce638df-d46f-4fb8-b9fa-d85fcdec2cd5" providerId="ADAL" clId="{08362040-18E5-4911-871A-90A5BB37375A}" dt="2025-10-11T09:36:48.267" v="244"/>
+          <ac:spMkLst>
+            <pc:docMk/>
+            <pc:sldMk cId="3199336296" sldId="259"/>
+            <ac:spMk id="7" creationId="{293602FC-A3F1-8FDD-0D48-7E453CE1A8A0}"/>
+          </ac:spMkLst>
+        </pc:spChg>
+        <pc:spChg chg="add mod">
+          <ac:chgData name="Federico De Mita" userId="6ce638df-d46f-4fb8-b9fa-d85fcdec2cd5" providerId="ADAL" clId="{08362040-18E5-4911-871A-90A5BB37375A}" dt="2025-10-11T11:09:54.733" v="3103"/>
+          <ac:spMkLst>
+            <pc:docMk/>
+            <pc:sldMk cId="3199336296" sldId="259"/>
+            <ac:spMk id="8" creationId="{28DE457B-B95E-465D-BDD8-99E15EAD6DC3}"/>
+          </ac:spMkLst>
+        </pc:spChg>
+        <pc:spChg chg="add mod">
+          <ac:chgData name="Federico De Mita" userId="6ce638df-d46f-4fb8-b9fa-d85fcdec2cd5" providerId="ADAL" clId="{08362040-18E5-4911-871A-90A5BB37375A}" dt="2025-10-11T11:09:56.217" v="3105"/>
+          <ac:spMkLst>
+            <pc:docMk/>
+            <pc:sldMk cId="3199336296" sldId="259"/>
+            <ac:spMk id="9" creationId="{8C079E31-6EBD-DDF9-5DF5-5F79F389E497}"/>
+          </ac:spMkLst>
+        </pc:spChg>
+      </pc:sldChg>
+      <pc:sldChg chg="addSp delSp modSp add mod">
+        <pc:chgData name="Federico De Mita" userId="6ce638df-d46f-4fb8-b9fa-d85fcdec2cd5" providerId="ADAL" clId="{08362040-18E5-4911-871A-90A5BB37375A}" dt="2025-10-11T11:10:04.111" v="3109"/>
+        <pc:sldMkLst>
+          <pc:docMk/>
+          <pc:sldMk cId="2438166315" sldId="260"/>
+        </pc:sldMkLst>
+        <pc:spChg chg="mod">
+          <ac:chgData name="Federico De Mita" userId="6ce638df-d46f-4fb8-b9fa-d85fcdec2cd5" providerId="ADAL" clId="{08362040-18E5-4911-871A-90A5BB37375A}" dt="2025-10-11T09:46:35.763" v="422" actId="404"/>
+          <ac:spMkLst>
+            <pc:docMk/>
+            <pc:sldMk cId="2438166315" sldId="260"/>
+            <ac:spMk id="2" creationId="{7F98E838-1D4D-7A39-99CC-37A428DA73C0}"/>
+          </ac:spMkLst>
+        </pc:spChg>
+        <pc:spChg chg="del">
+          <ac:chgData name="Federico De Mita" userId="6ce638df-d46f-4fb8-b9fa-d85fcdec2cd5" providerId="ADAL" clId="{08362040-18E5-4911-871A-90A5BB37375A}" dt="2025-10-11T09:37:01.966" v="246" actId="478"/>
+          <ac:spMkLst>
+            <pc:docMk/>
+            <pc:sldMk cId="2438166315" sldId="260"/>
+            <ac:spMk id="3" creationId="{F36215D3-FB49-CD9F-037B-449C308F618E}"/>
+          </ac:spMkLst>
+        </pc:spChg>
+        <pc:spChg chg="mod">
+          <ac:chgData name="Federico De Mita" userId="6ce638df-d46f-4fb8-b9fa-d85fcdec2cd5" providerId="ADAL" clId="{08362040-18E5-4911-871A-90A5BB37375A}" dt="2025-10-11T09:46:35.763" v="422" actId="404"/>
+          <ac:spMkLst>
+            <pc:docMk/>
+            <pc:sldMk cId="2438166315" sldId="260"/>
+            <ac:spMk id="4" creationId="{94172236-BF73-6D5C-4FCC-BE14C2FC675F}"/>
+          </ac:spMkLst>
+        </pc:spChg>
+        <pc:spChg chg="del mod">
+          <ac:chgData name="Federico De Mita" userId="6ce638df-d46f-4fb8-b9fa-d85fcdec2cd5" providerId="ADAL" clId="{08362040-18E5-4911-871A-90A5BB37375A}" dt="2025-10-11T11:10:03.409" v="3108" actId="478"/>
+          <ac:spMkLst>
+            <pc:docMk/>
+            <pc:sldMk cId="2438166315" sldId="260"/>
+            <ac:spMk id="5" creationId="{CC9FF4D9-7405-7229-925B-D5A35999E610}"/>
+          </ac:spMkLst>
+        </pc:spChg>
+        <pc:spChg chg="mod">
+          <ac:chgData name="Federico De Mita" userId="6ce638df-d46f-4fb8-b9fa-d85fcdec2cd5" providerId="ADAL" clId="{08362040-18E5-4911-871A-90A5BB37375A}" dt="2025-10-11T09:46:35.763" v="422" actId="404"/>
+          <ac:spMkLst>
+            <pc:docMk/>
+            <pc:sldMk cId="2438166315" sldId="260"/>
+            <ac:spMk id="6" creationId="{8EFA68EC-020C-EEEE-55F2-F5D9E085501B}"/>
+          </ac:spMkLst>
+        </pc:spChg>
+        <pc:spChg chg="add mod">
+          <ac:chgData name="Federico De Mita" userId="6ce638df-d46f-4fb8-b9fa-d85fcdec2cd5" providerId="ADAL" clId="{08362040-18E5-4911-871A-90A5BB37375A}" dt="2025-10-11T09:49:18.563" v="471" actId="20577"/>
+          <ac:spMkLst>
+            <pc:docMk/>
+            <pc:sldMk cId="2438166315" sldId="260"/>
+            <ac:spMk id="8" creationId="{77495751-531F-BBFD-89AB-6B5F8B668CCB}"/>
+          </ac:spMkLst>
+        </pc:spChg>
+        <pc:spChg chg="add mod">
+          <ac:chgData name="Federico De Mita" userId="6ce638df-d46f-4fb8-b9fa-d85fcdec2cd5" providerId="ADAL" clId="{08362040-18E5-4911-871A-90A5BB37375A}" dt="2025-10-11T09:55:35.242" v="640" actId="1076"/>
+          <ac:spMkLst>
+            <pc:docMk/>
+            <pc:sldMk cId="2438166315" sldId="260"/>
+            <ac:spMk id="13" creationId="{09F3E1F6-5FE5-4E12-6A3E-566AD6F332CC}"/>
+          </ac:spMkLst>
+        </pc:spChg>
+        <pc:spChg chg="add mod">
+          <ac:chgData name="Federico De Mita" userId="6ce638df-d46f-4fb8-b9fa-d85fcdec2cd5" providerId="ADAL" clId="{08362040-18E5-4911-871A-90A5BB37375A}" dt="2025-10-11T10:03:30.883" v="833" actId="207"/>
+          <ac:spMkLst>
+            <pc:docMk/>
+            <pc:sldMk cId="2438166315" sldId="260"/>
+            <ac:spMk id="18" creationId="{ABA0906B-35BC-A227-D811-C688A71A2AD2}"/>
+          </ac:spMkLst>
+        </pc:spChg>
+        <pc:spChg chg="add mod">
+          <ac:chgData name="Federico De Mita" userId="6ce638df-d46f-4fb8-b9fa-d85fcdec2cd5" providerId="ADAL" clId="{08362040-18E5-4911-871A-90A5BB37375A}" dt="2025-10-11T10:04:38.286" v="846" actId="20577"/>
+          <ac:spMkLst>
+            <pc:docMk/>
+            <pc:sldMk cId="2438166315" sldId="260"/>
+            <ac:spMk id="19" creationId="{68E25EA3-2050-37F0-42BE-F6DF30A0C865}"/>
+          </ac:spMkLst>
+        </pc:spChg>
+        <pc:spChg chg="add mod">
+          <ac:chgData name="Federico De Mita" userId="6ce638df-d46f-4fb8-b9fa-d85fcdec2cd5" providerId="ADAL" clId="{08362040-18E5-4911-871A-90A5BB37375A}" dt="2025-10-11T11:10:02.077" v="3107"/>
+          <ac:spMkLst>
+            <pc:docMk/>
+            <pc:sldMk cId="2438166315" sldId="260"/>
+            <ac:spMk id="20" creationId="{F4403553-B808-B1F5-049C-26284211AA39}"/>
+          </ac:spMkLst>
+        </pc:spChg>
+        <pc:spChg chg="add mod">
+          <ac:chgData name="Federico De Mita" userId="6ce638df-d46f-4fb8-b9fa-d85fcdec2cd5" providerId="ADAL" clId="{08362040-18E5-4911-871A-90A5BB37375A}" dt="2025-10-11T11:10:04.111" v="3109"/>
+          <ac:spMkLst>
+            <pc:docMk/>
+            <pc:sldMk cId="2438166315" sldId="260"/>
+            <ac:spMk id="21" creationId="{C20FE2E6-E720-62A8-A4AE-0A0584520AA5}"/>
+          </ac:spMkLst>
+        </pc:spChg>
+        <pc:picChg chg="add mod">
+          <ac:chgData name="Federico De Mita" userId="6ce638df-d46f-4fb8-b9fa-d85fcdec2cd5" providerId="ADAL" clId="{08362040-18E5-4911-871A-90A5BB37375A}" dt="2025-10-11T09:55:32.554" v="639" actId="1076"/>
+          <ac:picMkLst>
+            <pc:docMk/>
+            <pc:sldMk cId="2438166315" sldId="260"/>
+            <ac:picMk id="10" creationId="{CADAA80E-6848-1A40-3EC4-5586D584C773}"/>
+          </ac:picMkLst>
+        </pc:picChg>
+        <pc:picChg chg="add mod ord">
+          <ac:chgData name="Federico De Mita" userId="6ce638df-d46f-4fb8-b9fa-d85fcdec2cd5" providerId="ADAL" clId="{08362040-18E5-4911-871A-90A5BB37375A}" dt="2025-10-11T09:57:44.098" v="706" actId="1036"/>
+          <ac:picMkLst>
+            <pc:docMk/>
+            <pc:sldMk cId="2438166315" sldId="260"/>
+            <ac:picMk id="12" creationId="{77398D2B-D07D-6464-761B-15CA25AD10E5}"/>
+          </ac:picMkLst>
+        </pc:picChg>
+        <pc:picChg chg="add mod">
+          <ac:chgData name="Federico De Mita" userId="6ce638df-d46f-4fb8-b9fa-d85fcdec2cd5" providerId="ADAL" clId="{08362040-18E5-4911-871A-90A5BB37375A}" dt="2025-10-11T09:57:44.098" v="706" actId="1036"/>
+          <ac:picMkLst>
+            <pc:docMk/>
+            <pc:sldMk cId="2438166315" sldId="260"/>
+            <ac:picMk id="15" creationId="{B58455D3-7280-D81E-00EA-25FDA56A101A}"/>
+          </ac:picMkLst>
+        </pc:picChg>
+        <pc:picChg chg="add mod">
+          <ac:chgData name="Federico De Mita" userId="6ce638df-d46f-4fb8-b9fa-d85fcdec2cd5" providerId="ADAL" clId="{08362040-18E5-4911-871A-90A5BB37375A}" dt="2025-10-11T09:57:44.098" v="706" actId="1036"/>
+          <ac:picMkLst>
+            <pc:docMk/>
+            <pc:sldMk cId="2438166315" sldId="260"/>
+            <ac:picMk id="17" creationId="{3CF13917-22EA-6EB3-C71B-A57FFC8B3A61}"/>
+          </ac:picMkLst>
+        </pc:picChg>
+      </pc:sldChg>
+      <pc:sldChg chg="addSp delSp modSp add mod">
+        <pc:chgData name="Federico De Mita" userId="6ce638df-d46f-4fb8-b9fa-d85fcdec2cd5" providerId="ADAL" clId="{08362040-18E5-4911-871A-90A5BB37375A}" dt="2025-10-11T11:11:11.724" v="3123"/>
+        <pc:sldMkLst>
+          <pc:docMk/>
+          <pc:sldMk cId="2645377945" sldId="261"/>
+        </pc:sldMkLst>
+        <pc:spChg chg="del">
+          <ac:chgData name="Federico De Mita" userId="6ce638df-d46f-4fb8-b9fa-d85fcdec2cd5" providerId="ADAL" clId="{08362040-18E5-4911-871A-90A5BB37375A}" dt="2025-10-11T11:11:11.324" v="3122" actId="478"/>
+          <ac:spMkLst>
+            <pc:docMk/>
+            <pc:sldMk cId="2645377945" sldId="261"/>
+            <ac:spMk id="5" creationId="{827F9957-BD10-C1DA-6055-0B12AA237654}"/>
+          </ac:spMkLst>
+        </pc:spChg>
+        <pc:spChg chg="mod">
+          <ac:chgData name="Federico De Mita" userId="6ce638df-d46f-4fb8-b9fa-d85fcdec2cd5" providerId="ADAL" clId="{08362040-18E5-4911-871A-90A5BB37375A}" dt="2025-10-11T09:52:42.249" v="549" actId="1076"/>
+          <ac:spMkLst>
+            <pc:docMk/>
+            <pc:sldMk cId="2645377945" sldId="261"/>
+            <ac:spMk id="8" creationId="{DF38F374-7DFE-05E4-BBC2-C69F7009A965}"/>
+          </ac:spMkLst>
+        </pc:spChg>
+        <pc:spChg chg="add mod">
+          <ac:chgData name="Federico De Mita" userId="6ce638df-d46f-4fb8-b9fa-d85fcdec2cd5" providerId="ADAL" clId="{08362040-18E5-4911-871A-90A5BB37375A}" dt="2025-10-11T09:52:39.851" v="548" actId="1076"/>
+          <ac:spMkLst>
+            <pc:docMk/>
+            <pc:sldMk cId="2645377945" sldId="261"/>
+            <ac:spMk id="9" creationId="{70374BA6-94FD-26C1-061D-52B5E16F9C03}"/>
+          </ac:spMkLst>
+        </pc:spChg>
+        <pc:spChg chg="del">
+          <ac:chgData name="Federico De Mita" userId="6ce638df-d46f-4fb8-b9fa-d85fcdec2cd5" providerId="ADAL" clId="{08362040-18E5-4911-871A-90A5BB37375A}" dt="2025-10-11T09:50:32.362" v="488" actId="478"/>
+          <ac:spMkLst>
+            <pc:docMk/>
+            <pc:sldMk cId="2645377945" sldId="261"/>
+            <ac:spMk id="13" creationId="{BEF23034-C9C8-6FD9-D9D2-67DA9904EA2F}"/>
+          </ac:spMkLst>
+        </pc:spChg>
+        <pc:spChg chg="add mod">
+          <ac:chgData name="Federico De Mita" userId="6ce638df-d46f-4fb8-b9fa-d85fcdec2cd5" providerId="ADAL" clId="{08362040-18E5-4911-871A-90A5BB37375A}" dt="2025-10-11T10:05:25.603" v="853" actId="207"/>
+          <ac:spMkLst>
+            <pc:docMk/>
+            <pc:sldMk cId="2645377945" sldId="261"/>
+            <ac:spMk id="16" creationId="{CBFF1704-65B9-E46D-69F6-AFFA3E975AB4}"/>
+          </ac:spMkLst>
+        </pc:spChg>
+        <pc:spChg chg="add mod">
+          <ac:chgData name="Federico De Mita" userId="6ce638df-d46f-4fb8-b9fa-d85fcdec2cd5" providerId="ADAL" clId="{08362040-18E5-4911-871A-90A5BB37375A}" dt="2025-10-11T10:06:45.143" v="885"/>
+          <ac:spMkLst>
+            <pc:docMk/>
+            <pc:sldMk cId="2645377945" sldId="261"/>
+            <ac:spMk id="17" creationId="{0E18D537-46F0-D086-C47E-81C4C5E3B392}"/>
+          </ac:spMkLst>
+        </pc:spChg>
+        <pc:spChg chg="add mod">
+          <ac:chgData name="Federico De Mita" userId="6ce638df-d46f-4fb8-b9fa-d85fcdec2cd5" providerId="ADAL" clId="{08362040-18E5-4911-871A-90A5BB37375A}" dt="2025-10-11T10:07:13.301" v="894"/>
+          <ac:spMkLst>
+            <pc:docMk/>
+            <pc:sldMk cId="2645377945" sldId="261"/>
+            <ac:spMk id="18" creationId="{550A76FB-8BE3-29AD-3295-6A27A193037E}"/>
+          </ac:spMkLst>
+        </pc:spChg>
+        <pc:spChg chg="add mod">
+          <ac:chgData name="Federico De Mita" userId="6ce638df-d46f-4fb8-b9fa-d85fcdec2cd5" providerId="ADAL" clId="{08362040-18E5-4911-871A-90A5BB37375A}" dt="2025-10-11T10:07:48.895" v="900" actId="2711"/>
+          <ac:spMkLst>
+            <pc:docMk/>
+            <pc:sldMk cId="2645377945" sldId="261"/>
+            <ac:spMk id="19" creationId="{825E095B-538B-C021-B036-5F246B5DF091}"/>
+          </ac:spMkLst>
+        </pc:spChg>
+        <pc:spChg chg="add mod">
+          <ac:chgData name="Federico De Mita" userId="6ce638df-d46f-4fb8-b9fa-d85fcdec2cd5" providerId="ADAL" clId="{08362040-18E5-4911-871A-90A5BB37375A}" dt="2025-10-11T11:11:11.724" v="3123"/>
+          <ac:spMkLst>
+            <pc:docMk/>
+            <pc:sldMk cId="2645377945" sldId="261"/>
+            <ac:spMk id="20" creationId="{CB2BB8E8-4C0E-16F1-AFAA-9BB21E1AF6A0}"/>
+          </ac:spMkLst>
+        </pc:spChg>
+        <pc:picChg chg="add mod">
+          <ac:chgData name="Federico De Mita" userId="6ce638df-d46f-4fb8-b9fa-d85fcdec2cd5" providerId="ADAL" clId="{08362040-18E5-4911-871A-90A5BB37375A}" dt="2025-10-11T09:52:26.802" v="546" actId="14100"/>
+          <ac:picMkLst>
+            <pc:docMk/>
+            <pc:sldMk cId="2645377945" sldId="261"/>
+            <ac:picMk id="7" creationId="{4764F11D-91DC-6075-AD89-34448D48DC0C}"/>
+          </ac:picMkLst>
+        </pc:picChg>
+        <pc:picChg chg="del">
+          <ac:chgData name="Federico De Mita" userId="6ce638df-d46f-4fb8-b9fa-d85fcdec2cd5" providerId="ADAL" clId="{08362040-18E5-4911-871A-90A5BB37375A}" dt="2025-10-11T09:49:42.410" v="479" actId="478"/>
+          <ac:picMkLst>
+            <pc:docMk/>
+            <pc:sldMk cId="2645377945" sldId="261"/>
+            <ac:picMk id="10" creationId="{B4AAE971-4FA3-EF58-3824-A45C1F16DEA4}"/>
+          </ac:picMkLst>
+        </pc:picChg>
+        <pc:picChg chg="add del mod">
+          <ac:chgData name="Federico De Mita" userId="6ce638df-d46f-4fb8-b9fa-d85fcdec2cd5" providerId="ADAL" clId="{08362040-18E5-4911-871A-90A5BB37375A}" dt="2025-10-11T09:51:10.335" v="502" actId="478"/>
+          <ac:picMkLst>
+            <pc:docMk/>
+            <pc:sldMk cId="2645377945" sldId="261"/>
+            <ac:picMk id="11" creationId="{1993A2BA-C04D-5828-4A3D-B6960DF6BE27}"/>
+          </ac:picMkLst>
+        </pc:picChg>
+        <pc:picChg chg="del">
+          <ac:chgData name="Federico De Mita" userId="6ce638df-d46f-4fb8-b9fa-d85fcdec2cd5" providerId="ADAL" clId="{08362040-18E5-4911-871A-90A5BB37375A}" dt="2025-10-11T09:50:34.297" v="489" actId="478"/>
+          <ac:picMkLst>
+            <pc:docMk/>
+            <pc:sldMk cId="2645377945" sldId="261"/>
+            <ac:picMk id="12" creationId="{9C9B7035-3669-EDB5-85C3-2CE2A4FB250A}"/>
+          </ac:picMkLst>
+        </pc:picChg>
+        <pc:picChg chg="add mod">
+          <ac:chgData name="Federico De Mita" userId="6ce638df-d46f-4fb8-b9fa-d85fcdec2cd5" providerId="ADAL" clId="{08362040-18E5-4911-871A-90A5BB37375A}" dt="2025-10-11T09:52:30.099" v="547" actId="14100"/>
+          <ac:picMkLst>
+            <pc:docMk/>
+            <pc:sldMk cId="2645377945" sldId="261"/>
+            <ac:picMk id="15" creationId="{1A2AB303-29DA-9132-A78B-00024902091E}"/>
+          </ac:picMkLst>
+        </pc:picChg>
+      </pc:sldChg>
+      <pc:sldChg chg="addSp delSp modSp add mod">
+        <pc:chgData name="Federico De Mita" userId="6ce638df-d46f-4fb8-b9fa-d85fcdec2cd5" providerId="ADAL" clId="{08362040-18E5-4911-871A-90A5BB37375A}" dt="2025-10-11T11:10:10.005" v="3111"/>
+        <pc:sldMkLst>
+          <pc:docMk/>
+          <pc:sldMk cId="935433091" sldId="262"/>
+        </pc:sldMkLst>
+        <pc:spChg chg="del">
+          <ac:chgData name="Federico De Mita" userId="6ce638df-d46f-4fb8-b9fa-d85fcdec2cd5" providerId="ADAL" clId="{08362040-18E5-4911-871A-90A5BB37375A}" dt="2025-10-11T11:10:09.166" v="3110" actId="478"/>
+          <ac:spMkLst>
+            <pc:docMk/>
+            <pc:sldMk cId="935433091" sldId="262"/>
+            <ac:spMk id="5" creationId="{ECE4364C-0CF8-3959-5D64-3AE483C0C51F}"/>
+          </ac:spMkLst>
+        </pc:spChg>
+        <pc:spChg chg="del">
+          <ac:chgData name="Federico De Mita" userId="6ce638df-d46f-4fb8-b9fa-d85fcdec2cd5" providerId="ADAL" clId="{08362040-18E5-4911-871A-90A5BB37375A}" dt="2025-10-11T09:59:38.957" v="810" actId="478"/>
+          <ac:spMkLst>
+            <pc:docMk/>
+            <pc:sldMk cId="935433091" sldId="262"/>
+            <ac:spMk id="8" creationId="{F08B9895-D925-7011-26EE-BF57DB8143C5}"/>
+          </ac:spMkLst>
+        </pc:spChg>
+        <pc:spChg chg="mod">
+          <ac:chgData name="Federico De Mita" userId="6ce638df-d46f-4fb8-b9fa-d85fcdec2cd5" providerId="ADAL" clId="{08362040-18E5-4911-871A-90A5BB37375A}" dt="2025-10-11T10:08:29.961" v="912" actId="20577"/>
+          <ac:spMkLst>
+            <pc:docMk/>
+            <pc:sldMk cId="935433091" sldId="262"/>
+            <ac:spMk id="9" creationId="{80CE663F-93A9-CE0D-D036-5C554E139DE5}"/>
+          </ac:spMkLst>
+        </pc:spChg>
+        <pc:spChg chg="add del mod">
+          <ac:chgData name="Federico De Mita" userId="6ce638df-d46f-4fb8-b9fa-d85fcdec2cd5" providerId="ADAL" clId="{08362040-18E5-4911-871A-90A5BB37375A}" dt="2025-10-11T09:59:50.456" v="813" actId="478"/>
+          <ac:spMkLst>
+            <pc:docMk/>
+            <pc:sldMk cId="935433091" sldId="262"/>
+            <ac:spMk id="10" creationId="{31F40575-C7C3-BE88-9AEB-EC4B43F2B32F}"/>
+          </ac:spMkLst>
+        </pc:spChg>
+        <pc:spChg chg="add mod">
+          <ac:chgData name="Federico De Mita" userId="6ce638df-d46f-4fb8-b9fa-d85fcdec2cd5" providerId="ADAL" clId="{08362040-18E5-4911-871A-90A5BB37375A}" dt="2025-10-11T10:20:39.925" v="1079" actId="1076"/>
+          <ac:spMkLst>
+            <pc:docMk/>
+            <pc:sldMk cId="935433091" sldId="262"/>
+            <ac:spMk id="11" creationId="{9A67CC35-D011-3B6A-3284-B843C8A3BF29}"/>
+          </ac:spMkLst>
+        </pc:spChg>
+        <pc:spChg chg="add mod">
+          <ac:chgData name="Federico De Mita" userId="6ce638df-d46f-4fb8-b9fa-d85fcdec2cd5" providerId="ADAL" clId="{08362040-18E5-4911-871A-90A5BB37375A}" dt="2025-10-11T10:22:01.875" v="1204" actId="1076"/>
+          <ac:spMkLst>
+            <pc:docMk/>
+            <pc:sldMk cId="935433091" sldId="262"/>
+            <ac:spMk id="14" creationId="{5BB39634-D3CC-DBCC-7701-7C70E54FEBC6}"/>
+          </ac:spMkLst>
+        </pc:spChg>
+        <pc:spChg chg="add mod">
+          <ac:chgData name="Federico De Mita" userId="6ce638df-d46f-4fb8-b9fa-d85fcdec2cd5" providerId="ADAL" clId="{08362040-18E5-4911-871A-90A5BB37375A}" dt="2025-10-11T11:10:10.005" v="3111"/>
+          <ac:spMkLst>
+            <pc:docMk/>
+            <pc:sldMk cId="935433091" sldId="262"/>
+            <ac:spMk id="18" creationId="{6F7060D6-E30F-D8B9-7DE1-AEBC2B2935B7}"/>
+          </ac:spMkLst>
+        </pc:spChg>
+        <pc:picChg chg="del">
+          <ac:chgData name="Federico De Mita" userId="6ce638df-d46f-4fb8-b9fa-d85fcdec2cd5" providerId="ADAL" clId="{08362040-18E5-4911-871A-90A5BB37375A}" dt="2025-10-11T09:59:35.890" v="809" actId="478"/>
+          <ac:picMkLst>
+            <pc:docMk/>
+            <pc:sldMk cId="935433091" sldId="262"/>
+            <ac:picMk id="7" creationId="{997385C9-EC7D-5BB7-AD10-8D6A51F770F4}"/>
+          </ac:picMkLst>
+        </pc:picChg>
+        <pc:picChg chg="add mod">
+          <ac:chgData name="Federico De Mita" userId="6ce638df-d46f-4fb8-b9fa-d85fcdec2cd5" providerId="ADAL" clId="{08362040-18E5-4911-871A-90A5BB37375A}" dt="2025-10-11T10:20:46.125" v="1082" actId="1036"/>
+          <ac:picMkLst>
+            <pc:docMk/>
+            <pc:sldMk cId="935433091" sldId="262"/>
+            <ac:picMk id="13" creationId="{9919CF99-C5DF-D9A6-E311-3009DDFA182E}"/>
+          </ac:picMkLst>
+        </pc:picChg>
+        <pc:picChg chg="del">
+          <ac:chgData name="Federico De Mita" userId="6ce638df-d46f-4fb8-b9fa-d85fcdec2cd5" providerId="ADAL" clId="{08362040-18E5-4911-871A-90A5BB37375A}" dt="2025-10-11T09:59:38.957" v="810" actId="478"/>
+          <ac:picMkLst>
+            <pc:docMk/>
+            <pc:sldMk cId="935433091" sldId="262"/>
+            <ac:picMk id="15" creationId="{33B95F6D-B5E3-1414-3F37-D3E3B2C33A25}"/>
+          </ac:picMkLst>
+        </pc:picChg>
+        <pc:picChg chg="add mod">
+          <ac:chgData name="Federico De Mita" userId="6ce638df-d46f-4fb8-b9fa-d85fcdec2cd5" providerId="ADAL" clId="{08362040-18E5-4911-871A-90A5BB37375A}" dt="2025-10-11T10:23:02.747" v="1206" actId="1076"/>
+          <ac:picMkLst>
+            <pc:docMk/>
+            <pc:sldMk cId="935433091" sldId="262"/>
+            <ac:picMk id="17" creationId="{18012359-E88C-0586-39CF-69B5ADBA3B60}"/>
+          </ac:picMkLst>
+        </pc:picChg>
+      </pc:sldChg>
+      <pc:sldChg chg="addSp delSp modSp add mod">
+        <pc:chgData name="Federico De Mita" userId="6ce638df-d46f-4fb8-b9fa-d85fcdec2cd5" providerId="ADAL" clId="{08362040-18E5-4911-871A-90A5BB37375A}" dt="2025-10-11T11:10:14.436" v="3113"/>
+        <pc:sldMkLst>
+          <pc:docMk/>
+          <pc:sldMk cId="2417978243" sldId="263"/>
+        </pc:sldMkLst>
+        <pc:spChg chg="del">
+          <ac:chgData name="Federico De Mita" userId="6ce638df-d46f-4fb8-b9fa-d85fcdec2cd5" providerId="ADAL" clId="{08362040-18E5-4911-871A-90A5BB37375A}" dt="2025-10-11T10:23:12.835" v="1208" actId="478"/>
+          <ac:spMkLst>
+            <pc:docMk/>
+            <pc:sldMk cId="2417978243" sldId="263"/>
+            <ac:spMk id="4" creationId="{D7E311C5-0F20-A9AF-9166-2F67EE42E99F}"/>
+          </ac:spMkLst>
+        </pc:spChg>
+        <pc:spChg chg="del">
+          <ac:chgData name="Federico De Mita" userId="6ce638df-d46f-4fb8-b9fa-d85fcdec2cd5" providerId="ADAL" clId="{08362040-18E5-4911-871A-90A5BB37375A}" dt="2025-10-11T10:23:12.835" v="1208" actId="478"/>
+          <ac:spMkLst>
+            <pc:docMk/>
+            <pc:sldMk cId="2417978243" sldId="263"/>
+            <ac:spMk id="5" creationId="{EA4F4076-D7DD-2429-73DF-DCE273C5F651}"/>
+          </ac:spMkLst>
+        </pc:spChg>
+        <pc:spChg chg="del">
+          <ac:chgData name="Federico De Mita" userId="6ce638df-d46f-4fb8-b9fa-d85fcdec2cd5" providerId="ADAL" clId="{08362040-18E5-4911-871A-90A5BB37375A}" dt="2025-10-11T10:23:12.835" v="1208" actId="478"/>
+          <ac:spMkLst>
+            <pc:docMk/>
+            <pc:sldMk cId="2417978243" sldId="263"/>
+            <ac:spMk id="6" creationId="{E9D7B4F4-1822-D0A1-8F51-4186FE2BE65A}"/>
+          </ac:spMkLst>
+        </pc:spChg>
+        <pc:spChg chg="add mod">
+          <ac:chgData name="Federico De Mita" userId="6ce638df-d46f-4fb8-b9fa-d85fcdec2cd5" providerId="ADAL" clId="{08362040-18E5-4911-871A-90A5BB37375A}" dt="2025-10-11T10:28:51.614" v="1447" actId="14100"/>
+          <ac:spMkLst>
+            <pc:docMk/>
+            <pc:sldMk cId="2417978243" sldId="263"/>
+            <ac:spMk id="8" creationId="{9759BD24-084B-72E6-FC2F-5252F52D2E95}"/>
+          </ac:spMkLst>
+        </pc:spChg>
+        <pc:spChg chg="mod">
+          <ac:chgData name="Federico De Mita" userId="6ce638df-d46f-4fb8-b9fa-d85fcdec2cd5" providerId="ADAL" clId="{08362040-18E5-4911-871A-90A5BB37375A}" dt="2025-10-11T10:29:21.737" v="1450" actId="20577"/>
+          <ac:spMkLst>
+            <pc:docMk/>
+            <pc:sldMk cId="2417978243" sldId="263"/>
+            <ac:spMk id="9" creationId="{99DF7BC0-6B4E-FC01-941F-68DDFE781760}"/>
+          </ac:spMkLst>
+        </pc:spChg>
+        <pc:spChg chg="add mod">
+          <ac:chgData name="Federico De Mita" userId="6ce638df-d46f-4fb8-b9fa-d85fcdec2cd5" providerId="ADAL" clId="{08362040-18E5-4911-871A-90A5BB37375A}" dt="2025-10-11T10:27:19.140" v="1418" actId="1037"/>
+          <ac:spMkLst>
+            <pc:docMk/>
+            <pc:sldMk cId="2417978243" sldId="263"/>
+            <ac:spMk id="10" creationId="{940526FA-9961-ED2B-BCA8-B2EECC49DAD6}"/>
+          </ac:spMkLst>
+        </pc:spChg>
+        <pc:spChg chg="del">
+          <ac:chgData name="Federico De Mita" userId="6ce638df-d46f-4fb8-b9fa-d85fcdec2cd5" providerId="ADAL" clId="{08362040-18E5-4911-871A-90A5BB37375A}" dt="2025-10-11T10:23:12.835" v="1208" actId="478"/>
+          <ac:spMkLst>
+            <pc:docMk/>
+            <pc:sldMk cId="2417978243" sldId="263"/>
+            <ac:spMk id="11" creationId="{6322E70B-5321-8766-E372-667D2314BACF}"/>
+          </ac:spMkLst>
+        </pc:spChg>
+        <pc:spChg chg="del">
+          <ac:chgData name="Federico De Mita" userId="6ce638df-d46f-4fb8-b9fa-d85fcdec2cd5" providerId="ADAL" clId="{08362040-18E5-4911-871A-90A5BB37375A}" dt="2025-10-11T10:23:12.835" v="1208" actId="478"/>
+          <ac:spMkLst>
+            <pc:docMk/>
+            <pc:sldMk cId="2417978243" sldId="263"/>
+            <ac:spMk id="14" creationId="{70F6B5F8-C62E-6AE1-1B35-B6B21DF781B4}"/>
+          </ac:spMkLst>
+        </pc:spChg>
+        <pc:spChg chg="add mod">
+          <ac:chgData name="Federico De Mita" userId="6ce638df-d46f-4fb8-b9fa-d85fcdec2cd5" providerId="ADAL" clId="{08362040-18E5-4911-871A-90A5BB37375A}" dt="2025-10-11T10:27:06.071" v="1382" actId="1076"/>
+          <ac:spMkLst>
+            <pc:docMk/>
+            <pc:sldMk cId="2417978243" sldId="263"/>
+            <ac:spMk id="16" creationId="{6989B3C4-E700-D3E7-7D74-AECA184357A8}"/>
+          </ac:spMkLst>
+        </pc:spChg>
+        <pc:spChg chg="add mod">
+          <ac:chgData name="Federico De Mita" userId="6ce638df-d46f-4fb8-b9fa-d85fcdec2cd5" providerId="ADAL" clId="{08362040-18E5-4911-871A-90A5BB37375A}" dt="2025-10-11T10:28:44.103" v="1445" actId="14100"/>
+          <ac:spMkLst>
+            <pc:docMk/>
+            <pc:sldMk cId="2417978243" sldId="263"/>
+            <ac:spMk id="20" creationId="{AAFDC3FA-3188-CEEF-7C4C-700222B78A6C}"/>
+          </ac:spMkLst>
+        </pc:spChg>
+        <pc:spChg chg="add mod">
+          <ac:chgData name="Federico De Mita" userId="6ce638df-d46f-4fb8-b9fa-d85fcdec2cd5" providerId="ADAL" clId="{08362040-18E5-4911-871A-90A5BB37375A}" dt="2025-10-11T10:29:12.397" v="1448"/>
+          <ac:spMkLst>
+            <pc:docMk/>
+            <pc:sldMk cId="2417978243" sldId="263"/>
+            <ac:spMk id="21" creationId="{14D13847-40F8-53BC-2DAA-ECB9D41AEE69}"/>
+          </ac:spMkLst>
+        </pc:spChg>
+        <pc:spChg chg="add del mod">
+          <ac:chgData name="Federico De Mita" userId="6ce638df-d46f-4fb8-b9fa-d85fcdec2cd5" providerId="ADAL" clId="{08362040-18E5-4911-871A-90A5BB37375A}" dt="2025-10-11T11:10:13.602" v="3112" actId="478"/>
+          <ac:spMkLst>
+            <pc:docMk/>
+            <pc:sldMk cId="2417978243" sldId="263"/>
+            <ac:spMk id="22" creationId="{02C01187-3DB9-5073-8AA0-B459DBDA95D7}"/>
+          </ac:spMkLst>
+        </pc:spChg>
+        <pc:spChg chg="add mod">
+          <ac:chgData name="Federico De Mita" userId="6ce638df-d46f-4fb8-b9fa-d85fcdec2cd5" providerId="ADAL" clId="{08362040-18E5-4911-871A-90A5BB37375A}" dt="2025-10-11T10:29:12.397" v="1448"/>
+          <ac:spMkLst>
+            <pc:docMk/>
+            <pc:sldMk cId="2417978243" sldId="263"/>
+            <ac:spMk id="23" creationId="{CBE84831-418F-09CC-8AE1-7AD484DCEEC0}"/>
+          </ac:spMkLst>
+        </pc:spChg>
+        <pc:spChg chg="add mod">
+          <ac:chgData name="Federico De Mita" userId="6ce638df-d46f-4fb8-b9fa-d85fcdec2cd5" providerId="ADAL" clId="{08362040-18E5-4911-871A-90A5BB37375A}" dt="2025-10-11T11:10:14.436" v="3113"/>
+          <ac:spMkLst>
+            <pc:docMk/>
+            <pc:sldMk cId="2417978243" sldId="263"/>
+            <ac:spMk id="24" creationId="{7B8FE055-906D-DD28-7D1E-38EE56E3E8BE}"/>
+          </ac:spMkLst>
+        </pc:spChg>
+        <pc:picChg chg="add mod">
+          <ac:chgData name="Federico De Mita" userId="6ce638df-d46f-4fb8-b9fa-d85fcdec2cd5" providerId="ADAL" clId="{08362040-18E5-4911-871A-90A5BB37375A}" dt="2025-10-11T10:27:25.220" v="1427" actId="1038"/>
+          <ac:picMkLst>
+            <pc:docMk/>
+            <pc:sldMk cId="2417978243" sldId="263"/>
+            <ac:picMk id="7" creationId="{3C7006BA-D8A1-94F3-5B6A-3286E0A1AD46}"/>
+          </ac:picMkLst>
+        </pc:picChg>
+        <pc:picChg chg="del">
+          <ac:chgData name="Federico De Mita" userId="6ce638df-d46f-4fb8-b9fa-d85fcdec2cd5" providerId="ADAL" clId="{08362040-18E5-4911-871A-90A5BB37375A}" dt="2025-10-11T10:23:12.835" v="1208" actId="478"/>
+          <ac:picMkLst>
+            <pc:docMk/>
+            <pc:sldMk cId="2417978243" sldId="263"/>
+            <ac:picMk id="13" creationId="{1C42949D-DE8A-3E66-061F-4FA9C776684F}"/>
+          </ac:picMkLst>
+        </pc:picChg>
+        <pc:picChg chg="add mod ord">
+          <ac:chgData name="Federico De Mita" userId="6ce638df-d46f-4fb8-b9fa-d85fcdec2cd5" providerId="ADAL" clId="{08362040-18E5-4911-871A-90A5BB37375A}" dt="2025-10-11T10:26:50.878" v="1378" actId="1076"/>
+          <ac:picMkLst>
+            <pc:docMk/>
+            <pc:sldMk cId="2417978243" sldId="263"/>
+            <ac:picMk id="15" creationId="{33FE6F24-9361-189D-F3DC-EDAB6E1EDF2A}"/>
+          </ac:picMkLst>
+        </pc:picChg>
+        <pc:picChg chg="del">
+          <ac:chgData name="Federico De Mita" userId="6ce638df-d46f-4fb8-b9fa-d85fcdec2cd5" providerId="ADAL" clId="{08362040-18E5-4911-871A-90A5BB37375A}" dt="2025-10-11T10:23:12.835" v="1208" actId="478"/>
+          <ac:picMkLst>
+            <pc:docMk/>
+            <pc:sldMk cId="2417978243" sldId="263"/>
+            <ac:picMk id="17" creationId="{A291CB0A-DF8B-CCFB-82BC-BB27C96D45BF}"/>
+          </ac:picMkLst>
+        </pc:picChg>
+        <pc:picChg chg="add mod">
+          <ac:chgData name="Federico De Mita" userId="6ce638df-d46f-4fb8-b9fa-d85fcdec2cd5" providerId="ADAL" clId="{08362040-18E5-4911-871A-90A5BB37375A}" dt="2025-10-11T10:28:09.591" v="1435" actId="1076"/>
+          <ac:picMkLst>
+            <pc:docMk/>
+            <pc:sldMk cId="2417978243" sldId="263"/>
+            <ac:picMk id="19" creationId="{49F4EBA4-580E-9CA4-21DA-B23D88549E7E}"/>
+          </ac:picMkLst>
+        </pc:picChg>
+      </pc:sldChg>
+      <pc:sldChg chg="new del">
+        <pc:chgData name="Federico De Mita" userId="6ce638df-d46f-4fb8-b9fa-d85fcdec2cd5" providerId="ADAL" clId="{08362040-18E5-4911-871A-90A5BB37375A}" dt="2025-10-11T10:29:38.819" v="1452" actId="680"/>
+        <pc:sldMkLst>
+          <pc:docMk/>
+          <pc:sldMk cId="3903992602" sldId="264"/>
+        </pc:sldMkLst>
+      </pc:sldChg>
+      <pc:sldChg chg="addSp delSp modSp add mod">
+        <pc:chgData name="Federico De Mita" userId="6ce638df-d46f-4fb8-b9fa-d85fcdec2cd5" providerId="ADAL" clId="{08362040-18E5-4911-871A-90A5BB37375A}" dt="2025-10-11T11:10:49.862" v="3115"/>
+        <pc:sldMkLst>
+          <pc:docMk/>
+          <pc:sldMk cId="3950263107" sldId="264"/>
+        </pc:sldMkLst>
+        <pc:spChg chg="add mod">
+          <ac:chgData name="Federico De Mita" userId="6ce638df-d46f-4fb8-b9fa-d85fcdec2cd5" providerId="ADAL" clId="{08362040-18E5-4911-871A-90A5BB37375A}" dt="2025-10-11T10:42:27.920" v="1649" actId="1076"/>
+          <ac:spMkLst>
+            <pc:docMk/>
+            <pc:sldMk cId="3950263107" sldId="264"/>
+            <ac:spMk id="5" creationId="{D1C38F25-43FB-3B11-6260-9B9A1EDE0663}"/>
+          </ac:spMkLst>
+        </pc:spChg>
+        <pc:spChg chg="add mod">
+          <ac:chgData name="Federico De Mita" userId="6ce638df-d46f-4fb8-b9fa-d85fcdec2cd5" providerId="ADAL" clId="{08362040-18E5-4911-871A-90A5BB37375A}" dt="2025-10-11T10:42:27.920" v="1649" actId="1076"/>
+          <ac:spMkLst>
+            <pc:docMk/>
+            <pc:sldMk cId="3950263107" sldId="264"/>
+            <ac:spMk id="6" creationId="{FC75FF5D-4462-F408-8790-5F17E00F8941}"/>
+          </ac:spMkLst>
+        </pc:spChg>
+        <pc:spChg chg="del">
+          <ac:chgData name="Federico De Mita" userId="6ce638df-d46f-4fb8-b9fa-d85fcdec2cd5" providerId="ADAL" clId="{08362040-18E5-4911-871A-90A5BB37375A}" dt="2025-10-11T10:29:52.788" v="1454" actId="478"/>
+          <ac:spMkLst>
+            <pc:docMk/>
+            <pc:sldMk cId="3950263107" sldId="264"/>
+            <ac:spMk id="8" creationId="{A74A861B-E8DE-8DA3-09F2-DDFC81B11C92}"/>
+          </ac:spMkLst>
+        </pc:spChg>
+        <pc:spChg chg="del">
+          <ac:chgData name="Federico De Mita" userId="6ce638df-d46f-4fb8-b9fa-d85fcdec2cd5" providerId="ADAL" clId="{08362040-18E5-4911-871A-90A5BB37375A}" dt="2025-10-11T10:29:52.788" v="1454" actId="478"/>
+          <ac:spMkLst>
+            <pc:docMk/>
+            <pc:sldMk cId="3950263107" sldId="264"/>
+            <ac:spMk id="10" creationId="{57D0637B-2D34-409E-336F-AECD405834E8}"/>
+          </ac:spMkLst>
+        </pc:spChg>
+        <pc:spChg chg="add mod">
+          <ac:chgData name="Federico De Mita" userId="6ce638df-d46f-4fb8-b9fa-d85fcdec2cd5" providerId="ADAL" clId="{08362040-18E5-4911-871A-90A5BB37375A}" dt="2025-10-11T10:31:48.083" v="1497"/>
+          <ac:spMkLst>
+            <pc:docMk/>
+            <pc:sldMk cId="3950263107" sldId="264"/>
+            <ac:spMk id="11" creationId="{778B14E6-C3F0-1F1F-A311-C38533BE0B23}"/>
+          </ac:spMkLst>
+        </pc:spChg>
+        <pc:spChg chg="add mod">
+          <ac:chgData name="Federico De Mita" userId="6ce638df-d46f-4fb8-b9fa-d85fcdec2cd5" providerId="ADAL" clId="{08362040-18E5-4911-871A-90A5BB37375A}" dt="2025-10-11T10:31:48.291" v="1498"/>
+          <ac:spMkLst>
+            <pc:docMk/>
+            <pc:sldMk cId="3950263107" sldId="264"/>
+            <ac:spMk id="12" creationId="{53582FDF-3343-4079-3C62-A0867B2FFEDE}"/>
+          </ac:spMkLst>
+        </pc:spChg>
+        <pc:spChg chg="add mod">
+          <ac:chgData name="Federico De Mita" userId="6ce638df-d46f-4fb8-b9fa-d85fcdec2cd5" providerId="ADAL" clId="{08362040-18E5-4911-871A-90A5BB37375A}" dt="2025-10-11T10:31:53.288" v="1501" actId="1076"/>
+          <ac:spMkLst>
+            <pc:docMk/>
+            <pc:sldMk cId="3950263107" sldId="264"/>
+            <ac:spMk id="13" creationId="{3B06DBBB-A208-CDCF-91FC-42C9DB0F7802}"/>
+          </ac:spMkLst>
+        </pc:spChg>
+        <pc:spChg chg="add mod">
+          <ac:chgData name="Federico De Mita" userId="6ce638df-d46f-4fb8-b9fa-d85fcdec2cd5" providerId="ADAL" clId="{08362040-18E5-4911-871A-90A5BB37375A}" dt="2025-10-11T10:42:27.920" v="1649" actId="1076"/>
+          <ac:spMkLst>
+            <pc:docMk/>
+            <pc:sldMk cId="3950263107" sldId="264"/>
+            <ac:spMk id="14" creationId="{598A1E78-653E-7D8B-5153-7810CCA22B69}"/>
+          </ac:spMkLst>
+        </pc:spChg>
+        <pc:spChg chg="del">
+          <ac:chgData name="Federico De Mita" userId="6ce638df-d46f-4fb8-b9fa-d85fcdec2cd5" providerId="ADAL" clId="{08362040-18E5-4911-871A-90A5BB37375A}" dt="2025-10-11T10:29:52.788" v="1454" actId="478"/>
+          <ac:spMkLst>
+            <pc:docMk/>
+            <pc:sldMk cId="3950263107" sldId="264"/>
+            <ac:spMk id="16" creationId="{22C40310-1614-60BB-1AF1-DB647F152B74}"/>
+          </ac:spMkLst>
+        </pc:spChg>
+        <pc:spChg chg="add mod">
+          <ac:chgData name="Federico De Mita" userId="6ce638df-d46f-4fb8-b9fa-d85fcdec2cd5" providerId="ADAL" clId="{08362040-18E5-4911-871A-90A5BB37375A}" dt="2025-10-11T10:42:27.920" v="1649" actId="1076"/>
+          <ac:spMkLst>
+            <pc:docMk/>
+            <pc:sldMk cId="3950263107" sldId="264"/>
+            <ac:spMk id="17" creationId="{B78110CD-FC44-150A-7376-9344BEF58749}"/>
+          </ac:spMkLst>
+        </pc:spChg>
+        <pc:spChg chg="add mod">
+          <ac:chgData name="Federico De Mita" userId="6ce638df-d46f-4fb8-b9fa-d85fcdec2cd5" providerId="ADAL" clId="{08362040-18E5-4911-871A-90A5BB37375A}" dt="2025-10-11T10:42:27.920" v="1649" actId="1076"/>
+          <ac:spMkLst>
+            <pc:docMk/>
+            <pc:sldMk cId="3950263107" sldId="264"/>
+            <ac:spMk id="18" creationId="{92393E32-62B8-AC55-7DC6-71DE8743A87E}"/>
+          </ac:spMkLst>
+        </pc:spChg>
+        <pc:spChg chg="del">
+          <ac:chgData name="Federico De Mita" userId="6ce638df-d46f-4fb8-b9fa-d85fcdec2cd5" providerId="ADAL" clId="{08362040-18E5-4911-871A-90A5BB37375A}" dt="2025-10-11T10:29:52.788" v="1454" actId="478"/>
+          <ac:spMkLst>
+            <pc:docMk/>
+            <pc:sldMk cId="3950263107" sldId="264"/>
+            <ac:spMk id="20" creationId="{E15BFB27-F19E-EA6B-8EA8-E5EB194E2612}"/>
+          </ac:spMkLst>
+        </pc:spChg>
+        <pc:spChg chg="del">
+          <ac:chgData name="Federico De Mita" userId="6ce638df-d46f-4fb8-b9fa-d85fcdec2cd5" providerId="ADAL" clId="{08362040-18E5-4911-871A-90A5BB37375A}" dt="2025-10-11T11:10:49.155" v="3114" actId="478"/>
+          <ac:spMkLst>
+            <pc:docMk/>
+            <pc:sldMk cId="3950263107" sldId="264"/>
+            <ac:spMk id="22" creationId="{4783B1E5-C7D9-98EA-15F6-2A679203B81C}"/>
+          </ac:spMkLst>
+        </pc:spChg>
+        <pc:spChg chg="add mod">
+          <ac:chgData name="Federico De Mita" userId="6ce638df-d46f-4fb8-b9fa-d85fcdec2cd5" providerId="ADAL" clId="{08362040-18E5-4911-871A-90A5BB37375A}" dt="2025-10-11T10:42:27.920" v="1649" actId="1076"/>
+          <ac:spMkLst>
+            <pc:docMk/>
+            <pc:sldMk cId="3950263107" sldId="264"/>
+            <ac:spMk id="24" creationId="{40D4DA80-1832-B463-098E-9182D4187087}"/>
+          </ac:spMkLst>
+        </pc:spChg>
+        <pc:spChg chg="add mod">
+          <ac:chgData name="Federico De Mita" userId="6ce638df-d46f-4fb8-b9fa-d85fcdec2cd5" providerId="ADAL" clId="{08362040-18E5-4911-871A-90A5BB37375A}" dt="2025-10-11T10:42:27.920" v="1649" actId="1076"/>
+          <ac:spMkLst>
+            <pc:docMk/>
+            <pc:sldMk cId="3950263107" sldId="264"/>
+            <ac:spMk id="25" creationId="{1CB073E3-519F-4CC1-F8AB-BC75DD253C4B}"/>
+          </ac:spMkLst>
+        </pc:spChg>
+        <pc:spChg chg="add mod">
+          <ac:chgData name="Federico De Mita" userId="6ce638df-d46f-4fb8-b9fa-d85fcdec2cd5" providerId="ADAL" clId="{08362040-18E5-4911-871A-90A5BB37375A}" dt="2025-10-11T10:42:27.920" v="1649" actId="1076"/>
+          <ac:spMkLst>
+            <pc:docMk/>
+            <pc:sldMk cId="3950263107" sldId="264"/>
+            <ac:spMk id="26" creationId="{3F79D8D9-4D4D-3E19-2C55-C83E644BE9AC}"/>
+          </ac:spMkLst>
+        </pc:spChg>
+        <pc:spChg chg="add mod">
+          <ac:chgData name="Federico De Mita" userId="6ce638df-d46f-4fb8-b9fa-d85fcdec2cd5" providerId="ADAL" clId="{08362040-18E5-4911-871A-90A5BB37375A}" dt="2025-10-11T10:42:27.920" v="1649" actId="1076"/>
+          <ac:spMkLst>
+            <pc:docMk/>
+            <pc:sldMk cId="3950263107" sldId="264"/>
+            <ac:spMk id="27" creationId="{526FCE02-C2D3-BC44-E00E-BE24C2552D89}"/>
+          </ac:spMkLst>
+        </pc:spChg>
+        <pc:spChg chg="add mod">
+          <ac:chgData name="Federico De Mita" userId="6ce638df-d46f-4fb8-b9fa-d85fcdec2cd5" providerId="ADAL" clId="{08362040-18E5-4911-871A-90A5BB37375A}" dt="2025-10-11T10:42:27.920" v="1649" actId="1076"/>
+          <ac:spMkLst>
+            <pc:docMk/>
+            <pc:sldMk cId="3950263107" sldId="264"/>
+            <ac:spMk id="28" creationId="{FAA9127A-F7F5-1839-F455-BA5891DD79D2}"/>
+          </ac:spMkLst>
+        </pc:spChg>
+        <pc:spChg chg="add mod">
+          <ac:chgData name="Federico De Mita" userId="6ce638df-d46f-4fb8-b9fa-d85fcdec2cd5" providerId="ADAL" clId="{08362040-18E5-4911-871A-90A5BB37375A}" dt="2025-10-11T11:10:49.862" v="3115"/>
+          <ac:spMkLst>
+            <pc:docMk/>
+            <pc:sldMk cId="3950263107" sldId="264"/>
+            <ac:spMk id="29" creationId="{B4F524EF-A805-4DBD-45D4-9C469767D3A7}"/>
+          </ac:spMkLst>
+        </pc:spChg>
+        <pc:picChg chg="add mod">
+          <ac:chgData name="Federico De Mita" userId="6ce638df-d46f-4fb8-b9fa-d85fcdec2cd5" providerId="ADAL" clId="{08362040-18E5-4911-871A-90A5BB37375A}" dt="2025-10-11T10:42:33.509" v="1650" actId="1076"/>
+          <ac:picMkLst>
+            <pc:docMk/>
+            <pc:sldMk cId="3950263107" sldId="264"/>
+            <ac:picMk id="4" creationId="{9DA53EAC-9690-CC77-63F3-A03441FD1DA2}"/>
+          </ac:picMkLst>
+        </pc:picChg>
+        <pc:picChg chg="del">
+          <ac:chgData name="Federico De Mita" userId="6ce638df-d46f-4fb8-b9fa-d85fcdec2cd5" providerId="ADAL" clId="{08362040-18E5-4911-871A-90A5BB37375A}" dt="2025-10-11T10:29:52.788" v="1454" actId="478"/>
+          <ac:picMkLst>
+            <pc:docMk/>
+            <pc:sldMk cId="3950263107" sldId="264"/>
+            <ac:picMk id="7" creationId="{DE06AE3F-8F6D-3F0D-306E-DD182936E8B6}"/>
+          </ac:picMkLst>
+        </pc:picChg>
+        <pc:picChg chg="del">
+          <ac:chgData name="Federico De Mita" userId="6ce638df-d46f-4fb8-b9fa-d85fcdec2cd5" providerId="ADAL" clId="{08362040-18E5-4911-871A-90A5BB37375A}" dt="2025-10-11T10:29:52.788" v="1454" actId="478"/>
+          <ac:picMkLst>
+            <pc:docMk/>
+            <pc:sldMk cId="3950263107" sldId="264"/>
+            <ac:picMk id="15" creationId="{55927FD0-3B77-454D-95DC-515804DE65CD}"/>
+          </ac:picMkLst>
+        </pc:picChg>
+        <pc:picChg chg="del">
+          <ac:chgData name="Federico De Mita" userId="6ce638df-d46f-4fb8-b9fa-d85fcdec2cd5" providerId="ADAL" clId="{08362040-18E5-4911-871A-90A5BB37375A}" dt="2025-10-11T10:29:52.788" v="1454" actId="478"/>
+          <ac:picMkLst>
+            <pc:docMk/>
+            <pc:sldMk cId="3950263107" sldId="264"/>
+            <ac:picMk id="19" creationId="{6080D1D5-E6D4-810A-58C3-38FEF31EBA61}"/>
+          </ac:picMkLst>
+        </pc:picChg>
+      </pc:sldChg>
+      <pc:sldChg chg="addSp delSp modSp add mod">
+        <pc:chgData name="Federico De Mita" userId="6ce638df-d46f-4fb8-b9fa-d85fcdec2cd5" providerId="ADAL" clId="{08362040-18E5-4911-871A-90A5BB37375A}" dt="2025-10-11T11:10:53.552" v="3117"/>
+        <pc:sldMkLst>
+          <pc:docMk/>
+          <pc:sldMk cId="2155507051" sldId="265"/>
+        </pc:sldMkLst>
+        <pc:spChg chg="del">
+          <ac:chgData name="Federico De Mita" userId="6ce638df-d46f-4fb8-b9fa-d85fcdec2cd5" providerId="ADAL" clId="{08362040-18E5-4911-871A-90A5BB37375A}" dt="2025-10-11T10:35:00.216" v="1563" actId="478"/>
+          <ac:spMkLst>
+            <pc:docMk/>
+            <pc:sldMk cId="2155507051" sldId="265"/>
+            <ac:spMk id="5" creationId="{FC594521-B673-0197-C6D3-7C8BAFAFAD19}"/>
+          </ac:spMkLst>
+        </pc:spChg>
+        <pc:spChg chg="del">
+          <ac:chgData name="Federico De Mita" userId="6ce638df-d46f-4fb8-b9fa-d85fcdec2cd5" providerId="ADAL" clId="{08362040-18E5-4911-871A-90A5BB37375A}" dt="2025-10-11T10:35:00.216" v="1563" actId="478"/>
+          <ac:spMkLst>
+            <pc:docMk/>
+            <pc:sldMk cId="2155507051" sldId="265"/>
+            <ac:spMk id="6" creationId="{F8A5189E-FFB2-3740-7F1C-382D900CEAC8}"/>
+          </ac:spMkLst>
+        </pc:spChg>
+        <pc:spChg chg="add del">
+          <ac:chgData name="Federico De Mita" userId="6ce638df-d46f-4fb8-b9fa-d85fcdec2cd5" providerId="ADAL" clId="{08362040-18E5-4911-871A-90A5BB37375A}" dt="2025-10-11T10:37:50.631" v="1578" actId="22"/>
+          <ac:spMkLst>
+            <pc:docMk/>
+            <pc:sldMk cId="2155507051" sldId="265"/>
+            <ac:spMk id="7" creationId="{98CCE320-C581-E339-78DC-4C30B1174D62}"/>
+          </ac:spMkLst>
+        </pc:spChg>
+        <pc:spChg chg="mod">
+          <ac:chgData name="Federico De Mita" userId="6ce638df-d46f-4fb8-b9fa-d85fcdec2cd5" providerId="ADAL" clId="{08362040-18E5-4911-871A-90A5BB37375A}" dt="2025-10-11T10:39:26.529" v="1597" actId="1076"/>
+          <ac:spMkLst>
+            <pc:docMk/>
+            <pc:sldMk cId="2155507051" sldId="265"/>
+            <ac:spMk id="9" creationId="{10A27FA3-31C0-F509-47D9-AA895A9935B3}"/>
+          </ac:spMkLst>
+        </pc:spChg>
+        <pc:spChg chg="del">
+          <ac:chgData name="Federico De Mita" userId="6ce638df-d46f-4fb8-b9fa-d85fcdec2cd5" providerId="ADAL" clId="{08362040-18E5-4911-871A-90A5BB37375A}" dt="2025-10-11T10:35:00.216" v="1563" actId="478"/>
+          <ac:spMkLst>
+            <pc:docMk/>
+            <pc:sldMk cId="2155507051" sldId="265"/>
+            <ac:spMk id="14" creationId="{2C2A246E-FEC3-1123-884C-5847B6B2600D}"/>
+          </ac:spMkLst>
+        </pc:spChg>
+        <pc:spChg chg="del">
+          <ac:chgData name="Federico De Mita" userId="6ce638df-d46f-4fb8-b9fa-d85fcdec2cd5" providerId="ADAL" clId="{08362040-18E5-4911-871A-90A5BB37375A}" dt="2025-10-11T10:35:00.216" v="1563" actId="478"/>
+          <ac:spMkLst>
+            <pc:docMk/>
+            <pc:sldMk cId="2155507051" sldId="265"/>
+            <ac:spMk id="17" creationId="{259CB65E-7D0C-E8CE-2199-947999229D43}"/>
+          </ac:spMkLst>
+        </pc:spChg>
+        <pc:spChg chg="del">
+          <ac:chgData name="Federico De Mita" userId="6ce638df-d46f-4fb8-b9fa-d85fcdec2cd5" providerId="ADAL" clId="{08362040-18E5-4911-871A-90A5BB37375A}" dt="2025-10-11T10:35:00.216" v="1563" actId="478"/>
+          <ac:spMkLst>
+            <pc:docMk/>
+            <pc:sldMk cId="2155507051" sldId="265"/>
+            <ac:spMk id="18" creationId="{7C02729A-44C6-1D8E-8B38-14CC1F0DFE49}"/>
+          </ac:spMkLst>
+        </pc:spChg>
+        <pc:spChg chg="add del mod">
+          <ac:chgData name="Federico De Mita" userId="6ce638df-d46f-4fb8-b9fa-d85fcdec2cd5" providerId="ADAL" clId="{08362040-18E5-4911-871A-90A5BB37375A}" dt="2025-10-11T10:41:34.689" v="1646" actId="478"/>
+          <ac:spMkLst>
+            <pc:docMk/>
+            <pc:sldMk cId="2155507051" sldId="265"/>
+            <ac:spMk id="20" creationId="{667EF264-8FB6-9D80-625E-B0955CD27E69}"/>
+          </ac:spMkLst>
+        </pc:spChg>
+        <pc:spChg chg="del">
+          <ac:chgData name="Federico De Mita" userId="6ce638df-d46f-4fb8-b9fa-d85fcdec2cd5" providerId="ADAL" clId="{08362040-18E5-4911-871A-90A5BB37375A}" dt="2025-10-11T11:10:53.034" v="3116" actId="478"/>
+          <ac:spMkLst>
+            <pc:docMk/>
+            <pc:sldMk cId="2155507051" sldId="265"/>
+            <ac:spMk id="22" creationId="{7AACC51A-B9AE-04E6-78CF-83409A9AA689}"/>
+          </ac:spMkLst>
+        </pc:spChg>
+        <pc:spChg chg="del mod">
+          <ac:chgData name="Federico De Mita" userId="6ce638df-d46f-4fb8-b9fa-d85fcdec2cd5" providerId="ADAL" clId="{08362040-18E5-4911-871A-90A5BB37375A}" dt="2025-10-11T10:35:00.216" v="1563" actId="478"/>
+          <ac:spMkLst>
+            <pc:docMk/>
+            <pc:sldMk cId="2155507051" sldId="265"/>
+            <ac:spMk id="24" creationId="{C17FACD8-0989-EF7A-0474-FDC6E04CA812}"/>
+          </ac:spMkLst>
+        </pc:spChg>
+        <pc:spChg chg="del">
+          <ac:chgData name="Federico De Mita" userId="6ce638df-d46f-4fb8-b9fa-d85fcdec2cd5" providerId="ADAL" clId="{08362040-18E5-4911-871A-90A5BB37375A}" dt="2025-10-11T10:35:00.216" v="1563" actId="478"/>
+          <ac:spMkLst>
+            <pc:docMk/>
+            <pc:sldMk cId="2155507051" sldId="265"/>
+            <ac:spMk id="25" creationId="{36561E41-16F7-29F3-DF98-40FC9A844FEA}"/>
+          </ac:spMkLst>
+        </pc:spChg>
+        <pc:spChg chg="del">
+          <ac:chgData name="Federico De Mita" userId="6ce638df-d46f-4fb8-b9fa-d85fcdec2cd5" providerId="ADAL" clId="{08362040-18E5-4911-871A-90A5BB37375A}" dt="2025-10-11T10:35:00.216" v="1563" actId="478"/>
+          <ac:spMkLst>
+            <pc:docMk/>
+            <pc:sldMk cId="2155507051" sldId="265"/>
+            <ac:spMk id="26" creationId="{74B856F2-BD12-CC32-00E0-4D5C0CCA73A7}"/>
+          </ac:spMkLst>
+        </pc:spChg>
+        <pc:spChg chg="del">
+          <ac:chgData name="Federico De Mita" userId="6ce638df-d46f-4fb8-b9fa-d85fcdec2cd5" providerId="ADAL" clId="{08362040-18E5-4911-871A-90A5BB37375A}" dt="2025-10-11T10:35:00.216" v="1563" actId="478"/>
+          <ac:spMkLst>
+            <pc:docMk/>
+            <pc:sldMk cId="2155507051" sldId="265"/>
+            <ac:spMk id="27" creationId="{4EA9B01D-D107-CD9B-FD4C-8071208D2449}"/>
+          </ac:spMkLst>
+        </pc:spChg>
+        <pc:spChg chg="del">
+          <ac:chgData name="Federico De Mita" userId="6ce638df-d46f-4fb8-b9fa-d85fcdec2cd5" providerId="ADAL" clId="{08362040-18E5-4911-871A-90A5BB37375A}" dt="2025-10-11T10:35:00.216" v="1563" actId="478"/>
+          <ac:spMkLst>
+            <pc:docMk/>
+            <pc:sldMk cId="2155507051" sldId="265"/>
+            <ac:spMk id="28" creationId="{4CB87E83-D9EF-A1B6-1FC5-7F2E5E7AC3F5}"/>
+          </ac:spMkLst>
+        </pc:spChg>
+        <pc:spChg chg="add mod">
+          <ac:chgData name="Federico De Mita" userId="6ce638df-d46f-4fb8-b9fa-d85fcdec2cd5" providerId="ADAL" clId="{08362040-18E5-4911-871A-90A5BB37375A}" dt="2025-10-11T10:46:15.330" v="1957" actId="1076"/>
+          <ac:spMkLst>
+            <pc:docMk/>
+            <pc:sldMk cId="2155507051" sldId="265"/>
+            <ac:spMk id="29" creationId="{5E707B1E-5311-C876-9D60-302258B07CED}"/>
+          </ac:spMkLst>
+        </pc:spChg>
+        <pc:spChg chg="add mod">
+          <ac:chgData name="Federico De Mita" userId="6ce638df-d46f-4fb8-b9fa-d85fcdec2cd5" providerId="ADAL" clId="{08362040-18E5-4911-871A-90A5BB37375A}" dt="2025-10-11T11:10:53.552" v="3117"/>
+          <ac:spMkLst>
+            <pc:docMk/>
+            <pc:sldMk cId="2155507051" sldId="265"/>
+            <ac:spMk id="33" creationId="{AF108CE8-1F97-3D19-668D-DD9A9FE400B4}"/>
+          </ac:spMkLst>
+        </pc:spChg>
+        <pc:picChg chg="add mod">
+          <ac:chgData name="Federico De Mita" userId="6ce638df-d46f-4fb8-b9fa-d85fcdec2cd5" providerId="ADAL" clId="{08362040-18E5-4911-871A-90A5BB37375A}" dt="2025-10-11T10:41:00.771" v="1642" actId="1037"/>
+          <ac:picMkLst>
+            <pc:docMk/>
+            <pc:sldMk cId="2155507051" sldId="265"/>
+            <ac:picMk id="10" creationId="{0E2DFB05-BFB6-8575-0F2F-ED991E51E41D}"/>
+          </ac:picMkLst>
+        </pc:picChg>
+        <pc:picChg chg="add mod">
+          <ac:chgData name="Federico De Mita" userId="6ce638df-d46f-4fb8-b9fa-d85fcdec2cd5" providerId="ADAL" clId="{08362040-18E5-4911-871A-90A5BB37375A}" dt="2025-10-11T10:45:53.910" v="1948" actId="1076"/>
+          <ac:picMkLst>
+            <pc:docMk/>
+            <pc:sldMk cId="2155507051" sldId="265"/>
+            <ac:picMk id="12" creationId="{5372690A-C345-7B5E-7529-7F78006FE661}"/>
+          </ac:picMkLst>
+        </pc:picChg>
+        <pc:picChg chg="add mod">
+          <ac:chgData name="Federico De Mita" userId="6ce638df-d46f-4fb8-b9fa-d85fcdec2cd5" providerId="ADAL" clId="{08362040-18E5-4911-871A-90A5BB37375A}" dt="2025-10-11T10:41:00.771" v="1642" actId="1037"/>
+          <ac:picMkLst>
+            <pc:docMk/>
+            <pc:sldMk cId="2155507051" sldId="265"/>
+            <ac:picMk id="15" creationId="{6D472768-0FE8-7F8D-7EA3-29159F455601}"/>
+          </ac:picMkLst>
+        </pc:picChg>
+        <pc:picChg chg="add mod">
+          <ac:chgData name="Federico De Mita" userId="6ce638df-d46f-4fb8-b9fa-d85fcdec2cd5" providerId="ADAL" clId="{08362040-18E5-4911-871A-90A5BB37375A}" dt="2025-10-11T10:41:00.771" v="1642" actId="1037"/>
+          <ac:picMkLst>
+            <pc:docMk/>
+            <pc:sldMk cId="2155507051" sldId="265"/>
+            <ac:picMk id="19" creationId="{A00CFA10-EF14-E8D7-12DF-C53B5CD8052F}"/>
+          </ac:picMkLst>
+        </pc:picChg>
+        <pc:picChg chg="add mod">
+          <ac:chgData name="Federico De Mita" userId="6ce638df-d46f-4fb8-b9fa-d85fcdec2cd5" providerId="ADAL" clId="{08362040-18E5-4911-871A-90A5BB37375A}" dt="2025-10-11T10:46:36.371" v="1962" actId="1076"/>
+          <ac:picMkLst>
+            <pc:docMk/>
+            <pc:sldMk cId="2155507051" sldId="265"/>
+            <ac:picMk id="31" creationId="{554BB4DC-983F-19B2-6825-D0F71AFE5ECA}"/>
+          </ac:picMkLst>
+        </pc:picChg>
+        <pc:picChg chg="add mod">
+          <ac:chgData name="Federico De Mita" userId="6ce638df-d46f-4fb8-b9fa-d85fcdec2cd5" providerId="ADAL" clId="{08362040-18E5-4911-871A-90A5BB37375A}" dt="2025-10-11T10:46:41.556" v="1964" actId="1076"/>
+          <ac:picMkLst>
+            <pc:docMk/>
+            <pc:sldMk cId="2155507051" sldId="265"/>
+            <ac:picMk id="32" creationId="{97740336-5B3B-1F72-EB8F-E016BC7558ED}"/>
+          </ac:picMkLst>
+        </pc:picChg>
+      </pc:sldChg>
+      <pc:sldChg chg="addSp delSp modSp add mod">
+        <pc:chgData name="Federico De Mita" userId="6ce638df-d46f-4fb8-b9fa-d85fcdec2cd5" providerId="ADAL" clId="{08362040-18E5-4911-871A-90A5BB37375A}" dt="2025-10-11T11:10:56.815" v="3119"/>
+        <pc:sldMkLst>
+          <pc:docMk/>
+          <pc:sldMk cId="768897572" sldId="266"/>
+        </pc:sldMkLst>
+        <pc:spChg chg="mod">
+          <ac:chgData name="Federico De Mita" userId="6ce638df-d46f-4fb8-b9fa-d85fcdec2cd5" providerId="ADAL" clId="{08362040-18E5-4911-871A-90A5BB37375A}" dt="2025-10-11T10:51:32.930" v="2180" actId="1076"/>
+          <ac:spMkLst>
+            <pc:docMk/>
+            <pc:sldMk cId="768897572" sldId="266"/>
+            <ac:spMk id="2" creationId="{29E39CF1-9E8B-D0B3-9510-0AF1A6AA9F7A}"/>
+          </ac:spMkLst>
+        </pc:spChg>
+        <pc:spChg chg="add mod">
+          <ac:chgData name="Federico De Mita" userId="6ce638df-d46f-4fb8-b9fa-d85fcdec2cd5" providerId="ADAL" clId="{08362040-18E5-4911-871A-90A5BB37375A}" dt="2025-10-11T10:51:39.391" v="2194" actId="1035"/>
+          <ac:spMkLst>
+            <pc:docMk/>
+            <pc:sldMk cId="768897572" sldId="266"/>
+            <ac:spMk id="3" creationId="{A932DEC2-68B9-E94C-F946-84845CA72ADD}"/>
+          </ac:spMkLst>
+        </pc:spChg>
+        <pc:spChg chg="add mod">
+          <ac:chgData name="Federico De Mita" userId="6ce638df-d46f-4fb8-b9fa-d85fcdec2cd5" providerId="ADAL" clId="{08362040-18E5-4911-871A-90A5BB37375A}" dt="2025-10-11T10:51:39.391" v="2194" actId="1035"/>
+          <ac:spMkLst>
+            <pc:docMk/>
+            <pc:sldMk cId="768897572" sldId="266"/>
+            <ac:spMk id="4" creationId="{67FC3343-ABED-6AFC-0A62-9DE826629774}"/>
+          </ac:spMkLst>
+        </pc:spChg>
+        <pc:spChg chg="add mod">
+          <ac:chgData name="Federico De Mita" userId="6ce638df-d46f-4fb8-b9fa-d85fcdec2cd5" providerId="ADAL" clId="{08362040-18E5-4911-871A-90A5BB37375A}" dt="2025-10-11T10:51:39.391" v="2194" actId="1035"/>
+          <ac:spMkLst>
+            <pc:docMk/>
+            <pc:sldMk cId="768897572" sldId="266"/>
+            <ac:spMk id="7" creationId="{CAA23360-4E17-E19F-25FD-2C46D20D9064}"/>
+          </ac:spMkLst>
+        </pc:spChg>
+        <pc:spChg chg="del">
+          <ac:chgData name="Federico De Mita" userId="6ce638df-d46f-4fb8-b9fa-d85fcdec2cd5" providerId="ADAL" clId="{08362040-18E5-4911-871A-90A5BB37375A}" dt="2025-10-11T10:46:55.656" v="1966" actId="478"/>
+          <ac:spMkLst>
+            <pc:docMk/>
+            <pc:sldMk cId="768897572" sldId="266"/>
+            <ac:spMk id="9" creationId="{E7A37703-607A-03DF-14E0-70DD5489B2CA}"/>
+          </ac:spMkLst>
+        </pc:spChg>
+        <pc:spChg chg="add mod">
+          <ac:chgData name="Federico De Mita" userId="6ce638df-d46f-4fb8-b9fa-d85fcdec2cd5" providerId="ADAL" clId="{08362040-18E5-4911-871A-90A5BB37375A}" dt="2025-10-11T11:10:56.815" v="3119"/>
+          <ac:spMkLst>
+            <pc:docMk/>
+            <pc:sldMk cId="768897572" sldId="266"/>
+            <ac:spMk id="14" creationId="{A9EF36E1-ECB6-CE92-7A8B-C884EB8F631E}"/>
+          </ac:spMkLst>
+        </pc:spChg>
+        <pc:spChg chg="del">
+          <ac:chgData name="Federico De Mita" userId="6ce638df-d46f-4fb8-b9fa-d85fcdec2cd5" providerId="ADAL" clId="{08362040-18E5-4911-871A-90A5BB37375A}" dt="2025-10-11T11:10:56.179" v="3118" actId="478"/>
+          <ac:spMkLst>
+            <pc:docMk/>
+            <pc:sldMk cId="768897572" sldId="266"/>
+            <ac:spMk id="22" creationId="{971D1888-A1AA-8739-5FC1-DB542D7FADF5}"/>
+          </ac:spMkLst>
+        </pc:spChg>
+        <pc:spChg chg="del">
+          <ac:chgData name="Federico De Mita" userId="6ce638df-d46f-4fb8-b9fa-d85fcdec2cd5" providerId="ADAL" clId="{08362040-18E5-4911-871A-90A5BB37375A}" dt="2025-10-11T10:46:55.656" v="1966" actId="478"/>
+          <ac:spMkLst>
+            <pc:docMk/>
+            <pc:sldMk cId="768897572" sldId="266"/>
+            <ac:spMk id="29" creationId="{ED2FC2F6-9EF2-60D8-A369-28F5B07617D0}"/>
+          </ac:spMkLst>
+        </pc:spChg>
+        <pc:picChg chg="add mod">
+          <ac:chgData name="Federico De Mita" userId="6ce638df-d46f-4fb8-b9fa-d85fcdec2cd5" providerId="ADAL" clId="{08362040-18E5-4911-871A-90A5BB37375A}" dt="2025-10-11T10:51:39.391" v="2194" actId="1035"/>
+          <ac:picMkLst>
+            <pc:docMk/>
+            <pc:sldMk cId="768897572" sldId="266"/>
+            <ac:picMk id="6" creationId="{8FBE1760-BF5B-1256-090E-12EA025B892A}"/>
+          </ac:picMkLst>
+        </pc:picChg>
+        <pc:picChg chg="add del mod">
+          <ac:chgData name="Federico De Mita" userId="6ce638df-d46f-4fb8-b9fa-d85fcdec2cd5" providerId="ADAL" clId="{08362040-18E5-4911-871A-90A5BB37375A}" dt="2025-10-11T10:49:40.556" v="2150" actId="478"/>
+          <ac:picMkLst>
+            <pc:docMk/>
+            <pc:sldMk cId="768897572" sldId="266"/>
+            <ac:picMk id="8" creationId="{36E18049-F5D7-AF96-C0C4-EBD60C1A2D36}"/>
+          </ac:picMkLst>
+        </pc:picChg>
+        <pc:picChg chg="del">
+          <ac:chgData name="Federico De Mita" userId="6ce638df-d46f-4fb8-b9fa-d85fcdec2cd5" providerId="ADAL" clId="{08362040-18E5-4911-871A-90A5BB37375A}" dt="2025-10-11T10:46:55.656" v="1966" actId="478"/>
+          <ac:picMkLst>
+            <pc:docMk/>
+            <pc:sldMk cId="768897572" sldId="266"/>
+            <ac:picMk id="10" creationId="{277251E7-D905-0562-A50D-1F9D35D53AED}"/>
+          </ac:picMkLst>
+        </pc:picChg>
+        <pc:picChg chg="del">
+          <ac:chgData name="Federico De Mita" userId="6ce638df-d46f-4fb8-b9fa-d85fcdec2cd5" providerId="ADAL" clId="{08362040-18E5-4911-871A-90A5BB37375A}" dt="2025-10-11T10:46:55.656" v="1966" actId="478"/>
+          <ac:picMkLst>
+            <pc:docMk/>
+            <pc:sldMk cId="768897572" sldId="266"/>
+            <ac:picMk id="12" creationId="{EB90152F-A50D-1FD7-94A5-F9C9701E5BB1}"/>
+          </ac:picMkLst>
+        </pc:picChg>
+        <pc:picChg chg="add mod">
+          <ac:chgData name="Federico De Mita" userId="6ce638df-d46f-4fb8-b9fa-d85fcdec2cd5" providerId="ADAL" clId="{08362040-18E5-4911-871A-90A5BB37375A}" dt="2025-10-11T10:51:39.391" v="2194" actId="1035"/>
+          <ac:picMkLst>
+            <pc:docMk/>
+            <pc:sldMk cId="768897572" sldId="266"/>
+            <ac:picMk id="13" creationId="{04FE9AE4-6758-04D6-BA88-009286A40717}"/>
+          </ac:picMkLst>
+        </pc:picChg>
+        <pc:picChg chg="del">
+          <ac:chgData name="Federico De Mita" userId="6ce638df-d46f-4fb8-b9fa-d85fcdec2cd5" providerId="ADAL" clId="{08362040-18E5-4911-871A-90A5BB37375A}" dt="2025-10-11T10:46:55.656" v="1966" actId="478"/>
+          <ac:picMkLst>
+            <pc:docMk/>
+            <pc:sldMk cId="768897572" sldId="266"/>
+            <ac:picMk id="15" creationId="{FC7AFE15-65E3-D05C-8806-E139EFAEDB3E}"/>
+          </ac:picMkLst>
+        </pc:picChg>
+        <pc:picChg chg="del">
+          <ac:chgData name="Federico De Mita" userId="6ce638df-d46f-4fb8-b9fa-d85fcdec2cd5" providerId="ADAL" clId="{08362040-18E5-4911-871A-90A5BB37375A}" dt="2025-10-11T10:46:55.656" v="1966" actId="478"/>
+          <ac:picMkLst>
+            <pc:docMk/>
+            <pc:sldMk cId="768897572" sldId="266"/>
+            <ac:picMk id="19" creationId="{AABF59B1-5CFA-03A5-068C-7449DD4CCF71}"/>
+          </ac:picMkLst>
+        </pc:picChg>
+        <pc:picChg chg="del">
+          <ac:chgData name="Federico De Mita" userId="6ce638df-d46f-4fb8-b9fa-d85fcdec2cd5" providerId="ADAL" clId="{08362040-18E5-4911-871A-90A5BB37375A}" dt="2025-10-11T10:46:55.656" v="1966" actId="478"/>
+          <ac:picMkLst>
+            <pc:docMk/>
+            <pc:sldMk cId="768897572" sldId="266"/>
+            <ac:picMk id="31" creationId="{AB0AB335-A49A-B24E-9BF3-4CC61AAEC59A}"/>
+          </ac:picMkLst>
+        </pc:picChg>
+        <pc:picChg chg="del">
+          <ac:chgData name="Federico De Mita" userId="6ce638df-d46f-4fb8-b9fa-d85fcdec2cd5" providerId="ADAL" clId="{08362040-18E5-4911-871A-90A5BB37375A}" dt="2025-10-11T10:46:55.656" v="1966" actId="478"/>
+          <ac:picMkLst>
+            <pc:docMk/>
+            <pc:sldMk cId="768897572" sldId="266"/>
+            <ac:picMk id="32" creationId="{EC90A74D-CB41-FCED-59C4-66DEF10D0FF2}"/>
+          </ac:picMkLst>
+        </pc:picChg>
+      </pc:sldChg>
+      <pc:sldChg chg="addSp delSp modSp add mod">
+        <pc:chgData name="Federico De Mita" userId="6ce638df-d46f-4fb8-b9fa-d85fcdec2cd5" providerId="ADAL" clId="{08362040-18E5-4911-871A-90A5BB37375A}" dt="2025-10-11T11:11:00.671" v="3121"/>
+        <pc:sldMkLst>
+          <pc:docMk/>
+          <pc:sldMk cId="1472274086" sldId="267"/>
+        </pc:sldMkLst>
+        <pc:spChg chg="mod">
+          <ac:chgData name="Federico De Mita" userId="6ce638df-d46f-4fb8-b9fa-d85fcdec2cd5" providerId="ADAL" clId="{08362040-18E5-4911-871A-90A5BB37375A}" dt="2025-10-11T10:51:18.475" v="2160" actId="1076"/>
+          <ac:spMkLst>
+            <pc:docMk/>
+            <pc:sldMk cId="1472274086" sldId="267"/>
+            <ac:spMk id="2" creationId="{7637FDEB-63F6-F3A7-EDBC-0345DF9ECDCA}"/>
+          </ac:spMkLst>
+        </pc:spChg>
+        <pc:spChg chg="mod">
+          <ac:chgData name="Federico De Mita" userId="6ce638df-d46f-4fb8-b9fa-d85fcdec2cd5" providerId="ADAL" clId="{08362040-18E5-4911-871A-90A5BB37375A}" dt="2025-10-11T10:52:06.482" v="2220" actId="20577"/>
+          <ac:spMkLst>
+            <pc:docMk/>
+            <pc:sldMk cId="1472274086" sldId="267"/>
+            <ac:spMk id="3" creationId="{20797491-204B-98A8-3559-FE44DACA817C}"/>
+          </ac:spMkLst>
+        </pc:spChg>
+        <pc:spChg chg="del mod">
+          <ac:chgData name="Federico De Mita" userId="6ce638df-d46f-4fb8-b9fa-d85fcdec2cd5" providerId="ADAL" clId="{08362040-18E5-4911-871A-90A5BB37375A}" dt="2025-10-11T10:51:49.001" v="2195" actId="478"/>
+          <ac:spMkLst>
+            <pc:docMk/>
+            <pc:sldMk cId="1472274086" sldId="267"/>
+            <ac:spMk id="4" creationId="{B75276B5-1209-15DF-EB4A-A50BE97ED98A}"/>
+          </ac:spMkLst>
+        </pc:spChg>
+        <pc:spChg chg="del mod">
+          <ac:chgData name="Federico De Mita" userId="6ce638df-d46f-4fb8-b9fa-d85fcdec2cd5" providerId="ADAL" clId="{08362040-18E5-4911-871A-90A5BB37375A}" dt="2025-10-11T10:51:49.001" v="2195" actId="478"/>
+          <ac:spMkLst>
+            <pc:docMk/>
+            <pc:sldMk cId="1472274086" sldId="267"/>
+            <ac:spMk id="7" creationId="{25CC7C96-2D08-2C67-FC90-EB82E1F3E585}"/>
+          </ac:spMkLst>
+        </pc:spChg>
+        <pc:spChg chg="add mod">
+          <ac:chgData name="Federico De Mita" userId="6ce638df-d46f-4fb8-b9fa-d85fcdec2cd5" providerId="ADAL" clId="{08362040-18E5-4911-871A-90A5BB37375A}" dt="2025-10-11T11:02:11.048" v="2294" actId="1035"/>
+          <ac:spMkLst>
+            <pc:docMk/>
+            <pc:sldMk cId="1472274086" sldId="267"/>
+            <ac:spMk id="17" creationId="{CA4F95BC-175B-7FAD-42F7-6516B8B1FAE7}"/>
+          </ac:spMkLst>
+        </pc:spChg>
+        <pc:spChg chg="add mod">
+          <ac:chgData name="Federico De Mita" userId="6ce638df-d46f-4fb8-b9fa-d85fcdec2cd5" providerId="ADAL" clId="{08362040-18E5-4911-871A-90A5BB37375A}" dt="2025-10-11T11:06:25.990" v="2990" actId="20577"/>
+          <ac:spMkLst>
+            <pc:docMk/>
+            <pc:sldMk cId="1472274086" sldId="267"/>
+            <ac:spMk id="18" creationId="{5AAE8BC1-EE95-F0B6-1C92-01CADDCECAEC}"/>
+          </ac:spMkLst>
+        </pc:spChg>
+        <pc:spChg chg="add mod">
+          <ac:chgData name="Federico De Mita" userId="6ce638df-d46f-4fb8-b9fa-d85fcdec2cd5" providerId="ADAL" clId="{08362040-18E5-4911-871A-90A5BB37375A}" dt="2025-10-11T11:11:00.671" v="3121"/>
+          <ac:spMkLst>
+            <pc:docMk/>
+            <pc:sldMk cId="1472274086" sldId="267"/>
+            <ac:spMk id="19" creationId="{369E6933-52A5-30A4-7D3F-7B0220E4593C}"/>
+          </ac:spMkLst>
+        </pc:spChg>
+        <pc:spChg chg="del">
+          <ac:chgData name="Federico De Mita" userId="6ce638df-d46f-4fb8-b9fa-d85fcdec2cd5" providerId="ADAL" clId="{08362040-18E5-4911-871A-90A5BB37375A}" dt="2025-10-11T11:11:00.062" v="3120" actId="478"/>
+          <ac:spMkLst>
+            <pc:docMk/>
+            <pc:sldMk cId="1472274086" sldId="267"/>
+            <ac:spMk id="22" creationId="{6B68E476-29E6-A27D-D9C1-1582F5D76DF8}"/>
+          </ac:spMkLst>
+        </pc:spChg>
+        <pc:picChg chg="del mod">
+          <ac:chgData name="Federico De Mita" userId="6ce638df-d46f-4fb8-b9fa-d85fcdec2cd5" providerId="ADAL" clId="{08362040-18E5-4911-871A-90A5BB37375A}" dt="2025-10-11T10:51:49.001" v="2195" actId="478"/>
+          <ac:picMkLst>
+            <pc:docMk/>
+            <pc:sldMk cId="1472274086" sldId="267"/>
+            <ac:picMk id="6" creationId="{BA2068C6-3370-E3C3-357A-1088B4E60898}"/>
+          </ac:picMkLst>
+        </pc:picChg>
+        <pc:picChg chg="add mod">
+          <ac:chgData name="Federico De Mita" userId="6ce638df-d46f-4fb8-b9fa-d85fcdec2cd5" providerId="ADAL" clId="{08362040-18E5-4911-871A-90A5BB37375A}" dt="2025-10-11T11:01:30.970" v="2274" actId="1038"/>
+          <ac:picMkLst>
+            <pc:docMk/>
+            <pc:sldMk cId="1472274086" sldId="267"/>
+            <ac:picMk id="8" creationId="{3BDE7A01-FED3-AF07-2A03-60584C8A78CC}"/>
+          </ac:picMkLst>
+        </pc:picChg>
+        <pc:picChg chg="add mod">
+          <ac:chgData name="Federico De Mita" userId="6ce638df-d46f-4fb8-b9fa-d85fcdec2cd5" providerId="ADAL" clId="{08362040-18E5-4911-871A-90A5BB37375A}" dt="2025-10-11T11:01:30.970" v="2274" actId="1038"/>
+          <ac:picMkLst>
+            <pc:docMk/>
+            <pc:sldMk cId="1472274086" sldId="267"/>
+            <ac:picMk id="10" creationId="{B91100B0-D46A-F2CD-22F6-D534CC41E2C6}"/>
+          </ac:picMkLst>
+        </pc:picChg>
+        <pc:picChg chg="add mod">
+          <ac:chgData name="Federico De Mita" userId="6ce638df-d46f-4fb8-b9fa-d85fcdec2cd5" providerId="ADAL" clId="{08362040-18E5-4911-871A-90A5BB37375A}" dt="2025-10-11T11:01:30.970" v="2274" actId="1038"/>
+          <ac:picMkLst>
+            <pc:docMk/>
+            <pc:sldMk cId="1472274086" sldId="267"/>
+            <ac:picMk id="12" creationId="{39ED87BA-92E6-FF78-B887-E0D95448CD69}"/>
+          </ac:picMkLst>
+        </pc:picChg>
+        <pc:picChg chg="del mod">
+          <ac:chgData name="Federico De Mita" userId="6ce638df-d46f-4fb8-b9fa-d85fcdec2cd5" providerId="ADAL" clId="{08362040-18E5-4911-871A-90A5BB37375A}" dt="2025-10-11T10:51:49.001" v="2195" actId="478"/>
+          <ac:picMkLst>
+            <pc:docMk/>
+            <pc:sldMk cId="1472274086" sldId="267"/>
+            <ac:picMk id="13" creationId="{4D4A122E-B8F5-504B-3257-94C9C7CE8D69}"/>
+          </ac:picMkLst>
+        </pc:picChg>
+        <pc:picChg chg="add mod">
+          <ac:chgData name="Federico De Mita" userId="6ce638df-d46f-4fb8-b9fa-d85fcdec2cd5" providerId="ADAL" clId="{08362040-18E5-4911-871A-90A5BB37375A}" dt="2025-10-11T11:01:30.970" v="2274" actId="1038"/>
+          <ac:picMkLst>
+            <pc:docMk/>
+            <pc:sldMk cId="1472274086" sldId="267"/>
+            <ac:picMk id="15" creationId="{6473B0E0-A1AB-5D3B-E24A-A11F620D6205}"/>
+          </ac:picMkLst>
+        </pc:picChg>
+      </pc:sldChg>
+      <pc:sldChg chg="new del">
+        <pc:chgData name="Federico De Mita" userId="6ce638df-d46f-4fb8-b9fa-d85fcdec2cd5" providerId="ADAL" clId="{08362040-18E5-4911-871A-90A5BB37375A}" dt="2025-10-11T10:51:04.762" v="2158" actId="47"/>
+        <pc:sldMkLst>
+          <pc:docMk/>
+          <pc:sldMk cId="3369935716" sldId="267"/>
+        </pc:sldMkLst>
+      </pc:sldChg>
+    </pc:docChg>
+  </pc:docChgLst>
+</pc:chgInfo>
 </file>
 
 <file path=ppt/handoutMasters/handoutMaster1.xml><?xml version="1.0" encoding="utf-8"?>
@@ -4281,6 +5558,10 @@
           <a:bodyPr/>
           <a:lstStyle/>
           <a:p>
+            <a:r>
+              <a:rPr lang="it-IT" dirty="0"/>
+              <a:t>Controller design</a:t>
+            </a:r>
             <a:endParaRPr lang="en-DE" dirty="0"/>
           </a:p>
         </p:txBody>
@@ -4306,7 +5587,25 @@
           <a:bodyPr/>
           <a:lstStyle/>
           <a:p>
-            <a:endParaRPr lang="en-DE"/>
+            <a:r>
+              <a:rPr lang="it-IT" dirty="0"/>
+              <a:t>Presentation </a:t>
+            </a:r>
+            <a:r>
+              <a:rPr lang="it-IT" dirty="0" err="1"/>
+              <a:t>Exercise</a:t>
+            </a:r>
+            <a:r>
+              <a:rPr lang="it-IT" dirty="0"/>
+              <a:t> 2:</a:t>
+            </a:r>
+          </a:p>
+          <a:p>
+            <a:r>
+              <a:rPr lang="it-IT" dirty="0"/>
+              <a:t>Baseline Torque controller</a:t>
+            </a:r>
+            <a:endParaRPr lang="en-DE" dirty="0"/>
           </a:p>
         </p:txBody>
       </p:sp>
@@ -4355,14 +5654,67 @@
             <p:ph type="ftr" sz="quarter" idx="11"/>
           </p:nvPr>
         </p:nvSpPr>
-        <p:spPr/>
+        <p:spPr>
+          <a:xfrm>
+            <a:off x="2781300" y="6356349"/>
+            <a:ext cx="6629400" cy="365125"/>
+          </a:xfrm>
+        </p:spPr>
         <p:txBody>
           <a:bodyPr/>
           <a:lstStyle/>
           <a:p>
             <a:r>
               <a:rPr lang="en-DE" dirty="0"/>
-              <a:t>Group 3: </a:t>
+              <a:t>Group 3:</a:t>
+            </a:r>
+            <a:r>
+              <a:rPr lang="it-IT" dirty="0"/>
+              <a:t> Federico De Mita, </a:t>
+            </a:r>
+            <a:r>
+              <a:rPr lang="it-IT" dirty="0" err="1"/>
+              <a:t>Waqas</a:t>
+            </a:r>
+            <a:r>
+              <a:rPr lang="it-IT" dirty="0"/>
+              <a:t> Ahmed, Dominic </a:t>
+            </a:r>
+            <a:r>
+              <a:rPr lang="it-IT" dirty="0" err="1"/>
+              <a:t>Annang</a:t>
+            </a:r>
+            <a:r>
+              <a:rPr lang="it-IT" dirty="0"/>
+              <a:t>, Hesham </a:t>
+            </a:r>
+            <a:r>
+              <a:rPr lang="it-IT" dirty="0" err="1"/>
+              <a:t>Magdy</a:t>
+            </a:r>
+            <a:r>
+              <a:rPr lang="it-IT" dirty="0"/>
+              <a:t>, </a:t>
+            </a:r>
+            <a:r>
+              <a:rPr lang="it-IT" dirty="0" err="1"/>
+              <a:t>Muthu</a:t>
+            </a:r>
+            <a:r>
+              <a:rPr lang="it-IT" dirty="0"/>
+              <a:t> </a:t>
+            </a:r>
+            <a:r>
+              <a:rPr lang="it-IT" dirty="0" err="1"/>
+              <a:t>Sivamuthu</a:t>
+            </a:r>
+            <a:r>
+              <a:rPr lang="it-IT" dirty="0"/>
+              <a:t> </a:t>
+            </a:r>
+            <a:r>
+              <a:rPr lang="en-DE" dirty="0"/>
+              <a:t> </a:t>
             </a:r>
           </a:p>
         </p:txBody>
@@ -4392,7 +5744,7 @@
               <a:rPr lang="en-DE" smtClean="0"/>
               <a:t>1</a:t>
             </a:fld>
-            <a:endParaRPr lang="en-DE"/>
+            <a:endParaRPr lang="en-DE" dirty="0"/>
           </a:p>
         </p:txBody>
       </p:sp>
@@ -4400,6 +5752,734 @@
     <p:extLst>
       <p:ext uri="{BB962C8B-B14F-4D97-AF65-F5344CB8AC3E}">
         <p14:creationId xmlns:p14="http://schemas.microsoft.com/office/powerpoint/2010/main" val="2491019271"/>
+      </p:ext>
+    </p:extLst>
+  </p:cSld>
+  <p:clrMapOvr>
+    <a:masterClrMapping/>
+  </p:clrMapOvr>
+</p:sld>
+</file>
+
+<file path=ppt/slides/slide10.xml><?xml version="1.0" encoding="utf-8"?>
+<p:sld xmlns:a="http://schemas.openxmlformats.org/drawingml/2006/main" xmlns:r="http://schemas.openxmlformats.org/officeDocument/2006/relationships" xmlns:p="http://schemas.openxmlformats.org/presentationml/2006/main">
+  <p:cSld>
+    <p:spTree>
+      <p:nvGrpSpPr>
+        <p:cNvPr id="1" name="">
+          <a:extLst>
+            <a:ext uri="{FF2B5EF4-FFF2-40B4-BE49-F238E27FC236}">
+              <a16:creationId xmlns:a16="http://schemas.microsoft.com/office/drawing/2014/main" id="{D45503F2-6D9F-3DA0-6A69-F03F1B1805F0}"/>
+            </a:ext>
+          </a:extLst>
+        </p:cNvPr>
+        <p:cNvGrpSpPr/>
+        <p:nvPr/>
+      </p:nvGrpSpPr>
+      <p:grpSpPr>
+        <a:xfrm>
+          <a:off x="0" y="0"/>
+          <a:ext cx="0" cy="0"/>
+          <a:chOff x="0" y="0"/>
+          <a:chExt cx="0" cy="0"/>
+        </a:xfrm>
+      </p:grpSpPr>
+      <p:sp>
+        <p:nvSpPr>
+          <p:cNvPr id="2" name="Title 1">
+            <a:extLst>
+              <a:ext uri="{FF2B5EF4-FFF2-40B4-BE49-F238E27FC236}">
+                <a16:creationId xmlns:a16="http://schemas.microsoft.com/office/drawing/2014/main" id="{7637FDEB-63F6-F3A7-EDBC-0345DF9ECDCA}"/>
+              </a:ext>
+            </a:extLst>
+          </p:cNvPr>
+          <p:cNvSpPr>
+            <a:spLocks noGrp="1"/>
+          </p:cNvSpPr>
+          <p:nvPr>
+            <p:ph type="title"/>
+          </p:nvPr>
+        </p:nvSpPr>
+        <p:spPr>
+          <a:xfrm>
+            <a:off x="838200" y="253694"/>
+            <a:ext cx="8921262" cy="1325563"/>
+          </a:xfrm>
+        </p:spPr>
+        <p:txBody>
+          <a:bodyPr>
+            <a:normAutofit/>
+          </a:bodyPr>
+          <a:lstStyle/>
+          <a:p>
+            <a:r>
+              <a:rPr lang="it-IT" sz="3800" dirty="0"/>
+              <a:t>2 – Test of a Baseline controller </a:t>
+            </a:r>
+            <a:endParaRPr lang="en-GB" sz="3800" dirty="0"/>
+          </a:p>
+        </p:txBody>
+      </p:sp>
+      <p:sp>
+        <p:nvSpPr>
+          <p:cNvPr id="21" name="Date Placeholder 3">
+            <a:extLst>
+              <a:ext uri="{FF2B5EF4-FFF2-40B4-BE49-F238E27FC236}">
+                <a16:creationId xmlns:a16="http://schemas.microsoft.com/office/drawing/2014/main" id="{5F254CC9-3B29-3CA5-D991-9994CB06190A}"/>
+              </a:ext>
+            </a:extLst>
+          </p:cNvPr>
+          <p:cNvSpPr>
+            <a:spLocks noGrp="1"/>
+          </p:cNvSpPr>
+          <p:nvPr>
+            <p:ph type="dt" sz="half" idx="10"/>
+          </p:nvPr>
+        </p:nvSpPr>
+        <p:spPr>
+          <a:xfrm>
+            <a:off x="838200" y="6356350"/>
+            <a:ext cx="2743200" cy="365125"/>
+          </a:xfrm>
+        </p:spPr>
+        <p:txBody>
+          <a:bodyPr/>
+          <a:lstStyle/>
+          <a:p>
+            <a:fld id="{42FF62D6-EE07-404C-A186-889D29CA3091}" type="datetime1">
+              <a:rPr lang="LID4096" smtClean="0"/>
+              <a:t>10/11/2025</a:t>
+            </a:fld>
+            <a:endParaRPr lang="en-DE"/>
+          </a:p>
+        </p:txBody>
+      </p:sp>
+      <p:sp>
+        <p:nvSpPr>
+          <p:cNvPr id="23" name="Slide Number Placeholder 5">
+            <a:extLst>
+              <a:ext uri="{FF2B5EF4-FFF2-40B4-BE49-F238E27FC236}">
+                <a16:creationId xmlns:a16="http://schemas.microsoft.com/office/drawing/2014/main" id="{646A20A1-757E-2040-9358-CB5B9FECEA98}"/>
+              </a:ext>
+            </a:extLst>
+          </p:cNvPr>
+          <p:cNvSpPr>
+            <a:spLocks noGrp="1"/>
+          </p:cNvSpPr>
+          <p:nvPr>
+            <p:ph type="sldNum" sz="quarter" idx="12"/>
+          </p:nvPr>
+        </p:nvSpPr>
+        <p:spPr>
+          <a:xfrm>
+            <a:off x="8610600" y="6356350"/>
+            <a:ext cx="2743200" cy="365125"/>
+          </a:xfrm>
+        </p:spPr>
+        <p:txBody>
+          <a:bodyPr/>
+          <a:lstStyle/>
+          <a:p>
+            <a:fld id="{F9C2340B-4B0F-4DED-BE4C-833C39BBA64E}" type="slidenum">
+              <a:rPr lang="en-DE" smtClean="0"/>
+              <a:t>10</a:t>
+            </a:fld>
+            <a:endParaRPr lang="en-DE"/>
+          </a:p>
+        </p:txBody>
+      </p:sp>
+      <p:sp>
+        <p:nvSpPr>
+          <p:cNvPr id="3" name="TextBox 2">
+            <a:extLst>
+              <a:ext uri="{FF2B5EF4-FFF2-40B4-BE49-F238E27FC236}">
+                <a16:creationId xmlns:a16="http://schemas.microsoft.com/office/drawing/2014/main" id="{20797491-204B-98A8-3559-FE44DACA817C}"/>
+              </a:ext>
+            </a:extLst>
+          </p:cNvPr>
+          <p:cNvSpPr txBox="1"/>
+          <p:nvPr/>
+        </p:nvSpPr>
+        <p:spPr>
+          <a:xfrm>
+            <a:off x="838200" y="1313872"/>
+            <a:ext cx="7086600" cy="369332"/>
+          </a:xfrm>
+          <a:prstGeom prst="rect">
+            <a:avLst/>
+          </a:prstGeom>
+          <a:noFill/>
+        </p:spPr>
+        <p:txBody>
+          <a:bodyPr wrap="square" rtlCol="0">
+            <a:spAutoFit/>
+          </a:bodyPr>
+          <a:lstStyle/>
+          <a:p>
+            <a:r>
+              <a:rPr lang="it-IT" dirty="0"/>
+              <a:t>b) </a:t>
+            </a:r>
+            <a:r>
+              <a:rPr lang="it-IT" dirty="0" err="1"/>
+              <a:t>Comparison</a:t>
+            </a:r>
+            <a:r>
+              <a:rPr lang="it-IT" dirty="0"/>
+              <a:t> with FAST: </a:t>
+            </a:r>
+            <a:r>
+              <a:rPr lang="it-IT" dirty="0" err="1"/>
+              <a:t>comparison</a:t>
+            </a:r>
+            <a:r>
+              <a:rPr lang="it-IT" dirty="0"/>
+              <a:t> with fast</a:t>
+            </a:r>
+            <a:endParaRPr lang="en-GB" dirty="0"/>
+          </a:p>
+        </p:txBody>
+      </p:sp>
+      <p:pic>
+        <p:nvPicPr>
+          <p:cNvPr id="8" name="Picture 7">
+            <a:extLst>
+              <a:ext uri="{FF2B5EF4-FFF2-40B4-BE49-F238E27FC236}">
+                <a16:creationId xmlns:a16="http://schemas.microsoft.com/office/drawing/2014/main" id="{3BDE7A01-FED3-AF07-2A03-60584C8A78CC}"/>
+              </a:ext>
+            </a:extLst>
+          </p:cNvPr>
+          <p:cNvPicPr>
+            <a:picLocks noChangeAspect="1"/>
+          </p:cNvPicPr>
+          <p:nvPr/>
+        </p:nvPicPr>
+        <p:blipFill>
+          <a:blip r:embed="rId2"/>
+          <a:stretch>
+            <a:fillRect/>
+          </a:stretch>
+        </p:blipFill>
+        <p:spPr>
+          <a:xfrm>
+            <a:off x="539084" y="1876136"/>
+            <a:ext cx="5891022" cy="840838"/>
+          </a:xfrm>
+          <a:prstGeom prst="rect">
+            <a:avLst/>
+          </a:prstGeom>
+        </p:spPr>
+      </p:pic>
+      <p:pic>
+        <p:nvPicPr>
+          <p:cNvPr id="10" name="Picture 9">
+            <a:extLst>
+              <a:ext uri="{FF2B5EF4-FFF2-40B4-BE49-F238E27FC236}">
+                <a16:creationId xmlns:a16="http://schemas.microsoft.com/office/drawing/2014/main" id="{B91100B0-D46A-F2CD-22F6-D534CC41E2C6}"/>
+              </a:ext>
+            </a:extLst>
+          </p:cNvPr>
+          <p:cNvPicPr>
+            <a:picLocks noChangeAspect="1"/>
+          </p:cNvPicPr>
+          <p:nvPr/>
+        </p:nvPicPr>
+        <p:blipFill>
+          <a:blip r:embed="rId3"/>
+          <a:stretch>
+            <a:fillRect/>
+          </a:stretch>
+        </p:blipFill>
+        <p:spPr>
+          <a:xfrm>
+            <a:off x="539084" y="2878019"/>
+            <a:ext cx="5891022" cy="755087"/>
+          </a:xfrm>
+          <a:prstGeom prst="rect">
+            <a:avLst/>
+          </a:prstGeom>
+        </p:spPr>
+      </p:pic>
+      <p:pic>
+        <p:nvPicPr>
+          <p:cNvPr id="12" name="Picture 11">
+            <a:extLst>
+              <a:ext uri="{FF2B5EF4-FFF2-40B4-BE49-F238E27FC236}">
+                <a16:creationId xmlns:a16="http://schemas.microsoft.com/office/drawing/2014/main" id="{39ED87BA-92E6-FF78-B887-E0D95448CD69}"/>
+              </a:ext>
+            </a:extLst>
+          </p:cNvPr>
+          <p:cNvPicPr>
+            <a:picLocks noChangeAspect="1"/>
+          </p:cNvPicPr>
+          <p:nvPr/>
+        </p:nvPicPr>
+        <p:blipFill>
+          <a:blip r:embed="rId4"/>
+          <a:stretch>
+            <a:fillRect/>
+          </a:stretch>
+        </p:blipFill>
+        <p:spPr>
+          <a:xfrm>
+            <a:off x="506054" y="3694824"/>
+            <a:ext cx="5957081" cy="840838"/>
+          </a:xfrm>
+          <a:prstGeom prst="rect">
+            <a:avLst/>
+          </a:prstGeom>
+        </p:spPr>
+      </p:pic>
+      <p:pic>
+        <p:nvPicPr>
+          <p:cNvPr id="15" name="Picture 14">
+            <a:extLst>
+              <a:ext uri="{FF2B5EF4-FFF2-40B4-BE49-F238E27FC236}">
+                <a16:creationId xmlns:a16="http://schemas.microsoft.com/office/drawing/2014/main" id="{6473B0E0-A1AB-5D3B-E24A-A11F620D6205}"/>
+              </a:ext>
+            </a:extLst>
+          </p:cNvPr>
+          <p:cNvPicPr>
+            <a:picLocks noChangeAspect="1"/>
+          </p:cNvPicPr>
+          <p:nvPr/>
+        </p:nvPicPr>
+        <p:blipFill>
+          <a:blip r:embed="rId5"/>
+          <a:stretch>
+            <a:fillRect/>
+          </a:stretch>
+        </p:blipFill>
+        <p:spPr>
+          <a:xfrm>
+            <a:off x="473026" y="4764147"/>
+            <a:ext cx="5957080" cy="943299"/>
+          </a:xfrm>
+          <a:prstGeom prst="rect">
+            <a:avLst/>
+          </a:prstGeom>
+        </p:spPr>
+      </p:pic>
+      <p:sp>
+        <p:nvSpPr>
+          <p:cNvPr id="17" name="TextBox 16">
+            <a:extLst>
+              <a:ext uri="{FF2B5EF4-FFF2-40B4-BE49-F238E27FC236}">
+                <a16:creationId xmlns:a16="http://schemas.microsoft.com/office/drawing/2014/main" id="{CA4F95BC-175B-7FAD-42F7-6516B8B1FAE7}"/>
+              </a:ext>
+            </a:extLst>
+          </p:cNvPr>
+          <p:cNvSpPr txBox="1"/>
+          <p:nvPr/>
+        </p:nvSpPr>
+        <p:spPr>
+          <a:xfrm>
+            <a:off x="6244738" y="2068340"/>
+            <a:ext cx="6097464" cy="369332"/>
+          </a:xfrm>
+          <a:prstGeom prst="rect">
+            <a:avLst/>
+          </a:prstGeom>
+          <a:noFill/>
+        </p:spPr>
+        <p:txBody>
+          <a:bodyPr wrap="square">
+            <a:spAutoFit/>
+          </a:bodyPr>
+          <a:lstStyle/>
+          <a:p>
+            <a:pPr algn="ctr"/>
+            <a:r>
+              <a:rPr lang="en-GB" sz="1800" b="1" i="0" u="none" strike="noStrike" baseline="0" dirty="0">
+                <a:latin typeface="LMRoman10-Regular"/>
+              </a:rPr>
+              <a:t>How do model uncertainties impact the </a:t>
+            </a:r>
+            <a:r>
+              <a:rPr lang="en-GB" sz="1800" b="1" i="0" u="none" strike="noStrike" baseline="0" dirty="0" err="1">
+                <a:latin typeface="LMRoman10-Regular"/>
+              </a:rPr>
+              <a:t>behavior</a:t>
+            </a:r>
+            <a:r>
+              <a:rPr lang="en-GB" sz="1800" b="1" i="0" u="none" strike="noStrike" baseline="0" dirty="0">
+                <a:latin typeface="LMRoman10-Regular"/>
+              </a:rPr>
+              <a:t>?</a:t>
+            </a:r>
+            <a:endParaRPr lang="en-GB" b="1" dirty="0"/>
+          </a:p>
+        </p:txBody>
+      </p:sp>
+      <p:sp>
+        <p:nvSpPr>
+          <p:cNvPr id="18" name="TextBox 17">
+            <a:extLst>
+              <a:ext uri="{FF2B5EF4-FFF2-40B4-BE49-F238E27FC236}">
+                <a16:creationId xmlns:a16="http://schemas.microsoft.com/office/drawing/2014/main" id="{5AAE8BC1-EE95-F0B6-1C92-01CADDCECAEC}"/>
+              </a:ext>
+            </a:extLst>
+          </p:cNvPr>
+          <p:cNvSpPr txBox="1"/>
+          <p:nvPr/>
+        </p:nvSpPr>
+        <p:spPr>
+          <a:xfrm>
+            <a:off x="6838275" y="2437823"/>
+            <a:ext cx="4548554" cy="3139321"/>
+          </a:xfrm>
+          <a:prstGeom prst="rect">
+            <a:avLst/>
+          </a:prstGeom>
+          <a:noFill/>
+        </p:spPr>
+        <p:txBody>
+          <a:bodyPr wrap="square" rtlCol="0">
+            <a:spAutoFit/>
+          </a:bodyPr>
+          <a:lstStyle/>
+          <a:p>
+            <a:r>
+              <a:rPr lang="it-IT" dirty="0"/>
+              <a:t>The </a:t>
+            </a:r>
+            <a:r>
+              <a:rPr lang="it-IT" dirty="0" err="1"/>
+              <a:t>initial</a:t>
+            </a:r>
+            <a:r>
+              <a:rPr lang="it-IT" dirty="0"/>
+              <a:t> </a:t>
+            </a:r>
+            <a:r>
+              <a:rPr lang="it-IT" dirty="0" err="1"/>
+              <a:t>oscillations</a:t>
+            </a:r>
+            <a:r>
+              <a:rPr lang="it-IT" dirty="0"/>
+              <a:t> for the FAST model are </a:t>
+            </a:r>
+            <a:r>
+              <a:rPr lang="it-IT" dirty="0" err="1"/>
+              <a:t>probably</a:t>
+            </a:r>
+            <a:r>
+              <a:rPr lang="it-IT" dirty="0"/>
+              <a:t> due to the </a:t>
+            </a:r>
+            <a:r>
+              <a:rPr lang="it-IT" dirty="0" err="1"/>
+              <a:t>adaptation</a:t>
+            </a:r>
+            <a:r>
+              <a:rPr lang="it-IT" dirty="0"/>
+              <a:t> of the model to the wind </a:t>
+            </a:r>
+            <a:r>
+              <a:rPr lang="it-IT" dirty="0" err="1"/>
+              <a:t>characteristics</a:t>
+            </a:r>
+            <a:r>
+              <a:rPr lang="it-IT" dirty="0"/>
+              <a:t> </a:t>
+            </a:r>
+            <a:r>
+              <a:rPr lang="it-IT" dirty="0" err="1"/>
+              <a:t>but</a:t>
+            </a:r>
+            <a:r>
+              <a:rPr lang="it-IT" dirty="0"/>
+              <a:t> for the </a:t>
+            </a:r>
+            <a:r>
+              <a:rPr lang="it-IT" dirty="0" err="1"/>
+              <a:t>rest</a:t>
+            </a:r>
+            <a:r>
+              <a:rPr lang="it-IT" dirty="0"/>
+              <a:t> the </a:t>
+            </a:r>
+            <a:r>
+              <a:rPr lang="it-IT" dirty="0" err="1"/>
+              <a:t>two</a:t>
+            </a:r>
+            <a:r>
+              <a:rPr lang="it-IT" dirty="0"/>
+              <a:t> models are following </a:t>
+            </a:r>
+            <a:r>
+              <a:rPr lang="it-IT" dirty="0" err="1"/>
+              <a:t>almost</a:t>
+            </a:r>
+            <a:r>
+              <a:rPr lang="it-IT" dirty="0"/>
+              <a:t> the </a:t>
+            </a:r>
+            <a:r>
+              <a:rPr lang="it-IT" dirty="0" err="1"/>
+              <a:t>same</a:t>
+            </a:r>
+            <a:r>
+              <a:rPr lang="it-IT" dirty="0"/>
+              <a:t> trend.</a:t>
+            </a:r>
+          </a:p>
+          <a:p>
+            <a:r>
+              <a:rPr lang="it-IT" dirty="0"/>
+              <a:t>The </a:t>
+            </a:r>
+            <a:r>
+              <a:rPr lang="it-IT" dirty="0" err="1"/>
+              <a:t>only</a:t>
+            </a:r>
+            <a:r>
+              <a:rPr lang="it-IT" dirty="0"/>
+              <a:t> part </a:t>
+            </a:r>
+            <a:r>
+              <a:rPr lang="it-IT" dirty="0" err="1"/>
+              <a:t>that</a:t>
+            </a:r>
+            <a:r>
+              <a:rPr lang="it-IT" dirty="0"/>
+              <a:t> </a:t>
+            </a:r>
+            <a:r>
+              <a:rPr lang="it-IT" dirty="0" err="1"/>
+              <a:t>changes</a:t>
+            </a:r>
+            <a:r>
+              <a:rPr lang="it-IT" dirty="0"/>
+              <a:t> and, for </a:t>
+            </a:r>
+            <a:r>
+              <a:rPr lang="it-IT" dirty="0" err="1"/>
+              <a:t>which</a:t>
+            </a:r>
+            <a:r>
+              <a:rPr lang="it-IT" dirty="0"/>
+              <a:t>, the </a:t>
+            </a:r>
+            <a:r>
+              <a:rPr lang="it-IT" dirty="0" err="1"/>
+              <a:t>adaptation</a:t>
+            </a:r>
+            <a:r>
+              <a:rPr lang="it-IT" dirty="0"/>
+              <a:t> by FAST </a:t>
+            </a:r>
+            <a:r>
+              <a:rPr lang="it-IT" dirty="0" err="1"/>
+              <a:t>is</a:t>
+            </a:r>
+            <a:r>
+              <a:rPr lang="it-IT" dirty="0"/>
+              <a:t> </a:t>
+            </a:r>
+            <a:r>
+              <a:rPr lang="it-IT" dirty="0" err="1"/>
+              <a:t>not</a:t>
+            </a:r>
+            <a:r>
+              <a:rPr lang="it-IT" dirty="0"/>
+              <a:t> </a:t>
+            </a:r>
+            <a:r>
+              <a:rPr lang="it-IT" dirty="0" err="1"/>
+              <a:t>as</a:t>
+            </a:r>
+            <a:r>
+              <a:rPr lang="it-IT" dirty="0"/>
+              <a:t> </a:t>
+            </a:r>
+            <a:r>
+              <a:rPr lang="it-IT" dirty="0" err="1"/>
+              <a:t>smooth</a:t>
+            </a:r>
+            <a:r>
+              <a:rPr lang="it-IT" dirty="0"/>
+              <a:t> </a:t>
+            </a:r>
+            <a:r>
+              <a:rPr lang="it-IT" dirty="0" err="1"/>
+              <a:t>as</a:t>
+            </a:r>
+            <a:r>
+              <a:rPr lang="it-IT" dirty="0"/>
+              <a:t> the one for SLOW (</a:t>
+            </a:r>
+            <a:r>
+              <a:rPr lang="it-IT" dirty="0" err="1"/>
+              <a:t>which</a:t>
+            </a:r>
+            <a:r>
+              <a:rPr lang="it-IT" dirty="0"/>
+              <a:t> </a:t>
+            </a:r>
+            <a:r>
+              <a:rPr lang="it-IT" dirty="0" err="1"/>
+              <a:t>is</a:t>
+            </a:r>
+            <a:r>
+              <a:rPr lang="it-IT" dirty="0"/>
+              <a:t> </a:t>
+            </a:r>
+            <a:r>
+              <a:rPr lang="it-IT" dirty="0" err="1"/>
+              <a:t>very</a:t>
+            </a:r>
+            <a:r>
+              <a:rPr lang="it-IT" dirty="0"/>
+              <a:t> </a:t>
+            </a:r>
+            <a:r>
+              <a:rPr lang="it-IT" dirty="0" err="1"/>
+              <a:t>simplified</a:t>
+            </a:r>
+            <a:r>
+              <a:rPr lang="it-IT" dirty="0"/>
+              <a:t>) </a:t>
+            </a:r>
+            <a:r>
+              <a:rPr lang="it-IT" dirty="0" err="1"/>
+              <a:t>is</a:t>
+            </a:r>
+            <a:r>
+              <a:rPr lang="it-IT" dirty="0"/>
+              <a:t> the time </a:t>
+            </a:r>
+            <a:r>
+              <a:rPr lang="it-IT" dirty="0" err="1"/>
+              <a:t>period</a:t>
+            </a:r>
+            <a:r>
+              <a:rPr lang="it-IT" dirty="0"/>
+              <a:t> after the time step.</a:t>
+            </a:r>
+          </a:p>
+          <a:p>
+            <a:r>
+              <a:rPr lang="it-IT" dirty="0" err="1"/>
+              <a:t>It</a:t>
+            </a:r>
+            <a:r>
+              <a:rPr lang="it-IT" dirty="0"/>
+              <a:t> takes a </a:t>
+            </a:r>
+            <a:r>
+              <a:rPr lang="it-IT" dirty="0" err="1"/>
+              <a:t>few</a:t>
+            </a:r>
+            <a:r>
+              <a:rPr lang="it-IT" dirty="0"/>
+              <a:t> seconds for the FAST model to </a:t>
+            </a:r>
+            <a:r>
+              <a:rPr lang="it-IT" dirty="0" err="1"/>
+              <a:t>adapt</a:t>
+            </a:r>
+            <a:r>
+              <a:rPr lang="it-IT" dirty="0"/>
+              <a:t> to the SLOW </a:t>
+            </a:r>
+            <a:r>
+              <a:rPr lang="it-IT" dirty="0" err="1"/>
+              <a:t>smooth</a:t>
+            </a:r>
+            <a:r>
+              <a:rPr lang="it-IT" dirty="0"/>
+              <a:t> curve</a:t>
+            </a:r>
+            <a:endParaRPr lang="en-GB" dirty="0"/>
+          </a:p>
+        </p:txBody>
+      </p:sp>
+      <p:sp>
+        <p:nvSpPr>
+          <p:cNvPr id="19" name="Footer Placeholder 4">
+            <a:extLst>
+              <a:ext uri="{FF2B5EF4-FFF2-40B4-BE49-F238E27FC236}">
+                <a16:creationId xmlns:a16="http://schemas.microsoft.com/office/drawing/2014/main" id="{369E6933-52A5-30A4-7D3F-7B0220E4593C}"/>
+              </a:ext>
+            </a:extLst>
+          </p:cNvPr>
+          <p:cNvSpPr>
+            <a:spLocks noGrp="1"/>
+          </p:cNvSpPr>
+          <p:nvPr>
+            <p:ph type="ftr" sz="quarter" idx="11"/>
+          </p:nvPr>
+        </p:nvSpPr>
+        <p:spPr>
+          <a:xfrm>
+            <a:off x="2781300" y="6356349"/>
+            <a:ext cx="6629400" cy="365125"/>
+          </a:xfrm>
+        </p:spPr>
+        <p:txBody>
+          <a:bodyPr/>
+          <a:lstStyle/>
+          <a:p>
+            <a:r>
+              <a:rPr lang="en-DE" dirty="0"/>
+              <a:t>Group 3:</a:t>
+            </a:r>
+            <a:r>
+              <a:rPr lang="it-IT" dirty="0"/>
+              <a:t> Federico De Mita, </a:t>
+            </a:r>
+            <a:r>
+              <a:rPr lang="it-IT" dirty="0" err="1"/>
+              <a:t>Waqas</a:t>
+            </a:r>
+            <a:r>
+              <a:rPr lang="it-IT" dirty="0"/>
+              <a:t> Ahmed, Dominic </a:t>
+            </a:r>
+            <a:r>
+              <a:rPr lang="it-IT" dirty="0" err="1"/>
+              <a:t>Annang</a:t>
+            </a:r>
+            <a:r>
+              <a:rPr lang="it-IT" dirty="0"/>
+              <a:t>, Hesham </a:t>
+            </a:r>
+            <a:r>
+              <a:rPr lang="it-IT" dirty="0" err="1"/>
+              <a:t>Magdy</a:t>
+            </a:r>
+            <a:r>
+              <a:rPr lang="it-IT" dirty="0"/>
+              <a:t>, </a:t>
+            </a:r>
+            <a:r>
+              <a:rPr lang="it-IT" dirty="0" err="1"/>
+              <a:t>Muthu</a:t>
+            </a:r>
+            <a:r>
+              <a:rPr lang="it-IT" dirty="0"/>
+              <a:t> </a:t>
+            </a:r>
+            <a:r>
+              <a:rPr lang="it-IT" dirty="0" err="1"/>
+              <a:t>Sivamuthu</a:t>
+            </a:r>
+            <a:r>
+              <a:rPr lang="it-IT" dirty="0"/>
+              <a:t> </a:t>
+            </a:r>
+            <a:r>
+              <a:rPr lang="en-DE" dirty="0"/>
+              <a:t> </a:t>
+            </a:r>
+          </a:p>
+        </p:txBody>
+      </p:sp>
+    </p:spTree>
+    <p:extLst>
+      <p:ext uri="{BB962C8B-B14F-4D97-AF65-F5344CB8AC3E}">
+        <p14:creationId xmlns:p14="http://schemas.microsoft.com/office/powerpoint/2010/main" val="1472274086"/>
       </p:ext>
     </p:extLst>
   </p:cSld>
@@ -4431,7 +6511,7 @@
           <p:cNvPr id="2" name="Title 1">
             <a:extLst>
               <a:ext uri="{FF2B5EF4-FFF2-40B4-BE49-F238E27FC236}">
-                <a16:creationId xmlns:a16="http://schemas.microsoft.com/office/drawing/2014/main" id="{5584DEA6-2080-9454-4C88-3D73514C0FF6}"/>
+                <a16:creationId xmlns:a16="http://schemas.microsoft.com/office/drawing/2014/main" id="{9B30E08B-F779-A8D8-4857-18AE607A146F}"/>
               </a:ext>
             </a:extLst>
           </p:cNvPr>
@@ -4442,21 +6522,183 @@
             <p:ph type="title"/>
           </p:nvPr>
         </p:nvSpPr>
-        <p:spPr/>
+        <p:spPr>
+          <a:xfrm>
+            <a:off x="838200" y="410368"/>
+            <a:ext cx="8921262" cy="1325563"/>
+          </a:xfrm>
+        </p:spPr>
+        <p:txBody>
+          <a:bodyPr>
+            <a:normAutofit/>
+          </a:bodyPr>
+          <a:lstStyle/>
+          <a:p>
+            <a:r>
+              <a:rPr lang="it-IT" sz="3800" dirty="0"/>
+              <a:t>1 – Design of a Baseline Torque Controller</a:t>
+            </a:r>
+            <a:endParaRPr lang="en-GB" sz="3800" dirty="0"/>
+          </a:p>
+        </p:txBody>
+      </p:sp>
+      <p:sp>
+        <p:nvSpPr>
+          <p:cNvPr id="3" name="Content Placeholder 2">
+            <a:extLst>
+              <a:ext uri="{FF2B5EF4-FFF2-40B4-BE49-F238E27FC236}">
+                <a16:creationId xmlns:a16="http://schemas.microsoft.com/office/drawing/2014/main" id="{616A8F45-0137-9670-0923-3C7C7D97EBC6}"/>
+              </a:ext>
+            </a:extLst>
+          </p:cNvPr>
+          <p:cNvSpPr>
+            <a:spLocks noGrp="1"/>
+          </p:cNvSpPr>
+          <p:nvPr>
+            <p:ph idx="1"/>
+          </p:nvPr>
+        </p:nvSpPr>
+        <p:spPr>
+          <a:xfrm>
+            <a:off x="580292" y="1635368"/>
+            <a:ext cx="11078308" cy="4541594"/>
+          </a:xfrm>
+        </p:spPr>
         <p:txBody>
           <a:bodyPr/>
           <a:lstStyle/>
           <a:p>
-            <a:endParaRPr lang="en-GB"/>
-          </a:p>
-        </p:txBody>
-      </p:sp>
-      <p:sp>
-        <p:nvSpPr>
-          <p:cNvPr id="3" name="Date Placeholder 2">
-            <a:extLst>
-              <a:ext uri="{FF2B5EF4-FFF2-40B4-BE49-F238E27FC236}">
-                <a16:creationId xmlns:a16="http://schemas.microsoft.com/office/drawing/2014/main" id="{AB131622-D8E8-5E2D-C979-9BCECE252CE6}"/>
+            <a:pPr marL="0" indent="0">
+              <a:buNone/>
+            </a:pPr>
+            <a:r>
+              <a:rPr lang="it-IT" dirty="0"/>
+              <a:t>b) </a:t>
+            </a:r>
+            <a:r>
+              <a:rPr lang="it-IT" dirty="0" err="1"/>
+              <a:t>Parameter</a:t>
+            </a:r>
+            <a:r>
+              <a:rPr lang="it-IT" dirty="0"/>
+              <a:t> </a:t>
+            </a:r>
+            <a:r>
+              <a:rPr lang="it-IT" dirty="0" err="1"/>
+              <a:t>determination</a:t>
+            </a:r>
+            <a:r>
+              <a:rPr lang="it-IT" dirty="0"/>
+              <a:t> for baseline controller:</a:t>
+            </a:r>
+          </a:p>
+          <a:p>
+            <a:pPr marL="457200" lvl="1" indent="0">
+              <a:buNone/>
+            </a:pPr>
+            <a:r>
+              <a:rPr lang="en-GB" dirty="0"/>
+              <a:t>• </a:t>
+            </a:r>
+            <a:r>
+              <a:rPr lang="en-GB" dirty="0" err="1"/>
+              <a:t>Parameter.VSC.k</a:t>
+            </a:r>
+            <a:endParaRPr lang="en-GB" dirty="0"/>
+          </a:p>
+          <a:p>
+            <a:pPr marL="457200" lvl="1" indent="0">
+              <a:buNone/>
+            </a:pPr>
+            <a:r>
+              <a:rPr lang="en-GB" dirty="0"/>
+              <a:t>• </a:t>
+            </a:r>
+            <a:r>
+              <a:rPr lang="en-GB" dirty="0" err="1"/>
+              <a:t>Parameter.VSC.M_g_rated</a:t>
+            </a:r>
+            <a:endParaRPr lang="en-GB" dirty="0"/>
+          </a:p>
+          <a:p>
+            <a:pPr marL="457200" lvl="1" indent="0">
+              <a:buNone/>
+            </a:pPr>
+            <a:r>
+              <a:rPr lang="en-GB" dirty="0"/>
+              <a:t>• Parameter.VSC.a_1_5</a:t>
+            </a:r>
+          </a:p>
+          <a:p>
+            <a:pPr marL="457200" lvl="1" indent="0">
+              <a:buNone/>
+            </a:pPr>
+            <a:r>
+              <a:rPr lang="en-GB" dirty="0"/>
+              <a:t>• Parameter.VSC.b_1_5</a:t>
+            </a:r>
+          </a:p>
+          <a:p>
+            <a:pPr marL="457200" lvl="1" indent="0">
+              <a:buNone/>
+            </a:pPr>
+            <a:r>
+              <a:rPr lang="en-GB" dirty="0"/>
+              <a:t>• Parameter.VSC.a_2_5</a:t>
+            </a:r>
+          </a:p>
+          <a:p>
+            <a:pPr marL="457200" lvl="1" indent="0">
+              <a:buNone/>
+            </a:pPr>
+            <a:r>
+              <a:rPr lang="en-GB" dirty="0"/>
+              <a:t>• Parameter.VSC.b_2_5</a:t>
+            </a:r>
+          </a:p>
+          <a:p>
+            <a:pPr marL="457200" lvl="1" indent="0">
+              <a:buNone/>
+            </a:pPr>
+            <a:endParaRPr lang="en-GB" dirty="0"/>
+          </a:p>
+          <a:p>
+            <a:pPr marL="0" lvl="1" indent="0">
+              <a:buNone/>
+            </a:pPr>
+            <a:r>
+              <a:rPr lang="en-GB" dirty="0"/>
+              <a:t>Calculation in the </a:t>
+            </a:r>
+            <a:r>
+              <a:rPr lang="en-GB" dirty="0">
+                <a:solidFill>
+                  <a:srgbClr val="FF0000"/>
+                </a:solidFill>
+              </a:rPr>
+              <a:t>Exercise02_TorqueControllerDesign.m </a:t>
+            </a:r>
+            <a:r>
+              <a:rPr lang="en-GB" dirty="0"/>
+              <a:t>file and implementation for the simulation in the </a:t>
+            </a:r>
+            <a:r>
+              <a:rPr lang="en-GB" dirty="0">
+                <a:solidFill>
+                  <a:srgbClr val="FF0000"/>
+                </a:solidFill>
+              </a:rPr>
+              <a:t>NREL5MWDefaultParameter_FBNREL_TorqueController.m</a:t>
+            </a:r>
+          </a:p>
+        </p:txBody>
+      </p:sp>
+      <p:sp>
+        <p:nvSpPr>
+          <p:cNvPr id="4" name="Date Placeholder 3">
+            <a:extLst>
+              <a:ext uri="{FF2B5EF4-FFF2-40B4-BE49-F238E27FC236}">
+                <a16:creationId xmlns:a16="http://schemas.microsoft.com/office/drawing/2014/main" id="{29B72829-8391-29F5-695F-63BDB5D100D6}"/>
               </a:ext>
             </a:extLst>
           </p:cNvPr>
@@ -4472,7 +6714,7 @@
           <a:bodyPr/>
           <a:lstStyle/>
           <a:p>
-            <a:fld id="{C2A217BA-F67A-48D3-9AB9-1892FB53DA93}" type="datetime1">
+            <a:fld id="{42FF62D6-EE07-404C-A186-889D29CA3091}" type="datetime1">
               <a:rPr lang="LID4096" smtClean="0"/>
               <a:t>10/11/2025</a:t>
             </a:fld>
@@ -4482,10 +6724,39 @@
       </p:sp>
       <p:sp>
         <p:nvSpPr>
-          <p:cNvPr id="4" name="Footer Placeholder 3">
-            <a:extLst>
-              <a:ext uri="{FF2B5EF4-FFF2-40B4-BE49-F238E27FC236}">
-                <a16:creationId xmlns:a16="http://schemas.microsoft.com/office/drawing/2014/main" id="{DB9FFA2B-C227-3D9B-8B9E-F03AAF3169E4}"/>
+          <p:cNvPr id="6" name="Slide Number Placeholder 5">
+            <a:extLst>
+              <a:ext uri="{FF2B5EF4-FFF2-40B4-BE49-F238E27FC236}">
+                <a16:creationId xmlns:a16="http://schemas.microsoft.com/office/drawing/2014/main" id="{3BFEF18C-C5B8-AB75-8D26-BE4CB08D40E2}"/>
+              </a:ext>
+            </a:extLst>
+          </p:cNvPr>
+          <p:cNvSpPr>
+            <a:spLocks noGrp="1"/>
+          </p:cNvSpPr>
+          <p:nvPr>
+            <p:ph type="sldNum" sz="quarter" idx="12"/>
+          </p:nvPr>
+        </p:nvSpPr>
+        <p:spPr/>
+        <p:txBody>
+          <a:bodyPr/>
+          <a:lstStyle/>
+          <a:p>
+            <a:fld id="{F9C2340B-4B0F-4DED-BE4C-833C39BBA64E}" type="slidenum">
+              <a:rPr lang="en-DE" smtClean="0"/>
+              <a:t>2</a:t>
+            </a:fld>
+            <a:endParaRPr lang="en-DE"/>
+          </a:p>
+        </p:txBody>
+      </p:sp>
+      <p:sp>
+        <p:nvSpPr>
+          <p:cNvPr id="9" name="Footer Placeholder 4">
+            <a:extLst>
+              <a:ext uri="{FF2B5EF4-FFF2-40B4-BE49-F238E27FC236}">
+                <a16:creationId xmlns:a16="http://schemas.microsoft.com/office/drawing/2014/main" id="{8C079E31-6EBD-DDF9-5DF5-5F79F389E497}"/>
               </a:ext>
             </a:extLst>
           </p:cNvPr>
@@ -4496,24 +6767,178 @@
             <p:ph type="ftr" sz="quarter" idx="11"/>
           </p:nvPr>
         </p:nvSpPr>
-        <p:spPr/>
+        <p:spPr>
+          <a:xfrm>
+            <a:off x="2781300" y="6356349"/>
+            <a:ext cx="6629400" cy="365125"/>
+          </a:xfrm>
+        </p:spPr>
         <p:txBody>
           <a:bodyPr/>
           <a:lstStyle/>
           <a:p>
             <a:r>
-              <a:rPr lang="en-DE"/>
-              <a:t>Group 3: group members</a:t>
-            </a:r>
-          </a:p>
-        </p:txBody>
-      </p:sp>
-      <p:sp>
-        <p:nvSpPr>
-          <p:cNvPr id="5" name="Slide Number Placeholder 4">
-            <a:extLst>
-              <a:ext uri="{FF2B5EF4-FFF2-40B4-BE49-F238E27FC236}">
-                <a16:creationId xmlns:a16="http://schemas.microsoft.com/office/drawing/2014/main" id="{E289200E-D4BA-8F78-6CD7-F87BAA1036A1}"/>
+              <a:rPr lang="en-DE" dirty="0"/>
+              <a:t>Group 3:</a:t>
+            </a:r>
+            <a:r>
+              <a:rPr lang="it-IT" dirty="0"/>
+              <a:t> Federico De Mita, </a:t>
+            </a:r>
+            <a:r>
+              <a:rPr lang="it-IT" dirty="0" err="1"/>
+              <a:t>Waqas</a:t>
+            </a:r>
+            <a:r>
+              <a:rPr lang="it-IT" dirty="0"/>
+              <a:t> Ahmed, Dominic </a:t>
+            </a:r>
+            <a:r>
+              <a:rPr lang="it-IT" dirty="0" err="1"/>
+              <a:t>Annang</a:t>
+            </a:r>
+            <a:r>
+              <a:rPr lang="it-IT" dirty="0"/>
+              <a:t>, Hesham </a:t>
+            </a:r>
+            <a:r>
+              <a:rPr lang="it-IT" dirty="0" err="1"/>
+              <a:t>Magdy</a:t>
+            </a:r>
+            <a:r>
+              <a:rPr lang="it-IT" dirty="0"/>
+              <a:t>, </a:t>
+            </a:r>
+            <a:r>
+              <a:rPr lang="it-IT" dirty="0" err="1"/>
+              <a:t>Muthu</a:t>
+            </a:r>
+            <a:r>
+              <a:rPr lang="it-IT" dirty="0"/>
+              <a:t> </a:t>
+            </a:r>
+            <a:r>
+              <a:rPr lang="it-IT" dirty="0" err="1"/>
+              <a:t>Sivamuthu</a:t>
+            </a:r>
+            <a:r>
+              <a:rPr lang="it-IT" dirty="0"/>
+              <a:t> </a:t>
+            </a:r>
+            <a:r>
+              <a:rPr lang="en-DE" dirty="0"/>
+              <a:t> </a:t>
+            </a:r>
+          </a:p>
+        </p:txBody>
+      </p:sp>
+    </p:spTree>
+    <p:extLst>
+      <p:ext uri="{BB962C8B-B14F-4D97-AF65-F5344CB8AC3E}">
+        <p14:creationId xmlns:p14="http://schemas.microsoft.com/office/powerpoint/2010/main" val="3199336296"/>
+      </p:ext>
+    </p:extLst>
+  </p:cSld>
+  <p:clrMapOvr>
+    <a:masterClrMapping/>
+  </p:clrMapOvr>
+</p:sld>
+</file>
+
+<file path=ppt/slides/slide3.xml><?xml version="1.0" encoding="utf-8"?>
+<p:sld xmlns:a="http://schemas.openxmlformats.org/drawingml/2006/main" xmlns:r="http://schemas.openxmlformats.org/officeDocument/2006/relationships" xmlns:p="http://schemas.openxmlformats.org/presentationml/2006/main">
+  <p:cSld>
+    <p:spTree>
+      <p:nvGrpSpPr>
+        <p:cNvPr id="1" name="">
+          <a:extLst>
+            <a:ext uri="{FF2B5EF4-FFF2-40B4-BE49-F238E27FC236}">
+              <a16:creationId xmlns:a16="http://schemas.microsoft.com/office/drawing/2014/main" id="{F2D3D67D-72BA-8377-1557-5E1C73DA107F}"/>
+            </a:ext>
+          </a:extLst>
+        </p:cNvPr>
+        <p:cNvGrpSpPr/>
+        <p:nvPr/>
+      </p:nvGrpSpPr>
+      <p:grpSpPr>
+        <a:xfrm>
+          <a:off x="0" y="0"/>
+          <a:ext cx="0" cy="0"/>
+          <a:chOff x="0" y="0"/>
+          <a:chExt cx="0" cy="0"/>
+        </a:xfrm>
+      </p:grpSpPr>
+      <p:sp>
+        <p:nvSpPr>
+          <p:cNvPr id="2" name="Title 1">
+            <a:extLst>
+              <a:ext uri="{FF2B5EF4-FFF2-40B4-BE49-F238E27FC236}">
+                <a16:creationId xmlns:a16="http://schemas.microsoft.com/office/drawing/2014/main" id="{7F98E838-1D4D-7A39-99CC-37A428DA73C0}"/>
+              </a:ext>
+            </a:extLst>
+          </p:cNvPr>
+          <p:cNvSpPr>
+            <a:spLocks noGrp="1"/>
+          </p:cNvSpPr>
+          <p:nvPr>
+            <p:ph type="title"/>
+          </p:nvPr>
+        </p:nvSpPr>
+        <p:spPr>
+          <a:xfrm>
+            <a:off x="838200" y="410368"/>
+            <a:ext cx="8921262" cy="1325563"/>
+          </a:xfrm>
+        </p:spPr>
+        <p:txBody>
+          <a:bodyPr>
+            <a:normAutofit/>
+          </a:bodyPr>
+          <a:lstStyle/>
+          <a:p>
+            <a:r>
+              <a:rPr lang="it-IT" sz="3800" dirty="0"/>
+              <a:t>1 – Design of a Baseline Torque Controller</a:t>
+            </a:r>
+            <a:endParaRPr lang="en-GB" sz="3800" dirty="0"/>
+          </a:p>
+        </p:txBody>
+      </p:sp>
+      <p:sp>
+        <p:nvSpPr>
+          <p:cNvPr id="4" name="Date Placeholder 3">
+            <a:extLst>
+              <a:ext uri="{FF2B5EF4-FFF2-40B4-BE49-F238E27FC236}">
+                <a16:creationId xmlns:a16="http://schemas.microsoft.com/office/drawing/2014/main" id="{94172236-BF73-6D5C-4FCC-BE14C2FC675F}"/>
+              </a:ext>
+            </a:extLst>
+          </p:cNvPr>
+          <p:cNvSpPr>
+            <a:spLocks noGrp="1"/>
+          </p:cNvSpPr>
+          <p:nvPr>
+            <p:ph type="dt" sz="half" idx="10"/>
+          </p:nvPr>
+        </p:nvSpPr>
+        <p:spPr/>
+        <p:txBody>
+          <a:bodyPr/>
+          <a:lstStyle/>
+          <a:p>
+            <a:fld id="{42FF62D6-EE07-404C-A186-889D29CA3091}" type="datetime1">
+              <a:rPr lang="LID4096" smtClean="0"/>
+              <a:t>10/11/2025</a:t>
+            </a:fld>
+            <a:endParaRPr lang="en-DE"/>
+          </a:p>
+        </p:txBody>
+      </p:sp>
+      <p:sp>
+        <p:nvSpPr>
+          <p:cNvPr id="6" name="Slide Number Placeholder 5">
+            <a:extLst>
+              <a:ext uri="{FF2B5EF4-FFF2-40B4-BE49-F238E27FC236}">
+                <a16:creationId xmlns:a16="http://schemas.microsoft.com/office/drawing/2014/main" id="{8EFA68EC-020C-EEEE-55F2-F5D9E085501B}"/>
               </a:ext>
             </a:extLst>
           </p:cNvPr>
@@ -4531,16 +6956,5949 @@
           <a:p>
             <a:fld id="{F9C2340B-4B0F-4DED-BE4C-833C39BBA64E}" type="slidenum">
               <a:rPr lang="en-DE" smtClean="0"/>
-              <a:t>2</a:t>
+              <a:t>3</a:t>
             </a:fld>
             <a:endParaRPr lang="en-DE"/>
+          </a:p>
+        </p:txBody>
+      </p:sp>
+      <p:sp>
+        <p:nvSpPr>
+          <p:cNvPr id="8" name="Content Placeholder 7">
+            <a:extLst>
+              <a:ext uri="{FF2B5EF4-FFF2-40B4-BE49-F238E27FC236}">
+                <a16:creationId xmlns:a16="http://schemas.microsoft.com/office/drawing/2014/main" id="{77495751-531F-BBFD-89AB-6B5F8B668CCB}"/>
+              </a:ext>
+            </a:extLst>
+          </p:cNvPr>
+          <p:cNvSpPr>
+            <a:spLocks noGrp="1"/>
+          </p:cNvSpPr>
+          <p:nvPr>
+            <p:ph idx="1"/>
+          </p:nvPr>
+        </p:nvSpPr>
+        <p:spPr>
+          <a:xfrm>
+            <a:off x="838200" y="1588233"/>
+            <a:ext cx="10515600" cy="1234282"/>
+          </a:xfrm>
+        </p:spPr>
+        <p:txBody>
+          <a:bodyPr>
+            <a:normAutofit/>
+          </a:bodyPr>
+          <a:lstStyle/>
+          <a:p>
+            <a:pPr marL="0" indent="0">
+              <a:buNone/>
+            </a:pPr>
+            <a:r>
+              <a:rPr lang="it-IT" sz="2000" dirty="0"/>
+              <a:t>b) </a:t>
+            </a:r>
+            <a:r>
+              <a:rPr lang="it-IT" sz="2000" dirty="0" err="1"/>
+              <a:t>Parameter</a:t>
+            </a:r>
+            <a:r>
+              <a:rPr lang="it-IT" sz="2000" dirty="0"/>
+              <a:t> </a:t>
+            </a:r>
+            <a:r>
+              <a:rPr lang="it-IT" sz="2000" dirty="0" err="1"/>
+              <a:t>determination</a:t>
+            </a:r>
+            <a:r>
+              <a:rPr lang="it-IT" sz="2000" dirty="0"/>
+              <a:t> for baseline controller:</a:t>
+            </a:r>
+          </a:p>
+          <a:p>
+            <a:pPr marL="0" indent="0">
+              <a:buNone/>
+            </a:pPr>
+            <a:r>
+              <a:rPr lang="en-GB" sz="2000" dirty="0"/>
+              <a:t>• </a:t>
+            </a:r>
+            <a:r>
+              <a:rPr lang="en-GB" sz="2000" dirty="0" err="1"/>
+              <a:t>Parameter.VSC.M_g_rated</a:t>
+            </a:r>
+            <a:endParaRPr lang="en-GB" sz="2000" dirty="0"/>
+          </a:p>
+        </p:txBody>
+      </p:sp>
+      <p:pic>
+        <p:nvPicPr>
+          <p:cNvPr id="10" name="Picture 9">
+            <a:extLst>
+              <a:ext uri="{FF2B5EF4-FFF2-40B4-BE49-F238E27FC236}">
+                <a16:creationId xmlns:a16="http://schemas.microsoft.com/office/drawing/2014/main" id="{CADAA80E-6848-1A40-3EC4-5586D584C773}"/>
+              </a:ext>
+            </a:extLst>
+          </p:cNvPr>
+          <p:cNvPicPr>
+            <a:picLocks noChangeAspect="1"/>
+          </p:cNvPicPr>
+          <p:nvPr/>
+        </p:nvPicPr>
+        <p:blipFill>
+          <a:blip r:embed="rId2"/>
+          <a:stretch>
+            <a:fillRect/>
+          </a:stretch>
+        </p:blipFill>
+        <p:spPr>
+          <a:xfrm>
+            <a:off x="965386" y="2468623"/>
+            <a:ext cx="9593014" cy="1066949"/>
+          </a:xfrm>
+          <a:prstGeom prst="rect">
+            <a:avLst/>
+          </a:prstGeom>
+        </p:spPr>
+      </p:pic>
+      <p:sp>
+        <p:nvSpPr>
+          <p:cNvPr id="13" name="TextBox 12">
+            <a:extLst>
+              <a:ext uri="{FF2B5EF4-FFF2-40B4-BE49-F238E27FC236}">
+                <a16:creationId xmlns:a16="http://schemas.microsoft.com/office/drawing/2014/main" id="{09F3E1F6-5FE5-4E12-6A3E-566AD6F332CC}"/>
+              </a:ext>
+            </a:extLst>
+          </p:cNvPr>
+          <p:cNvSpPr txBox="1"/>
+          <p:nvPr/>
+        </p:nvSpPr>
+        <p:spPr>
+          <a:xfrm>
+            <a:off x="838200" y="3702905"/>
+            <a:ext cx="3991708" cy="400110"/>
+          </a:xfrm>
+          <a:prstGeom prst="rect">
+            <a:avLst/>
+          </a:prstGeom>
+          <a:noFill/>
+        </p:spPr>
+        <p:txBody>
+          <a:bodyPr wrap="square" rtlCol="0">
+            <a:spAutoFit/>
+          </a:bodyPr>
+          <a:lstStyle/>
+          <a:p>
+            <a:r>
+              <a:rPr lang="en-GB" sz="2000" dirty="0"/>
+              <a:t>• </a:t>
+            </a:r>
+            <a:r>
+              <a:rPr lang="en-GB" sz="2000" dirty="0" err="1"/>
+              <a:t>Parameter.VSC.k</a:t>
+            </a:r>
+            <a:endParaRPr lang="en-GB" sz="2000" dirty="0"/>
+          </a:p>
+        </p:txBody>
+      </p:sp>
+      <p:pic>
+        <p:nvPicPr>
+          <p:cNvPr id="15" name="Picture 14">
+            <a:extLst>
+              <a:ext uri="{FF2B5EF4-FFF2-40B4-BE49-F238E27FC236}">
+                <a16:creationId xmlns:a16="http://schemas.microsoft.com/office/drawing/2014/main" id="{B58455D3-7280-D81E-00EA-25FDA56A101A}"/>
+              </a:ext>
+            </a:extLst>
+          </p:cNvPr>
+          <p:cNvPicPr>
+            <a:picLocks noChangeAspect="1"/>
+          </p:cNvPicPr>
+          <p:nvPr/>
+        </p:nvPicPr>
+        <p:blipFill>
+          <a:blip r:embed="rId3"/>
+          <a:stretch>
+            <a:fillRect/>
+          </a:stretch>
+        </p:blipFill>
+        <p:spPr>
+          <a:xfrm>
+            <a:off x="838200" y="4173351"/>
+            <a:ext cx="7004914" cy="968615"/>
+          </a:xfrm>
+          <a:prstGeom prst="rect">
+            <a:avLst/>
+          </a:prstGeom>
+        </p:spPr>
+      </p:pic>
+      <p:pic>
+        <p:nvPicPr>
+          <p:cNvPr id="12" name="Picture 11">
+            <a:extLst>
+              <a:ext uri="{FF2B5EF4-FFF2-40B4-BE49-F238E27FC236}">
+                <a16:creationId xmlns:a16="http://schemas.microsoft.com/office/drawing/2014/main" id="{77398D2B-D07D-6464-761B-15CA25AD10E5}"/>
+              </a:ext>
+            </a:extLst>
+          </p:cNvPr>
+          <p:cNvPicPr>
+            <a:picLocks noChangeAspect="1"/>
+          </p:cNvPicPr>
+          <p:nvPr/>
+        </p:nvPicPr>
+        <p:blipFill>
+          <a:blip r:embed="rId4"/>
+          <a:stretch>
+            <a:fillRect/>
+          </a:stretch>
+        </p:blipFill>
+        <p:spPr>
+          <a:xfrm>
+            <a:off x="838200" y="5509023"/>
+            <a:ext cx="7004914" cy="640007"/>
+          </a:xfrm>
+          <a:prstGeom prst="rect">
+            <a:avLst/>
+          </a:prstGeom>
+        </p:spPr>
+      </p:pic>
+      <p:pic>
+        <p:nvPicPr>
+          <p:cNvPr id="17" name="Picture 16">
+            <a:extLst>
+              <a:ext uri="{FF2B5EF4-FFF2-40B4-BE49-F238E27FC236}">
+                <a16:creationId xmlns:a16="http://schemas.microsoft.com/office/drawing/2014/main" id="{3CF13917-22EA-6EB3-C71B-A57FFC8B3A61}"/>
+              </a:ext>
+            </a:extLst>
+          </p:cNvPr>
+          <p:cNvPicPr>
+            <a:picLocks noChangeAspect="1"/>
+          </p:cNvPicPr>
+          <p:nvPr/>
+        </p:nvPicPr>
+        <p:blipFill>
+          <a:blip r:embed="rId5"/>
+          <a:stretch>
+            <a:fillRect/>
+          </a:stretch>
+        </p:blipFill>
+        <p:spPr>
+          <a:xfrm>
+            <a:off x="899746" y="5028086"/>
+            <a:ext cx="7315200" cy="285641"/>
+          </a:xfrm>
+          <a:prstGeom prst="rect">
+            <a:avLst/>
+          </a:prstGeom>
+        </p:spPr>
+      </p:pic>
+      <mc:AlternateContent xmlns:mc="http://schemas.openxmlformats.org/markup-compatibility/2006">
+        <mc:Choice xmlns:a14="http://schemas.microsoft.com/office/drawing/2010/main" Requires="a14">
+          <p:sp>
+            <p:nvSpPr>
+              <p:cNvPr id="18" name="TextBox 17">
+                <a:extLst>
+                  <a:ext uri="{FF2B5EF4-FFF2-40B4-BE49-F238E27FC236}">
+                    <a16:creationId xmlns:a16="http://schemas.microsoft.com/office/drawing/2014/main" id="{ABA0906B-35BC-A227-D811-C688A71A2AD2}"/>
+                  </a:ext>
+                </a:extLst>
+              </p:cNvPr>
+              <p:cNvSpPr txBox="1"/>
+              <p:nvPr/>
+            </p:nvSpPr>
+            <p:spPr>
+              <a:xfrm>
+                <a:off x="9367040" y="3183949"/>
+                <a:ext cx="1859574" cy="307777"/>
+              </a:xfrm>
+              <a:prstGeom prst="rect">
+                <a:avLst/>
+              </a:prstGeom>
+              <a:noFill/>
+            </p:spPr>
+            <p:txBody>
+              <a:bodyPr wrap="square" lIns="0" tIns="0" rIns="0" bIns="0" rtlCol="0">
+                <a:spAutoFit/>
+              </a:bodyPr>
+              <a:lstStyle/>
+              <a:p>
+                <a14:m>
+                  <m:oMathPara xmlns:m="http://schemas.openxmlformats.org/officeDocument/2006/math">
+                    <m:oMathParaPr>
+                      <m:jc m:val="centerGroup"/>
+                    </m:oMathParaPr>
+                    <m:oMath xmlns:m="http://schemas.openxmlformats.org/officeDocument/2006/math">
+                      <m:r>
+                        <a:rPr lang="it-IT" sz="2000" i="1" smtClean="0">
+                          <a:solidFill>
+                            <a:srgbClr val="FF0000"/>
+                          </a:solidFill>
+                          <a:latin typeface="Cambria Math" panose="02040503050406030204" pitchFamily="18" charset="0"/>
+                        </a:rPr>
+                        <m:t>=43093.6</m:t>
+                      </m:r>
+                      <m:r>
+                        <a:rPr lang="it-IT" sz="2000" b="0" i="1" smtClean="0">
+                          <a:solidFill>
+                            <a:srgbClr val="FF0000"/>
+                          </a:solidFill>
+                          <a:latin typeface="Cambria Math" panose="02040503050406030204" pitchFamily="18" charset="0"/>
+                        </a:rPr>
+                        <m:t> </m:t>
+                      </m:r>
+                      <m:r>
+                        <a:rPr lang="it-IT" sz="2000" b="0" i="1" smtClean="0">
+                          <a:solidFill>
+                            <a:srgbClr val="FF0000"/>
+                          </a:solidFill>
+                          <a:latin typeface="Cambria Math" panose="02040503050406030204" pitchFamily="18" charset="0"/>
+                        </a:rPr>
+                        <m:t>𝑁𝑚</m:t>
+                      </m:r>
+                      <m:r>
+                        <a:rPr lang="it-IT" sz="2000" b="0" i="1" smtClean="0">
+                          <a:solidFill>
+                            <a:srgbClr val="FF0000"/>
+                          </a:solidFill>
+                          <a:latin typeface="Cambria Math" panose="02040503050406030204" pitchFamily="18" charset="0"/>
+                        </a:rPr>
+                        <m:t> </m:t>
+                      </m:r>
+                    </m:oMath>
+                  </m:oMathPara>
+                </a14:m>
+                <a:endParaRPr lang="en-GB" sz="2000" dirty="0">
+                  <a:solidFill>
+                    <a:srgbClr val="FF0000"/>
+                  </a:solidFill>
+                </a:endParaRPr>
+              </a:p>
+            </p:txBody>
+          </p:sp>
+        </mc:Choice>
+        <mc:Fallback>
+          <p:sp>
+            <p:nvSpPr>
+              <p:cNvPr id="18" name="TextBox 17">
+                <a:extLst>
+                  <a:ext uri="{FF2B5EF4-FFF2-40B4-BE49-F238E27FC236}">
+                    <a16:creationId xmlns:a16="http://schemas.microsoft.com/office/drawing/2014/main" id="{ABA0906B-35BC-A227-D811-C688A71A2AD2}"/>
+                  </a:ext>
+                </a:extLst>
+              </p:cNvPr>
+              <p:cNvSpPr txBox="1">
+                <a:spLocks noRot="1" noChangeAspect="1" noMove="1" noResize="1" noEditPoints="1" noAdjustHandles="1" noChangeArrowheads="1" noChangeShapeType="1" noTextEdit="1"/>
+              </p:cNvSpPr>
+              <p:nvPr/>
+            </p:nvSpPr>
+            <p:spPr>
+              <a:xfrm>
+                <a:off x="9367040" y="3183949"/>
+                <a:ext cx="1859574" cy="307777"/>
+              </a:xfrm>
+              <a:prstGeom prst="rect">
+                <a:avLst/>
+              </a:prstGeom>
+              <a:blipFill>
+                <a:blip r:embed="rId6"/>
+                <a:stretch>
+                  <a:fillRect b="-5882"/>
+                </a:stretch>
+              </a:blipFill>
+            </p:spPr>
+            <p:txBody>
+              <a:bodyPr/>
+              <a:lstStyle/>
+              <a:p>
+                <a:r>
+                  <a:rPr lang="en-GB">
+                    <a:noFill/>
+                  </a:rPr>
+                  <a:t> </a:t>
+                </a:r>
+              </a:p>
+            </p:txBody>
+          </p:sp>
+        </mc:Fallback>
+      </mc:AlternateContent>
+      <mc:AlternateContent xmlns:mc="http://schemas.openxmlformats.org/markup-compatibility/2006">
+        <mc:Choice xmlns:a14="http://schemas.microsoft.com/office/drawing/2010/main" Requires="a14">
+          <p:sp>
+            <p:nvSpPr>
+              <p:cNvPr id="19" name="TextBox 18">
+                <a:extLst>
+                  <a:ext uri="{FF2B5EF4-FFF2-40B4-BE49-F238E27FC236}">
+                    <a16:creationId xmlns:a16="http://schemas.microsoft.com/office/drawing/2014/main" id="{68E25EA3-2050-37F0-42BE-F6DF30A0C865}"/>
+                  </a:ext>
+                </a:extLst>
+              </p:cNvPr>
+              <p:cNvSpPr txBox="1"/>
+              <p:nvPr/>
+            </p:nvSpPr>
+            <p:spPr>
+              <a:xfrm>
+                <a:off x="9358248" y="5741235"/>
+                <a:ext cx="1859574" cy="307777"/>
+              </a:xfrm>
+              <a:prstGeom prst="rect">
+                <a:avLst/>
+              </a:prstGeom>
+              <a:noFill/>
+            </p:spPr>
+            <p:txBody>
+              <a:bodyPr wrap="square" lIns="0" tIns="0" rIns="0" bIns="0" rtlCol="0">
+                <a:spAutoFit/>
+              </a:bodyPr>
+              <a:lstStyle/>
+              <a:p>
+                <a14:m>
+                  <m:oMathPara xmlns:m="http://schemas.openxmlformats.org/officeDocument/2006/math">
+                    <m:oMathParaPr>
+                      <m:jc m:val="centerGroup"/>
+                    </m:oMathParaPr>
+                    <m:oMath xmlns:m="http://schemas.openxmlformats.org/officeDocument/2006/math">
+                      <m:r>
+                        <a:rPr lang="it-IT" sz="2000" i="1" smtClean="0">
+                          <a:solidFill>
+                            <a:srgbClr val="FF0000"/>
+                          </a:solidFill>
+                          <a:latin typeface="Cambria Math" panose="02040503050406030204" pitchFamily="18" charset="0"/>
+                        </a:rPr>
+                        <m:t>=2.32318</m:t>
+                      </m:r>
+                      <m:r>
+                        <a:rPr lang="it-IT" sz="2000" b="0" i="1" smtClean="0">
+                          <a:solidFill>
+                            <a:srgbClr val="FF0000"/>
+                          </a:solidFill>
+                          <a:latin typeface="Cambria Math" panose="02040503050406030204" pitchFamily="18" charset="0"/>
+                        </a:rPr>
+                        <m:t> [−]</m:t>
+                      </m:r>
+                    </m:oMath>
+                  </m:oMathPara>
+                </a14:m>
+                <a:endParaRPr lang="en-GB" sz="2000" dirty="0">
+                  <a:solidFill>
+                    <a:srgbClr val="FF0000"/>
+                  </a:solidFill>
+                </a:endParaRPr>
+              </a:p>
+            </p:txBody>
+          </p:sp>
+        </mc:Choice>
+        <mc:Fallback>
+          <p:sp>
+            <p:nvSpPr>
+              <p:cNvPr id="19" name="TextBox 18">
+                <a:extLst>
+                  <a:ext uri="{FF2B5EF4-FFF2-40B4-BE49-F238E27FC236}">
+                    <a16:creationId xmlns:a16="http://schemas.microsoft.com/office/drawing/2014/main" id="{68E25EA3-2050-37F0-42BE-F6DF30A0C865}"/>
+                  </a:ext>
+                </a:extLst>
+              </p:cNvPr>
+              <p:cNvSpPr txBox="1">
+                <a:spLocks noRot="1" noChangeAspect="1" noMove="1" noResize="1" noEditPoints="1" noAdjustHandles="1" noChangeArrowheads="1" noChangeShapeType="1" noTextEdit="1"/>
+              </p:cNvSpPr>
+              <p:nvPr/>
+            </p:nvSpPr>
+            <p:spPr>
+              <a:xfrm>
+                <a:off x="9358248" y="5741235"/>
+                <a:ext cx="1859574" cy="307777"/>
+              </a:xfrm>
+              <a:prstGeom prst="rect">
+                <a:avLst/>
+              </a:prstGeom>
+              <a:blipFill>
+                <a:blip r:embed="rId7"/>
+                <a:stretch>
+                  <a:fillRect t="-2000" b="-36000"/>
+                </a:stretch>
+              </a:blipFill>
+            </p:spPr>
+            <p:txBody>
+              <a:bodyPr/>
+              <a:lstStyle/>
+              <a:p>
+                <a:r>
+                  <a:rPr lang="en-GB">
+                    <a:noFill/>
+                  </a:rPr>
+                  <a:t> </a:t>
+                </a:r>
+              </a:p>
+            </p:txBody>
+          </p:sp>
+        </mc:Fallback>
+      </mc:AlternateContent>
+      <p:sp>
+        <p:nvSpPr>
+          <p:cNvPr id="21" name="Footer Placeholder 4">
+            <a:extLst>
+              <a:ext uri="{FF2B5EF4-FFF2-40B4-BE49-F238E27FC236}">
+                <a16:creationId xmlns:a16="http://schemas.microsoft.com/office/drawing/2014/main" id="{C20FE2E6-E720-62A8-A4AE-0A0584520AA5}"/>
+              </a:ext>
+            </a:extLst>
+          </p:cNvPr>
+          <p:cNvSpPr>
+            <a:spLocks noGrp="1"/>
+          </p:cNvSpPr>
+          <p:nvPr>
+            <p:ph type="ftr" sz="quarter" idx="11"/>
+          </p:nvPr>
+        </p:nvSpPr>
+        <p:spPr>
+          <a:xfrm>
+            <a:off x="2781300" y="6356349"/>
+            <a:ext cx="6629400" cy="365125"/>
+          </a:xfrm>
+        </p:spPr>
+        <p:txBody>
+          <a:bodyPr/>
+          <a:lstStyle/>
+          <a:p>
+            <a:r>
+              <a:rPr lang="en-DE" dirty="0"/>
+              <a:t>Group 3:</a:t>
+            </a:r>
+            <a:r>
+              <a:rPr lang="it-IT" dirty="0"/>
+              <a:t> Federico De Mita, </a:t>
+            </a:r>
+            <a:r>
+              <a:rPr lang="it-IT" dirty="0" err="1"/>
+              <a:t>Waqas</a:t>
+            </a:r>
+            <a:r>
+              <a:rPr lang="it-IT" dirty="0"/>
+              <a:t> Ahmed, Dominic </a:t>
+            </a:r>
+            <a:r>
+              <a:rPr lang="it-IT" dirty="0" err="1"/>
+              <a:t>Annang</a:t>
+            </a:r>
+            <a:r>
+              <a:rPr lang="it-IT" dirty="0"/>
+              <a:t>, Hesham </a:t>
+            </a:r>
+            <a:r>
+              <a:rPr lang="it-IT" dirty="0" err="1"/>
+              <a:t>Magdy</a:t>
+            </a:r>
+            <a:r>
+              <a:rPr lang="it-IT" dirty="0"/>
+              <a:t>, </a:t>
+            </a:r>
+            <a:r>
+              <a:rPr lang="it-IT" dirty="0" err="1"/>
+              <a:t>Muthu</a:t>
+            </a:r>
+            <a:r>
+              <a:rPr lang="it-IT" dirty="0"/>
+              <a:t> </a:t>
+            </a:r>
+            <a:r>
+              <a:rPr lang="it-IT" dirty="0" err="1"/>
+              <a:t>Sivamuthu</a:t>
+            </a:r>
+            <a:r>
+              <a:rPr lang="it-IT" dirty="0"/>
+              <a:t> </a:t>
+            </a:r>
+            <a:r>
+              <a:rPr lang="en-DE" dirty="0"/>
+              <a:t> </a:t>
+            </a:r>
           </a:p>
         </p:txBody>
       </p:sp>
     </p:spTree>
     <p:extLst>
       <p:ext uri="{BB962C8B-B14F-4D97-AF65-F5344CB8AC3E}">
-        <p14:creationId xmlns:p14="http://schemas.microsoft.com/office/powerpoint/2010/main" val="3817345829"/>
+        <p14:creationId xmlns:p14="http://schemas.microsoft.com/office/powerpoint/2010/main" val="2438166315"/>
+      </p:ext>
+    </p:extLst>
+  </p:cSld>
+  <p:clrMapOvr>
+    <a:masterClrMapping/>
+  </p:clrMapOvr>
+</p:sld>
+</file>
+
+<file path=ppt/slides/slide4.xml><?xml version="1.0" encoding="utf-8"?>
+<p:sld xmlns:a="http://schemas.openxmlformats.org/drawingml/2006/main" xmlns:r="http://schemas.openxmlformats.org/officeDocument/2006/relationships" xmlns:p="http://schemas.openxmlformats.org/presentationml/2006/main">
+  <p:cSld>
+    <p:spTree>
+      <p:nvGrpSpPr>
+        <p:cNvPr id="1" name="">
+          <a:extLst>
+            <a:ext uri="{FF2B5EF4-FFF2-40B4-BE49-F238E27FC236}">
+              <a16:creationId xmlns:a16="http://schemas.microsoft.com/office/drawing/2014/main" id="{76FB4AEA-A562-308A-1BEB-DC8AA546E925}"/>
+            </a:ext>
+          </a:extLst>
+        </p:cNvPr>
+        <p:cNvGrpSpPr/>
+        <p:nvPr/>
+      </p:nvGrpSpPr>
+      <p:grpSpPr>
+        <a:xfrm>
+          <a:off x="0" y="0"/>
+          <a:ext cx="0" cy="0"/>
+          <a:chOff x="0" y="0"/>
+          <a:chExt cx="0" cy="0"/>
+        </a:xfrm>
+      </p:grpSpPr>
+      <p:sp>
+        <p:nvSpPr>
+          <p:cNvPr id="2" name="Title 1">
+            <a:extLst>
+              <a:ext uri="{FF2B5EF4-FFF2-40B4-BE49-F238E27FC236}">
+                <a16:creationId xmlns:a16="http://schemas.microsoft.com/office/drawing/2014/main" id="{3386EDB0-5111-66B1-9095-1254C6AF644C}"/>
+              </a:ext>
+            </a:extLst>
+          </p:cNvPr>
+          <p:cNvSpPr>
+            <a:spLocks noGrp="1"/>
+          </p:cNvSpPr>
+          <p:nvPr>
+            <p:ph type="title"/>
+          </p:nvPr>
+        </p:nvSpPr>
+        <p:spPr>
+          <a:xfrm>
+            <a:off x="838200" y="410368"/>
+            <a:ext cx="8921262" cy="1325563"/>
+          </a:xfrm>
+        </p:spPr>
+        <p:txBody>
+          <a:bodyPr>
+            <a:normAutofit/>
+          </a:bodyPr>
+          <a:lstStyle/>
+          <a:p>
+            <a:r>
+              <a:rPr lang="it-IT" sz="3800" dirty="0"/>
+              <a:t>1 – Design of a Baseline Torque Controller</a:t>
+            </a:r>
+            <a:endParaRPr lang="en-GB" sz="3800" dirty="0"/>
+          </a:p>
+        </p:txBody>
+      </p:sp>
+      <p:sp>
+        <p:nvSpPr>
+          <p:cNvPr id="4" name="Date Placeholder 3">
+            <a:extLst>
+              <a:ext uri="{FF2B5EF4-FFF2-40B4-BE49-F238E27FC236}">
+                <a16:creationId xmlns:a16="http://schemas.microsoft.com/office/drawing/2014/main" id="{D4A9D0C4-E574-1B96-702F-234A813D7B2F}"/>
+              </a:ext>
+            </a:extLst>
+          </p:cNvPr>
+          <p:cNvSpPr>
+            <a:spLocks noGrp="1"/>
+          </p:cNvSpPr>
+          <p:nvPr>
+            <p:ph type="dt" sz="half" idx="10"/>
+          </p:nvPr>
+        </p:nvSpPr>
+        <p:spPr/>
+        <p:txBody>
+          <a:bodyPr/>
+          <a:lstStyle/>
+          <a:p>
+            <a:fld id="{42FF62D6-EE07-404C-A186-889D29CA3091}" type="datetime1">
+              <a:rPr lang="LID4096" smtClean="0"/>
+              <a:t>10/11/2025</a:t>
+            </a:fld>
+            <a:endParaRPr lang="en-DE"/>
+          </a:p>
+        </p:txBody>
+      </p:sp>
+      <p:sp>
+        <p:nvSpPr>
+          <p:cNvPr id="6" name="Slide Number Placeholder 5">
+            <a:extLst>
+              <a:ext uri="{FF2B5EF4-FFF2-40B4-BE49-F238E27FC236}">
+                <a16:creationId xmlns:a16="http://schemas.microsoft.com/office/drawing/2014/main" id="{7832AD2E-E4F1-5B52-9722-FE6E4D0C6615}"/>
+              </a:ext>
+            </a:extLst>
+          </p:cNvPr>
+          <p:cNvSpPr>
+            <a:spLocks noGrp="1"/>
+          </p:cNvSpPr>
+          <p:nvPr>
+            <p:ph type="sldNum" sz="quarter" idx="12"/>
+          </p:nvPr>
+        </p:nvSpPr>
+        <p:spPr/>
+        <p:txBody>
+          <a:bodyPr/>
+          <a:lstStyle/>
+          <a:p>
+            <a:fld id="{F9C2340B-4B0F-4DED-BE4C-833C39BBA64E}" type="slidenum">
+              <a:rPr lang="en-DE" smtClean="0"/>
+              <a:t>4</a:t>
+            </a:fld>
+            <a:endParaRPr lang="en-DE"/>
+          </a:p>
+        </p:txBody>
+      </p:sp>
+      <p:sp>
+        <p:nvSpPr>
+          <p:cNvPr id="8" name="Content Placeholder 7">
+            <a:extLst>
+              <a:ext uri="{FF2B5EF4-FFF2-40B4-BE49-F238E27FC236}">
+                <a16:creationId xmlns:a16="http://schemas.microsoft.com/office/drawing/2014/main" id="{DF38F374-7DFE-05E4-BBC2-C69F7009A965}"/>
+              </a:ext>
+            </a:extLst>
+          </p:cNvPr>
+          <p:cNvSpPr>
+            <a:spLocks noGrp="1"/>
+          </p:cNvSpPr>
+          <p:nvPr>
+            <p:ph idx="1"/>
+          </p:nvPr>
+        </p:nvSpPr>
+        <p:spPr>
+          <a:xfrm>
+            <a:off x="990600" y="3961811"/>
+            <a:ext cx="10515600" cy="1714562"/>
+          </a:xfrm>
+        </p:spPr>
+        <p:txBody>
+          <a:bodyPr>
+            <a:normAutofit/>
+          </a:bodyPr>
+          <a:lstStyle/>
+          <a:p>
+            <a:pPr marL="0" indent="0">
+              <a:lnSpc>
+                <a:spcPct val="150000"/>
+              </a:lnSpc>
+              <a:buNone/>
+            </a:pPr>
+            <a:r>
+              <a:rPr lang="en-GB" sz="2000" dirty="0"/>
+              <a:t>• Parameter.VSC.a_2_5</a:t>
+            </a:r>
+          </a:p>
+          <a:p>
+            <a:pPr marL="0" indent="0">
+              <a:buNone/>
+            </a:pPr>
+            <a:r>
+              <a:rPr lang="en-GB" sz="2000" dirty="0"/>
+              <a:t>• Parameter.VSC.b_2_5</a:t>
+            </a:r>
+            <a:endParaRPr lang="en-GB" sz="2400" dirty="0"/>
+          </a:p>
+        </p:txBody>
+      </p:sp>
+      <p:pic>
+        <p:nvPicPr>
+          <p:cNvPr id="7" name="Picture 6">
+            <a:extLst>
+              <a:ext uri="{FF2B5EF4-FFF2-40B4-BE49-F238E27FC236}">
+                <a16:creationId xmlns:a16="http://schemas.microsoft.com/office/drawing/2014/main" id="{4764F11D-91DC-6075-AD89-34448D48DC0C}"/>
+              </a:ext>
+            </a:extLst>
+          </p:cNvPr>
+          <p:cNvPicPr>
+            <a:picLocks noChangeAspect="1"/>
+          </p:cNvPicPr>
+          <p:nvPr/>
+        </p:nvPicPr>
+        <p:blipFill>
+          <a:blip r:embed="rId2"/>
+          <a:stretch>
+            <a:fillRect/>
+          </a:stretch>
+        </p:blipFill>
+        <p:spPr>
+          <a:xfrm>
+            <a:off x="4038600" y="1946013"/>
+            <a:ext cx="5545015" cy="2015798"/>
+          </a:xfrm>
+          <a:prstGeom prst="rect">
+            <a:avLst/>
+          </a:prstGeom>
+        </p:spPr>
+      </p:pic>
+      <p:sp>
+        <p:nvSpPr>
+          <p:cNvPr id="9" name="Content Placeholder 7">
+            <a:extLst>
+              <a:ext uri="{FF2B5EF4-FFF2-40B4-BE49-F238E27FC236}">
+                <a16:creationId xmlns:a16="http://schemas.microsoft.com/office/drawing/2014/main" id="{70374BA6-94FD-26C1-061D-52B5E16F9C03}"/>
+              </a:ext>
+            </a:extLst>
+          </p:cNvPr>
+          <p:cNvSpPr txBox="1">
+            <a:spLocks/>
+          </p:cNvSpPr>
+          <p:nvPr/>
+        </p:nvSpPr>
+        <p:spPr>
+          <a:xfrm>
+            <a:off x="990600" y="1407255"/>
+            <a:ext cx="10515600" cy="1714562"/>
+          </a:xfrm>
+          <a:prstGeom prst="rect">
+            <a:avLst/>
+          </a:prstGeom>
+        </p:spPr>
+        <p:txBody>
+          <a:bodyPr vert="horz" lIns="91440" tIns="45720" rIns="91440" bIns="45720" rtlCol="0">
+            <a:normAutofit/>
+          </a:bodyPr>
+          <a:lstStyle>
+            <a:lvl1pPr marL="228600" indent="-228600" algn="l" defTabSz="914400" rtl="0" eaLnBrk="1" latinLnBrk="0" hangingPunct="1">
+              <a:lnSpc>
+                <a:spcPct val="90000"/>
+              </a:lnSpc>
+              <a:spcBef>
+                <a:spcPts val="1000"/>
+              </a:spcBef>
+              <a:buFont typeface="Arial" panose="020B0604020202020204" pitchFamily="34" charset="0"/>
+              <a:buChar char="•"/>
+              <a:defRPr sz="2800" kern="1200">
+                <a:solidFill>
+                  <a:schemeClr val="tx1"/>
+                </a:solidFill>
+                <a:latin typeface="+mn-lt"/>
+                <a:ea typeface="+mn-ea"/>
+                <a:cs typeface="+mn-cs"/>
+              </a:defRPr>
+            </a:lvl1pPr>
+            <a:lvl2pPr marL="685800" indent="-228600" algn="l" defTabSz="914400" rtl="0" eaLnBrk="1" latinLnBrk="0" hangingPunct="1">
+              <a:lnSpc>
+                <a:spcPct val="90000"/>
+              </a:lnSpc>
+              <a:spcBef>
+                <a:spcPts val="500"/>
+              </a:spcBef>
+              <a:buFont typeface="Arial" panose="020B0604020202020204" pitchFamily="34" charset="0"/>
+              <a:buChar char="•"/>
+              <a:defRPr sz="2400" kern="1200">
+                <a:solidFill>
+                  <a:schemeClr val="tx1"/>
+                </a:solidFill>
+                <a:latin typeface="+mn-lt"/>
+                <a:ea typeface="+mn-ea"/>
+                <a:cs typeface="+mn-cs"/>
+              </a:defRPr>
+            </a:lvl2pPr>
+            <a:lvl3pPr marL="1143000" indent="-228600" algn="l" defTabSz="914400" rtl="0" eaLnBrk="1" latinLnBrk="0" hangingPunct="1">
+              <a:lnSpc>
+                <a:spcPct val="90000"/>
+              </a:lnSpc>
+              <a:spcBef>
+                <a:spcPts val="500"/>
+              </a:spcBef>
+              <a:buFont typeface="Arial" panose="020B0604020202020204" pitchFamily="34" charset="0"/>
+              <a:buChar char="•"/>
+              <a:defRPr sz="2000" kern="1200">
+                <a:solidFill>
+                  <a:schemeClr val="tx1"/>
+                </a:solidFill>
+                <a:latin typeface="+mn-lt"/>
+                <a:ea typeface="+mn-ea"/>
+                <a:cs typeface="+mn-cs"/>
+              </a:defRPr>
+            </a:lvl3pPr>
+            <a:lvl4pPr marL="1600200" indent="-228600" algn="l" defTabSz="914400" rtl="0" eaLnBrk="1" latinLnBrk="0" hangingPunct="1">
+              <a:lnSpc>
+                <a:spcPct val="90000"/>
+              </a:lnSpc>
+              <a:spcBef>
+                <a:spcPts val="500"/>
+              </a:spcBef>
+              <a:buFont typeface="Arial" panose="020B0604020202020204" pitchFamily="34" charset="0"/>
+              <a:buChar char="•"/>
+              <a:defRPr sz="1800" kern="1200">
+                <a:solidFill>
+                  <a:schemeClr val="tx1"/>
+                </a:solidFill>
+                <a:latin typeface="+mn-lt"/>
+                <a:ea typeface="+mn-ea"/>
+                <a:cs typeface="+mn-cs"/>
+              </a:defRPr>
+            </a:lvl4pPr>
+            <a:lvl5pPr marL="2057400" indent="-228600" algn="l" defTabSz="914400" rtl="0" eaLnBrk="1" latinLnBrk="0" hangingPunct="1">
+              <a:lnSpc>
+                <a:spcPct val="90000"/>
+              </a:lnSpc>
+              <a:spcBef>
+                <a:spcPts val="500"/>
+              </a:spcBef>
+              <a:buFont typeface="Arial" panose="020B0604020202020204" pitchFamily="34" charset="0"/>
+              <a:buChar char="•"/>
+              <a:defRPr sz="1800" kern="1200">
+                <a:solidFill>
+                  <a:schemeClr val="tx1"/>
+                </a:solidFill>
+                <a:latin typeface="+mn-lt"/>
+                <a:ea typeface="+mn-ea"/>
+                <a:cs typeface="+mn-cs"/>
+              </a:defRPr>
+            </a:lvl5pPr>
+            <a:lvl6pPr marL="2514600" indent="-228600" algn="l" defTabSz="914400" rtl="0" eaLnBrk="1" latinLnBrk="0" hangingPunct="1">
+              <a:lnSpc>
+                <a:spcPct val="90000"/>
+              </a:lnSpc>
+              <a:spcBef>
+                <a:spcPts val="500"/>
+              </a:spcBef>
+              <a:buFont typeface="Arial" panose="020B0604020202020204" pitchFamily="34" charset="0"/>
+              <a:buChar char="•"/>
+              <a:defRPr sz="1800" kern="1200">
+                <a:solidFill>
+                  <a:schemeClr val="tx1"/>
+                </a:solidFill>
+                <a:latin typeface="+mn-lt"/>
+                <a:ea typeface="+mn-ea"/>
+                <a:cs typeface="+mn-cs"/>
+              </a:defRPr>
+            </a:lvl6pPr>
+            <a:lvl7pPr marL="2971800" indent="-228600" algn="l" defTabSz="914400" rtl="0" eaLnBrk="1" latinLnBrk="0" hangingPunct="1">
+              <a:lnSpc>
+                <a:spcPct val="90000"/>
+              </a:lnSpc>
+              <a:spcBef>
+                <a:spcPts val="500"/>
+              </a:spcBef>
+              <a:buFont typeface="Arial" panose="020B0604020202020204" pitchFamily="34" charset="0"/>
+              <a:buChar char="•"/>
+              <a:defRPr sz="1800" kern="1200">
+                <a:solidFill>
+                  <a:schemeClr val="tx1"/>
+                </a:solidFill>
+                <a:latin typeface="+mn-lt"/>
+                <a:ea typeface="+mn-ea"/>
+                <a:cs typeface="+mn-cs"/>
+              </a:defRPr>
+            </a:lvl7pPr>
+            <a:lvl8pPr marL="3429000" indent="-228600" algn="l" defTabSz="914400" rtl="0" eaLnBrk="1" latinLnBrk="0" hangingPunct="1">
+              <a:lnSpc>
+                <a:spcPct val="90000"/>
+              </a:lnSpc>
+              <a:spcBef>
+                <a:spcPts val="500"/>
+              </a:spcBef>
+              <a:buFont typeface="Arial" panose="020B0604020202020204" pitchFamily="34" charset="0"/>
+              <a:buChar char="•"/>
+              <a:defRPr sz="1800" kern="1200">
+                <a:solidFill>
+                  <a:schemeClr val="tx1"/>
+                </a:solidFill>
+                <a:latin typeface="+mn-lt"/>
+                <a:ea typeface="+mn-ea"/>
+                <a:cs typeface="+mn-cs"/>
+              </a:defRPr>
+            </a:lvl8pPr>
+            <a:lvl9pPr marL="3886200" indent="-228600" algn="l" defTabSz="914400" rtl="0" eaLnBrk="1" latinLnBrk="0" hangingPunct="1">
+              <a:lnSpc>
+                <a:spcPct val="90000"/>
+              </a:lnSpc>
+              <a:spcBef>
+                <a:spcPts val="500"/>
+              </a:spcBef>
+              <a:buFont typeface="Arial" panose="020B0604020202020204" pitchFamily="34" charset="0"/>
+              <a:buChar char="•"/>
+              <a:defRPr sz="1800" kern="1200">
+                <a:solidFill>
+                  <a:schemeClr val="tx1"/>
+                </a:solidFill>
+                <a:latin typeface="+mn-lt"/>
+                <a:ea typeface="+mn-ea"/>
+                <a:cs typeface="+mn-cs"/>
+              </a:defRPr>
+            </a:lvl9pPr>
+          </a:lstStyle>
+          <a:p>
+            <a:pPr marL="0" indent="0">
+              <a:buFont typeface="Arial" panose="020B0604020202020204" pitchFamily="34" charset="0"/>
+              <a:buNone/>
+            </a:pPr>
+            <a:r>
+              <a:rPr lang="it-IT" sz="2000" dirty="0"/>
+              <a:t>b) </a:t>
+            </a:r>
+            <a:r>
+              <a:rPr lang="it-IT" sz="2000" dirty="0" err="1"/>
+              <a:t>Parameter</a:t>
+            </a:r>
+            <a:r>
+              <a:rPr lang="it-IT" sz="2000" dirty="0"/>
+              <a:t> </a:t>
+            </a:r>
+            <a:r>
+              <a:rPr lang="it-IT" sz="2000" dirty="0" err="1"/>
+              <a:t>determination</a:t>
+            </a:r>
+            <a:r>
+              <a:rPr lang="it-IT" sz="2000" dirty="0"/>
+              <a:t> for baseline controller:</a:t>
+            </a:r>
+          </a:p>
+          <a:p>
+            <a:pPr marL="0" indent="0">
+              <a:lnSpc>
+                <a:spcPct val="150000"/>
+              </a:lnSpc>
+              <a:buFont typeface="Arial" panose="020B0604020202020204" pitchFamily="34" charset="0"/>
+              <a:buNone/>
+            </a:pPr>
+            <a:r>
+              <a:rPr lang="en-GB" sz="2000" dirty="0"/>
+              <a:t>• Parameter.VSC.a_1_5</a:t>
+            </a:r>
+          </a:p>
+          <a:p>
+            <a:pPr marL="0" indent="0">
+              <a:buFont typeface="Arial" panose="020B0604020202020204" pitchFamily="34" charset="0"/>
+              <a:buNone/>
+            </a:pPr>
+            <a:r>
+              <a:rPr lang="en-GB" sz="2000" dirty="0"/>
+              <a:t>• Parameter.VSC.b_1_5</a:t>
+            </a:r>
+            <a:endParaRPr lang="en-GB" sz="2400" dirty="0"/>
+          </a:p>
+        </p:txBody>
+      </p:sp>
+      <p:pic>
+        <p:nvPicPr>
+          <p:cNvPr id="15" name="Picture 14">
+            <a:extLst>
+              <a:ext uri="{FF2B5EF4-FFF2-40B4-BE49-F238E27FC236}">
+                <a16:creationId xmlns:a16="http://schemas.microsoft.com/office/drawing/2014/main" id="{1A2AB303-29DA-9132-A78B-00024902091E}"/>
+              </a:ext>
+            </a:extLst>
+          </p:cNvPr>
+          <p:cNvPicPr>
+            <a:picLocks noChangeAspect="1"/>
+          </p:cNvPicPr>
+          <p:nvPr/>
+        </p:nvPicPr>
+        <p:blipFill>
+          <a:blip r:embed="rId3"/>
+          <a:stretch>
+            <a:fillRect/>
+          </a:stretch>
+        </p:blipFill>
+        <p:spPr>
+          <a:xfrm>
+            <a:off x="4098029" y="4176346"/>
+            <a:ext cx="5661434" cy="1865565"/>
+          </a:xfrm>
+          <a:prstGeom prst="rect">
+            <a:avLst/>
+          </a:prstGeom>
+        </p:spPr>
+      </p:pic>
+      <mc:AlternateContent xmlns:mc="http://schemas.openxmlformats.org/markup-compatibility/2006">
+        <mc:Choice xmlns:a14="http://schemas.microsoft.com/office/drawing/2010/main" Requires="a14">
+          <p:sp>
+            <p:nvSpPr>
+              <p:cNvPr id="16" name="TextBox 15">
+                <a:extLst>
+                  <a:ext uri="{FF2B5EF4-FFF2-40B4-BE49-F238E27FC236}">
+                    <a16:creationId xmlns:a16="http://schemas.microsoft.com/office/drawing/2014/main" id="{CBFF1704-65B9-E46D-69F6-AFFA3E975AB4}"/>
+                  </a:ext>
+                </a:extLst>
+              </p:cNvPr>
+              <p:cNvSpPr txBox="1"/>
+              <p:nvPr/>
+            </p:nvSpPr>
+            <p:spPr>
+              <a:xfrm>
+                <a:off x="8304335" y="3370373"/>
+                <a:ext cx="1024318" cy="276999"/>
+              </a:xfrm>
+              <a:prstGeom prst="rect">
+                <a:avLst/>
+              </a:prstGeom>
+              <a:noFill/>
+            </p:spPr>
+            <p:txBody>
+              <a:bodyPr wrap="none" lIns="0" tIns="0" rIns="0" bIns="0" rtlCol="0">
+                <a:spAutoFit/>
+              </a:bodyPr>
+              <a:lstStyle/>
+              <a:p>
+                <a14:m>
+                  <m:oMathPara xmlns:m="http://schemas.openxmlformats.org/officeDocument/2006/math">
+                    <m:oMathParaPr>
+                      <m:jc m:val="centerGroup"/>
+                    </m:oMathParaPr>
+                    <m:oMath xmlns:m="http://schemas.openxmlformats.org/officeDocument/2006/math">
+                      <m:r>
+                        <a:rPr lang="it-IT" b="0" i="1" smtClean="0">
+                          <a:solidFill>
+                            <a:srgbClr val="FF0000"/>
+                          </a:solidFill>
+                          <a:latin typeface="Cambria Math" panose="02040503050406030204" pitchFamily="18" charset="0"/>
+                        </a:rPr>
+                        <m:t>= </m:t>
+                      </m:r>
+                      <m:r>
+                        <a:rPr lang="en-GB" i="1">
+                          <a:solidFill>
+                            <a:srgbClr val="FF0000"/>
+                          </a:solidFill>
+                          <a:latin typeface="Cambria Math" panose="02040503050406030204" pitchFamily="18" charset="0"/>
+                        </a:rPr>
+                        <m:t>918.23</m:t>
+                      </m:r>
+                    </m:oMath>
+                  </m:oMathPara>
+                </a14:m>
+                <a:endParaRPr lang="en-GB" dirty="0">
+                  <a:solidFill>
+                    <a:srgbClr val="FF0000"/>
+                  </a:solidFill>
+                </a:endParaRPr>
+              </a:p>
+            </p:txBody>
+          </p:sp>
+        </mc:Choice>
+        <mc:Fallback>
+          <p:sp>
+            <p:nvSpPr>
+              <p:cNvPr id="16" name="TextBox 15">
+                <a:extLst>
+                  <a:ext uri="{FF2B5EF4-FFF2-40B4-BE49-F238E27FC236}">
+                    <a16:creationId xmlns:a16="http://schemas.microsoft.com/office/drawing/2014/main" id="{CBFF1704-65B9-E46D-69F6-AFFA3E975AB4}"/>
+                  </a:ext>
+                </a:extLst>
+              </p:cNvPr>
+              <p:cNvSpPr txBox="1">
+                <a:spLocks noRot="1" noChangeAspect="1" noMove="1" noResize="1" noEditPoints="1" noAdjustHandles="1" noChangeArrowheads="1" noChangeShapeType="1" noTextEdit="1"/>
+              </p:cNvSpPr>
+              <p:nvPr/>
+            </p:nvSpPr>
+            <p:spPr>
+              <a:xfrm>
+                <a:off x="8304335" y="3370373"/>
+                <a:ext cx="1024318" cy="276999"/>
+              </a:xfrm>
+              <a:prstGeom prst="rect">
+                <a:avLst/>
+              </a:prstGeom>
+              <a:blipFill>
+                <a:blip r:embed="rId4"/>
+                <a:stretch>
+                  <a:fillRect l="-1786" r="-5952" b="-6667"/>
+                </a:stretch>
+              </a:blipFill>
+            </p:spPr>
+            <p:txBody>
+              <a:bodyPr/>
+              <a:lstStyle/>
+              <a:p>
+                <a:r>
+                  <a:rPr lang="en-GB">
+                    <a:noFill/>
+                  </a:rPr>
+                  <a:t> </a:t>
+                </a:r>
+              </a:p>
+            </p:txBody>
+          </p:sp>
+        </mc:Fallback>
+      </mc:AlternateContent>
+      <mc:AlternateContent xmlns:mc="http://schemas.openxmlformats.org/markup-compatibility/2006">
+        <mc:Choice xmlns:a14="http://schemas.microsoft.com/office/drawing/2010/main" Requires="a14">
+          <p:sp>
+            <p:nvSpPr>
+              <p:cNvPr id="17" name="TextBox 16">
+                <a:extLst>
+                  <a:ext uri="{FF2B5EF4-FFF2-40B4-BE49-F238E27FC236}">
+                    <a16:creationId xmlns:a16="http://schemas.microsoft.com/office/drawing/2014/main" id="{0E18D537-46F0-D086-C47E-81C4C5E3B392}"/>
+                  </a:ext>
+                </a:extLst>
+              </p:cNvPr>
+              <p:cNvSpPr txBox="1"/>
+              <p:nvPr/>
+            </p:nvSpPr>
+            <p:spPr>
+              <a:xfrm>
+                <a:off x="8307270" y="3637073"/>
+                <a:ext cx="1178208" cy="276999"/>
+              </a:xfrm>
+              <a:prstGeom prst="rect">
+                <a:avLst/>
+              </a:prstGeom>
+              <a:noFill/>
+            </p:spPr>
+            <p:txBody>
+              <a:bodyPr wrap="none" lIns="0" tIns="0" rIns="0" bIns="0" rtlCol="0">
+                <a:spAutoFit/>
+              </a:bodyPr>
+              <a:lstStyle/>
+              <a:p>
+                <a14:m>
+                  <m:oMathPara xmlns:m="http://schemas.openxmlformats.org/officeDocument/2006/math">
+                    <m:oMathParaPr>
+                      <m:jc m:val="centerGroup"/>
+                    </m:oMathParaPr>
+                    <m:oMath xmlns:m="http://schemas.openxmlformats.org/officeDocument/2006/math">
+                      <m:r>
+                        <a:rPr lang="it-IT" i="1">
+                          <a:solidFill>
+                            <a:srgbClr val="FF0000"/>
+                          </a:solidFill>
+                          <a:latin typeface="Cambria Math" panose="02040503050406030204" pitchFamily="18" charset="0"/>
+                        </a:rPr>
+                        <m:t>=-64425.1</m:t>
+                      </m:r>
+                    </m:oMath>
+                  </m:oMathPara>
+                </a14:m>
+                <a:endParaRPr lang="en-GB" dirty="0">
+                  <a:solidFill>
+                    <a:srgbClr val="FF0000"/>
+                  </a:solidFill>
+                </a:endParaRPr>
+              </a:p>
+            </p:txBody>
+          </p:sp>
+        </mc:Choice>
+        <mc:Fallback>
+          <p:sp>
+            <p:nvSpPr>
+              <p:cNvPr id="17" name="TextBox 16">
+                <a:extLst>
+                  <a:ext uri="{FF2B5EF4-FFF2-40B4-BE49-F238E27FC236}">
+                    <a16:creationId xmlns:a16="http://schemas.microsoft.com/office/drawing/2014/main" id="{0E18D537-46F0-D086-C47E-81C4C5E3B392}"/>
+                  </a:ext>
+                </a:extLst>
+              </p:cNvPr>
+              <p:cNvSpPr txBox="1">
+                <a:spLocks noRot="1" noChangeAspect="1" noMove="1" noResize="1" noEditPoints="1" noAdjustHandles="1" noChangeArrowheads="1" noChangeShapeType="1" noTextEdit="1"/>
+              </p:cNvSpPr>
+              <p:nvPr/>
+            </p:nvSpPr>
+            <p:spPr>
+              <a:xfrm>
+                <a:off x="8307270" y="3637073"/>
+                <a:ext cx="1178208" cy="276999"/>
+              </a:xfrm>
+              <a:prstGeom prst="rect">
+                <a:avLst/>
+              </a:prstGeom>
+              <a:blipFill>
+                <a:blip r:embed="rId5"/>
+                <a:stretch>
+                  <a:fillRect l="-2073" r="-5181" b="-8889"/>
+                </a:stretch>
+              </a:blipFill>
+            </p:spPr>
+            <p:txBody>
+              <a:bodyPr/>
+              <a:lstStyle/>
+              <a:p>
+                <a:r>
+                  <a:rPr lang="en-GB">
+                    <a:noFill/>
+                  </a:rPr>
+                  <a:t> </a:t>
+                </a:r>
+              </a:p>
+            </p:txBody>
+          </p:sp>
+        </mc:Fallback>
+      </mc:AlternateContent>
+      <mc:AlternateContent xmlns:mc="http://schemas.openxmlformats.org/markup-compatibility/2006">
+        <mc:Choice xmlns:a14="http://schemas.microsoft.com/office/drawing/2010/main" Requires="a14">
+          <p:sp>
+            <p:nvSpPr>
+              <p:cNvPr id="18" name="TextBox 17">
+                <a:extLst>
+                  <a:ext uri="{FF2B5EF4-FFF2-40B4-BE49-F238E27FC236}">
+                    <a16:creationId xmlns:a16="http://schemas.microsoft.com/office/drawing/2014/main" id="{550A76FB-8BE3-29AD-3295-6A27A193037E}"/>
+                  </a:ext>
+                </a:extLst>
+              </p:cNvPr>
+              <p:cNvSpPr txBox="1"/>
+              <p:nvPr/>
+            </p:nvSpPr>
+            <p:spPr>
+              <a:xfrm>
+                <a:off x="8301400" y="5383582"/>
+                <a:ext cx="1101264" cy="276999"/>
+              </a:xfrm>
+              <a:prstGeom prst="rect">
+                <a:avLst/>
+              </a:prstGeom>
+              <a:noFill/>
+            </p:spPr>
+            <p:txBody>
+              <a:bodyPr wrap="none" lIns="0" tIns="0" rIns="0" bIns="0" rtlCol="0">
+                <a:spAutoFit/>
+              </a:bodyPr>
+              <a:lstStyle/>
+              <a:p>
+                <a14:m>
+                  <m:oMathPara xmlns:m="http://schemas.openxmlformats.org/officeDocument/2006/math">
+                    <m:oMathParaPr>
+                      <m:jc m:val="centerGroup"/>
+                    </m:oMathParaPr>
+                    <m:oMath xmlns:m="http://schemas.openxmlformats.org/officeDocument/2006/math">
+                      <m:r>
+                        <a:rPr lang="it-IT" i="1">
+                          <a:solidFill>
+                            <a:srgbClr val="FF0000"/>
+                          </a:solidFill>
+                          <a:latin typeface="Cambria Math" panose="02040503050406030204" pitchFamily="18" charset="0"/>
+                        </a:rPr>
+                        <m:t>=3915.26</m:t>
+                      </m:r>
+                    </m:oMath>
+                  </m:oMathPara>
+                </a14:m>
+                <a:endParaRPr lang="en-GB" dirty="0">
+                  <a:solidFill>
+                    <a:srgbClr val="FF0000"/>
+                  </a:solidFill>
+                </a:endParaRPr>
+              </a:p>
+            </p:txBody>
+          </p:sp>
+        </mc:Choice>
+        <mc:Fallback>
+          <p:sp>
+            <p:nvSpPr>
+              <p:cNvPr id="18" name="TextBox 17">
+                <a:extLst>
+                  <a:ext uri="{FF2B5EF4-FFF2-40B4-BE49-F238E27FC236}">
+                    <a16:creationId xmlns:a16="http://schemas.microsoft.com/office/drawing/2014/main" id="{550A76FB-8BE3-29AD-3295-6A27A193037E}"/>
+                  </a:ext>
+                </a:extLst>
+              </p:cNvPr>
+              <p:cNvSpPr txBox="1">
+                <a:spLocks noRot="1" noChangeAspect="1" noMove="1" noResize="1" noEditPoints="1" noAdjustHandles="1" noChangeArrowheads="1" noChangeShapeType="1" noTextEdit="1"/>
+              </p:cNvSpPr>
+              <p:nvPr/>
+            </p:nvSpPr>
+            <p:spPr>
+              <a:xfrm>
+                <a:off x="8301400" y="5383582"/>
+                <a:ext cx="1101264" cy="276999"/>
+              </a:xfrm>
+              <a:prstGeom prst="rect">
+                <a:avLst/>
+              </a:prstGeom>
+              <a:blipFill>
+                <a:blip r:embed="rId6"/>
+                <a:stretch>
+                  <a:fillRect l="-2222" r="-5556" b="-6522"/>
+                </a:stretch>
+              </a:blipFill>
+            </p:spPr>
+            <p:txBody>
+              <a:bodyPr/>
+              <a:lstStyle/>
+              <a:p>
+                <a:r>
+                  <a:rPr lang="en-GB">
+                    <a:noFill/>
+                  </a:rPr>
+                  <a:t> </a:t>
+                </a:r>
+              </a:p>
+            </p:txBody>
+          </p:sp>
+        </mc:Fallback>
+      </mc:AlternateContent>
+      <mc:AlternateContent xmlns:mc="http://schemas.openxmlformats.org/markup-compatibility/2006">
+        <mc:Choice xmlns:a14="http://schemas.microsoft.com/office/drawing/2010/main" Requires="a14">
+          <p:sp>
+            <p:nvSpPr>
+              <p:cNvPr id="19" name="TextBox 18">
+                <a:extLst>
+                  <a:ext uri="{FF2B5EF4-FFF2-40B4-BE49-F238E27FC236}">
+                    <a16:creationId xmlns:a16="http://schemas.microsoft.com/office/drawing/2014/main" id="{825E095B-538B-C021-B036-5F246B5DF091}"/>
+                  </a:ext>
+                </a:extLst>
+              </p:cNvPr>
+              <p:cNvSpPr txBox="1"/>
+              <p:nvPr/>
+            </p:nvSpPr>
+            <p:spPr>
+              <a:xfrm>
+                <a:off x="8304335" y="5650282"/>
+                <a:ext cx="1134926" cy="276999"/>
+              </a:xfrm>
+              <a:prstGeom prst="rect">
+                <a:avLst/>
+              </a:prstGeom>
+              <a:noFill/>
+            </p:spPr>
+            <p:txBody>
+              <a:bodyPr wrap="none" lIns="0" tIns="0" rIns="0" bIns="0" rtlCol="0">
+                <a:spAutoFit/>
+              </a:bodyPr>
+              <a:lstStyle/>
+              <a:p>
+                <a14:m>
+                  <m:oMathPara xmlns:m="http://schemas.openxmlformats.org/officeDocument/2006/math">
+                    <m:oMathParaPr>
+                      <m:jc m:val="centerGroup"/>
+                    </m:oMathParaPr>
+                    <m:oMath xmlns:m="http://schemas.openxmlformats.org/officeDocument/2006/math">
+                      <m:r>
+                        <a:rPr lang="it-IT" i="1">
+                          <a:solidFill>
+                            <a:srgbClr val="FF0000"/>
+                          </a:solidFill>
+                          <a:latin typeface="Cambria Math" panose="02040503050406030204" pitchFamily="18" charset="0"/>
+                        </a:rPr>
+                        <m:t>=</m:t>
+                      </m:r>
+                      <m:r>
+                        <m:rPr>
+                          <m:nor/>
+                        </m:rPr>
+                        <a:rPr lang="en-GB" dirty="0">
+                          <a:solidFill>
+                            <a:srgbClr val="FF0000"/>
+                          </a:solidFill>
+                          <a:latin typeface="Cambria" panose="02040503050406030204" pitchFamily="18" charset="0"/>
+                          <a:ea typeface="Cambria" panose="02040503050406030204" pitchFamily="18" charset="0"/>
+                        </a:rPr>
+                        <m:t>-438130</m:t>
+                      </m:r>
+                    </m:oMath>
+                  </m:oMathPara>
+                </a14:m>
+                <a:endParaRPr lang="en-GB" dirty="0">
+                  <a:solidFill>
+                    <a:srgbClr val="FF0000"/>
+                  </a:solidFill>
+                  <a:latin typeface="Cambria" panose="02040503050406030204" pitchFamily="18" charset="0"/>
+                  <a:ea typeface="Cambria" panose="02040503050406030204" pitchFamily="18" charset="0"/>
+                </a:endParaRPr>
+              </a:p>
+            </p:txBody>
+          </p:sp>
+        </mc:Choice>
+        <mc:Fallback>
+          <p:sp>
+            <p:nvSpPr>
+              <p:cNvPr id="19" name="TextBox 18">
+                <a:extLst>
+                  <a:ext uri="{FF2B5EF4-FFF2-40B4-BE49-F238E27FC236}">
+                    <a16:creationId xmlns:a16="http://schemas.microsoft.com/office/drawing/2014/main" id="{825E095B-538B-C021-B036-5F246B5DF091}"/>
+                  </a:ext>
+                </a:extLst>
+              </p:cNvPr>
+              <p:cNvSpPr txBox="1">
+                <a:spLocks noRot="1" noChangeAspect="1" noMove="1" noResize="1" noEditPoints="1" noAdjustHandles="1" noChangeArrowheads="1" noChangeShapeType="1" noTextEdit="1"/>
+              </p:cNvSpPr>
+              <p:nvPr/>
+            </p:nvSpPr>
+            <p:spPr>
+              <a:xfrm>
+                <a:off x="8304335" y="5650282"/>
+                <a:ext cx="1134926" cy="276999"/>
+              </a:xfrm>
+              <a:prstGeom prst="rect">
+                <a:avLst/>
+              </a:prstGeom>
+              <a:blipFill>
+                <a:blip r:embed="rId7"/>
+                <a:stretch>
+                  <a:fillRect l="-1613" r="-5376" b="-8889"/>
+                </a:stretch>
+              </a:blipFill>
+            </p:spPr>
+            <p:txBody>
+              <a:bodyPr/>
+              <a:lstStyle/>
+              <a:p>
+                <a:r>
+                  <a:rPr lang="en-GB">
+                    <a:noFill/>
+                  </a:rPr>
+                  <a:t> </a:t>
+                </a:r>
+              </a:p>
+            </p:txBody>
+          </p:sp>
+        </mc:Fallback>
+      </mc:AlternateContent>
+      <p:sp>
+        <p:nvSpPr>
+          <p:cNvPr id="20" name="Footer Placeholder 4">
+            <a:extLst>
+              <a:ext uri="{FF2B5EF4-FFF2-40B4-BE49-F238E27FC236}">
+                <a16:creationId xmlns:a16="http://schemas.microsoft.com/office/drawing/2014/main" id="{CB2BB8E8-4C0E-16F1-AFAA-9BB21E1AF6A0}"/>
+              </a:ext>
+            </a:extLst>
+          </p:cNvPr>
+          <p:cNvSpPr>
+            <a:spLocks noGrp="1"/>
+          </p:cNvSpPr>
+          <p:nvPr>
+            <p:ph type="ftr" sz="quarter" idx="11"/>
+          </p:nvPr>
+        </p:nvSpPr>
+        <p:spPr>
+          <a:xfrm>
+            <a:off x="2781300" y="6356349"/>
+            <a:ext cx="6629400" cy="365125"/>
+          </a:xfrm>
+        </p:spPr>
+        <p:txBody>
+          <a:bodyPr/>
+          <a:lstStyle/>
+          <a:p>
+            <a:r>
+              <a:rPr lang="en-DE" dirty="0"/>
+              <a:t>Group 3:</a:t>
+            </a:r>
+            <a:r>
+              <a:rPr lang="it-IT" dirty="0"/>
+              <a:t> Federico De Mita, </a:t>
+            </a:r>
+            <a:r>
+              <a:rPr lang="it-IT" dirty="0" err="1"/>
+              <a:t>Waqas</a:t>
+            </a:r>
+            <a:r>
+              <a:rPr lang="it-IT" dirty="0"/>
+              <a:t> Ahmed, Dominic </a:t>
+            </a:r>
+            <a:r>
+              <a:rPr lang="it-IT" dirty="0" err="1"/>
+              <a:t>Annang</a:t>
+            </a:r>
+            <a:r>
+              <a:rPr lang="it-IT" dirty="0"/>
+              <a:t>, Hesham </a:t>
+            </a:r>
+            <a:r>
+              <a:rPr lang="it-IT" dirty="0" err="1"/>
+              <a:t>Magdy</a:t>
+            </a:r>
+            <a:r>
+              <a:rPr lang="it-IT" dirty="0"/>
+              <a:t>, </a:t>
+            </a:r>
+            <a:r>
+              <a:rPr lang="it-IT" dirty="0" err="1"/>
+              <a:t>Muthu</a:t>
+            </a:r>
+            <a:r>
+              <a:rPr lang="it-IT" dirty="0"/>
+              <a:t> </a:t>
+            </a:r>
+            <a:r>
+              <a:rPr lang="it-IT" dirty="0" err="1"/>
+              <a:t>Sivamuthu</a:t>
+            </a:r>
+            <a:r>
+              <a:rPr lang="it-IT" dirty="0"/>
+              <a:t> </a:t>
+            </a:r>
+            <a:r>
+              <a:rPr lang="en-DE" dirty="0"/>
+              <a:t> </a:t>
+            </a:r>
+          </a:p>
+        </p:txBody>
+      </p:sp>
+    </p:spTree>
+    <p:extLst>
+      <p:ext uri="{BB962C8B-B14F-4D97-AF65-F5344CB8AC3E}">
+        <p14:creationId xmlns:p14="http://schemas.microsoft.com/office/powerpoint/2010/main" val="2645377945"/>
+      </p:ext>
+    </p:extLst>
+  </p:cSld>
+  <p:clrMapOvr>
+    <a:masterClrMapping/>
+  </p:clrMapOvr>
+</p:sld>
+</file>
+
+<file path=ppt/slides/slide5.xml><?xml version="1.0" encoding="utf-8"?>
+<p:sld xmlns:a="http://schemas.openxmlformats.org/drawingml/2006/main" xmlns:r="http://schemas.openxmlformats.org/officeDocument/2006/relationships" xmlns:p="http://schemas.openxmlformats.org/presentationml/2006/main">
+  <p:cSld>
+    <p:spTree>
+      <p:nvGrpSpPr>
+        <p:cNvPr id="1" name="">
+          <a:extLst>
+            <a:ext uri="{FF2B5EF4-FFF2-40B4-BE49-F238E27FC236}">
+              <a16:creationId xmlns:a16="http://schemas.microsoft.com/office/drawing/2014/main" id="{AFF34569-F5A3-29B2-22F7-6FC5939F5755}"/>
+            </a:ext>
+          </a:extLst>
+        </p:cNvPr>
+        <p:cNvGrpSpPr/>
+        <p:nvPr/>
+      </p:nvGrpSpPr>
+      <p:grpSpPr>
+        <a:xfrm>
+          <a:off x="0" y="0"/>
+          <a:ext cx="0" cy="0"/>
+          <a:chOff x="0" y="0"/>
+          <a:chExt cx="0" cy="0"/>
+        </a:xfrm>
+      </p:grpSpPr>
+      <p:sp>
+        <p:nvSpPr>
+          <p:cNvPr id="2" name="Title 1">
+            <a:extLst>
+              <a:ext uri="{FF2B5EF4-FFF2-40B4-BE49-F238E27FC236}">
+                <a16:creationId xmlns:a16="http://schemas.microsoft.com/office/drawing/2014/main" id="{64BC359D-5956-C5D2-478A-F0E2388E0319}"/>
+              </a:ext>
+            </a:extLst>
+          </p:cNvPr>
+          <p:cNvSpPr>
+            <a:spLocks noGrp="1"/>
+          </p:cNvSpPr>
+          <p:nvPr>
+            <p:ph type="title"/>
+          </p:nvPr>
+        </p:nvSpPr>
+        <p:spPr>
+          <a:xfrm>
+            <a:off x="838200" y="410368"/>
+            <a:ext cx="8921262" cy="1325563"/>
+          </a:xfrm>
+        </p:spPr>
+        <p:txBody>
+          <a:bodyPr>
+            <a:normAutofit/>
+          </a:bodyPr>
+          <a:lstStyle/>
+          <a:p>
+            <a:r>
+              <a:rPr lang="it-IT" sz="3800" dirty="0"/>
+              <a:t>1 – Design of a Baseline Torque Controller</a:t>
+            </a:r>
+            <a:endParaRPr lang="en-GB" sz="3800" dirty="0"/>
+          </a:p>
+        </p:txBody>
+      </p:sp>
+      <p:sp>
+        <p:nvSpPr>
+          <p:cNvPr id="4" name="Date Placeholder 3">
+            <a:extLst>
+              <a:ext uri="{FF2B5EF4-FFF2-40B4-BE49-F238E27FC236}">
+                <a16:creationId xmlns:a16="http://schemas.microsoft.com/office/drawing/2014/main" id="{976BD795-43C7-448F-2853-A3C156ADC5A2}"/>
+              </a:ext>
+            </a:extLst>
+          </p:cNvPr>
+          <p:cNvSpPr>
+            <a:spLocks noGrp="1"/>
+          </p:cNvSpPr>
+          <p:nvPr>
+            <p:ph type="dt" sz="half" idx="10"/>
+          </p:nvPr>
+        </p:nvSpPr>
+        <p:spPr/>
+        <p:txBody>
+          <a:bodyPr/>
+          <a:lstStyle/>
+          <a:p>
+            <a:fld id="{42FF62D6-EE07-404C-A186-889D29CA3091}" type="datetime1">
+              <a:rPr lang="LID4096" smtClean="0"/>
+              <a:t>10/11/2025</a:t>
+            </a:fld>
+            <a:endParaRPr lang="en-DE"/>
+          </a:p>
+        </p:txBody>
+      </p:sp>
+      <p:sp>
+        <p:nvSpPr>
+          <p:cNvPr id="6" name="Slide Number Placeholder 5">
+            <a:extLst>
+              <a:ext uri="{FF2B5EF4-FFF2-40B4-BE49-F238E27FC236}">
+                <a16:creationId xmlns:a16="http://schemas.microsoft.com/office/drawing/2014/main" id="{FB820FB7-64DA-6954-AB2B-E926E76787E9}"/>
+              </a:ext>
+            </a:extLst>
+          </p:cNvPr>
+          <p:cNvSpPr>
+            <a:spLocks noGrp="1"/>
+          </p:cNvSpPr>
+          <p:nvPr>
+            <p:ph type="sldNum" sz="quarter" idx="12"/>
+          </p:nvPr>
+        </p:nvSpPr>
+        <p:spPr/>
+        <p:txBody>
+          <a:bodyPr/>
+          <a:lstStyle/>
+          <a:p>
+            <a:fld id="{F9C2340B-4B0F-4DED-BE4C-833C39BBA64E}" type="slidenum">
+              <a:rPr lang="en-DE" smtClean="0"/>
+              <a:t>5</a:t>
+            </a:fld>
+            <a:endParaRPr lang="en-DE"/>
+          </a:p>
+        </p:txBody>
+      </p:sp>
+      <mc:AlternateContent xmlns:mc="http://schemas.openxmlformats.org/markup-compatibility/2006">
+        <mc:Choice xmlns:a14="http://schemas.microsoft.com/office/drawing/2010/main" Requires="a14">
+          <p:sp>
+            <p:nvSpPr>
+              <p:cNvPr id="9" name="Content Placeholder 7">
+                <a:extLst>
+                  <a:ext uri="{FF2B5EF4-FFF2-40B4-BE49-F238E27FC236}">
+                    <a16:creationId xmlns:a16="http://schemas.microsoft.com/office/drawing/2014/main" id="{80CE663F-93A9-CE0D-D036-5C554E139DE5}"/>
+                  </a:ext>
+                </a:extLst>
+              </p:cNvPr>
+              <p:cNvSpPr txBox="1">
+                <a:spLocks/>
+              </p:cNvSpPr>
+              <p:nvPr/>
+            </p:nvSpPr>
+            <p:spPr>
+              <a:xfrm>
+                <a:off x="838200" y="1584692"/>
+                <a:ext cx="10515600" cy="764445"/>
+              </a:xfrm>
+              <a:prstGeom prst="rect">
+                <a:avLst/>
+              </a:prstGeom>
+            </p:spPr>
+            <p:txBody>
+              <a:bodyPr vert="horz" lIns="91440" tIns="45720" rIns="91440" bIns="45720" rtlCol="0">
+                <a:normAutofit/>
+              </a:bodyPr>
+              <a:lstStyle>
+                <a:lvl1pPr marL="228600" indent="-228600" algn="l" defTabSz="914400" rtl="0" eaLnBrk="1" latinLnBrk="0" hangingPunct="1">
+                  <a:lnSpc>
+                    <a:spcPct val="90000"/>
+                  </a:lnSpc>
+                  <a:spcBef>
+                    <a:spcPts val="1000"/>
+                  </a:spcBef>
+                  <a:buFont typeface="Arial" panose="020B0604020202020204" pitchFamily="34" charset="0"/>
+                  <a:buChar char="•"/>
+                  <a:defRPr sz="2800" kern="1200">
+                    <a:solidFill>
+                      <a:schemeClr val="tx1"/>
+                    </a:solidFill>
+                    <a:latin typeface="+mn-lt"/>
+                    <a:ea typeface="+mn-ea"/>
+                    <a:cs typeface="+mn-cs"/>
+                  </a:defRPr>
+                </a:lvl1pPr>
+                <a:lvl2pPr marL="685800" indent="-228600" algn="l" defTabSz="914400" rtl="0" eaLnBrk="1" latinLnBrk="0" hangingPunct="1">
+                  <a:lnSpc>
+                    <a:spcPct val="90000"/>
+                  </a:lnSpc>
+                  <a:spcBef>
+                    <a:spcPts val="500"/>
+                  </a:spcBef>
+                  <a:buFont typeface="Arial" panose="020B0604020202020204" pitchFamily="34" charset="0"/>
+                  <a:buChar char="•"/>
+                  <a:defRPr sz="2400" kern="1200">
+                    <a:solidFill>
+                      <a:schemeClr val="tx1"/>
+                    </a:solidFill>
+                    <a:latin typeface="+mn-lt"/>
+                    <a:ea typeface="+mn-ea"/>
+                    <a:cs typeface="+mn-cs"/>
+                  </a:defRPr>
+                </a:lvl2pPr>
+                <a:lvl3pPr marL="1143000" indent="-228600" algn="l" defTabSz="914400" rtl="0" eaLnBrk="1" latinLnBrk="0" hangingPunct="1">
+                  <a:lnSpc>
+                    <a:spcPct val="90000"/>
+                  </a:lnSpc>
+                  <a:spcBef>
+                    <a:spcPts val="500"/>
+                  </a:spcBef>
+                  <a:buFont typeface="Arial" panose="020B0604020202020204" pitchFamily="34" charset="0"/>
+                  <a:buChar char="•"/>
+                  <a:defRPr sz="2000" kern="1200">
+                    <a:solidFill>
+                      <a:schemeClr val="tx1"/>
+                    </a:solidFill>
+                    <a:latin typeface="+mn-lt"/>
+                    <a:ea typeface="+mn-ea"/>
+                    <a:cs typeface="+mn-cs"/>
+                  </a:defRPr>
+                </a:lvl3pPr>
+                <a:lvl4pPr marL="1600200" indent="-228600" algn="l" defTabSz="914400" rtl="0" eaLnBrk="1" latinLnBrk="0" hangingPunct="1">
+                  <a:lnSpc>
+                    <a:spcPct val="90000"/>
+                  </a:lnSpc>
+                  <a:spcBef>
+                    <a:spcPts val="500"/>
+                  </a:spcBef>
+                  <a:buFont typeface="Arial" panose="020B0604020202020204" pitchFamily="34" charset="0"/>
+                  <a:buChar char="•"/>
+                  <a:defRPr sz="1800" kern="1200">
+                    <a:solidFill>
+                      <a:schemeClr val="tx1"/>
+                    </a:solidFill>
+                    <a:latin typeface="+mn-lt"/>
+                    <a:ea typeface="+mn-ea"/>
+                    <a:cs typeface="+mn-cs"/>
+                  </a:defRPr>
+                </a:lvl4pPr>
+                <a:lvl5pPr marL="2057400" indent="-228600" algn="l" defTabSz="914400" rtl="0" eaLnBrk="1" latinLnBrk="0" hangingPunct="1">
+                  <a:lnSpc>
+                    <a:spcPct val="90000"/>
+                  </a:lnSpc>
+                  <a:spcBef>
+                    <a:spcPts val="500"/>
+                  </a:spcBef>
+                  <a:buFont typeface="Arial" panose="020B0604020202020204" pitchFamily="34" charset="0"/>
+                  <a:buChar char="•"/>
+                  <a:defRPr sz="1800" kern="1200">
+                    <a:solidFill>
+                      <a:schemeClr val="tx1"/>
+                    </a:solidFill>
+                    <a:latin typeface="+mn-lt"/>
+                    <a:ea typeface="+mn-ea"/>
+                    <a:cs typeface="+mn-cs"/>
+                  </a:defRPr>
+                </a:lvl5pPr>
+                <a:lvl6pPr marL="2514600" indent="-228600" algn="l" defTabSz="914400" rtl="0" eaLnBrk="1" latinLnBrk="0" hangingPunct="1">
+                  <a:lnSpc>
+                    <a:spcPct val="90000"/>
+                  </a:lnSpc>
+                  <a:spcBef>
+                    <a:spcPts val="500"/>
+                  </a:spcBef>
+                  <a:buFont typeface="Arial" panose="020B0604020202020204" pitchFamily="34" charset="0"/>
+                  <a:buChar char="•"/>
+                  <a:defRPr sz="1800" kern="1200">
+                    <a:solidFill>
+                      <a:schemeClr val="tx1"/>
+                    </a:solidFill>
+                    <a:latin typeface="+mn-lt"/>
+                    <a:ea typeface="+mn-ea"/>
+                    <a:cs typeface="+mn-cs"/>
+                  </a:defRPr>
+                </a:lvl6pPr>
+                <a:lvl7pPr marL="2971800" indent="-228600" algn="l" defTabSz="914400" rtl="0" eaLnBrk="1" latinLnBrk="0" hangingPunct="1">
+                  <a:lnSpc>
+                    <a:spcPct val="90000"/>
+                  </a:lnSpc>
+                  <a:spcBef>
+                    <a:spcPts val="500"/>
+                  </a:spcBef>
+                  <a:buFont typeface="Arial" panose="020B0604020202020204" pitchFamily="34" charset="0"/>
+                  <a:buChar char="•"/>
+                  <a:defRPr sz="1800" kern="1200">
+                    <a:solidFill>
+                      <a:schemeClr val="tx1"/>
+                    </a:solidFill>
+                    <a:latin typeface="+mn-lt"/>
+                    <a:ea typeface="+mn-ea"/>
+                    <a:cs typeface="+mn-cs"/>
+                  </a:defRPr>
+                </a:lvl7pPr>
+                <a:lvl8pPr marL="3429000" indent="-228600" algn="l" defTabSz="914400" rtl="0" eaLnBrk="1" latinLnBrk="0" hangingPunct="1">
+                  <a:lnSpc>
+                    <a:spcPct val="90000"/>
+                  </a:lnSpc>
+                  <a:spcBef>
+                    <a:spcPts val="500"/>
+                  </a:spcBef>
+                  <a:buFont typeface="Arial" panose="020B0604020202020204" pitchFamily="34" charset="0"/>
+                  <a:buChar char="•"/>
+                  <a:defRPr sz="1800" kern="1200">
+                    <a:solidFill>
+                      <a:schemeClr val="tx1"/>
+                    </a:solidFill>
+                    <a:latin typeface="+mn-lt"/>
+                    <a:ea typeface="+mn-ea"/>
+                    <a:cs typeface="+mn-cs"/>
+                  </a:defRPr>
+                </a:lvl8pPr>
+                <a:lvl9pPr marL="3886200" indent="-228600" algn="l" defTabSz="914400" rtl="0" eaLnBrk="1" latinLnBrk="0" hangingPunct="1">
+                  <a:lnSpc>
+                    <a:spcPct val="90000"/>
+                  </a:lnSpc>
+                  <a:spcBef>
+                    <a:spcPts val="500"/>
+                  </a:spcBef>
+                  <a:buFont typeface="Arial" panose="020B0604020202020204" pitchFamily="34" charset="0"/>
+                  <a:buChar char="•"/>
+                  <a:defRPr sz="1800" kern="1200">
+                    <a:solidFill>
+                      <a:schemeClr val="tx1"/>
+                    </a:solidFill>
+                    <a:latin typeface="+mn-lt"/>
+                    <a:ea typeface="+mn-ea"/>
+                    <a:cs typeface="+mn-cs"/>
+                  </a:defRPr>
+                </a:lvl9pPr>
+              </a:lstStyle>
+              <a:p>
+                <a:pPr marL="0" indent="0">
+                  <a:buFont typeface="Arial" panose="020B0604020202020204" pitchFamily="34" charset="0"/>
+                  <a:buNone/>
+                </a:pPr>
+                <a:r>
+                  <a:rPr lang="it-IT" sz="2000" dirty="0"/>
+                  <a:t>c) </a:t>
+                </a:r>
+                <a:r>
+                  <a:rPr lang="it-IT" sz="2000" dirty="0" err="1"/>
+                  <a:t>Calculate</a:t>
+                </a:r>
+                <a:r>
+                  <a:rPr lang="it-IT" sz="2000" dirty="0"/>
+                  <a:t> </a:t>
+                </a:r>
+                <a14:m>
+                  <m:oMath xmlns:m="http://schemas.openxmlformats.org/officeDocument/2006/math">
+                    <m:r>
+                      <a:rPr lang="it-IT" sz="2000" b="0" i="1" smtClean="0">
+                        <a:latin typeface="Cambria Math" panose="02040503050406030204" pitchFamily="18" charset="0"/>
+                      </a:rPr>
+                      <m:t>𝜆</m:t>
+                    </m:r>
+                  </m:oMath>
+                </a14:m>
+                <a:r>
+                  <a:rPr lang="it-IT" sz="2000" dirty="0"/>
+                  <a:t> and </a:t>
+                </a:r>
+                <a14:m>
+                  <m:oMath xmlns:m="http://schemas.openxmlformats.org/officeDocument/2006/math">
+                    <m:r>
+                      <a:rPr lang="it-IT" sz="2000" b="0" i="1" smtClean="0">
+                        <a:latin typeface="Cambria Math" panose="02040503050406030204" pitchFamily="18" charset="0"/>
+                      </a:rPr>
+                      <m:t>𝜃</m:t>
+                    </m:r>
+                  </m:oMath>
+                </a14:m>
+                <a:r>
+                  <a:rPr lang="it-IT" sz="2000" dirty="0"/>
+                  <a:t> to </a:t>
+                </a:r>
+                <a:r>
+                  <a:rPr lang="it-IT" sz="2000" dirty="0" err="1"/>
+                  <a:t>reach</a:t>
+                </a:r>
+                <a:r>
+                  <a:rPr lang="it-IT" sz="2000" dirty="0"/>
+                  <a:t> a </a:t>
+                </a:r>
+                <a:r>
+                  <a:rPr lang="it-IT" sz="2000" dirty="0" err="1"/>
+                  <a:t>higher</a:t>
+                </a:r>
+                <a:r>
+                  <a:rPr lang="it-IT" sz="2000" dirty="0"/>
+                  <a:t> </a:t>
+                </a:r>
+                <a:r>
+                  <a:rPr lang="it-IT" sz="2000" dirty="0" err="1"/>
+                  <a:t>value</a:t>
+                </a:r>
+                <a:r>
+                  <a:rPr lang="it-IT" sz="2000" dirty="0"/>
+                  <a:t> of </a:t>
+                </a:r>
+                <a14:m>
+                  <m:oMath xmlns:m="http://schemas.openxmlformats.org/officeDocument/2006/math">
+                    <m:sSub>
+                      <m:sSubPr>
+                        <m:ctrlPr>
+                          <a:rPr lang="it-IT" sz="2000" b="0" i="1" smtClean="0">
+                            <a:latin typeface="Cambria Math" panose="02040503050406030204" pitchFamily="18" charset="0"/>
+                          </a:rPr>
+                        </m:ctrlPr>
+                      </m:sSubPr>
+                      <m:e>
+                        <m:r>
+                          <a:rPr lang="it-IT" sz="2000" b="0" i="1" smtClean="0">
+                            <a:latin typeface="Cambria Math" panose="02040503050406030204" pitchFamily="18" charset="0"/>
+                          </a:rPr>
+                          <m:t>𝑐</m:t>
+                        </m:r>
+                      </m:e>
+                      <m:sub>
+                        <m:r>
+                          <a:rPr lang="it-IT" sz="2000" b="0" i="1" smtClean="0">
+                            <a:latin typeface="Cambria Math" panose="02040503050406030204" pitchFamily="18" charset="0"/>
+                          </a:rPr>
+                          <m:t>𝑝</m:t>
+                        </m:r>
+                      </m:sub>
+                    </m:sSub>
+                  </m:oMath>
+                </a14:m>
+                <a:endParaRPr lang="it-IT" sz="2000" dirty="0"/>
+              </a:p>
+            </p:txBody>
+          </p:sp>
+        </mc:Choice>
+        <mc:Fallback>
+          <p:sp>
+            <p:nvSpPr>
+              <p:cNvPr id="9" name="Content Placeholder 7">
+                <a:extLst>
+                  <a:ext uri="{FF2B5EF4-FFF2-40B4-BE49-F238E27FC236}">
+                    <a16:creationId xmlns:a16="http://schemas.microsoft.com/office/drawing/2014/main" id="{80CE663F-93A9-CE0D-D036-5C554E139DE5}"/>
+                  </a:ext>
+                </a:extLst>
+              </p:cNvPr>
+              <p:cNvSpPr txBox="1">
+                <a:spLocks noRot="1" noChangeAspect="1" noMove="1" noResize="1" noEditPoints="1" noAdjustHandles="1" noChangeArrowheads="1" noChangeShapeType="1" noTextEdit="1"/>
+              </p:cNvSpPr>
+              <p:nvPr/>
+            </p:nvSpPr>
+            <p:spPr>
+              <a:xfrm>
+                <a:off x="838200" y="1584692"/>
+                <a:ext cx="10515600" cy="764445"/>
+              </a:xfrm>
+              <a:prstGeom prst="rect">
+                <a:avLst/>
+              </a:prstGeom>
+              <a:blipFill>
+                <a:blip r:embed="rId2"/>
+                <a:stretch>
+                  <a:fillRect l="-638" t="-6400"/>
+                </a:stretch>
+              </a:blipFill>
+            </p:spPr>
+            <p:txBody>
+              <a:bodyPr/>
+              <a:lstStyle/>
+              <a:p>
+                <a:r>
+                  <a:rPr lang="en-GB">
+                    <a:noFill/>
+                  </a:rPr>
+                  <a:t> </a:t>
+                </a:r>
+              </a:p>
+            </p:txBody>
+          </p:sp>
+        </mc:Fallback>
+      </mc:AlternateContent>
+      <mc:AlternateContent xmlns:mc="http://schemas.openxmlformats.org/markup-compatibility/2006">
+        <mc:Choice xmlns:a14="http://schemas.microsoft.com/office/drawing/2010/main" Requires="a14">
+          <p:sp>
+            <p:nvSpPr>
+              <p:cNvPr id="11" name="Content Placeholder 7">
+                <a:extLst>
+                  <a:ext uri="{FF2B5EF4-FFF2-40B4-BE49-F238E27FC236}">
+                    <a16:creationId xmlns:a16="http://schemas.microsoft.com/office/drawing/2014/main" id="{9A67CC35-D011-3B6A-3284-B843C8A3BF29}"/>
+                  </a:ext>
+                </a:extLst>
+              </p:cNvPr>
+              <p:cNvSpPr txBox="1">
+                <a:spLocks/>
+              </p:cNvSpPr>
+              <p:nvPr/>
+            </p:nvSpPr>
+            <p:spPr>
+              <a:xfrm>
+                <a:off x="838200" y="2145810"/>
+                <a:ext cx="10515600" cy="764445"/>
+              </a:xfrm>
+              <a:prstGeom prst="rect">
+                <a:avLst/>
+              </a:prstGeom>
+            </p:spPr>
+            <p:txBody>
+              <a:bodyPr vert="horz" lIns="91440" tIns="45720" rIns="91440" bIns="45720" rtlCol="0">
+                <a:normAutofit/>
+              </a:bodyPr>
+              <a:lstStyle>
+                <a:lvl1pPr marL="228600" indent="-228600" algn="l" defTabSz="914400" rtl="0" eaLnBrk="1" latinLnBrk="0" hangingPunct="1">
+                  <a:lnSpc>
+                    <a:spcPct val="90000"/>
+                  </a:lnSpc>
+                  <a:spcBef>
+                    <a:spcPts val="1000"/>
+                  </a:spcBef>
+                  <a:buFont typeface="Arial" panose="020B0604020202020204" pitchFamily="34" charset="0"/>
+                  <a:buChar char="•"/>
+                  <a:defRPr sz="2800" kern="1200">
+                    <a:solidFill>
+                      <a:schemeClr val="tx1"/>
+                    </a:solidFill>
+                    <a:latin typeface="+mn-lt"/>
+                    <a:ea typeface="+mn-ea"/>
+                    <a:cs typeface="+mn-cs"/>
+                  </a:defRPr>
+                </a:lvl1pPr>
+                <a:lvl2pPr marL="685800" indent="-228600" algn="l" defTabSz="914400" rtl="0" eaLnBrk="1" latinLnBrk="0" hangingPunct="1">
+                  <a:lnSpc>
+                    <a:spcPct val="90000"/>
+                  </a:lnSpc>
+                  <a:spcBef>
+                    <a:spcPts val="500"/>
+                  </a:spcBef>
+                  <a:buFont typeface="Arial" panose="020B0604020202020204" pitchFamily="34" charset="0"/>
+                  <a:buChar char="•"/>
+                  <a:defRPr sz="2400" kern="1200">
+                    <a:solidFill>
+                      <a:schemeClr val="tx1"/>
+                    </a:solidFill>
+                    <a:latin typeface="+mn-lt"/>
+                    <a:ea typeface="+mn-ea"/>
+                    <a:cs typeface="+mn-cs"/>
+                  </a:defRPr>
+                </a:lvl2pPr>
+                <a:lvl3pPr marL="1143000" indent="-228600" algn="l" defTabSz="914400" rtl="0" eaLnBrk="1" latinLnBrk="0" hangingPunct="1">
+                  <a:lnSpc>
+                    <a:spcPct val="90000"/>
+                  </a:lnSpc>
+                  <a:spcBef>
+                    <a:spcPts val="500"/>
+                  </a:spcBef>
+                  <a:buFont typeface="Arial" panose="020B0604020202020204" pitchFamily="34" charset="0"/>
+                  <a:buChar char="•"/>
+                  <a:defRPr sz="2000" kern="1200">
+                    <a:solidFill>
+                      <a:schemeClr val="tx1"/>
+                    </a:solidFill>
+                    <a:latin typeface="+mn-lt"/>
+                    <a:ea typeface="+mn-ea"/>
+                    <a:cs typeface="+mn-cs"/>
+                  </a:defRPr>
+                </a:lvl3pPr>
+                <a:lvl4pPr marL="1600200" indent="-228600" algn="l" defTabSz="914400" rtl="0" eaLnBrk="1" latinLnBrk="0" hangingPunct="1">
+                  <a:lnSpc>
+                    <a:spcPct val="90000"/>
+                  </a:lnSpc>
+                  <a:spcBef>
+                    <a:spcPts val="500"/>
+                  </a:spcBef>
+                  <a:buFont typeface="Arial" panose="020B0604020202020204" pitchFamily="34" charset="0"/>
+                  <a:buChar char="•"/>
+                  <a:defRPr sz="1800" kern="1200">
+                    <a:solidFill>
+                      <a:schemeClr val="tx1"/>
+                    </a:solidFill>
+                    <a:latin typeface="+mn-lt"/>
+                    <a:ea typeface="+mn-ea"/>
+                    <a:cs typeface="+mn-cs"/>
+                  </a:defRPr>
+                </a:lvl4pPr>
+                <a:lvl5pPr marL="2057400" indent="-228600" algn="l" defTabSz="914400" rtl="0" eaLnBrk="1" latinLnBrk="0" hangingPunct="1">
+                  <a:lnSpc>
+                    <a:spcPct val="90000"/>
+                  </a:lnSpc>
+                  <a:spcBef>
+                    <a:spcPts val="500"/>
+                  </a:spcBef>
+                  <a:buFont typeface="Arial" panose="020B0604020202020204" pitchFamily="34" charset="0"/>
+                  <a:buChar char="•"/>
+                  <a:defRPr sz="1800" kern="1200">
+                    <a:solidFill>
+                      <a:schemeClr val="tx1"/>
+                    </a:solidFill>
+                    <a:latin typeface="+mn-lt"/>
+                    <a:ea typeface="+mn-ea"/>
+                    <a:cs typeface="+mn-cs"/>
+                  </a:defRPr>
+                </a:lvl5pPr>
+                <a:lvl6pPr marL="2514600" indent="-228600" algn="l" defTabSz="914400" rtl="0" eaLnBrk="1" latinLnBrk="0" hangingPunct="1">
+                  <a:lnSpc>
+                    <a:spcPct val="90000"/>
+                  </a:lnSpc>
+                  <a:spcBef>
+                    <a:spcPts val="500"/>
+                  </a:spcBef>
+                  <a:buFont typeface="Arial" panose="020B0604020202020204" pitchFamily="34" charset="0"/>
+                  <a:buChar char="•"/>
+                  <a:defRPr sz="1800" kern="1200">
+                    <a:solidFill>
+                      <a:schemeClr val="tx1"/>
+                    </a:solidFill>
+                    <a:latin typeface="+mn-lt"/>
+                    <a:ea typeface="+mn-ea"/>
+                    <a:cs typeface="+mn-cs"/>
+                  </a:defRPr>
+                </a:lvl6pPr>
+                <a:lvl7pPr marL="2971800" indent="-228600" algn="l" defTabSz="914400" rtl="0" eaLnBrk="1" latinLnBrk="0" hangingPunct="1">
+                  <a:lnSpc>
+                    <a:spcPct val="90000"/>
+                  </a:lnSpc>
+                  <a:spcBef>
+                    <a:spcPts val="500"/>
+                  </a:spcBef>
+                  <a:buFont typeface="Arial" panose="020B0604020202020204" pitchFamily="34" charset="0"/>
+                  <a:buChar char="•"/>
+                  <a:defRPr sz="1800" kern="1200">
+                    <a:solidFill>
+                      <a:schemeClr val="tx1"/>
+                    </a:solidFill>
+                    <a:latin typeface="+mn-lt"/>
+                    <a:ea typeface="+mn-ea"/>
+                    <a:cs typeface="+mn-cs"/>
+                  </a:defRPr>
+                </a:lvl7pPr>
+                <a:lvl8pPr marL="3429000" indent="-228600" algn="l" defTabSz="914400" rtl="0" eaLnBrk="1" latinLnBrk="0" hangingPunct="1">
+                  <a:lnSpc>
+                    <a:spcPct val="90000"/>
+                  </a:lnSpc>
+                  <a:spcBef>
+                    <a:spcPts val="500"/>
+                  </a:spcBef>
+                  <a:buFont typeface="Arial" panose="020B0604020202020204" pitchFamily="34" charset="0"/>
+                  <a:buChar char="•"/>
+                  <a:defRPr sz="1800" kern="1200">
+                    <a:solidFill>
+                      <a:schemeClr val="tx1"/>
+                    </a:solidFill>
+                    <a:latin typeface="+mn-lt"/>
+                    <a:ea typeface="+mn-ea"/>
+                    <a:cs typeface="+mn-cs"/>
+                  </a:defRPr>
+                </a:lvl8pPr>
+                <a:lvl9pPr marL="3886200" indent="-228600" algn="l" defTabSz="914400" rtl="0" eaLnBrk="1" latinLnBrk="0" hangingPunct="1">
+                  <a:lnSpc>
+                    <a:spcPct val="90000"/>
+                  </a:lnSpc>
+                  <a:spcBef>
+                    <a:spcPts val="500"/>
+                  </a:spcBef>
+                  <a:buFont typeface="Arial" panose="020B0604020202020204" pitchFamily="34" charset="0"/>
+                  <a:buChar char="•"/>
+                  <a:defRPr sz="1800" kern="1200">
+                    <a:solidFill>
+                      <a:schemeClr val="tx1"/>
+                    </a:solidFill>
+                    <a:latin typeface="+mn-lt"/>
+                    <a:ea typeface="+mn-ea"/>
+                    <a:cs typeface="+mn-cs"/>
+                  </a:defRPr>
+                </a:lvl9pPr>
+              </a:lstStyle>
+              <a:p>
+                <a:pPr marL="0" indent="0">
+                  <a:buNone/>
+                </a:pPr>
+                <a:r>
+                  <a:rPr lang="it-IT" sz="2000" dirty="0">
+                    <a:latin typeface="Monospaced"/>
+                  </a:rPr>
+                  <a:t>We </a:t>
+                </a:r>
+                <a:r>
+                  <a:rPr lang="it-IT" sz="2000" dirty="0" err="1">
+                    <a:latin typeface="Monospaced"/>
+                  </a:rPr>
+                  <a:t>calculate</a:t>
+                </a:r>
+                <a:r>
+                  <a:rPr lang="it-IT" sz="2000" dirty="0">
+                    <a:latin typeface="Monospaced"/>
+                  </a:rPr>
+                  <a:t>, for a </a:t>
+                </a:r>
+                <a:r>
+                  <a:rPr lang="it-IT" sz="2000" dirty="0" err="1">
+                    <a:latin typeface="Monospaced"/>
+                  </a:rPr>
+                  <a:t>reference</a:t>
+                </a:r>
+                <a:r>
+                  <a:rPr lang="it-IT" sz="2000" dirty="0">
+                    <a:latin typeface="Monospaced"/>
+                  </a:rPr>
+                  <a:t> </a:t>
+                </a:r>
+                <a:r>
+                  <a:rPr lang="it-IT" sz="2000" dirty="0" err="1">
+                    <a:latin typeface="Monospaced"/>
+                  </a:rPr>
+                  <a:t>value</a:t>
+                </a:r>
+                <a:r>
+                  <a:rPr lang="it-IT" sz="2000" dirty="0">
+                    <a:latin typeface="Monospaced"/>
+                  </a:rPr>
+                  <a:t> of </a:t>
+                </a:r>
+                <a14:m>
+                  <m:oMath xmlns:m="http://schemas.openxmlformats.org/officeDocument/2006/math">
+                    <m:sSub>
+                      <m:sSubPr>
+                        <m:ctrlPr>
+                          <a:rPr lang="it-IT" sz="2000" b="0" i="1" smtClean="0">
+                            <a:latin typeface="Monospaced"/>
+                          </a:rPr>
+                        </m:ctrlPr>
+                      </m:sSubPr>
+                      <m:e>
+                        <m:r>
+                          <a:rPr lang="it-IT" sz="2000" b="0" i="1" smtClean="0">
+                            <a:latin typeface="Monospaced"/>
+                          </a:rPr>
+                          <m:t>𝑐</m:t>
+                        </m:r>
+                      </m:e>
+                      <m:sub>
+                        <m:r>
+                          <a:rPr lang="it-IT" sz="2000" b="0" i="1" smtClean="0">
+                            <a:latin typeface="Monospaced"/>
+                          </a:rPr>
+                          <m:t>𝑝</m:t>
+                        </m:r>
+                      </m:sub>
+                    </m:sSub>
+                  </m:oMath>
+                </a14:m>
+                <a:r>
+                  <a:rPr lang="it-IT" sz="2000" dirty="0">
+                    <a:latin typeface="Monospaced"/>
+                  </a:rPr>
+                  <a:t> the maximum </a:t>
+                </a:r>
+                <a:r>
+                  <a:rPr lang="it-IT" sz="2000" dirty="0" err="1">
+                    <a:latin typeface="Monospaced"/>
+                  </a:rPr>
+                  <a:t>value</a:t>
+                </a:r>
+                <a:r>
+                  <a:rPr lang="it-IT" sz="2000" dirty="0">
+                    <a:latin typeface="Monospaced"/>
+                  </a:rPr>
+                  <a:t> </a:t>
+                </a:r>
+                <a:r>
+                  <a:rPr lang="it-IT" sz="2000" dirty="0" err="1">
+                    <a:latin typeface="Monospaced"/>
+                  </a:rPr>
+                  <a:t>that</a:t>
+                </a:r>
+                <a:r>
+                  <a:rPr lang="it-IT" sz="2000" dirty="0">
+                    <a:latin typeface="Monospaced"/>
+                  </a:rPr>
+                  <a:t> </a:t>
+                </a:r>
+                <a:r>
+                  <a:rPr lang="it-IT" sz="2000" dirty="0" err="1">
+                    <a:latin typeface="Monospaced"/>
+                  </a:rPr>
+                  <a:t>we</a:t>
+                </a:r>
+                <a:r>
+                  <a:rPr lang="it-IT" sz="2000" dirty="0">
+                    <a:latin typeface="Monospaced"/>
+                  </a:rPr>
+                  <a:t> can </a:t>
+                </a:r>
+                <a:r>
+                  <a:rPr lang="it-IT" sz="2000" dirty="0" err="1">
+                    <a:latin typeface="Monospaced"/>
+                  </a:rPr>
+                  <a:t>find</a:t>
+                </a:r>
+                <a:r>
+                  <a:rPr lang="it-IT" sz="2000" dirty="0">
+                    <a:latin typeface="Monospaced"/>
+                  </a:rPr>
+                  <a:t> in the </a:t>
+                </a:r>
+                <a14:m>
+                  <m:oMath xmlns:m="http://schemas.openxmlformats.org/officeDocument/2006/math">
+                    <m:sSub>
+                      <m:sSubPr>
+                        <m:ctrlPr>
+                          <a:rPr lang="it-IT" sz="2000" i="1">
+                            <a:latin typeface="Monospaced"/>
+                          </a:rPr>
+                        </m:ctrlPr>
+                      </m:sSubPr>
+                      <m:e>
+                        <m:r>
+                          <a:rPr lang="it-IT" sz="2000" i="1">
+                            <a:latin typeface="Monospaced"/>
+                          </a:rPr>
+                          <m:t>𝑐</m:t>
+                        </m:r>
+                      </m:e>
+                      <m:sub>
+                        <m:r>
+                          <a:rPr lang="it-IT" sz="2000" i="1">
+                            <a:latin typeface="Monospaced"/>
+                          </a:rPr>
+                          <m:t>𝑝</m:t>
+                        </m:r>
+                      </m:sub>
+                    </m:sSub>
+                  </m:oMath>
+                </a14:m>
+                <a:r>
+                  <a:rPr lang="it-IT" sz="2000" dirty="0">
+                    <a:latin typeface="Monospaced"/>
+                  </a:rPr>
+                  <a:t> </a:t>
+                </a:r>
+                <a:r>
+                  <a:rPr lang="it-IT" sz="2000" dirty="0" err="1">
+                    <a:latin typeface="Monospaced"/>
+                  </a:rPr>
+                  <a:t>matrix</a:t>
+                </a:r>
+                <a:r>
+                  <a:rPr lang="it-IT" sz="2000" dirty="0">
+                    <a:latin typeface="Monospaced"/>
+                  </a:rPr>
+                  <a:t>:</a:t>
+                </a:r>
+              </a:p>
+              <a:p>
+                <a:pPr marL="0" indent="0">
+                  <a:buNone/>
+                </a:pPr>
+                <a:endParaRPr lang="it-IT" sz="2000" dirty="0">
+                  <a:latin typeface="Monospaced"/>
+                </a:endParaRPr>
+              </a:p>
+              <a:p>
+                <a:pPr marL="0" indent="0">
+                  <a:buNone/>
+                </a:pPr>
+                <a:endParaRPr lang="it-IT" sz="2000" dirty="0">
+                  <a:latin typeface="Monospaced"/>
+                </a:endParaRPr>
+              </a:p>
+            </p:txBody>
+          </p:sp>
+        </mc:Choice>
+        <mc:Fallback>
+          <p:sp>
+            <p:nvSpPr>
+              <p:cNvPr id="11" name="Content Placeholder 7">
+                <a:extLst>
+                  <a:ext uri="{FF2B5EF4-FFF2-40B4-BE49-F238E27FC236}">
+                    <a16:creationId xmlns:a16="http://schemas.microsoft.com/office/drawing/2014/main" id="{9A67CC35-D011-3B6A-3284-B843C8A3BF29}"/>
+                  </a:ext>
+                </a:extLst>
+              </p:cNvPr>
+              <p:cNvSpPr txBox="1">
+                <a:spLocks noRot="1" noChangeAspect="1" noMove="1" noResize="1" noEditPoints="1" noAdjustHandles="1" noChangeArrowheads="1" noChangeShapeType="1" noTextEdit="1"/>
+              </p:cNvSpPr>
+              <p:nvPr/>
+            </p:nvSpPr>
+            <p:spPr>
+              <a:xfrm>
+                <a:off x="838200" y="2145810"/>
+                <a:ext cx="10515600" cy="764445"/>
+              </a:xfrm>
+              <a:prstGeom prst="rect">
+                <a:avLst/>
+              </a:prstGeom>
+              <a:blipFill>
+                <a:blip r:embed="rId3"/>
+                <a:stretch>
+                  <a:fillRect l="-638" t="-7200"/>
+                </a:stretch>
+              </a:blipFill>
+            </p:spPr>
+            <p:txBody>
+              <a:bodyPr/>
+              <a:lstStyle/>
+              <a:p>
+                <a:r>
+                  <a:rPr lang="en-GB">
+                    <a:noFill/>
+                  </a:rPr>
+                  <a:t> </a:t>
+                </a:r>
+              </a:p>
+            </p:txBody>
+          </p:sp>
+        </mc:Fallback>
+      </mc:AlternateContent>
+      <p:pic>
+        <p:nvPicPr>
+          <p:cNvPr id="13" name="Picture 12">
+            <a:extLst>
+              <a:ext uri="{FF2B5EF4-FFF2-40B4-BE49-F238E27FC236}">
+                <a16:creationId xmlns:a16="http://schemas.microsoft.com/office/drawing/2014/main" id="{9919CF99-C5DF-D9A6-E311-3009DDFA182E}"/>
+              </a:ext>
+            </a:extLst>
+          </p:cNvPr>
+          <p:cNvPicPr>
+            <a:picLocks noChangeAspect="1"/>
+          </p:cNvPicPr>
+          <p:nvPr/>
+        </p:nvPicPr>
+        <p:blipFill>
+          <a:blip r:embed="rId4"/>
+          <a:stretch>
+            <a:fillRect/>
+          </a:stretch>
+        </p:blipFill>
+        <p:spPr>
+          <a:xfrm>
+            <a:off x="838200" y="2651822"/>
+            <a:ext cx="7668695" cy="1371791"/>
+          </a:xfrm>
+          <a:prstGeom prst="rect">
+            <a:avLst/>
+          </a:prstGeom>
+        </p:spPr>
+      </p:pic>
+      <p:sp>
+        <p:nvSpPr>
+          <p:cNvPr id="14" name="Content Placeholder 7">
+            <a:extLst>
+              <a:ext uri="{FF2B5EF4-FFF2-40B4-BE49-F238E27FC236}">
+                <a16:creationId xmlns:a16="http://schemas.microsoft.com/office/drawing/2014/main" id="{5BB39634-D3CC-DBCC-7701-7C70E54FEBC6}"/>
+              </a:ext>
+            </a:extLst>
+          </p:cNvPr>
+          <p:cNvSpPr txBox="1">
+            <a:spLocks/>
+          </p:cNvSpPr>
+          <p:nvPr/>
+        </p:nvSpPr>
+        <p:spPr>
+          <a:xfrm>
+            <a:off x="665284" y="4326298"/>
+            <a:ext cx="10861431" cy="764445"/>
+          </a:xfrm>
+          <a:prstGeom prst="rect">
+            <a:avLst/>
+          </a:prstGeom>
+        </p:spPr>
+        <p:txBody>
+          <a:bodyPr vert="horz" lIns="91440" tIns="45720" rIns="91440" bIns="45720" rtlCol="0">
+            <a:normAutofit/>
+          </a:bodyPr>
+          <a:lstStyle>
+            <a:lvl1pPr marL="228600" indent="-228600" algn="l" defTabSz="914400" rtl="0" eaLnBrk="1" latinLnBrk="0" hangingPunct="1">
+              <a:lnSpc>
+                <a:spcPct val="90000"/>
+              </a:lnSpc>
+              <a:spcBef>
+                <a:spcPts val="1000"/>
+              </a:spcBef>
+              <a:buFont typeface="Arial" panose="020B0604020202020204" pitchFamily="34" charset="0"/>
+              <a:buChar char="•"/>
+              <a:defRPr sz="2800" kern="1200">
+                <a:solidFill>
+                  <a:schemeClr val="tx1"/>
+                </a:solidFill>
+                <a:latin typeface="+mn-lt"/>
+                <a:ea typeface="+mn-ea"/>
+                <a:cs typeface="+mn-cs"/>
+              </a:defRPr>
+            </a:lvl1pPr>
+            <a:lvl2pPr marL="685800" indent="-228600" algn="l" defTabSz="914400" rtl="0" eaLnBrk="1" latinLnBrk="0" hangingPunct="1">
+              <a:lnSpc>
+                <a:spcPct val="90000"/>
+              </a:lnSpc>
+              <a:spcBef>
+                <a:spcPts val="500"/>
+              </a:spcBef>
+              <a:buFont typeface="Arial" panose="020B0604020202020204" pitchFamily="34" charset="0"/>
+              <a:buChar char="•"/>
+              <a:defRPr sz="2400" kern="1200">
+                <a:solidFill>
+                  <a:schemeClr val="tx1"/>
+                </a:solidFill>
+                <a:latin typeface="+mn-lt"/>
+                <a:ea typeface="+mn-ea"/>
+                <a:cs typeface="+mn-cs"/>
+              </a:defRPr>
+            </a:lvl2pPr>
+            <a:lvl3pPr marL="1143000" indent="-228600" algn="l" defTabSz="914400" rtl="0" eaLnBrk="1" latinLnBrk="0" hangingPunct="1">
+              <a:lnSpc>
+                <a:spcPct val="90000"/>
+              </a:lnSpc>
+              <a:spcBef>
+                <a:spcPts val="500"/>
+              </a:spcBef>
+              <a:buFont typeface="Arial" panose="020B0604020202020204" pitchFamily="34" charset="0"/>
+              <a:buChar char="•"/>
+              <a:defRPr sz="2000" kern="1200">
+                <a:solidFill>
+                  <a:schemeClr val="tx1"/>
+                </a:solidFill>
+                <a:latin typeface="+mn-lt"/>
+                <a:ea typeface="+mn-ea"/>
+                <a:cs typeface="+mn-cs"/>
+              </a:defRPr>
+            </a:lvl3pPr>
+            <a:lvl4pPr marL="1600200" indent="-228600" algn="l" defTabSz="914400" rtl="0" eaLnBrk="1" latinLnBrk="0" hangingPunct="1">
+              <a:lnSpc>
+                <a:spcPct val="90000"/>
+              </a:lnSpc>
+              <a:spcBef>
+                <a:spcPts val="500"/>
+              </a:spcBef>
+              <a:buFont typeface="Arial" panose="020B0604020202020204" pitchFamily="34" charset="0"/>
+              <a:buChar char="•"/>
+              <a:defRPr sz="1800" kern="1200">
+                <a:solidFill>
+                  <a:schemeClr val="tx1"/>
+                </a:solidFill>
+                <a:latin typeface="+mn-lt"/>
+                <a:ea typeface="+mn-ea"/>
+                <a:cs typeface="+mn-cs"/>
+              </a:defRPr>
+            </a:lvl4pPr>
+            <a:lvl5pPr marL="2057400" indent="-228600" algn="l" defTabSz="914400" rtl="0" eaLnBrk="1" latinLnBrk="0" hangingPunct="1">
+              <a:lnSpc>
+                <a:spcPct val="90000"/>
+              </a:lnSpc>
+              <a:spcBef>
+                <a:spcPts val="500"/>
+              </a:spcBef>
+              <a:buFont typeface="Arial" panose="020B0604020202020204" pitchFamily="34" charset="0"/>
+              <a:buChar char="•"/>
+              <a:defRPr sz="1800" kern="1200">
+                <a:solidFill>
+                  <a:schemeClr val="tx1"/>
+                </a:solidFill>
+                <a:latin typeface="+mn-lt"/>
+                <a:ea typeface="+mn-ea"/>
+                <a:cs typeface="+mn-cs"/>
+              </a:defRPr>
+            </a:lvl5pPr>
+            <a:lvl6pPr marL="2514600" indent="-228600" algn="l" defTabSz="914400" rtl="0" eaLnBrk="1" latinLnBrk="0" hangingPunct="1">
+              <a:lnSpc>
+                <a:spcPct val="90000"/>
+              </a:lnSpc>
+              <a:spcBef>
+                <a:spcPts val="500"/>
+              </a:spcBef>
+              <a:buFont typeface="Arial" panose="020B0604020202020204" pitchFamily="34" charset="0"/>
+              <a:buChar char="•"/>
+              <a:defRPr sz="1800" kern="1200">
+                <a:solidFill>
+                  <a:schemeClr val="tx1"/>
+                </a:solidFill>
+                <a:latin typeface="+mn-lt"/>
+                <a:ea typeface="+mn-ea"/>
+                <a:cs typeface="+mn-cs"/>
+              </a:defRPr>
+            </a:lvl6pPr>
+            <a:lvl7pPr marL="2971800" indent="-228600" algn="l" defTabSz="914400" rtl="0" eaLnBrk="1" latinLnBrk="0" hangingPunct="1">
+              <a:lnSpc>
+                <a:spcPct val="90000"/>
+              </a:lnSpc>
+              <a:spcBef>
+                <a:spcPts val="500"/>
+              </a:spcBef>
+              <a:buFont typeface="Arial" panose="020B0604020202020204" pitchFamily="34" charset="0"/>
+              <a:buChar char="•"/>
+              <a:defRPr sz="1800" kern="1200">
+                <a:solidFill>
+                  <a:schemeClr val="tx1"/>
+                </a:solidFill>
+                <a:latin typeface="+mn-lt"/>
+                <a:ea typeface="+mn-ea"/>
+                <a:cs typeface="+mn-cs"/>
+              </a:defRPr>
+            </a:lvl7pPr>
+            <a:lvl8pPr marL="3429000" indent="-228600" algn="l" defTabSz="914400" rtl="0" eaLnBrk="1" latinLnBrk="0" hangingPunct="1">
+              <a:lnSpc>
+                <a:spcPct val="90000"/>
+              </a:lnSpc>
+              <a:spcBef>
+                <a:spcPts val="500"/>
+              </a:spcBef>
+              <a:buFont typeface="Arial" panose="020B0604020202020204" pitchFamily="34" charset="0"/>
+              <a:buChar char="•"/>
+              <a:defRPr sz="1800" kern="1200">
+                <a:solidFill>
+                  <a:schemeClr val="tx1"/>
+                </a:solidFill>
+                <a:latin typeface="+mn-lt"/>
+                <a:ea typeface="+mn-ea"/>
+                <a:cs typeface="+mn-cs"/>
+              </a:defRPr>
+            </a:lvl8pPr>
+            <a:lvl9pPr marL="3886200" indent="-228600" algn="l" defTabSz="914400" rtl="0" eaLnBrk="1" latinLnBrk="0" hangingPunct="1">
+              <a:lnSpc>
+                <a:spcPct val="90000"/>
+              </a:lnSpc>
+              <a:spcBef>
+                <a:spcPts val="500"/>
+              </a:spcBef>
+              <a:buFont typeface="Arial" panose="020B0604020202020204" pitchFamily="34" charset="0"/>
+              <a:buChar char="•"/>
+              <a:defRPr sz="1800" kern="1200">
+                <a:solidFill>
+                  <a:schemeClr val="tx1"/>
+                </a:solidFill>
+                <a:latin typeface="+mn-lt"/>
+                <a:ea typeface="+mn-ea"/>
+                <a:cs typeface="+mn-cs"/>
+              </a:defRPr>
+            </a:lvl9pPr>
+          </a:lstStyle>
+          <a:p>
+            <a:pPr marL="0" indent="0">
+              <a:buNone/>
+            </a:pPr>
+            <a:r>
+              <a:rPr lang="it-IT" sz="2000" dirty="0">
+                <a:latin typeface="Monospaced"/>
+              </a:rPr>
+              <a:t>We </a:t>
+            </a:r>
+            <a:r>
+              <a:rPr lang="it-IT" sz="2000" dirty="0" err="1">
+                <a:latin typeface="Monospaced"/>
+              </a:rPr>
+              <a:t>calculate</a:t>
+            </a:r>
+            <a:r>
+              <a:rPr lang="it-IT" sz="2000" dirty="0">
+                <a:latin typeface="Monospaced"/>
+              </a:rPr>
+              <a:t>, </a:t>
+            </a:r>
+            <a:r>
+              <a:rPr lang="it-IT" sz="2000" dirty="0" err="1">
+                <a:latin typeface="Monospaced"/>
+              </a:rPr>
+              <a:t>then</a:t>
+            </a:r>
+            <a:r>
+              <a:rPr lang="it-IT" sz="2000" dirty="0">
+                <a:latin typeface="Monospaced"/>
+              </a:rPr>
+              <a:t>, the </a:t>
+            </a:r>
+            <a:r>
+              <a:rPr lang="it-IT" sz="2000" dirty="0" err="1">
+                <a:latin typeface="Monospaced"/>
+              </a:rPr>
+              <a:t>additional</a:t>
+            </a:r>
+            <a:r>
+              <a:rPr lang="it-IT" sz="2000" dirty="0">
+                <a:latin typeface="Monospaced"/>
+              </a:rPr>
+              <a:t> power for the turbine for </a:t>
+            </a:r>
+            <a:r>
+              <a:rPr lang="it-IT" sz="2000" dirty="0" err="1">
+                <a:latin typeface="Monospaced"/>
+              </a:rPr>
+              <a:t>this</a:t>
+            </a:r>
+            <a:r>
+              <a:rPr lang="it-IT" sz="2000" dirty="0">
+                <a:latin typeface="Monospaced"/>
+              </a:rPr>
+              <a:t> new  power </a:t>
+            </a:r>
+            <a:r>
+              <a:rPr lang="it-IT" sz="2000" dirty="0" err="1">
+                <a:latin typeface="Monospaced"/>
+              </a:rPr>
+              <a:t>coefficient</a:t>
+            </a:r>
+            <a:r>
+              <a:rPr lang="it-IT" sz="2000" dirty="0">
+                <a:latin typeface="Monospaced"/>
+              </a:rPr>
+              <a:t> </a:t>
+            </a:r>
+            <a:r>
+              <a:rPr lang="it-IT" sz="2000" dirty="0" err="1">
+                <a:latin typeface="Monospaced"/>
+              </a:rPr>
+              <a:t>as</a:t>
+            </a:r>
+            <a:r>
+              <a:rPr lang="it-IT" sz="2000" dirty="0">
+                <a:latin typeface="Monospaced"/>
+              </a:rPr>
+              <a:t> a </a:t>
+            </a:r>
+            <a:r>
+              <a:rPr lang="it-IT" sz="2000" dirty="0" err="1">
+                <a:latin typeface="Monospaced"/>
+              </a:rPr>
+              <a:t>percentage</a:t>
+            </a:r>
+            <a:endParaRPr lang="it-IT" sz="2000" dirty="0">
+              <a:latin typeface="Monospaced"/>
+            </a:endParaRPr>
+          </a:p>
+          <a:p>
+            <a:pPr marL="0" indent="0">
+              <a:buNone/>
+            </a:pPr>
+            <a:endParaRPr lang="it-IT" sz="2000" dirty="0">
+              <a:latin typeface="Monospaced"/>
+            </a:endParaRPr>
+          </a:p>
+        </p:txBody>
+      </p:sp>
+      <p:pic>
+        <p:nvPicPr>
+          <p:cNvPr id="17" name="Picture 16">
+            <a:extLst>
+              <a:ext uri="{FF2B5EF4-FFF2-40B4-BE49-F238E27FC236}">
+                <a16:creationId xmlns:a16="http://schemas.microsoft.com/office/drawing/2014/main" id="{18012359-E88C-0586-39CF-69B5ADBA3B60}"/>
+              </a:ext>
+            </a:extLst>
+          </p:cNvPr>
+          <p:cNvPicPr>
+            <a:picLocks noChangeAspect="1"/>
+          </p:cNvPicPr>
+          <p:nvPr/>
+        </p:nvPicPr>
+        <p:blipFill>
+          <a:blip r:embed="rId5"/>
+          <a:stretch>
+            <a:fillRect/>
+          </a:stretch>
+        </p:blipFill>
+        <p:spPr>
+          <a:xfrm>
+            <a:off x="918472" y="4917693"/>
+            <a:ext cx="9897856" cy="743054"/>
+          </a:xfrm>
+          <a:prstGeom prst="rect">
+            <a:avLst/>
+          </a:prstGeom>
+        </p:spPr>
+      </p:pic>
+      <p:sp>
+        <p:nvSpPr>
+          <p:cNvPr id="18" name="Footer Placeholder 4">
+            <a:extLst>
+              <a:ext uri="{FF2B5EF4-FFF2-40B4-BE49-F238E27FC236}">
+                <a16:creationId xmlns:a16="http://schemas.microsoft.com/office/drawing/2014/main" id="{6F7060D6-E30F-D8B9-7DE1-AEBC2B2935B7}"/>
+              </a:ext>
+            </a:extLst>
+          </p:cNvPr>
+          <p:cNvSpPr>
+            <a:spLocks noGrp="1"/>
+          </p:cNvSpPr>
+          <p:nvPr>
+            <p:ph type="ftr" sz="quarter" idx="11"/>
+          </p:nvPr>
+        </p:nvSpPr>
+        <p:spPr>
+          <a:xfrm>
+            <a:off x="2781300" y="6356349"/>
+            <a:ext cx="6629400" cy="365125"/>
+          </a:xfrm>
+        </p:spPr>
+        <p:txBody>
+          <a:bodyPr/>
+          <a:lstStyle/>
+          <a:p>
+            <a:r>
+              <a:rPr lang="en-DE" dirty="0"/>
+              <a:t>Group 3:</a:t>
+            </a:r>
+            <a:r>
+              <a:rPr lang="it-IT" dirty="0"/>
+              <a:t> Federico De Mita, </a:t>
+            </a:r>
+            <a:r>
+              <a:rPr lang="it-IT" dirty="0" err="1"/>
+              <a:t>Waqas</a:t>
+            </a:r>
+            <a:r>
+              <a:rPr lang="it-IT" dirty="0"/>
+              <a:t> Ahmed, Dominic </a:t>
+            </a:r>
+            <a:r>
+              <a:rPr lang="it-IT" dirty="0" err="1"/>
+              <a:t>Annang</a:t>
+            </a:r>
+            <a:r>
+              <a:rPr lang="it-IT" dirty="0"/>
+              <a:t>, Hesham </a:t>
+            </a:r>
+            <a:r>
+              <a:rPr lang="it-IT" dirty="0" err="1"/>
+              <a:t>Magdy</a:t>
+            </a:r>
+            <a:r>
+              <a:rPr lang="it-IT" dirty="0"/>
+              <a:t>, </a:t>
+            </a:r>
+            <a:r>
+              <a:rPr lang="it-IT" dirty="0" err="1"/>
+              <a:t>Muthu</a:t>
+            </a:r>
+            <a:r>
+              <a:rPr lang="it-IT" dirty="0"/>
+              <a:t> </a:t>
+            </a:r>
+            <a:r>
+              <a:rPr lang="it-IT" dirty="0" err="1"/>
+              <a:t>Sivamuthu</a:t>
+            </a:r>
+            <a:r>
+              <a:rPr lang="it-IT" dirty="0"/>
+              <a:t> </a:t>
+            </a:r>
+            <a:r>
+              <a:rPr lang="en-DE" dirty="0"/>
+              <a:t> </a:t>
+            </a:r>
+          </a:p>
+        </p:txBody>
+      </p:sp>
+    </p:spTree>
+    <p:extLst>
+      <p:ext uri="{BB962C8B-B14F-4D97-AF65-F5344CB8AC3E}">
+        <p14:creationId xmlns:p14="http://schemas.microsoft.com/office/powerpoint/2010/main" val="935433091"/>
+      </p:ext>
+    </p:extLst>
+  </p:cSld>
+  <p:clrMapOvr>
+    <a:masterClrMapping/>
+  </p:clrMapOvr>
+</p:sld>
+</file>
+
+<file path=ppt/slides/slide6.xml><?xml version="1.0" encoding="utf-8"?>
+<p:sld xmlns:a="http://schemas.openxmlformats.org/drawingml/2006/main" xmlns:r="http://schemas.openxmlformats.org/officeDocument/2006/relationships" xmlns:p="http://schemas.openxmlformats.org/presentationml/2006/main">
+  <p:cSld>
+    <p:spTree>
+      <p:nvGrpSpPr>
+        <p:cNvPr id="1" name="">
+          <a:extLst>
+            <a:ext uri="{FF2B5EF4-FFF2-40B4-BE49-F238E27FC236}">
+              <a16:creationId xmlns:a16="http://schemas.microsoft.com/office/drawing/2014/main" id="{890FC4AC-7ED6-ACF9-8559-4E646007D532}"/>
+            </a:ext>
+          </a:extLst>
+        </p:cNvPr>
+        <p:cNvGrpSpPr/>
+        <p:nvPr/>
+      </p:nvGrpSpPr>
+      <p:grpSpPr>
+        <a:xfrm>
+          <a:off x="0" y="0"/>
+          <a:ext cx="0" cy="0"/>
+          <a:chOff x="0" y="0"/>
+          <a:chExt cx="0" cy="0"/>
+        </a:xfrm>
+      </p:grpSpPr>
+      <p:sp>
+        <p:nvSpPr>
+          <p:cNvPr id="2" name="Title 1">
+            <a:extLst>
+              <a:ext uri="{FF2B5EF4-FFF2-40B4-BE49-F238E27FC236}">
+                <a16:creationId xmlns:a16="http://schemas.microsoft.com/office/drawing/2014/main" id="{D8D413B2-D733-6934-4A18-CCEFE1D7619D}"/>
+              </a:ext>
+            </a:extLst>
+          </p:cNvPr>
+          <p:cNvSpPr>
+            <a:spLocks noGrp="1"/>
+          </p:cNvSpPr>
+          <p:nvPr>
+            <p:ph type="title"/>
+          </p:nvPr>
+        </p:nvSpPr>
+        <p:spPr>
+          <a:xfrm>
+            <a:off x="838200" y="410368"/>
+            <a:ext cx="8921262" cy="1325563"/>
+          </a:xfrm>
+        </p:spPr>
+        <p:txBody>
+          <a:bodyPr>
+            <a:normAutofit/>
+          </a:bodyPr>
+          <a:lstStyle/>
+          <a:p>
+            <a:r>
+              <a:rPr lang="it-IT" sz="3800" dirty="0"/>
+              <a:t>1 – Design of a Baseline Torque Controller</a:t>
+            </a:r>
+            <a:endParaRPr lang="en-GB" sz="3800" dirty="0"/>
+          </a:p>
+        </p:txBody>
+      </p:sp>
+      <p:sp>
+        <p:nvSpPr>
+          <p:cNvPr id="9" name="Content Placeholder 7">
+            <a:extLst>
+              <a:ext uri="{FF2B5EF4-FFF2-40B4-BE49-F238E27FC236}">
+                <a16:creationId xmlns:a16="http://schemas.microsoft.com/office/drawing/2014/main" id="{99DF7BC0-6B4E-FC01-941F-68DDFE781760}"/>
+              </a:ext>
+            </a:extLst>
+          </p:cNvPr>
+          <p:cNvSpPr txBox="1">
+            <a:spLocks/>
+          </p:cNvSpPr>
+          <p:nvPr/>
+        </p:nvSpPr>
+        <p:spPr>
+          <a:xfrm>
+            <a:off x="838200" y="1584692"/>
+            <a:ext cx="10515600" cy="764445"/>
+          </a:xfrm>
+          <a:prstGeom prst="rect">
+            <a:avLst/>
+          </a:prstGeom>
+        </p:spPr>
+        <p:txBody>
+          <a:bodyPr vert="horz" lIns="91440" tIns="45720" rIns="91440" bIns="45720" rtlCol="0">
+            <a:normAutofit/>
+          </a:bodyPr>
+          <a:lstStyle>
+            <a:lvl1pPr marL="228600" indent="-228600" algn="l" defTabSz="914400" rtl="0" eaLnBrk="1" latinLnBrk="0" hangingPunct="1">
+              <a:lnSpc>
+                <a:spcPct val="90000"/>
+              </a:lnSpc>
+              <a:spcBef>
+                <a:spcPts val="1000"/>
+              </a:spcBef>
+              <a:buFont typeface="Arial" panose="020B0604020202020204" pitchFamily="34" charset="0"/>
+              <a:buChar char="•"/>
+              <a:defRPr sz="2800" kern="1200">
+                <a:solidFill>
+                  <a:schemeClr val="tx1"/>
+                </a:solidFill>
+                <a:latin typeface="+mn-lt"/>
+                <a:ea typeface="+mn-ea"/>
+                <a:cs typeface="+mn-cs"/>
+              </a:defRPr>
+            </a:lvl1pPr>
+            <a:lvl2pPr marL="685800" indent="-228600" algn="l" defTabSz="914400" rtl="0" eaLnBrk="1" latinLnBrk="0" hangingPunct="1">
+              <a:lnSpc>
+                <a:spcPct val="90000"/>
+              </a:lnSpc>
+              <a:spcBef>
+                <a:spcPts val="500"/>
+              </a:spcBef>
+              <a:buFont typeface="Arial" panose="020B0604020202020204" pitchFamily="34" charset="0"/>
+              <a:buChar char="•"/>
+              <a:defRPr sz="2400" kern="1200">
+                <a:solidFill>
+                  <a:schemeClr val="tx1"/>
+                </a:solidFill>
+                <a:latin typeface="+mn-lt"/>
+                <a:ea typeface="+mn-ea"/>
+                <a:cs typeface="+mn-cs"/>
+              </a:defRPr>
+            </a:lvl2pPr>
+            <a:lvl3pPr marL="1143000" indent="-228600" algn="l" defTabSz="914400" rtl="0" eaLnBrk="1" latinLnBrk="0" hangingPunct="1">
+              <a:lnSpc>
+                <a:spcPct val="90000"/>
+              </a:lnSpc>
+              <a:spcBef>
+                <a:spcPts val="500"/>
+              </a:spcBef>
+              <a:buFont typeface="Arial" panose="020B0604020202020204" pitchFamily="34" charset="0"/>
+              <a:buChar char="•"/>
+              <a:defRPr sz="2000" kern="1200">
+                <a:solidFill>
+                  <a:schemeClr val="tx1"/>
+                </a:solidFill>
+                <a:latin typeface="+mn-lt"/>
+                <a:ea typeface="+mn-ea"/>
+                <a:cs typeface="+mn-cs"/>
+              </a:defRPr>
+            </a:lvl3pPr>
+            <a:lvl4pPr marL="1600200" indent="-228600" algn="l" defTabSz="914400" rtl="0" eaLnBrk="1" latinLnBrk="0" hangingPunct="1">
+              <a:lnSpc>
+                <a:spcPct val="90000"/>
+              </a:lnSpc>
+              <a:spcBef>
+                <a:spcPts val="500"/>
+              </a:spcBef>
+              <a:buFont typeface="Arial" panose="020B0604020202020204" pitchFamily="34" charset="0"/>
+              <a:buChar char="•"/>
+              <a:defRPr sz="1800" kern="1200">
+                <a:solidFill>
+                  <a:schemeClr val="tx1"/>
+                </a:solidFill>
+                <a:latin typeface="+mn-lt"/>
+                <a:ea typeface="+mn-ea"/>
+                <a:cs typeface="+mn-cs"/>
+              </a:defRPr>
+            </a:lvl4pPr>
+            <a:lvl5pPr marL="2057400" indent="-228600" algn="l" defTabSz="914400" rtl="0" eaLnBrk="1" latinLnBrk="0" hangingPunct="1">
+              <a:lnSpc>
+                <a:spcPct val="90000"/>
+              </a:lnSpc>
+              <a:spcBef>
+                <a:spcPts val="500"/>
+              </a:spcBef>
+              <a:buFont typeface="Arial" panose="020B0604020202020204" pitchFamily="34" charset="0"/>
+              <a:buChar char="•"/>
+              <a:defRPr sz="1800" kern="1200">
+                <a:solidFill>
+                  <a:schemeClr val="tx1"/>
+                </a:solidFill>
+                <a:latin typeface="+mn-lt"/>
+                <a:ea typeface="+mn-ea"/>
+                <a:cs typeface="+mn-cs"/>
+              </a:defRPr>
+            </a:lvl5pPr>
+            <a:lvl6pPr marL="2514600" indent="-228600" algn="l" defTabSz="914400" rtl="0" eaLnBrk="1" latinLnBrk="0" hangingPunct="1">
+              <a:lnSpc>
+                <a:spcPct val="90000"/>
+              </a:lnSpc>
+              <a:spcBef>
+                <a:spcPts val="500"/>
+              </a:spcBef>
+              <a:buFont typeface="Arial" panose="020B0604020202020204" pitchFamily="34" charset="0"/>
+              <a:buChar char="•"/>
+              <a:defRPr sz="1800" kern="1200">
+                <a:solidFill>
+                  <a:schemeClr val="tx1"/>
+                </a:solidFill>
+                <a:latin typeface="+mn-lt"/>
+                <a:ea typeface="+mn-ea"/>
+                <a:cs typeface="+mn-cs"/>
+              </a:defRPr>
+            </a:lvl6pPr>
+            <a:lvl7pPr marL="2971800" indent="-228600" algn="l" defTabSz="914400" rtl="0" eaLnBrk="1" latinLnBrk="0" hangingPunct="1">
+              <a:lnSpc>
+                <a:spcPct val="90000"/>
+              </a:lnSpc>
+              <a:spcBef>
+                <a:spcPts val="500"/>
+              </a:spcBef>
+              <a:buFont typeface="Arial" panose="020B0604020202020204" pitchFamily="34" charset="0"/>
+              <a:buChar char="•"/>
+              <a:defRPr sz="1800" kern="1200">
+                <a:solidFill>
+                  <a:schemeClr val="tx1"/>
+                </a:solidFill>
+                <a:latin typeface="+mn-lt"/>
+                <a:ea typeface="+mn-ea"/>
+                <a:cs typeface="+mn-cs"/>
+              </a:defRPr>
+            </a:lvl7pPr>
+            <a:lvl8pPr marL="3429000" indent="-228600" algn="l" defTabSz="914400" rtl="0" eaLnBrk="1" latinLnBrk="0" hangingPunct="1">
+              <a:lnSpc>
+                <a:spcPct val="90000"/>
+              </a:lnSpc>
+              <a:spcBef>
+                <a:spcPts val="500"/>
+              </a:spcBef>
+              <a:buFont typeface="Arial" panose="020B0604020202020204" pitchFamily="34" charset="0"/>
+              <a:buChar char="•"/>
+              <a:defRPr sz="1800" kern="1200">
+                <a:solidFill>
+                  <a:schemeClr val="tx1"/>
+                </a:solidFill>
+                <a:latin typeface="+mn-lt"/>
+                <a:ea typeface="+mn-ea"/>
+                <a:cs typeface="+mn-cs"/>
+              </a:defRPr>
+            </a:lvl8pPr>
+            <a:lvl9pPr marL="3886200" indent="-228600" algn="l" defTabSz="914400" rtl="0" eaLnBrk="1" latinLnBrk="0" hangingPunct="1">
+              <a:lnSpc>
+                <a:spcPct val="90000"/>
+              </a:lnSpc>
+              <a:spcBef>
+                <a:spcPts val="500"/>
+              </a:spcBef>
+              <a:buFont typeface="Arial" panose="020B0604020202020204" pitchFamily="34" charset="0"/>
+              <a:buChar char="•"/>
+              <a:defRPr sz="1800" kern="1200">
+                <a:solidFill>
+                  <a:schemeClr val="tx1"/>
+                </a:solidFill>
+                <a:latin typeface="+mn-lt"/>
+                <a:ea typeface="+mn-ea"/>
+                <a:cs typeface="+mn-cs"/>
+              </a:defRPr>
+            </a:lvl9pPr>
+          </a:lstStyle>
+          <a:p>
+            <a:pPr marL="0" indent="0">
+              <a:buFont typeface="Arial" panose="020B0604020202020204" pitchFamily="34" charset="0"/>
+              <a:buNone/>
+            </a:pPr>
+            <a:r>
+              <a:rPr lang="it-IT" sz="2000" dirty="0"/>
+              <a:t>d) </a:t>
+            </a:r>
+            <a:r>
+              <a:rPr lang="it-IT" sz="2000" dirty="0" err="1"/>
+              <a:t>Implementation</a:t>
+            </a:r>
+            <a:r>
+              <a:rPr lang="it-IT" sz="2000" dirty="0"/>
+              <a:t> of the </a:t>
+            </a:r>
+            <a:r>
+              <a:rPr lang="it-IT" sz="2000" dirty="0" err="1"/>
+              <a:t>function</a:t>
+            </a:r>
+            <a:r>
+              <a:rPr lang="it-IT" sz="2000" dirty="0"/>
+              <a:t> inside of the baseline controller inside of the </a:t>
+            </a:r>
+            <a:r>
+              <a:rPr lang="it-IT" sz="2000" dirty="0" err="1"/>
+              <a:t>Simulink</a:t>
+            </a:r>
+            <a:r>
+              <a:rPr lang="it-IT" sz="2000" dirty="0"/>
+              <a:t> </a:t>
+            </a:r>
+            <a:r>
+              <a:rPr lang="it-IT" sz="2000" dirty="0" err="1"/>
+              <a:t>structure</a:t>
+            </a:r>
+            <a:endParaRPr lang="it-IT" sz="2000" dirty="0"/>
+          </a:p>
+        </p:txBody>
+      </p:sp>
+      <p:pic>
+        <p:nvPicPr>
+          <p:cNvPr id="7" name="Picture 6">
+            <a:extLst>
+              <a:ext uri="{FF2B5EF4-FFF2-40B4-BE49-F238E27FC236}">
+                <a16:creationId xmlns:a16="http://schemas.microsoft.com/office/drawing/2014/main" id="{3C7006BA-D8A1-94F3-5B6A-3286E0A1AD46}"/>
+              </a:ext>
+            </a:extLst>
+          </p:cNvPr>
+          <p:cNvPicPr>
+            <a:picLocks noChangeAspect="1"/>
+          </p:cNvPicPr>
+          <p:nvPr/>
+        </p:nvPicPr>
+        <p:blipFill>
+          <a:blip r:embed="rId2"/>
+          <a:stretch>
+            <a:fillRect/>
+          </a:stretch>
+        </p:blipFill>
+        <p:spPr>
+          <a:xfrm>
+            <a:off x="267169" y="2667463"/>
+            <a:ext cx="3608811" cy="2203475"/>
+          </a:xfrm>
+          <a:prstGeom prst="rect">
+            <a:avLst/>
+          </a:prstGeom>
+        </p:spPr>
+      </p:pic>
+      <p:sp>
+        <p:nvSpPr>
+          <p:cNvPr id="8" name="Rectangle 7">
+            <a:extLst>
+              <a:ext uri="{FF2B5EF4-FFF2-40B4-BE49-F238E27FC236}">
+                <a16:creationId xmlns:a16="http://schemas.microsoft.com/office/drawing/2014/main" id="{9759BD24-084B-72E6-FC2F-5252F52D2E95}"/>
+              </a:ext>
+            </a:extLst>
+          </p:cNvPr>
+          <p:cNvSpPr/>
+          <p:nvPr/>
+        </p:nvSpPr>
+        <p:spPr>
+          <a:xfrm>
+            <a:off x="1222928" y="3429000"/>
+            <a:ext cx="1071864" cy="1160585"/>
+          </a:xfrm>
+          <a:prstGeom prst="rect">
+            <a:avLst/>
+          </a:prstGeom>
+          <a:noFill/>
+          <a:ln w="38100" cap="flat" cmpd="sng" algn="ctr">
+            <a:solidFill>
+              <a:srgbClr val="C00000"/>
+            </a:solidFill>
+            <a:prstDash val="solid"/>
+            <a:round/>
+            <a:headEnd type="none" w="med" len="med"/>
+            <a:tailEnd type="none" w="med" len="med"/>
+          </a:ln>
+        </p:spPr>
+        <p:style>
+          <a:lnRef idx="0">
+            <a:scrgbClr r="0" g="0" b="0"/>
+          </a:lnRef>
+          <a:fillRef idx="0">
+            <a:scrgbClr r="0" g="0" b="0"/>
+          </a:fillRef>
+          <a:effectRef idx="0">
+            <a:scrgbClr r="0" g="0" b="0"/>
+          </a:effectRef>
+          <a:fontRef idx="minor">
+            <a:schemeClr val="accent2"/>
+          </a:fontRef>
+        </p:style>
+        <p:txBody>
+          <a:bodyPr rtlCol="0" anchor="ctr"/>
+          <a:lstStyle/>
+          <a:p>
+            <a:pPr algn="ctr"/>
+            <a:endParaRPr lang="en-GB"/>
+          </a:p>
+        </p:txBody>
+      </p:sp>
+      <p:pic>
+        <p:nvPicPr>
+          <p:cNvPr id="15" name="Picture 14">
+            <a:extLst>
+              <a:ext uri="{FF2B5EF4-FFF2-40B4-BE49-F238E27FC236}">
+                <a16:creationId xmlns:a16="http://schemas.microsoft.com/office/drawing/2014/main" id="{33FE6F24-9361-189D-F3DC-EDAB6E1EDF2A}"/>
+              </a:ext>
+            </a:extLst>
+          </p:cNvPr>
+          <p:cNvPicPr>
+            <a:picLocks noChangeAspect="1"/>
+          </p:cNvPicPr>
+          <p:nvPr/>
+        </p:nvPicPr>
+        <p:blipFill>
+          <a:blip r:embed="rId3"/>
+          <a:stretch>
+            <a:fillRect/>
+          </a:stretch>
+        </p:blipFill>
+        <p:spPr>
+          <a:xfrm>
+            <a:off x="4501458" y="2588720"/>
+            <a:ext cx="3586076" cy="2343376"/>
+          </a:xfrm>
+          <a:prstGeom prst="rect">
+            <a:avLst/>
+          </a:prstGeom>
+        </p:spPr>
+      </p:pic>
+      <p:sp>
+        <p:nvSpPr>
+          <p:cNvPr id="10" name="Arrow: Right 9">
+            <a:extLst>
+              <a:ext uri="{FF2B5EF4-FFF2-40B4-BE49-F238E27FC236}">
+                <a16:creationId xmlns:a16="http://schemas.microsoft.com/office/drawing/2014/main" id="{940526FA-9961-ED2B-BCA8-B2EECC49DAD6}"/>
+              </a:ext>
+            </a:extLst>
+          </p:cNvPr>
+          <p:cNvSpPr/>
+          <p:nvPr/>
+        </p:nvSpPr>
+        <p:spPr>
+          <a:xfrm>
+            <a:off x="3807077" y="3760408"/>
+            <a:ext cx="940777" cy="345600"/>
+          </a:xfrm>
+          <a:prstGeom prst="rightArrow">
+            <a:avLst/>
+          </a:prstGeom>
+          <a:solidFill>
+            <a:srgbClr val="C00000"/>
+          </a:solidFill>
+          <a:ln>
+            <a:solidFill>
+              <a:srgbClr val="C00000"/>
+            </a:solidFill>
+          </a:ln>
+        </p:spPr>
+        <p:style>
+          <a:lnRef idx="2">
+            <a:schemeClr val="accent1">
+              <a:shade val="15000"/>
+            </a:schemeClr>
+          </a:lnRef>
+          <a:fillRef idx="1">
+            <a:schemeClr val="accent1"/>
+          </a:fillRef>
+          <a:effectRef idx="0">
+            <a:schemeClr val="accent1"/>
+          </a:effectRef>
+          <a:fontRef idx="minor">
+            <a:schemeClr val="lt1"/>
+          </a:fontRef>
+        </p:style>
+        <p:txBody>
+          <a:bodyPr rtlCol="0" anchor="ctr"/>
+          <a:lstStyle/>
+          <a:p>
+            <a:pPr algn="ctr"/>
+            <a:endParaRPr lang="en-GB"/>
+          </a:p>
+        </p:txBody>
+      </p:sp>
+      <p:sp>
+        <p:nvSpPr>
+          <p:cNvPr id="16" name="Arrow: Right 15">
+            <a:extLst>
+              <a:ext uri="{FF2B5EF4-FFF2-40B4-BE49-F238E27FC236}">
+                <a16:creationId xmlns:a16="http://schemas.microsoft.com/office/drawing/2014/main" id="{6989B3C4-E700-D3E7-7D74-AECA184357A8}"/>
+              </a:ext>
+            </a:extLst>
+          </p:cNvPr>
+          <p:cNvSpPr/>
+          <p:nvPr/>
+        </p:nvSpPr>
+        <p:spPr>
+          <a:xfrm>
+            <a:off x="7763438" y="3760408"/>
+            <a:ext cx="940777" cy="345600"/>
+          </a:xfrm>
+          <a:prstGeom prst="rightArrow">
+            <a:avLst/>
+          </a:prstGeom>
+          <a:solidFill>
+            <a:srgbClr val="C00000"/>
+          </a:solidFill>
+          <a:ln>
+            <a:solidFill>
+              <a:srgbClr val="C00000"/>
+            </a:solidFill>
+          </a:ln>
+        </p:spPr>
+        <p:style>
+          <a:lnRef idx="2">
+            <a:schemeClr val="accent1">
+              <a:shade val="15000"/>
+            </a:schemeClr>
+          </a:lnRef>
+          <a:fillRef idx="1">
+            <a:schemeClr val="accent1"/>
+          </a:fillRef>
+          <a:effectRef idx="0">
+            <a:schemeClr val="accent1"/>
+          </a:effectRef>
+          <a:fontRef idx="minor">
+            <a:schemeClr val="lt1"/>
+          </a:fontRef>
+        </p:style>
+        <p:txBody>
+          <a:bodyPr rtlCol="0" anchor="ctr"/>
+          <a:lstStyle/>
+          <a:p>
+            <a:pPr algn="ctr"/>
+            <a:endParaRPr lang="en-GB"/>
+          </a:p>
+        </p:txBody>
+      </p:sp>
+      <p:pic>
+        <p:nvPicPr>
+          <p:cNvPr id="19" name="Picture 18">
+            <a:extLst>
+              <a:ext uri="{FF2B5EF4-FFF2-40B4-BE49-F238E27FC236}">
+                <a16:creationId xmlns:a16="http://schemas.microsoft.com/office/drawing/2014/main" id="{49F4EBA4-580E-9CA4-21DA-B23D88549E7E}"/>
+              </a:ext>
+            </a:extLst>
+          </p:cNvPr>
+          <p:cNvPicPr>
+            <a:picLocks noChangeAspect="1"/>
+          </p:cNvPicPr>
+          <p:nvPr/>
+        </p:nvPicPr>
+        <p:blipFill>
+          <a:blip r:embed="rId4"/>
+          <a:stretch>
+            <a:fillRect/>
+          </a:stretch>
+        </p:blipFill>
+        <p:spPr>
+          <a:xfrm>
+            <a:off x="8736638" y="2588720"/>
+            <a:ext cx="3188193" cy="2573602"/>
+          </a:xfrm>
+          <a:prstGeom prst="rect">
+            <a:avLst/>
+          </a:prstGeom>
+        </p:spPr>
+      </p:pic>
+      <p:sp>
+        <p:nvSpPr>
+          <p:cNvPr id="20" name="Rectangle 19">
+            <a:extLst>
+              <a:ext uri="{FF2B5EF4-FFF2-40B4-BE49-F238E27FC236}">
+                <a16:creationId xmlns:a16="http://schemas.microsoft.com/office/drawing/2014/main" id="{AAFDC3FA-3188-CEEF-7C4C-700222B78A6C}"/>
+              </a:ext>
+            </a:extLst>
+          </p:cNvPr>
+          <p:cNvSpPr/>
+          <p:nvPr/>
+        </p:nvSpPr>
+        <p:spPr>
+          <a:xfrm>
+            <a:off x="6005147" y="2910255"/>
+            <a:ext cx="1161788" cy="850153"/>
+          </a:xfrm>
+          <a:prstGeom prst="rect">
+            <a:avLst/>
+          </a:prstGeom>
+          <a:noFill/>
+          <a:ln w="38100" cap="flat" cmpd="sng" algn="ctr">
+            <a:solidFill>
+              <a:srgbClr val="C00000"/>
+            </a:solidFill>
+            <a:prstDash val="solid"/>
+            <a:round/>
+            <a:headEnd type="none" w="med" len="med"/>
+            <a:tailEnd type="none" w="med" len="med"/>
+          </a:ln>
+        </p:spPr>
+        <p:style>
+          <a:lnRef idx="0">
+            <a:scrgbClr r="0" g="0" b="0"/>
+          </a:lnRef>
+          <a:fillRef idx="0">
+            <a:scrgbClr r="0" g="0" b="0"/>
+          </a:fillRef>
+          <a:effectRef idx="0">
+            <a:scrgbClr r="0" g="0" b="0"/>
+          </a:effectRef>
+          <a:fontRef idx="minor">
+            <a:schemeClr val="accent2"/>
+          </a:fontRef>
+        </p:style>
+        <p:txBody>
+          <a:bodyPr rtlCol="0" anchor="ctr"/>
+          <a:lstStyle/>
+          <a:p>
+            <a:pPr algn="ctr"/>
+            <a:endParaRPr lang="en-GB"/>
+          </a:p>
+        </p:txBody>
+      </p:sp>
+      <p:sp>
+        <p:nvSpPr>
+          <p:cNvPr id="21" name="Date Placeholder 3">
+            <a:extLst>
+              <a:ext uri="{FF2B5EF4-FFF2-40B4-BE49-F238E27FC236}">
+                <a16:creationId xmlns:a16="http://schemas.microsoft.com/office/drawing/2014/main" id="{14D13847-40F8-53BC-2DAA-ECB9D41AEE69}"/>
+              </a:ext>
+            </a:extLst>
+          </p:cNvPr>
+          <p:cNvSpPr>
+            <a:spLocks noGrp="1"/>
+          </p:cNvSpPr>
+          <p:nvPr>
+            <p:ph type="dt" sz="half" idx="10"/>
+          </p:nvPr>
+        </p:nvSpPr>
+        <p:spPr>
+          <a:xfrm>
+            <a:off x="838200" y="6356350"/>
+            <a:ext cx="2743200" cy="365125"/>
+          </a:xfrm>
+        </p:spPr>
+        <p:txBody>
+          <a:bodyPr/>
+          <a:lstStyle/>
+          <a:p>
+            <a:fld id="{42FF62D6-EE07-404C-A186-889D29CA3091}" type="datetime1">
+              <a:rPr lang="LID4096" smtClean="0"/>
+              <a:t>10/11/2025</a:t>
+            </a:fld>
+            <a:endParaRPr lang="en-DE"/>
+          </a:p>
+        </p:txBody>
+      </p:sp>
+      <p:sp>
+        <p:nvSpPr>
+          <p:cNvPr id="23" name="Slide Number Placeholder 5">
+            <a:extLst>
+              <a:ext uri="{FF2B5EF4-FFF2-40B4-BE49-F238E27FC236}">
+                <a16:creationId xmlns:a16="http://schemas.microsoft.com/office/drawing/2014/main" id="{CBE84831-418F-09CC-8AE1-7AD484DCEEC0}"/>
+              </a:ext>
+            </a:extLst>
+          </p:cNvPr>
+          <p:cNvSpPr>
+            <a:spLocks noGrp="1"/>
+          </p:cNvSpPr>
+          <p:nvPr>
+            <p:ph type="sldNum" sz="quarter" idx="12"/>
+          </p:nvPr>
+        </p:nvSpPr>
+        <p:spPr>
+          <a:xfrm>
+            <a:off x="8610600" y="6356350"/>
+            <a:ext cx="2743200" cy="365125"/>
+          </a:xfrm>
+        </p:spPr>
+        <p:txBody>
+          <a:bodyPr/>
+          <a:lstStyle/>
+          <a:p>
+            <a:fld id="{F9C2340B-4B0F-4DED-BE4C-833C39BBA64E}" type="slidenum">
+              <a:rPr lang="en-DE" smtClean="0"/>
+              <a:t>6</a:t>
+            </a:fld>
+            <a:endParaRPr lang="en-DE"/>
+          </a:p>
+        </p:txBody>
+      </p:sp>
+      <p:sp>
+        <p:nvSpPr>
+          <p:cNvPr id="24" name="Footer Placeholder 4">
+            <a:extLst>
+              <a:ext uri="{FF2B5EF4-FFF2-40B4-BE49-F238E27FC236}">
+                <a16:creationId xmlns:a16="http://schemas.microsoft.com/office/drawing/2014/main" id="{7B8FE055-906D-DD28-7D1E-38EE56E3E8BE}"/>
+              </a:ext>
+            </a:extLst>
+          </p:cNvPr>
+          <p:cNvSpPr>
+            <a:spLocks noGrp="1"/>
+          </p:cNvSpPr>
+          <p:nvPr>
+            <p:ph type="ftr" sz="quarter" idx="11"/>
+          </p:nvPr>
+        </p:nvSpPr>
+        <p:spPr>
+          <a:xfrm>
+            <a:off x="2781300" y="6356349"/>
+            <a:ext cx="6629400" cy="365125"/>
+          </a:xfrm>
+        </p:spPr>
+        <p:txBody>
+          <a:bodyPr/>
+          <a:lstStyle/>
+          <a:p>
+            <a:r>
+              <a:rPr lang="en-DE" dirty="0"/>
+              <a:t>Group 3:</a:t>
+            </a:r>
+            <a:r>
+              <a:rPr lang="it-IT" dirty="0"/>
+              <a:t> Federico De Mita, </a:t>
+            </a:r>
+            <a:r>
+              <a:rPr lang="it-IT" dirty="0" err="1"/>
+              <a:t>Waqas</a:t>
+            </a:r>
+            <a:r>
+              <a:rPr lang="it-IT" dirty="0"/>
+              <a:t> Ahmed, Dominic </a:t>
+            </a:r>
+            <a:r>
+              <a:rPr lang="it-IT" dirty="0" err="1"/>
+              <a:t>Annang</a:t>
+            </a:r>
+            <a:r>
+              <a:rPr lang="it-IT" dirty="0"/>
+              <a:t>, Hesham </a:t>
+            </a:r>
+            <a:r>
+              <a:rPr lang="it-IT" dirty="0" err="1"/>
+              <a:t>Magdy</a:t>
+            </a:r>
+            <a:r>
+              <a:rPr lang="it-IT" dirty="0"/>
+              <a:t>, </a:t>
+            </a:r>
+            <a:r>
+              <a:rPr lang="it-IT" dirty="0" err="1"/>
+              <a:t>Muthu</a:t>
+            </a:r>
+            <a:r>
+              <a:rPr lang="it-IT" dirty="0"/>
+              <a:t> </a:t>
+            </a:r>
+            <a:r>
+              <a:rPr lang="it-IT" dirty="0" err="1"/>
+              <a:t>Sivamuthu</a:t>
+            </a:r>
+            <a:r>
+              <a:rPr lang="it-IT" dirty="0"/>
+              <a:t> </a:t>
+            </a:r>
+            <a:r>
+              <a:rPr lang="en-DE" dirty="0"/>
+              <a:t> </a:t>
+            </a:r>
+          </a:p>
+        </p:txBody>
+      </p:sp>
+    </p:spTree>
+    <p:extLst>
+      <p:ext uri="{BB962C8B-B14F-4D97-AF65-F5344CB8AC3E}">
+        <p14:creationId xmlns:p14="http://schemas.microsoft.com/office/powerpoint/2010/main" val="2417978243"/>
+      </p:ext>
+    </p:extLst>
+  </p:cSld>
+  <p:clrMapOvr>
+    <a:masterClrMapping/>
+  </p:clrMapOvr>
+</p:sld>
+</file>
+
+<file path=ppt/slides/slide7.xml><?xml version="1.0" encoding="utf-8"?>
+<p:sld xmlns:a="http://schemas.openxmlformats.org/drawingml/2006/main" xmlns:r="http://schemas.openxmlformats.org/officeDocument/2006/relationships" xmlns:p="http://schemas.openxmlformats.org/presentationml/2006/main">
+  <p:cSld>
+    <p:spTree>
+      <p:nvGrpSpPr>
+        <p:cNvPr id="1" name="">
+          <a:extLst>
+            <a:ext uri="{FF2B5EF4-FFF2-40B4-BE49-F238E27FC236}">
+              <a16:creationId xmlns:a16="http://schemas.microsoft.com/office/drawing/2014/main" id="{2C8BE1A2-67DE-5D69-B285-8EAAC83EBFA8}"/>
+            </a:ext>
+          </a:extLst>
+        </p:cNvPr>
+        <p:cNvGrpSpPr/>
+        <p:nvPr/>
+      </p:nvGrpSpPr>
+      <p:grpSpPr>
+        <a:xfrm>
+          <a:off x="0" y="0"/>
+          <a:ext cx="0" cy="0"/>
+          <a:chOff x="0" y="0"/>
+          <a:chExt cx="0" cy="0"/>
+        </a:xfrm>
+      </p:grpSpPr>
+      <p:sp>
+        <p:nvSpPr>
+          <p:cNvPr id="2" name="Title 1">
+            <a:extLst>
+              <a:ext uri="{FF2B5EF4-FFF2-40B4-BE49-F238E27FC236}">
+                <a16:creationId xmlns:a16="http://schemas.microsoft.com/office/drawing/2014/main" id="{FE9E38F5-5E40-08B1-B92C-C423E3A8F809}"/>
+              </a:ext>
+            </a:extLst>
+          </p:cNvPr>
+          <p:cNvSpPr>
+            <a:spLocks noGrp="1"/>
+          </p:cNvSpPr>
+          <p:nvPr>
+            <p:ph type="title"/>
+          </p:nvPr>
+        </p:nvSpPr>
+        <p:spPr>
+          <a:xfrm>
+            <a:off x="838200" y="410368"/>
+            <a:ext cx="8921262" cy="1325563"/>
+          </a:xfrm>
+        </p:spPr>
+        <p:txBody>
+          <a:bodyPr>
+            <a:normAutofit/>
+          </a:bodyPr>
+          <a:lstStyle/>
+          <a:p>
+            <a:r>
+              <a:rPr lang="it-IT" sz="3800" dirty="0"/>
+              <a:t>1 – Design of a Baseline Torque Controller</a:t>
+            </a:r>
+            <a:endParaRPr lang="en-GB" sz="3800" dirty="0"/>
+          </a:p>
+        </p:txBody>
+      </p:sp>
+      <p:sp>
+        <p:nvSpPr>
+          <p:cNvPr id="9" name="Content Placeholder 7">
+            <a:extLst>
+              <a:ext uri="{FF2B5EF4-FFF2-40B4-BE49-F238E27FC236}">
+                <a16:creationId xmlns:a16="http://schemas.microsoft.com/office/drawing/2014/main" id="{B115E864-91FB-98B0-C139-D03889A8FB7B}"/>
+              </a:ext>
+            </a:extLst>
+          </p:cNvPr>
+          <p:cNvSpPr txBox="1">
+            <a:spLocks/>
+          </p:cNvSpPr>
+          <p:nvPr/>
+        </p:nvSpPr>
+        <p:spPr>
+          <a:xfrm>
+            <a:off x="838200" y="1584692"/>
+            <a:ext cx="10515600" cy="764445"/>
+          </a:xfrm>
+          <a:prstGeom prst="rect">
+            <a:avLst/>
+          </a:prstGeom>
+        </p:spPr>
+        <p:txBody>
+          <a:bodyPr vert="horz" lIns="91440" tIns="45720" rIns="91440" bIns="45720" rtlCol="0">
+            <a:normAutofit/>
+          </a:bodyPr>
+          <a:lstStyle>
+            <a:lvl1pPr marL="228600" indent="-228600" algn="l" defTabSz="914400" rtl="0" eaLnBrk="1" latinLnBrk="0" hangingPunct="1">
+              <a:lnSpc>
+                <a:spcPct val="90000"/>
+              </a:lnSpc>
+              <a:spcBef>
+                <a:spcPts val="1000"/>
+              </a:spcBef>
+              <a:buFont typeface="Arial" panose="020B0604020202020204" pitchFamily="34" charset="0"/>
+              <a:buChar char="•"/>
+              <a:defRPr sz="2800" kern="1200">
+                <a:solidFill>
+                  <a:schemeClr val="tx1"/>
+                </a:solidFill>
+                <a:latin typeface="+mn-lt"/>
+                <a:ea typeface="+mn-ea"/>
+                <a:cs typeface="+mn-cs"/>
+              </a:defRPr>
+            </a:lvl1pPr>
+            <a:lvl2pPr marL="685800" indent="-228600" algn="l" defTabSz="914400" rtl="0" eaLnBrk="1" latinLnBrk="0" hangingPunct="1">
+              <a:lnSpc>
+                <a:spcPct val="90000"/>
+              </a:lnSpc>
+              <a:spcBef>
+                <a:spcPts val="500"/>
+              </a:spcBef>
+              <a:buFont typeface="Arial" panose="020B0604020202020204" pitchFamily="34" charset="0"/>
+              <a:buChar char="•"/>
+              <a:defRPr sz="2400" kern="1200">
+                <a:solidFill>
+                  <a:schemeClr val="tx1"/>
+                </a:solidFill>
+                <a:latin typeface="+mn-lt"/>
+                <a:ea typeface="+mn-ea"/>
+                <a:cs typeface="+mn-cs"/>
+              </a:defRPr>
+            </a:lvl2pPr>
+            <a:lvl3pPr marL="1143000" indent="-228600" algn="l" defTabSz="914400" rtl="0" eaLnBrk="1" latinLnBrk="0" hangingPunct="1">
+              <a:lnSpc>
+                <a:spcPct val="90000"/>
+              </a:lnSpc>
+              <a:spcBef>
+                <a:spcPts val="500"/>
+              </a:spcBef>
+              <a:buFont typeface="Arial" panose="020B0604020202020204" pitchFamily="34" charset="0"/>
+              <a:buChar char="•"/>
+              <a:defRPr sz="2000" kern="1200">
+                <a:solidFill>
+                  <a:schemeClr val="tx1"/>
+                </a:solidFill>
+                <a:latin typeface="+mn-lt"/>
+                <a:ea typeface="+mn-ea"/>
+                <a:cs typeface="+mn-cs"/>
+              </a:defRPr>
+            </a:lvl3pPr>
+            <a:lvl4pPr marL="1600200" indent="-228600" algn="l" defTabSz="914400" rtl="0" eaLnBrk="1" latinLnBrk="0" hangingPunct="1">
+              <a:lnSpc>
+                <a:spcPct val="90000"/>
+              </a:lnSpc>
+              <a:spcBef>
+                <a:spcPts val="500"/>
+              </a:spcBef>
+              <a:buFont typeface="Arial" panose="020B0604020202020204" pitchFamily="34" charset="0"/>
+              <a:buChar char="•"/>
+              <a:defRPr sz="1800" kern="1200">
+                <a:solidFill>
+                  <a:schemeClr val="tx1"/>
+                </a:solidFill>
+                <a:latin typeface="+mn-lt"/>
+                <a:ea typeface="+mn-ea"/>
+                <a:cs typeface="+mn-cs"/>
+              </a:defRPr>
+            </a:lvl4pPr>
+            <a:lvl5pPr marL="2057400" indent="-228600" algn="l" defTabSz="914400" rtl="0" eaLnBrk="1" latinLnBrk="0" hangingPunct="1">
+              <a:lnSpc>
+                <a:spcPct val="90000"/>
+              </a:lnSpc>
+              <a:spcBef>
+                <a:spcPts val="500"/>
+              </a:spcBef>
+              <a:buFont typeface="Arial" panose="020B0604020202020204" pitchFamily="34" charset="0"/>
+              <a:buChar char="•"/>
+              <a:defRPr sz="1800" kern="1200">
+                <a:solidFill>
+                  <a:schemeClr val="tx1"/>
+                </a:solidFill>
+                <a:latin typeface="+mn-lt"/>
+                <a:ea typeface="+mn-ea"/>
+                <a:cs typeface="+mn-cs"/>
+              </a:defRPr>
+            </a:lvl5pPr>
+            <a:lvl6pPr marL="2514600" indent="-228600" algn="l" defTabSz="914400" rtl="0" eaLnBrk="1" latinLnBrk="0" hangingPunct="1">
+              <a:lnSpc>
+                <a:spcPct val="90000"/>
+              </a:lnSpc>
+              <a:spcBef>
+                <a:spcPts val="500"/>
+              </a:spcBef>
+              <a:buFont typeface="Arial" panose="020B0604020202020204" pitchFamily="34" charset="0"/>
+              <a:buChar char="•"/>
+              <a:defRPr sz="1800" kern="1200">
+                <a:solidFill>
+                  <a:schemeClr val="tx1"/>
+                </a:solidFill>
+                <a:latin typeface="+mn-lt"/>
+                <a:ea typeface="+mn-ea"/>
+                <a:cs typeface="+mn-cs"/>
+              </a:defRPr>
+            </a:lvl6pPr>
+            <a:lvl7pPr marL="2971800" indent="-228600" algn="l" defTabSz="914400" rtl="0" eaLnBrk="1" latinLnBrk="0" hangingPunct="1">
+              <a:lnSpc>
+                <a:spcPct val="90000"/>
+              </a:lnSpc>
+              <a:spcBef>
+                <a:spcPts val="500"/>
+              </a:spcBef>
+              <a:buFont typeface="Arial" panose="020B0604020202020204" pitchFamily="34" charset="0"/>
+              <a:buChar char="•"/>
+              <a:defRPr sz="1800" kern="1200">
+                <a:solidFill>
+                  <a:schemeClr val="tx1"/>
+                </a:solidFill>
+                <a:latin typeface="+mn-lt"/>
+                <a:ea typeface="+mn-ea"/>
+                <a:cs typeface="+mn-cs"/>
+              </a:defRPr>
+            </a:lvl7pPr>
+            <a:lvl8pPr marL="3429000" indent="-228600" algn="l" defTabSz="914400" rtl="0" eaLnBrk="1" latinLnBrk="0" hangingPunct="1">
+              <a:lnSpc>
+                <a:spcPct val="90000"/>
+              </a:lnSpc>
+              <a:spcBef>
+                <a:spcPts val="500"/>
+              </a:spcBef>
+              <a:buFont typeface="Arial" panose="020B0604020202020204" pitchFamily="34" charset="0"/>
+              <a:buChar char="•"/>
+              <a:defRPr sz="1800" kern="1200">
+                <a:solidFill>
+                  <a:schemeClr val="tx1"/>
+                </a:solidFill>
+                <a:latin typeface="+mn-lt"/>
+                <a:ea typeface="+mn-ea"/>
+                <a:cs typeface="+mn-cs"/>
+              </a:defRPr>
+            </a:lvl8pPr>
+            <a:lvl9pPr marL="3886200" indent="-228600" algn="l" defTabSz="914400" rtl="0" eaLnBrk="1" latinLnBrk="0" hangingPunct="1">
+              <a:lnSpc>
+                <a:spcPct val="90000"/>
+              </a:lnSpc>
+              <a:spcBef>
+                <a:spcPts val="500"/>
+              </a:spcBef>
+              <a:buFont typeface="Arial" panose="020B0604020202020204" pitchFamily="34" charset="0"/>
+              <a:buChar char="•"/>
+              <a:defRPr sz="1800" kern="1200">
+                <a:solidFill>
+                  <a:schemeClr val="tx1"/>
+                </a:solidFill>
+                <a:latin typeface="+mn-lt"/>
+                <a:ea typeface="+mn-ea"/>
+                <a:cs typeface="+mn-cs"/>
+              </a:defRPr>
+            </a:lvl9pPr>
+          </a:lstStyle>
+          <a:p>
+            <a:pPr marL="0" indent="0">
+              <a:buFont typeface="Arial" panose="020B0604020202020204" pitchFamily="34" charset="0"/>
+              <a:buNone/>
+            </a:pPr>
+            <a:r>
+              <a:rPr lang="it-IT" sz="2000" dirty="0"/>
+              <a:t>d) </a:t>
+            </a:r>
+            <a:r>
+              <a:rPr lang="it-IT" sz="2000" dirty="0" err="1"/>
+              <a:t>Implementation</a:t>
+            </a:r>
+            <a:r>
+              <a:rPr lang="it-IT" sz="2000" dirty="0"/>
+              <a:t> of the </a:t>
+            </a:r>
+            <a:r>
+              <a:rPr lang="it-IT" sz="2000" dirty="0" err="1"/>
+              <a:t>function</a:t>
+            </a:r>
+            <a:r>
+              <a:rPr lang="it-IT" sz="2000" dirty="0"/>
+              <a:t> inside of the baseline controller inside of the </a:t>
+            </a:r>
+            <a:r>
+              <a:rPr lang="it-IT" sz="2000" dirty="0" err="1"/>
+              <a:t>Simulink</a:t>
+            </a:r>
+            <a:r>
+              <a:rPr lang="it-IT" sz="2000" dirty="0"/>
+              <a:t> </a:t>
+            </a:r>
+            <a:r>
+              <a:rPr lang="it-IT" sz="2000" dirty="0" err="1"/>
+              <a:t>structure</a:t>
+            </a:r>
+            <a:endParaRPr lang="it-IT" sz="2000" dirty="0"/>
+          </a:p>
+        </p:txBody>
+      </p:sp>
+      <p:sp>
+        <p:nvSpPr>
+          <p:cNvPr id="21" name="Date Placeholder 3">
+            <a:extLst>
+              <a:ext uri="{FF2B5EF4-FFF2-40B4-BE49-F238E27FC236}">
+                <a16:creationId xmlns:a16="http://schemas.microsoft.com/office/drawing/2014/main" id="{001031B6-1B35-DCE2-ECE9-232F5370AF54}"/>
+              </a:ext>
+            </a:extLst>
+          </p:cNvPr>
+          <p:cNvSpPr>
+            <a:spLocks noGrp="1"/>
+          </p:cNvSpPr>
+          <p:nvPr>
+            <p:ph type="dt" sz="half" idx="10"/>
+          </p:nvPr>
+        </p:nvSpPr>
+        <p:spPr>
+          <a:xfrm>
+            <a:off x="838200" y="6356350"/>
+            <a:ext cx="2743200" cy="365125"/>
+          </a:xfrm>
+        </p:spPr>
+        <p:txBody>
+          <a:bodyPr/>
+          <a:lstStyle/>
+          <a:p>
+            <a:fld id="{42FF62D6-EE07-404C-A186-889D29CA3091}" type="datetime1">
+              <a:rPr lang="LID4096" smtClean="0"/>
+              <a:t>10/11/2025</a:t>
+            </a:fld>
+            <a:endParaRPr lang="en-DE"/>
+          </a:p>
+        </p:txBody>
+      </p:sp>
+      <p:sp>
+        <p:nvSpPr>
+          <p:cNvPr id="23" name="Slide Number Placeholder 5">
+            <a:extLst>
+              <a:ext uri="{FF2B5EF4-FFF2-40B4-BE49-F238E27FC236}">
+                <a16:creationId xmlns:a16="http://schemas.microsoft.com/office/drawing/2014/main" id="{5B4B041E-A183-69CB-9A73-D956B5B0D50A}"/>
+              </a:ext>
+            </a:extLst>
+          </p:cNvPr>
+          <p:cNvSpPr>
+            <a:spLocks noGrp="1"/>
+          </p:cNvSpPr>
+          <p:nvPr>
+            <p:ph type="sldNum" sz="quarter" idx="12"/>
+          </p:nvPr>
+        </p:nvSpPr>
+        <p:spPr>
+          <a:xfrm>
+            <a:off x="8610600" y="6356350"/>
+            <a:ext cx="2743200" cy="365125"/>
+          </a:xfrm>
+        </p:spPr>
+        <p:txBody>
+          <a:bodyPr/>
+          <a:lstStyle/>
+          <a:p>
+            <a:fld id="{F9C2340B-4B0F-4DED-BE4C-833C39BBA64E}" type="slidenum">
+              <a:rPr lang="en-DE" smtClean="0"/>
+              <a:t>7</a:t>
+            </a:fld>
+            <a:endParaRPr lang="en-DE"/>
+          </a:p>
+        </p:txBody>
+      </p:sp>
+      <p:pic>
+        <p:nvPicPr>
+          <p:cNvPr id="4" name="Picture 3">
+            <a:extLst>
+              <a:ext uri="{FF2B5EF4-FFF2-40B4-BE49-F238E27FC236}">
+                <a16:creationId xmlns:a16="http://schemas.microsoft.com/office/drawing/2014/main" id="{9DA53EAC-9690-CC77-63F3-A03441FD1DA2}"/>
+              </a:ext>
+            </a:extLst>
+          </p:cNvPr>
+          <p:cNvPicPr>
+            <a:picLocks noChangeAspect="1"/>
+          </p:cNvPicPr>
+          <p:nvPr/>
+        </p:nvPicPr>
+        <p:blipFill>
+          <a:blip r:embed="rId2"/>
+          <a:stretch>
+            <a:fillRect/>
+          </a:stretch>
+        </p:blipFill>
+        <p:spPr>
+          <a:xfrm>
+            <a:off x="3116001" y="2279705"/>
+            <a:ext cx="4090767" cy="3740727"/>
+          </a:xfrm>
+          <a:prstGeom prst="rect">
+            <a:avLst/>
+          </a:prstGeom>
+        </p:spPr>
+      </p:pic>
+      <p:sp>
+        <p:nvSpPr>
+          <p:cNvPr id="5" name="Right Brace 4">
+            <a:extLst>
+              <a:ext uri="{FF2B5EF4-FFF2-40B4-BE49-F238E27FC236}">
+                <a16:creationId xmlns:a16="http://schemas.microsoft.com/office/drawing/2014/main" id="{D1C38F25-43FB-3B11-6260-9B9A1EDE0663}"/>
+              </a:ext>
+            </a:extLst>
+          </p:cNvPr>
+          <p:cNvSpPr/>
+          <p:nvPr/>
+        </p:nvSpPr>
+        <p:spPr>
+          <a:xfrm>
+            <a:off x="7430971" y="5176314"/>
+            <a:ext cx="79131" cy="200146"/>
+          </a:xfrm>
+          <a:prstGeom prst="rightBrace">
+            <a:avLst/>
+          </a:prstGeom>
+        </p:spPr>
+        <p:style>
+          <a:lnRef idx="2">
+            <a:schemeClr val="accent1"/>
+          </a:lnRef>
+          <a:fillRef idx="0">
+            <a:schemeClr val="accent1"/>
+          </a:fillRef>
+          <a:effectRef idx="1">
+            <a:schemeClr val="accent1"/>
+          </a:effectRef>
+          <a:fontRef idx="minor">
+            <a:schemeClr val="tx1"/>
+          </a:fontRef>
+        </p:style>
+        <p:txBody>
+          <a:bodyPr rtlCol="0" anchor="ctr"/>
+          <a:lstStyle/>
+          <a:p>
+            <a:pPr algn="ctr"/>
+            <a:endParaRPr lang="en-GB"/>
+          </a:p>
+        </p:txBody>
+      </p:sp>
+      <p:sp>
+        <p:nvSpPr>
+          <p:cNvPr id="6" name="TextBox 5">
+            <a:extLst>
+              <a:ext uri="{FF2B5EF4-FFF2-40B4-BE49-F238E27FC236}">
+                <a16:creationId xmlns:a16="http://schemas.microsoft.com/office/drawing/2014/main" id="{FC75FF5D-4462-F408-8790-5F17E00F8941}"/>
+              </a:ext>
+            </a:extLst>
+          </p:cNvPr>
+          <p:cNvSpPr txBox="1"/>
+          <p:nvPr/>
+        </p:nvSpPr>
+        <p:spPr>
+          <a:xfrm>
+            <a:off x="7911616" y="3857176"/>
+            <a:ext cx="2347547" cy="338554"/>
+          </a:xfrm>
+          <a:prstGeom prst="rect">
+            <a:avLst/>
+          </a:prstGeom>
+          <a:noFill/>
+        </p:spPr>
+        <p:txBody>
+          <a:bodyPr wrap="square" rtlCol="0">
+            <a:spAutoFit/>
+          </a:bodyPr>
+          <a:lstStyle/>
+          <a:p>
+            <a:r>
+              <a:rPr lang="it-IT" sz="1600" dirty="0" err="1">
+                <a:solidFill>
+                  <a:srgbClr val="FF0000"/>
+                </a:solidFill>
+              </a:rPr>
+              <a:t>Region</a:t>
+            </a:r>
+            <a:r>
+              <a:rPr lang="it-IT" sz="1600" dirty="0">
+                <a:solidFill>
+                  <a:srgbClr val="FF0000"/>
+                </a:solidFill>
+              </a:rPr>
+              <a:t> 3</a:t>
+            </a:r>
+            <a:endParaRPr lang="en-GB" sz="1600" dirty="0">
+              <a:solidFill>
+                <a:srgbClr val="FF0000"/>
+              </a:solidFill>
+            </a:endParaRPr>
+          </a:p>
+        </p:txBody>
+      </p:sp>
+      <p:sp>
+        <p:nvSpPr>
+          <p:cNvPr id="14" name="Right Brace 13">
+            <a:extLst>
+              <a:ext uri="{FF2B5EF4-FFF2-40B4-BE49-F238E27FC236}">
+                <a16:creationId xmlns:a16="http://schemas.microsoft.com/office/drawing/2014/main" id="{598A1E78-653E-7D8B-5153-7810CCA22B69}"/>
+              </a:ext>
+            </a:extLst>
+          </p:cNvPr>
+          <p:cNvSpPr/>
+          <p:nvPr/>
+        </p:nvSpPr>
+        <p:spPr>
+          <a:xfrm>
+            <a:off x="7435220" y="3916994"/>
+            <a:ext cx="79131" cy="200146"/>
+          </a:xfrm>
+          <a:prstGeom prst="rightBrace">
+            <a:avLst/>
+          </a:prstGeom>
+        </p:spPr>
+        <p:style>
+          <a:lnRef idx="2">
+            <a:schemeClr val="accent1"/>
+          </a:lnRef>
+          <a:fillRef idx="0">
+            <a:schemeClr val="accent1"/>
+          </a:fillRef>
+          <a:effectRef idx="1">
+            <a:schemeClr val="accent1"/>
+          </a:effectRef>
+          <a:fontRef idx="minor">
+            <a:schemeClr val="tx1"/>
+          </a:fontRef>
+        </p:style>
+        <p:txBody>
+          <a:bodyPr rtlCol="0" anchor="ctr"/>
+          <a:lstStyle/>
+          <a:p>
+            <a:pPr algn="ctr"/>
+            <a:endParaRPr lang="en-GB"/>
+          </a:p>
+        </p:txBody>
+      </p:sp>
+      <p:sp>
+        <p:nvSpPr>
+          <p:cNvPr id="17" name="TextBox 16">
+            <a:extLst>
+              <a:ext uri="{FF2B5EF4-FFF2-40B4-BE49-F238E27FC236}">
+                <a16:creationId xmlns:a16="http://schemas.microsoft.com/office/drawing/2014/main" id="{B78110CD-FC44-150A-7376-9344BEF58749}"/>
+              </a:ext>
+            </a:extLst>
+          </p:cNvPr>
+          <p:cNvSpPr txBox="1"/>
+          <p:nvPr/>
+        </p:nvSpPr>
+        <p:spPr>
+          <a:xfrm>
+            <a:off x="7911616" y="5084195"/>
+            <a:ext cx="2347547" cy="338554"/>
+          </a:xfrm>
+          <a:prstGeom prst="rect">
+            <a:avLst/>
+          </a:prstGeom>
+          <a:noFill/>
+        </p:spPr>
+        <p:txBody>
+          <a:bodyPr wrap="square" rtlCol="0">
+            <a:spAutoFit/>
+          </a:bodyPr>
+          <a:lstStyle/>
+          <a:p>
+            <a:r>
+              <a:rPr lang="it-IT" sz="1600" dirty="0" err="1">
+                <a:solidFill>
+                  <a:srgbClr val="FF0000"/>
+                </a:solidFill>
+              </a:rPr>
+              <a:t>Region</a:t>
+            </a:r>
+            <a:r>
+              <a:rPr lang="it-IT" sz="1600" dirty="0">
+                <a:solidFill>
+                  <a:srgbClr val="FF0000"/>
+                </a:solidFill>
+              </a:rPr>
+              <a:t> 1.5</a:t>
+            </a:r>
+            <a:endParaRPr lang="en-GB" sz="1600" dirty="0">
+              <a:solidFill>
+                <a:srgbClr val="FF0000"/>
+              </a:solidFill>
+            </a:endParaRPr>
+          </a:p>
+        </p:txBody>
+      </p:sp>
+      <p:sp>
+        <p:nvSpPr>
+          <p:cNvPr id="18" name="Right Brace 17">
+            <a:extLst>
+              <a:ext uri="{FF2B5EF4-FFF2-40B4-BE49-F238E27FC236}">
+                <a16:creationId xmlns:a16="http://schemas.microsoft.com/office/drawing/2014/main" id="{92393E32-62B8-AC55-7DC6-71DE8743A87E}"/>
+              </a:ext>
+            </a:extLst>
+          </p:cNvPr>
+          <p:cNvSpPr/>
+          <p:nvPr/>
+        </p:nvSpPr>
+        <p:spPr>
+          <a:xfrm>
+            <a:off x="7420713" y="4355272"/>
+            <a:ext cx="79131" cy="200146"/>
+          </a:xfrm>
+          <a:prstGeom prst="rightBrace">
+            <a:avLst/>
+          </a:prstGeom>
+        </p:spPr>
+        <p:style>
+          <a:lnRef idx="2">
+            <a:schemeClr val="accent1"/>
+          </a:lnRef>
+          <a:fillRef idx="0">
+            <a:schemeClr val="accent1"/>
+          </a:fillRef>
+          <a:effectRef idx="1">
+            <a:schemeClr val="accent1"/>
+          </a:effectRef>
+          <a:fontRef idx="minor">
+            <a:schemeClr val="tx1"/>
+          </a:fontRef>
+        </p:style>
+        <p:txBody>
+          <a:bodyPr rtlCol="0" anchor="ctr"/>
+          <a:lstStyle/>
+          <a:p>
+            <a:pPr algn="ctr"/>
+            <a:endParaRPr lang="en-GB"/>
+          </a:p>
+        </p:txBody>
+      </p:sp>
+      <p:sp>
+        <p:nvSpPr>
+          <p:cNvPr id="24" name="TextBox 23">
+            <a:extLst>
+              <a:ext uri="{FF2B5EF4-FFF2-40B4-BE49-F238E27FC236}">
+                <a16:creationId xmlns:a16="http://schemas.microsoft.com/office/drawing/2014/main" id="{40D4DA80-1832-B463-098E-9182D4187087}"/>
+              </a:ext>
+            </a:extLst>
+          </p:cNvPr>
+          <p:cNvSpPr txBox="1"/>
+          <p:nvPr/>
+        </p:nvSpPr>
+        <p:spPr>
+          <a:xfrm>
+            <a:off x="7864722" y="4322651"/>
+            <a:ext cx="2347547" cy="338554"/>
+          </a:xfrm>
+          <a:prstGeom prst="rect">
+            <a:avLst/>
+          </a:prstGeom>
+          <a:noFill/>
+        </p:spPr>
+        <p:txBody>
+          <a:bodyPr wrap="square" rtlCol="0">
+            <a:spAutoFit/>
+          </a:bodyPr>
+          <a:lstStyle/>
+          <a:p>
+            <a:r>
+              <a:rPr lang="it-IT" sz="1600" dirty="0" err="1">
+                <a:solidFill>
+                  <a:srgbClr val="FF0000"/>
+                </a:solidFill>
+              </a:rPr>
+              <a:t>Region</a:t>
+            </a:r>
+            <a:r>
+              <a:rPr lang="it-IT" sz="1600" dirty="0">
+                <a:solidFill>
+                  <a:srgbClr val="FF0000"/>
+                </a:solidFill>
+              </a:rPr>
+              <a:t> 2.5</a:t>
+            </a:r>
+            <a:endParaRPr lang="en-GB" sz="1600" dirty="0">
+              <a:solidFill>
+                <a:srgbClr val="FF0000"/>
+              </a:solidFill>
+            </a:endParaRPr>
+          </a:p>
+        </p:txBody>
+      </p:sp>
+      <p:sp>
+        <p:nvSpPr>
+          <p:cNvPr id="25" name="Right Brace 24">
+            <a:extLst>
+              <a:ext uri="{FF2B5EF4-FFF2-40B4-BE49-F238E27FC236}">
+                <a16:creationId xmlns:a16="http://schemas.microsoft.com/office/drawing/2014/main" id="{1CB073E3-519F-4CC1-F8AB-BC75DD253C4B}"/>
+              </a:ext>
+            </a:extLst>
+          </p:cNvPr>
+          <p:cNvSpPr/>
+          <p:nvPr/>
+        </p:nvSpPr>
+        <p:spPr>
+          <a:xfrm>
+            <a:off x="7420713" y="4792604"/>
+            <a:ext cx="79131" cy="200146"/>
+          </a:xfrm>
+          <a:prstGeom prst="rightBrace">
+            <a:avLst/>
+          </a:prstGeom>
+        </p:spPr>
+        <p:style>
+          <a:lnRef idx="2">
+            <a:schemeClr val="accent1"/>
+          </a:lnRef>
+          <a:fillRef idx="0">
+            <a:schemeClr val="accent1"/>
+          </a:fillRef>
+          <a:effectRef idx="1">
+            <a:schemeClr val="accent1"/>
+          </a:effectRef>
+          <a:fontRef idx="minor">
+            <a:schemeClr val="tx1"/>
+          </a:fontRef>
+        </p:style>
+        <p:txBody>
+          <a:bodyPr rtlCol="0" anchor="ctr"/>
+          <a:lstStyle/>
+          <a:p>
+            <a:pPr algn="ctr"/>
+            <a:endParaRPr lang="en-GB"/>
+          </a:p>
+        </p:txBody>
+      </p:sp>
+      <p:sp>
+        <p:nvSpPr>
+          <p:cNvPr id="26" name="TextBox 25">
+            <a:extLst>
+              <a:ext uri="{FF2B5EF4-FFF2-40B4-BE49-F238E27FC236}">
+                <a16:creationId xmlns:a16="http://schemas.microsoft.com/office/drawing/2014/main" id="{3F79D8D9-4D4D-3E19-2C55-C83E644BE9AC}"/>
+              </a:ext>
+            </a:extLst>
+          </p:cNvPr>
+          <p:cNvSpPr txBox="1"/>
+          <p:nvPr/>
+        </p:nvSpPr>
+        <p:spPr>
+          <a:xfrm>
+            <a:off x="7911616" y="4723400"/>
+            <a:ext cx="2347547" cy="338554"/>
+          </a:xfrm>
+          <a:prstGeom prst="rect">
+            <a:avLst/>
+          </a:prstGeom>
+          <a:noFill/>
+        </p:spPr>
+        <p:txBody>
+          <a:bodyPr wrap="square" rtlCol="0">
+            <a:spAutoFit/>
+          </a:bodyPr>
+          <a:lstStyle/>
+          <a:p>
+            <a:r>
+              <a:rPr lang="it-IT" sz="1600" dirty="0" err="1">
+                <a:solidFill>
+                  <a:srgbClr val="FF0000"/>
+                </a:solidFill>
+              </a:rPr>
+              <a:t>Region</a:t>
+            </a:r>
+            <a:r>
+              <a:rPr lang="it-IT" sz="1600" dirty="0">
+                <a:solidFill>
+                  <a:srgbClr val="FF0000"/>
+                </a:solidFill>
+              </a:rPr>
+              <a:t> 2</a:t>
+            </a:r>
+            <a:endParaRPr lang="en-GB" sz="1600" dirty="0">
+              <a:solidFill>
+                <a:srgbClr val="FF0000"/>
+              </a:solidFill>
+            </a:endParaRPr>
+          </a:p>
+        </p:txBody>
+      </p:sp>
+      <p:sp>
+        <p:nvSpPr>
+          <p:cNvPr id="27" name="Right Brace 26">
+            <a:extLst>
+              <a:ext uri="{FF2B5EF4-FFF2-40B4-BE49-F238E27FC236}">
+                <a16:creationId xmlns:a16="http://schemas.microsoft.com/office/drawing/2014/main" id="{526FCE02-C2D3-BC44-E00E-BE24C2552D89}"/>
+              </a:ext>
+            </a:extLst>
+          </p:cNvPr>
+          <p:cNvSpPr/>
+          <p:nvPr/>
+        </p:nvSpPr>
+        <p:spPr>
+          <a:xfrm>
+            <a:off x="7420713" y="5496709"/>
+            <a:ext cx="79131" cy="200146"/>
+          </a:xfrm>
+          <a:prstGeom prst="rightBrace">
+            <a:avLst/>
+          </a:prstGeom>
+        </p:spPr>
+        <p:style>
+          <a:lnRef idx="2">
+            <a:schemeClr val="accent1"/>
+          </a:lnRef>
+          <a:fillRef idx="0">
+            <a:schemeClr val="accent1"/>
+          </a:fillRef>
+          <a:effectRef idx="1">
+            <a:schemeClr val="accent1"/>
+          </a:effectRef>
+          <a:fontRef idx="minor">
+            <a:schemeClr val="tx1"/>
+          </a:fontRef>
+        </p:style>
+        <p:txBody>
+          <a:bodyPr rtlCol="0" anchor="ctr"/>
+          <a:lstStyle/>
+          <a:p>
+            <a:pPr algn="ctr"/>
+            <a:endParaRPr lang="en-GB"/>
+          </a:p>
+        </p:txBody>
+      </p:sp>
+      <p:sp>
+        <p:nvSpPr>
+          <p:cNvPr id="28" name="TextBox 27">
+            <a:extLst>
+              <a:ext uri="{FF2B5EF4-FFF2-40B4-BE49-F238E27FC236}">
+                <a16:creationId xmlns:a16="http://schemas.microsoft.com/office/drawing/2014/main" id="{FAA9127A-F7F5-1839-F455-BA5891DD79D2}"/>
+              </a:ext>
+            </a:extLst>
+          </p:cNvPr>
+          <p:cNvSpPr txBox="1"/>
+          <p:nvPr/>
+        </p:nvSpPr>
+        <p:spPr>
+          <a:xfrm>
+            <a:off x="7927734" y="5404590"/>
+            <a:ext cx="2347547" cy="338554"/>
+          </a:xfrm>
+          <a:prstGeom prst="rect">
+            <a:avLst/>
+          </a:prstGeom>
+          <a:noFill/>
+        </p:spPr>
+        <p:txBody>
+          <a:bodyPr wrap="square" rtlCol="0">
+            <a:spAutoFit/>
+          </a:bodyPr>
+          <a:lstStyle/>
+          <a:p>
+            <a:r>
+              <a:rPr lang="it-IT" sz="1600" dirty="0" err="1">
+                <a:solidFill>
+                  <a:srgbClr val="FF0000"/>
+                </a:solidFill>
+              </a:rPr>
+              <a:t>Region</a:t>
+            </a:r>
+            <a:r>
+              <a:rPr lang="it-IT" sz="1600" dirty="0">
+                <a:solidFill>
+                  <a:srgbClr val="FF0000"/>
+                </a:solidFill>
+              </a:rPr>
+              <a:t> 1</a:t>
+            </a:r>
+            <a:endParaRPr lang="en-GB" sz="1600" dirty="0">
+              <a:solidFill>
+                <a:srgbClr val="FF0000"/>
+              </a:solidFill>
+            </a:endParaRPr>
+          </a:p>
+        </p:txBody>
+      </p:sp>
+      <p:sp>
+        <p:nvSpPr>
+          <p:cNvPr id="29" name="Footer Placeholder 4">
+            <a:extLst>
+              <a:ext uri="{FF2B5EF4-FFF2-40B4-BE49-F238E27FC236}">
+                <a16:creationId xmlns:a16="http://schemas.microsoft.com/office/drawing/2014/main" id="{B4F524EF-A805-4DBD-45D4-9C469767D3A7}"/>
+              </a:ext>
+            </a:extLst>
+          </p:cNvPr>
+          <p:cNvSpPr>
+            <a:spLocks noGrp="1"/>
+          </p:cNvSpPr>
+          <p:nvPr>
+            <p:ph type="ftr" sz="quarter" idx="11"/>
+          </p:nvPr>
+        </p:nvSpPr>
+        <p:spPr>
+          <a:xfrm>
+            <a:off x="2781300" y="6356349"/>
+            <a:ext cx="6629400" cy="365125"/>
+          </a:xfrm>
+        </p:spPr>
+        <p:txBody>
+          <a:bodyPr/>
+          <a:lstStyle/>
+          <a:p>
+            <a:r>
+              <a:rPr lang="en-DE" dirty="0"/>
+              <a:t>Group 3:</a:t>
+            </a:r>
+            <a:r>
+              <a:rPr lang="it-IT" dirty="0"/>
+              <a:t> Federico De Mita, </a:t>
+            </a:r>
+            <a:r>
+              <a:rPr lang="it-IT" dirty="0" err="1"/>
+              <a:t>Waqas</a:t>
+            </a:r>
+            <a:r>
+              <a:rPr lang="it-IT" dirty="0"/>
+              <a:t> Ahmed, Dominic </a:t>
+            </a:r>
+            <a:r>
+              <a:rPr lang="it-IT" dirty="0" err="1"/>
+              <a:t>Annang</a:t>
+            </a:r>
+            <a:r>
+              <a:rPr lang="it-IT" dirty="0"/>
+              <a:t>, Hesham </a:t>
+            </a:r>
+            <a:r>
+              <a:rPr lang="it-IT" dirty="0" err="1"/>
+              <a:t>Magdy</a:t>
+            </a:r>
+            <a:r>
+              <a:rPr lang="it-IT" dirty="0"/>
+              <a:t>, </a:t>
+            </a:r>
+            <a:r>
+              <a:rPr lang="it-IT" dirty="0" err="1"/>
+              <a:t>Muthu</a:t>
+            </a:r>
+            <a:r>
+              <a:rPr lang="it-IT" dirty="0"/>
+              <a:t> </a:t>
+            </a:r>
+            <a:r>
+              <a:rPr lang="it-IT" dirty="0" err="1"/>
+              <a:t>Sivamuthu</a:t>
+            </a:r>
+            <a:r>
+              <a:rPr lang="it-IT" dirty="0"/>
+              <a:t> </a:t>
+            </a:r>
+            <a:r>
+              <a:rPr lang="en-DE" dirty="0"/>
+              <a:t> </a:t>
+            </a:r>
+          </a:p>
+        </p:txBody>
+      </p:sp>
+    </p:spTree>
+    <p:extLst>
+      <p:ext uri="{BB962C8B-B14F-4D97-AF65-F5344CB8AC3E}">
+        <p14:creationId xmlns:p14="http://schemas.microsoft.com/office/powerpoint/2010/main" val="3950263107"/>
+      </p:ext>
+    </p:extLst>
+  </p:cSld>
+  <p:clrMapOvr>
+    <a:masterClrMapping/>
+  </p:clrMapOvr>
+</p:sld>
+</file>
+
+<file path=ppt/slides/slide8.xml><?xml version="1.0" encoding="utf-8"?>
+<p:sld xmlns:a="http://schemas.openxmlformats.org/drawingml/2006/main" xmlns:r="http://schemas.openxmlformats.org/officeDocument/2006/relationships" xmlns:p="http://schemas.openxmlformats.org/presentationml/2006/main">
+  <p:cSld>
+    <p:spTree>
+      <p:nvGrpSpPr>
+        <p:cNvPr id="1" name="">
+          <a:extLst>
+            <a:ext uri="{FF2B5EF4-FFF2-40B4-BE49-F238E27FC236}">
+              <a16:creationId xmlns:a16="http://schemas.microsoft.com/office/drawing/2014/main" id="{C77BC94A-C94E-F70C-D48E-3DD924D0D854}"/>
+            </a:ext>
+          </a:extLst>
+        </p:cNvPr>
+        <p:cNvGrpSpPr/>
+        <p:nvPr/>
+      </p:nvGrpSpPr>
+      <p:grpSpPr>
+        <a:xfrm>
+          <a:off x="0" y="0"/>
+          <a:ext cx="0" cy="0"/>
+          <a:chOff x="0" y="0"/>
+          <a:chExt cx="0" cy="0"/>
+        </a:xfrm>
+      </p:grpSpPr>
+      <p:sp>
+        <p:nvSpPr>
+          <p:cNvPr id="2" name="Title 1">
+            <a:extLst>
+              <a:ext uri="{FF2B5EF4-FFF2-40B4-BE49-F238E27FC236}">
+                <a16:creationId xmlns:a16="http://schemas.microsoft.com/office/drawing/2014/main" id="{9D27EA08-1906-701C-84B1-FB56CAB3B8BA}"/>
+              </a:ext>
+            </a:extLst>
+          </p:cNvPr>
+          <p:cNvSpPr>
+            <a:spLocks noGrp="1"/>
+          </p:cNvSpPr>
+          <p:nvPr>
+            <p:ph type="title"/>
+          </p:nvPr>
+        </p:nvSpPr>
+        <p:spPr>
+          <a:xfrm>
+            <a:off x="838200" y="410368"/>
+            <a:ext cx="8921262" cy="1325563"/>
+          </a:xfrm>
+        </p:spPr>
+        <p:txBody>
+          <a:bodyPr>
+            <a:normAutofit/>
+          </a:bodyPr>
+          <a:lstStyle/>
+          <a:p>
+            <a:r>
+              <a:rPr lang="it-IT" sz="3800" dirty="0"/>
+              <a:t>1 – Design of a Baseline Torque Controller</a:t>
+            </a:r>
+            <a:endParaRPr lang="en-GB" sz="3800" dirty="0"/>
+          </a:p>
+        </p:txBody>
+      </p:sp>
+      <p:sp>
+        <p:nvSpPr>
+          <p:cNvPr id="9" name="Content Placeholder 7">
+            <a:extLst>
+              <a:ext uri="{FF2B5EF4-FFF2-40B4-BE49-F238E27FC236}">
+                <a16:creationId xmlns:a16="http://schemas.microsoft.com/office/drawing/2014/main" id="{10A27FA3-31C0-F509-47D9-AA895A9935B3}"/>
+              </a:ext>
+            </a:extLst>
+          </p:cNvPr>
+          <p:cNvSpPr txBox="1">
+            <a:spLocks/>
+          </p:cNvSpPr>
+          <p:nvPr/>
+        </p:nvSpPr>
+        <p:spPr>
+          <a:xfrm>
+            <a:off x="784412" y="1546744"/>
+            <a:ext cx="10515600" cy="506321"/>
+          </a:xfrm>
+          <a:prstGeom prst="rect">
+            <a:avLst/>
+          </a:prstGeom>
+        </p:spPr>
+        <p:txBody>
+          <a:bodyPr vert="horz" lIns="91440" tIns="45720" rIns="91440" bIns="45720" rtlCol="0">
+            <a:normAutofit/>
+          </a:bodyPr>
+          <a:lstStyle>
+            <a:lvl1pPr marL="228600" indent="-228600" algn="l" defTabSz="914400" rtl="0" eaLnBrk="1" latinLnBrk="0" hangingPunct="1">
+              <a:lnSpc>
+                <a:spcPct val="90000"/>
+              </a:lnSpc>
+              <a:spcBef>
+                <a:spcPts val="1000"/>
+              </a:spcBef>
+              <a:buFont typeface="Arial" panose="020B0604020202020204" pitchFamily="34" charset="0"/>
+              <a:buChar char="•"/>
+              <a:defRPr sz="2800" kern="1200">
+                <a:solidFill>
+                  <a:schemeClr val="tx1"/>
+                </a:solidFill>
+                <a:latin typeface="+mn-lt"/>
+                <a:ea typeface="+mn-ea"/>
+                <a:cs typeface="+mn-cs"/>
+              </a:defRPr>
+            </a:lvl1pPr>
+            <a:lvl2pPr marL="685800" indent="-228600" algn="l" defTabSz="914400" rtl="0" eaLnBrk="1" latinLnBrk="0" hangingPunct="1">
+              <a:lnSpc>
+                <a:spcPct val="90000"/>
+              </a:lnSpc>
+              <a:spcBef>
+                <a:spcPts val="500"/>
+              </a:spcBef>
+              <a:buFont typeface="Arial" panose="020B0604020202020204" pitchFamily="34" charset="0"/>
+              <a:buChar char="•"/>
+              <a:defRPr sz="2400" kern="1200">
+                <a:solidFill>
+                  <a:schemeClr val="tx1"/>
+                </a:solidFill>
+                <a:latin typeface="+mn-lt"/>
+                <a:ea typeface="+mn-ea"/>
+                <a:cs typeface="+mn-cs"/>
+              </a:defRPr>
+            </a:lvl2pPr>
+            <a:lvl3pPr marL="1143000" indent="-228600" algn="l" defTabSz="914400" rtl="0" eaLnBrk="1" latinLnBrk="0" hangingPunct="1">
+              <a:lnSpc>
+                <a:spcPct val="90000"/>
+              </a:lnSpc>
+              <a:spcBef>
+                <a:spcPts val="500"/>
+              </a:spcBef>
+              <a:buFont typeface="Arial" panose="020B0604020202020204" pitchFamily="34" charset="0"/>
+              <a:buChar char="•"/>
+              <a:defRPr sz="2000" kern="1200">
+                <a:solidFill>
+                  <a:schemeClr val="tx1"/>
+                </a:solidFill>
+                <a:latin typeface="+mn-lt"/>
+                <a:ea typeface="+mn-ea"/>
+                <a:cs typeface="+mn-cs"/>
+              </a:defRPr>
+            </a:lvl3pPr>
+            <a:lvl4pPr marL="1600200" indent="-228600" algn="l" defTabSz="914400" rtl="0" eaLnBrk="1" latinLnBrk="0" hangingPunct="1">
+              <a:lnSpc>
+                <a:spcPct val="90000"/>
+              </a:lnSpc>
+              <a:spcBef>
+                <a:spcPts val="500"/>
+              </a:spcBef>
+              <a:buFont typeface="Arial" panose="020B0604020202020204" pitchFamily="34" charset="0"/>
+              <a:buChar char="•"/>
+              <a:defRPr sz="1800" kern="1200">
+                <a:solidFill>
+                  <a:schemeClr val="tx1"/>
+                </a:solidFill>
+                <a:latin typeface="+mn-lt"/>
+                <a:ea typeface="+mn-ea"/>
+                <a:cs typeface="+mn-cs"/>
+              </a:defRPr>
+            </a:lvl4pPr>
+            <a:lvl5pPr marL="2057400" indent="-228600" algn="l" defTabSz="914400" rtl="0" eaLnBrk="1" latinLnBrk="0" hangingPunct="1">
+              <a:lnSpc>
+                <a:spcPct val="90000"/>
+              </a:lnSpc>
+              <a:spcBef>
+                <a:spcPts val="500"/>
+              </a:spcBef>
+              <a:buFont typeface="Arial" panose="020B0604020202020204" pitchFamily="34" charset="0"/>
+              <a:buChar char="•"/>
+              <a:defRPr sz="1800" kern="1200">
+                <a:solidFill>
+                  <a:schemeClr val="tx1"/>
+                </a:solidFill>
+                <a:latin typeface="+mn-lt"/>
+                <a:ea typeface="+mn-ea"/>
+                <a:cs typeface="+mn-cs"/>
+              </a:defRPr>
+            </a:lvl5pPr>
+            <a:lvl6pPr marL="2514600" indent="-228600" algn="l" defTabSz="914400" rtl="0" eaLnBrk="1" latinLnBrk="0" hangingPunct="1">
+              <a:lnSpc>
+                <a:spcPct val="90000"/>
+              </a:lnSpc>
+              <a:spcBef>
+                <a:spcPts val="500"/>
+              </a:spcBef>
+              <a:buFont typeface="Arial" panose="020B0604020202020204" pitchFamily="34" charset="0"/>
+              <a:buChar char="•"/>
+              <a:defRPr sz="1800" kern="1200">
+                <a:solidFill>
+                  <a:schemeClr val="tx1"/>
+                </a:solidFill>
+                <a:latin typeface="+mn-lt"/>
+                <a:ea typeface="+mn-ea"/>
+                <a:cs typeface="+mn-cs"/>
+              </a:defRPr>
+            </a:lvl6pPr>
+            <a:lvl7pPr marL="2971800" indent="-228600" algn="l" defTabSz="914400" rtl="0" eaLnBrk="1" latinLnBrk="0" hangingPunct="1">
+              <a:lnSpc>
+                <a:spcPct val="90000"/>
+              </a:lnSpc>
+              <a:spcBef>
+                <a:spcPts val="500"/>
+              </a:spcBef>
+              <a:buFont typeface="Arial" panose="020B0604020202020204" pitchFamily="34" charset="0"/>
+              <a:buChar char="•"/>
+              <a:defRPr sz="1800" kern="1200">
+                <a:solidFill>
+                  <a:schemeClr val="tx1"/>
+                </a:solidFill>
+                <a:latin typeface="+mn-lt"/>
+                <a:ea typeface="+mn-ea"/>
+                <a:cs typeface="+mn-cs"/>
+              </a:defRPr>
+            </a:lvl7pPr>
+            <a:lvl8pPr marL="3429000" indent="-228600" algn="l" defTabSz="914400" rtl="0" eaLnBrk="1" latinLnBrk="0" hangingPunct="1">
+              <a:lnSpc>
+                <a:spcPct val="90000"/>
+              </a:lnSpc>
+              <a:spcBef>
+                <a:spcPts val="500"/>
+              </a:spcBef>
+              <a:buFont typeface="Arial" panose="020B0604020202020204" pitchFamily="34" charset="0"/>
+              <a:buChar char="•"/>
+              <a:defRPr sz="1800" kern="1200">
+                <a:solidFill>
+                  <a:schemeClr val="tx1"/>
+                </a:solidFill>
+                <a:latin typeface="+mn-lt"/>
+                <a:ea typeface="+mn-ea"/>
+                <a:cs typeface="+mn-cs"/>
+              </a:defRPr>
+            </a:lvl8pPr>
+            <a:lvl9pPr marL="3886200" indent="-228600" algn="l" defTabSz="914400" rtl="0" eaLnBrk="1" latinLnBrk="0" hangingPunct="1">
+              <a:lnSpc>
+                <a:spcPct val="90000"/>
+              </a:lnSpc>
+              <a:spcBef>
+                <a:spcPts val="500"/>
+              </a:spcBef>
+              <a:buFont typeface="Arial" panose="020B0604020202020204" pitchFamily="34" charset="0"/>
+              <a:buChar char="•"/>
+              <a:defRPr sz="1800" kern="1200">
+                <a:solidFill>
+                  <a:schemeClr val="tx1"/>
+                </a:solidFill>
+                <a:latin typeface="+mn-lt"/>
+                <a:ea typeface="+mn-ea"/>
+                <a:cs typeface="+mn-cs"/>
+              </a:defRPr>
+            </a:lvl9pPr>
+          </a:lstStyle>
+          <a:p>
+            <a:pPr marL="0" indent="0" algn="ctr">
+              <a:buNone/>
+            </a:pPr>
+            <a:r>
+              <a:rPr lang="en-GB" sz="2000" b="1" dirty="0"/>
+              <a:t>e) Does the torque controller </a:t>
+            </a:r>
+            <a:r>
+              <a:rPr lang="en-GB" sz="2000" b="1" dirty="0" err="1"/>
+              <a:t>fulfill</a:t>
+            </a:r>
+            <a:r>
+              <a:rPr lang="en-GB" sz="2000" b="1" dirty="0"/>
+              <a:t> the design goal?</a:t>
+            </a:r>
+            <a:endParaRPr lang="it-IT" sz="1600" b="1" dirty="0"/>
+          </a:p>
+        </p:txBody>
+      </p:sp>
+      <p:sp>
+        <p:nvSpPr>
+          <p:cNvPr id="21" name="Date Placeholder 3">
+            <a:extLst>
+              <a:ext uri="{FF2B5EF4-FFF2-40B4-BE49-F238E27FC236}">
+                <a16:creationId xmlns:a16="http://schemas.microsoft.com/office/drawing/2014/main" id="{6D5ECC42-957F-A39B-EE27-53D9BEC093A7}"/>
+              </a:ext>
+            </a:extLst>
+          </p:cNvPr>
+          <p:cNvSpPr>
+            <a:spLocks noGrp="1"/>
+          </p:cNvSpPr>
+          <p:nvPr>
+            <p:ph type="dt" sz="half" idx="10"/>
+          </p:nvPr>
+        </p:nvSpPr>
+        <p:spPr>
+          <a:xfrm>
+            <a:off x="838200" y="6356350"/>
+            <a:ext cx="2743200" cy="365125"/>
+          </a:xfrm>
+        </p:spPr>
+        <p:txBody>
+          <a:bodyPr/>
+          <a:lstStyle/>
+          <a:p>
+            <a:fld id="{42FF62D6-EE07-404C-A186-889D29CA3091}" type="datetime1">
+              <a:rPr lang="LID4096" smtClean="0"/>
+              <a:t>10/11/2025</a:t>
+            </a:fld>
+            <a:endParaRPr lang="en-DE"/>
+          </a:p>
+        </p:txBody>
+      </p:sp>
+      <p:sp>
+        <p:nvSpPr>
+          <p:cNvPr id="23" name="Slide Number Placeholder 5">
+            <a:extLst>
+              <a:ext uri="{FF2B5EF4-FFF2-40B4-BE49-F238E27FC236}">
+                <a16:creationId xmlns:a16="http://schemas.microsoft.com/office/drawing/2014/main" id="{20B706B1-5C2F-8D95-F90F-85AFAB31BAE6}"/>
+              </a:ext>
+            </a:extLst>
+          </p:cNvPr>
+          <p:cNvSpPr>
+            <a:spLocks noGrp="1"/>
+          </p:cNvSpPr>
+          <p:nvPr>
+            <p:ph type="sldNum" sz="quarter" idx="12"/>
+          </p:nvPr>
+        </p:nvSpPr>
+        <p:spPr>
+          <a:xfrm>
+            <a:off x="8610600" y="6356350"/>
+            <a:ext cx="2743200" cy="365125"/>
+          </a:xfrm>
+        </p:spPr>
+        <p:txBody>
+          <a:bodyPr/>
+          <a:lstStyle/>
+          <a:p>
+            <a:fld id="{F9C2340B-4B0F-4DED-BE4C-833C39BBA64E}" type="slidenum">
+              <a:rPr lang="en-DE" smtClean="0"/>
+              <a:t>8</a:t>
+            </a:fld>
+            <a:endParaRPr lang="en-DE"/>
+          </a:p>
+        </p:txBody>
+      </p:sp>
+      <p:pic>
+        <p:nvPicPr>
+          <p:cNvPr id="10" name="Picture 9">
+            <a:extLst>
+              <a:ext uri="{FF2B5EF4-FFF2-40B4-BE49-F238E27FC236}">
+                <a16:creationId xmlns:a16="http://schemas.microsoft.com/office/drawing/2014/main" id="{0E2DFB05-BFB6-8575-0F2F-ED991E51E41D}"/>
+              </a:ext>
+            </a:extLst>
+          </p:cNvPr>
+          <p:cNvPicPr>
+            <a:picLocks noChangeAspect="1"/>
+          </p:cNvPicPr>
+          <p:nvPr/>
+        </p:nvPicPr>
+        <p:blipFill>
+          <a:blip r:embed="rId2"/>
+          <a:stretch>
+            <a:fillRect/>
+          </a:stretch>
+        </p:blipFill>
+        <p:spPr>
+          <a:xfrm>
+            <a:off x="1031633" y="2053065"/>
+            <a:ext cx="5855675" cy="920713"/>
+          </a:xfrm>
+          <a:prstGeom prst="rect">
+            <a:avLst/>
+          </a:prstGeom>
+        </p:spPr>
+      </p:pic>
+      <p:pic>
+        <p:nvPicPr>
+          <p:cNvPr id="12" name="Picture 11">
+            <a:extLst>
+              <a:ext uri="{FF2B5EF4-FFF2-40B4-BE49-F238E27FC236}">
+                <a16:creationId xmlns:a16="http://schemas.microsoft.com/office/drawing/2014/main" id="{5372690A-C345-7B5E-7529-7F78006FE661}"/>
+              </a:ext>
+            </a:extLst>
+          </p:cNvPr>
+          <p:cNvPicPr>
+            <a:picLocks noChangeAspect="1"/>
+          </p:cNvPicPr>
+          <p:nvPr/>
+        </p:nvPicPr>
+        <p:blipFill>
+          <a:blip r:embed="rId3"/>
+          <a:stretch>
+            <a:fillRect/>
+          </a:stretch>
+        </p:blipFill>
+        <p:spPr>
+          <a:xfrm>
+            <a:off x="1053011" y="3096943"/>
+            <a:ext cx="5840561" cy="920712"/>
+          </a:xfrm>
+          <a:prstGeom prst="rect">
+            <a:avLst/>
+          </a:prstGeom>
+        </p:spPr>
+      </p:pic>
+      <p:pic>
+        <p:nvPicPr>
+          <p:cNvPr id="15" name="Picture 14">
+            <a:extLst>
+              <a:ext uri="{FF2B5EF4-FFF2-40B4-BE49-F238E27FC236}">
+                <a16:creationId xmlns:a16="http://schemas.microsoft.com/office/drawing/2014/main" id="{6D472768-0FE8-7F8D-7EA3-29159F455601}"/>
+              </a:ext>
+            </a:extLst>
+          </p:cNvPr>
+          <p:cNvPicPr>
+            <a:picLocks noChangeAspect="1"/>
+          </p:cNvPicPr>
+          <p:nvPr/>
+        </p:nvPicPr>
+        <p:blipFill>
+          <a:blip r:embed="rId4"/>
+          <a:stretch>
+            <a:fillRect/>
+          </a:stretch>
+        </p:blipFill>
+        <p:spPr>
+          <a:xfrm>
+            <a:off x="1031632" y="4145812"/>
+            <a:ext cx="5855675" cy="919528"/>
+          </a:xfrm>
+          <a:prstGeom prst="rect">
+            <a:avLst/>
+          </a:prstGeom>
+        </p:spPr>
+      </p:pic>
+      <p:pic>
+        <p:nvPicPr>
+          <p:cNvPr id="19" name="Picture 18">
+            <a:extLst>
+              <a:ext uri="{FF2B5EF4-FFF2-40B4-BE49-F238E27FC236}">
+                <a16:creationId xmlns:a16="http://schemas.microsoft.com/office/drawing/2014/main" id="{A00CFA10-EF14-E8D7-12DF-C53B5CD8052F}"/>
+              </a:ext>
+            </a:extLst>
+          </p:cNvPr>
+          <p:cNvPicPr>
+            <a:picLocks noChangeAspect="1"/>
+          </p:cNvPicPr>
+          <p:nvPr/>
+        </p:nvPicPr>
+        <p:blipFill>
+          <a:blip r:embed="rId5"/>
+          <a:stretch>
+            <a:fillRect/>
+          </a:stretch>
+        </p:blipFill>
+        <p:spPr>
+          <a:xfrm>
+            <a:off x="1031632" y="5189689"/>
+            <a:ext cx="5878830" cy="957525"/>
+          </a:xfrm>
+          <a:prstGeom prst="rect">
+            <a:avLst/>
+          </a:prstGeom>
+        </p:spPr>
+      </p:pic>
+      <mc:AlternateContent xmlns:mc="http://schemas.openxmlformats.org/markup-compatibility/2006">
+        <mc:Choice xmlns:a14="http://schemas.microsoft.com/office/drawing/2010/main" Requires="a14">
+          <p:sp>
+            <p:nvSpPr>
+              <p:cNvPr id="29" name="TextBox 28">
+                <a:extLst>
+                  <a:ext uri="{FF2B5EF4-FFF2-40B4-BE49-F238E27FC236}">
+                    <a16:creationId xmlns:a16="http://schemas.microsoft.com/office/drawing/2014/main" id="{5E707B1E-5311-C876-9D60-302258B07CED}"/>
+                  </a:ext>
+                </a:extLst>
+              </p:cNvPr>
+              <p:cNvSpPr txBox="1"/>
+              <p:nvPr/>
+            </p:nvSpPr>
+            <p:spPr>
+              <a:xfrm>
+                <a:off x="7217620" y="2722703"/>
+                <a:ext cx="3921369" cy="2329740"/>
+              </a:xfrm>
+              <a:prstGeom prst="rect">
+                <a:avLst/>
+              </a:prstGeom>
+              <a:noFill/>
+            </p:spPr>
+            <p:txBody>
+              <a:bodyPr wrap="square" rtlCol="0">
+                <a:spAutoFit/>
+              </a:bodyPr>
+              <a:lstStyle/>
+              <a:p>
+                <a:r>
+                  <a:rPr lang="it-IT" dirty="0"/>
+                  <a:t>Design goals: </a:t>
+                </a:r>
+              </a:p>
+              <a:p>
+                <a:endParaRPr lang="it-IT" dirty="0"/>
+              </a:p>
+              <a:p>
+                <a:pPr marL="285750" indent="-285750">
+                  <a:buFont typeface="Arial" panose="020B0604020202020204" pitchFamily="34" charset="0"/>
+                  <a:buChar char="•"/>
+                </a:pPr>
+                <a:r>
+                  <a:rPr lang="it-IT" dirty="0"/>
+                  <a:t>The </a:t>
+                </a:r>
+                <a:r>
+                  <a:rPr lang="it-IT" dirty="0" err="1"/>
+                  <a:t>parameters</a:t>
+                </a:r>
+                <a:r>
+                  <a:rPr lang="it-IT" dirty="0"/>
+                  <a:t> are </a:t>
+                </a:r>
+                <a:r>
+                  <a:rPr lang="it-IT" dirty="0" err="1"/>
+                  <a:t>constant</a:t>
+                </a:r>
+                <a:r>
+                  <a:rPr lang="it-IT" dirty="0"/>
+                  <a:t> for </a:t>
+                </a:r>
+                <a14:m>
+                  <m:oMath xmlns:m="http://schemas.openxmlformats.org/officeDocument/2006/math">
+                    <m:sSub>
+                      <m:sSubPr>
+                        <m:ctrlPr>
+                          <a:rPr lang="it-IT" b="0" i="1" smtClean="0">
+                            <a:latin typeface="Cambria Math" panose="02040503050406030204" pitchFamily="18" charset="0"/>
+                          </a:rPr>
+                        </m:ctrlPr>
+                      </m:sSubPr>
+                      <m:e>
+                        <m:r>
+                          <a:rPr lang="it-IT" b="0" i="1" smtClean="0">
+                            <a:latin typeface="Cambria Math" panose="02040503050406030204" pitchFamily="18" charset="0"/>
+                          </a:rPr>
+                          <m:t>𝑣</m:t>
+                        </m:r>
+                      </m:e>
+                      <m:sub>
+                        <m:r>
+                          <a:rPr lang="it-IT" b="0" i="1" smtClean="0">
+                            <a:latin typeface="Cambria Math" panose="02040503050406030204" pitchFamily="18" charset="0"/>
+                          </a:rPr>
+                          <m:t>𝑜</m:t>
+                        </m:r>
+                      </m:sub>
+                    </m:sSub>
+                    <m:r>
+                      <a:rPr lang="it-IT" b="0" i="1" smtClean="0">
+                        <a:latin typeface="Cambria Math" panose="02040503050406030204" pitchFamily="18" charset="0"/>
+                      </a:rPr>
+                      <m:t>=8 </m:t>
+                    </m:r>
+                    <m:r>
+                      <a:rPr lang="it-IT" b="0" i="1" smtClean="0">
+                        <a:latin typeface="Cambria Math" panose="02040503050406030204" pitchFamily="18" charset="0"/>
+                      </a:rPr>
+                      <m:t>𝑚</m:t>
+                    </m:r>
+                    <m:r>
+                      <a:rPr lang="it-IT" b="0" i="1" smtClean="0">
+                        <a:latin typeface="Cambria Math" panose="02040503050406030204" pitchFamily="18" charset="0"/>
+                      </a:rPr>
+                      <m:t>/</m:t>
+                    </m:r>
+                    <m:r>
+                      <a:rPr lang="it-IT" b="0" i="1" smtClean="0">
+                        <a:latin typeface="Cambria Math" panose="02040503050406030204" pitchFamily="18" charset="0"/>
+                      </a:rPr>
+                      <m:t>𝑠</m:t>
+                    </m:r>
+                  </m:oMath>
+                </a14:m>
+                <a:r>
+                  <a:rPr lang="en-GB" dirty="0"/>
+                  <a:t> </a:t>
+                </a:r>
+              </a:p>
+              <a:p>
+                <a:endParaRPr lang="en-GB" dirty="0"/>
+              </a:p>
+              <a:p>
+                <a:pPr marL="285750" indent="-285750">
+                  <a:buFont typeface="Arial" panose="020B0604020202020204" pitchFamily="34" charset="0"/>
+                  <a:buChar char="•"/>
+                </a:pPr>
+                <a:r>
+                  <a:rPr lang="en-GB" dirty="0"/>
+                  <a:t>The parameters adapt so that after the wind step to </a:t>
+                </a:r>
+                <a14:m>
+                  <m:oMath xmlns:m="http://schemas.openxmlformats.org/officeDocument/2006/math">
+                    <m:sSub>
+                      <m:sSubPr>
+                        <m:ctrlPr>
+                          <a:rPr lang="it-IT" b="0" i="1" smtClean="0">
+                            <a:latin typeface="Cambria Math" panose="02040503050406030204" pitchFamily="18" charset="0"/>
+                          </a:rPr>
+                        </m:ctrlPr>
+                      </m:sSubPr>
+                      <m:e>
+                        <m:r>
+                          <a:rPr lang="it-IT" b="0" i="1" smtClean="0">
+                            <a:latin typeface="Cambria Math" panose="02040503050406030204" pitchFamily="18" charset="0"/>
+                          </a:rPr>
+                          <m:t>𝑣</m:t>
+                        </m:r>
+                      </m:e>
+                      <m:sub>
+                        <m:r>
+                          <a:rPr lang="it-IT" b="0" i="1" smtClean="0">
+                            <a:latin typeface="Cambria Math" panose="02040503050406030204" pitchFamily="18" charset="0"/>
+                          </a:rPr>
+                          <m:t>0</m:t>
+                        </m:r>
+                      </m:sub>
+                    </m:sSub>
+                    <m:r>
+                      <a:rPr lang="it-IT" b="0" i="1" smtClean="0">
+                        <a:latin typeface="Cambria Math" panose="02040503050406030204" pitchFamily="18" charset="0"/>
+                      </a:rPr>
+                      <m:t>=9 </m:t>
+                    </m:r>
+                    <m:r>
+                      <a:rPr lang="it-IT" b="0" i="1" smtClean="0">
+                        <a:latin typeface="Cambria Math" panose="02040503050406030204" pitchFamily="18" charset="0"/>
+                      </a:rPr>
+                      <m:t>𝑚</m:t>
+                    </m:r>
+                    <m:r>
+                      <a:rPr lang="it-IT" b="0" i="1" smtClean="0">
+                        <a:latin typeface="Cambria Math" panose="02040503050406030204" pitchFamily="18" charset="0"/>
+                      </a:rPr>
+                      <m:t>/</m:t>
+                    </m:r>
+                    <m:r>
+                      <a:rPr lang="it-IT" b="0" i="1" smtClean="0">
+                        <a:latin typeface="Cambria Math" panose="02040503050406030204" pitchFamily="18" charset="0"/>
+                      </a:rPr>
+                      <m:t>𝑠</m:t>
+                    </m:r>
+                  </m:oMath>
+                </a14:m>
+                <a:r>
+                  <a:rPr lang="en-GB" dirty="0"/>
+                  <a:t> the value of </a:t>
+                </a:r>
+                <a14:m>
+                  <m:oMath xmlns:m="http://schemas.openxmlformats.org/officeDocument/2006/math">
+                    <m:r>
+                      <a:rPr lang="it-IT" b="0" i="1" smtClean="0">
+                        <a:latin typeface="Cambria Math" panose="02040503050406030204" pitchFamily="18" charset="0"/>
+                      </a:rPr>
+                      <m:t>𝜆</m:t>
+                    </m:r>
+                    <m:r>
+                      <a:rPr lang="it-IT" b="0" i="1" smtClean="0">
+                        <a:latin typeface="Cambria Math" panose="02040503050406030204" pitchFamily="18" charset="0"/>
+                      </a:rPr>
+                      <m:t> </m:t>
+                    </m:r>
+                  </m:oMath>
+                </a14:m>
+                <a:r>
+                  <a:rPr lang="en-GB" dirty="0"/>
+                  <a:t>tends to </a:t>
+                </a:r>
+                <a14:m>
+                  <m:oMath xmlns:m="http://schemas.openxmlformats.org/officeDocument/2006/math">
+                    <m:sSub>
+                      <m:sSubPr>
+                        <m:ctrlPr>
+                          <a:rPr lang="it-IT" b="0" i="1" smtClean="0">
+                            <a:latin typeface="Cambria Math" panose="02040503050406030204" pitchFamily="18" charset="0"/>
+                          </a:rPr>
+                        </m:ctrlPr>
+                      </m:sSubPr>
+                      <m:e>
+                        <m:r>
+                          <a:rPr lang="it-IT" b="0" i="1" smtClean="0">
+                            <a:latin typeface="Cambria Math" panose="02040503050406030204" pitchFamily="18" charset="0"/>
+                          </a:rPr>
+                          <m:t>𝜆</m:t>
+                        </m:r>
+                      </m:e>
+                      <m:sub>
+                        <m:r>
+                          <a:rPr lang="it-IT" b="0" i="1" smtClean="0">
+                            <a:latin typeface="Cambria Math" panose="02040503050406030204" pitchFamily="18" charset="0"/>
+                          </a:rPr>
+                          <m:t>𝑜𝑝𝑡</m:t>
+                        </m:r>
+                      </m:sub>
+                    </m:sSub>
+                  </m:oMath>
+                </a14:m>
+                <a:endParaRPr lang="en-GB" dirty="0"/>
+              </a:p>
+            </p:txBody>
+          </p:sp>
+        </mc:Choice>
+        <mc:Fallback>
+          <p:sp>
+            <p:nvSpPr>
+              <p:cNvPr id="29" name="TextBox 28">
+                <a:extLst>
+                  <a:ext uri="{FF2B5EF4-FFF2-40B4-BE49-F238E27FC236}">
+                    <a16:creationId xmlns:a16="http://schemas.microsoft.com/office/drawing/2014/main" id="{5E707B1E-5311-C876-9D60-302258B07CED}"/>
+                  </a:ext>
+                </a:extLst>
+              </p:cNvPr>
+              <p:cNvSpPr txBox="1">
+                <a:spLocks noRot="1" noChangeAspect="1" noMove="1" noResize="1" noEditPoints="1" noAdjustHandles="1" noChangeArrowheads="1" noChangeShapeType="1" noTextEdit="1"/>
+              </p:cNvSpPr>
+              <p:nvPr/>
+            </p:nvSpPr>
+            <p:spPr>
+              <a:xfrm>
+                <a:off x="7217620" y="2722703"/>
+                <a:ext cx="3921369" cy="2329740"/>
+              </a:xfrm>
+              <a:prstGeom prst="rect">
+                <a:avLst/>
+              </a:prstGeom>
+              <a:blipFill>
+                <a:blip r:embed="rId6"/>
+                <a:stretch>
+                  <a:fillRect l="-1400" t="-1309" r="-933" b="-2880"/>
+                </a:stretch>
+              </a:blipFill>
+            </p:spPr>
+            <p:txBody>
+              <a:bodyPr/>
+              <a:lstStyle/>
+              <a:p>
+                <a:r>
+                  <a:rPr lang="en-GB">
+                    <a:noFill/>
+                  </a:rPr>
+                  <a:t> </a:t>
+                </a:r>
+              </a:p>
+            </p:txBody>
+          </p:sp>
+        </mc:Fallback>
+      </mc:AlternateContent>
+      <p:pic>
+        <p:nvPicPr>
+          <p:cNvPr id="31" name="Graphic 30" descr="Tick with solid fill">
+            <a:extLst>
+              <a:ext uri="{FF2B5EF4-FFF2-40B4-BE49-F238E27FC236}">
+                <a16:creationId xmlns:a16="http://schemas.microsoft.com/office/drawing/2014/main" id="{554BB4DC-983F-19B2-6825-D0F71AFE5ECA}"/>
+              </a:ext>
+            </a:extLst>
+          </p:cNvPr>
+          <p:cNvPicPr>
+            <a:picLocks noChangeAspect="1"/>
+          </p:cNvPicPr>
+          <p:nvPr/>
+        </p:nvPicPr>
+        <p:blipFill>
+          <a:blip r:embed="rId7">
+            <a:extLst>
+              <a:ext uri="{96DAC541-7B7A-43D3-8B79-37D633B846F1}">
+                <asvg:svgBlip xmlns:asvg="http://schemas.microsoft.com/office/drawing/2016/SVG/main" r:embed="rId8"/>
+              </a:ext>
+            </a:extLst>
+          </a:blip>
+          <a:stretch>
+            <a:fillRect/>
+          </a:stretch>
+        </p:blipFill>
+        <p:spPr>
+          <a:xfrm>
+            <a:off x="11046851" y="3410309"/>
+            <a:ext cx="506321" cy="506321"/>
+          </a:xfrm>
+          <a:prstGeom prst="rect">
+            <a:avLst/>
+          </a:prstGeom>
+        </p:spPr>
+      </p:pic>
+      <p:pic>
+        <p:nvPicPr>
+          <p:cNvPr id="32" name="Graphic 31" descr="Tick with solid fill">
+            <a:extLst>
+              <a:ext uri="{FF2B5EF4-FFF2-40B4-BE49-F238E27FC236}">
+                <a16:creationId xmlns:a16="http://schemas.microsoft.com/office/drawing/2014/main" id="{97740336-5B3B-1F72-EB8F-E016BC7558ED}"/>
+              </a:ext>
+            </a:extLst>
+          </p:cNvPr>
+          <p:cNvPicPr>
+            <a:picLocks noChangeAspect="1"/>
+          </p:cNvPicPr>
+          <p:nvPr/>
+        </p:nvPicPr>
+        <p:blipFill>
+          <a:blip r:embed="rId7">
+            <a:extLst>
+              <a:ext uri="{96DAC541-7B7A-43D3-8B79-37D633B846F1}">
+                <asvg:svgBlip xmlns:asvg="http://schemas.microsoft.com/office/drawing/2016/SVG/main" r:embed="rId8"/>
+              </a:ext>
+            </a:extLst>
+          </a:blip>
+          <a:stretch>
+            <a:fillRect/>
+          </a:stretch>
+        </p:blipFill>
+        <p:spPr>
+          <a:xfrm>
+            <a:off x="11138989" y="4377008"/>
+            <a:ext cx="506321" cy="506321"/>
+          </a:xfrm>
+          <a:prstGeom prst="rect">
+            <a:avLst/>
+          </a:prstGeom>
+        </p:spPr>
+      </p:pic>
+      <p:sp>
+        <p:nvSpPr>
+          <p:cNvPr id="33" name="Footer Placeholder 4">
+            <a:extLst>
+              <a:ext uri="{FF2B5EF4-FFF2-40B4-BE49-F238E27FC236}">
+                <a16:creationId xmlns:a16="http://schemas.microsoft.com/office/drawing/2014/main" id="{AF108CE8-1F97-3D19-668D-DD9A9FE400B4}"/>
+              </a:ext>
+            </a:extLst>
+          </p:cNvPr>
+          <p:cNvSpPr>
+            <a:spLocks noGrp="1"/>
+          </p:cNvSpPr>
+          <p:nvPr>
+            <p:ph type="ftr" sz="quarter" idx="11"/>
+          </p:nvPr>
+        </p:nvSpPr>
+        <p:spPr>
+          <a:xfrm>
+            <a:off x="2781300" y="6356349"/>
+            <a:ext cx="6629400" cy="365125"/>
+          </a:xfrm>
+        </p:spPr>
+        <p:txBody>
+          <a:bodyPr/>
+          <a:lstStyle/>
+          <a:p>
+            <a:r>
+              <a:rPr lang="en-DE" dirty="0"/>
+              <a:t>Group 3:</a:t>
+            </a:r>
+            <a:r>
+              <a:rPr lang="it-IT" dirty="0"/>
+              <a:t> Federico De Mita, </a:t>
+            </a:r>
+            <a:r>
+              <a:rPr lang="it-IT" dirty="0" err="1"/>
+              <a:t>Waqas</a:t>
+            </a:r>
+            <a:r>
+              <a:rPr lang="it-IT" dirty="0"/>
+              <a:t> Ahmed, Dominic </a:t>
+            </a:r>
+            <a:r>
+              <a:rPr lang="it-IT" dirty="0" err="1"/>
+              <a:t>Annang</a:t>
+            </a:r>
+            <a:r>
+              <a:rPr lang="it-IT" dirty="0"/>
+              <a:t>, Hesham </a:t>
+            </a:r>
+            <a:r>
+              <a:rPr lang="it-IT" dirty="0" err="1"/>
+              <a:t>Magdy</a:t>
+            </a:r>
+            <a:r>
+              <a:rPr lang="it-IT" dirty="0"/>
+              <a:t>, </a:t>
+            </a:r>
+            <a:r>
+              <a:rPr lang="it-IT" dirty="0" err="1"/>
+              <a:t>Muthu</a:t>
+            </a:r>
+            <a:r>
+              <a:rPr lang="it-IT" dirty="0"/>
+              <a:t> </a:t>
+            </a:r>
+            <a:r>
+              <a:rPr lang="it-IT" dirty="0" err="1"/>
+              <a:t>Sivamuthu</a:t>
+            </a:r>
+            <a:r>
+              <a:rPr lang="it-IT" dirty="0"/>
+              <a:t> </a:t>
+            </a:r>
+            <a:r>
+              <a:rPr lang="en-DE" dirty="0"/>
+              <a:t> </a:t>
+            </a:r>
+          </a:p>
+        </p:txBody>
+      </p:sp>
+    </p:spTree>
+    <p:extLst>
+      <p:ext uri="{BB962C8B-B14F-4D97-AF65-F5344CB8AC3E}">
+        <p14:creationId xmlns:p14="http://schemas.microsoft.com/office/powerpoint/2010/main" val="2155507051"/>
+      </p:ext>
+    </p:extLst>
+  </p:cSld>
+  <p:clrMapOvr>
+    <a:masterClrMapping/>
+  </p:clrMapOvr>
+</p:sld>
+</file>
+
+<file path=ppt/slides/slide9.xml><?xml version="1.0" encoding="utf-8"?>
+<p:sld xmlns:a="http://schemas.openxmlformats.org/drawingml/2006/main" xmlns:r="http://schemas.openxmlformats.org/officeDocument/2006/relationships" xmlns:p="http://schemas.openxmlformats.org/presentationml/2006/main">
+  <p:cSld>
+    <p:spTree>
+      <p:nvGrpSpPr>
+        <p:cNvPr id="1" name="">
+          <a:extLst>
+            <a:ext uri="{FF2B5EF4-FFF2-40B4-BE49-F238E27FC236}">
+              <a16:creationId xmlns:a16="http://schemas.microsoft.com/office/drawing/2014/main" id="{2D840B68-C6BD-E3F5-6593-A82EBA51B4F2}"/>
+            </a:ext>
+          </a:extLst>
+        </p:cNvPr>
+        <p:cNvGrpSpPr/>
+        <p:nvPr/>
+      </p:nvGrpSpPr>
+      <p:grpSpPr>
+        <a:xfrm>
+          <a:off x="0" y="0"/>
+          <a:ext cx="0" cy="0"/>
+          <a:chOff x="0" y="0"/>
+          <a:chExt cx="0" cy="0"/>
+        </a:xfrm>
+      </p:grpSpPr>
+      <p:sp>
+        <p:nvSpPr>
+          <p:cNvPr id="2" name="Title 1">
+            <a:extLst>
+              <a:ext uri="{FF2B5EF4-FFF2-40B4-BE49-F238E27FC236}">
+                <a16:creationId xmlns:a16="http://schemas.microsoft.com/office/drawing/2014/main" id="{29E39CF1-9E8B-D0B3-9510-0AF1A6AA9F7A}"/>
+              </a:ext>
+            </a:extLst>
+          </p:cNvPr>
+          <p:cNvSpPr>
+            <a:spLocks noGrp="1"/>
+          </p:cNvSpPr>
+          <p:nvPr>
+            <p:ph type="title"/>
+          </p:nvPr>
+        </p:nvSpPr>
+        <p:spPr>
+          <a:xfrm>
+            <a:off x="838200" y="214444"/>
+            <a:ext cx="8921262" cy="1325563"/>
+          </a:xfrm>
+        </p:spPr>
+        <p:txBody>
+          <a:bodyPr>
+            <a:normAutofit/>
+          </a:bodyPr>
+          <a:lstStyle/>
+          <a:p>
+            <a:r>
+              <a:rPr lang="it-IT" sz="3800" dirty="0"/>
+              <a:t>2 – Test of a Baseline controller </a:t>
+            </a:r>
+            <a:endParaRPr lang="en-GB" sz="3800" dirty="0"/>
+          </a:p>
+        </p:txBody>
+      </p:sp>
+      <p:sp>
+        <p:nvSpPr>
+          <p:cNvPr id="21" name="Date Placeholder 3">
+            <a:extLst>
+              <a:ext uri="{FF2B5EF4-FFF2-40B4-BE49-F238E27FC236}">
+                <a16:creationId xmlns:a16="http://schemas.microsoft.com/office/drawing/2014/main" id="{80F8ADFD-317F-859B-23B6-71E56D732A11}"/>
+              </a:ext>
+            </a:extLst>
+          </p:cNvPr>
+          <p:cNvSpPr>
+            <a:spLocks noGrp="1"/>
+          </p:cNvSpPr>
+          <p:nvPr>
+            <p:ph type="dt" sz="half" idx="10"/>
+          </p:nvPr>
+        </p:nvSpPr>
+        <p:spPr>
+          <a:xfrm>
+            <a:off x="838200" y="6356350"/>
+            <a:ext cx="2743200" cy="365125"/>
+          </a:xfrm>
+        </p:spPr>
+        <p:txBody>
+          <a:bodyPr/>
+          <a:lstStyle/>
+          <a:p>
+            <a:fld id="{42FF62D6-EE07-404C-A186-889D29CA3091}" type="datetime1">
+              <a:rPr lang="LID4096" smtClean="0"/>
+              <a:t>10/11/2025</a:t>
+            </a:fld>
+            <a:endParaRPr lang="en-DE"/>
+          </a:p>
+        </p:txBody>
+      </p:sp>
+      <p:sp>
+        <p:nvSpPr>
+          <p:cNvPr id="23" name="Slide Number Placeholder 5">
+            <a:extLst>
+              <a:ext uri="{FF2B5EF4-FFF2-40B4-BE49-F238E27FC236}">
+                <a16:creationId xmlns:a16="http://schemas.microsoft.com/office/drawing/2014/main" id="{D496C03A-107B-6F73-7FC2-31A34AD9EF50}"/>
+              </a:ext>
+            </a:extLst>
+          </p:cNvPr>
+          <p:cNvSpPr>
+            <a:spLocks noGrp="1"/>
+          </p:cNvSpPr>
+          <p:nvPr>
+            <p:ph type="sldNum" sz="quarter" idx="12"/>
+          </p:nvPr>
+        </p:nvSpPr>
+        <p:spPr>
+          <a:xfrm>
+            <a:off x="8610600" y="6356350"/>
+            <a:ext cx="2743200" cy="365125"/>
+          </a:xfrm>
+        </p:spPr>
+        <p:txBody>
+          <a:bodyPr/>
+          <a:lstStyle/>
+          <a:p>
+            <a:fld id="{F9C2340B-4B0F-4DED-BE4C-833C39BBA64E}" type="slidenum">
+              <a:rPr lang="en-DE" smtClean="0"/>
+              <a:t>9</a:t>
+            </a:fld>
+            <a:endParaRPr lang="en-DE"/>
+          </a:p>
+        </p:txBody>
+      </p:sp>
+      <p:sp>
+        <p:nvSpPr>
+          <p:cNvPr id="3" name="TextBox 2">
+            <a:extLst>
+              <a:ext uri="{FF2B5EF4-FFF2-40B4-BE49-F238E27FC236}">
+                <a16:creationId xmlns:a16="http://schemas.microsoft.com/office/drawing/2014/main" id="{A932DEC2-68B9-E94C-F946-84845CA72ADD}"/>
+              </a:ext>
+            </a:extLst>
+          </p:cNvPr>
+          <p:cNvSpPr txBox="1"/>
+          <p:nvPr/>
+        </p:nvSpPr>
+        <p:spPr>
+          <a:xfrm>
+            <a:off x="838200" y="1234742"/>
+            <a:ext cx="7086600" cy="369332"/>
+          </a:xfrm>
+          <a:prstGeom prst="rect">
+            <a:avLst/>
+          </a:prstGeom>
+          <a:noFill/>
+        </p:spPr>
+        <p:txBody>
+          <a:bodyPr wrap="square" rtlCol="0">
+            <a:spAutoFit/>
+          </a:bodyPr>
+          <a:lstStyle/>
+          <a:p>
+            <a:r>
+              <a:rPr lang="it-IT" dirty="0"/>
+              <a:t>a) </a:t>
+            </a:r>
+            <a:r>
+              <a:rPr lang="it-IT" dirty="0" err="1"/>
+              <a:t>Comparison</a:t>
+            </a:r>
+            <a:r>
+              <a:rPr lang="it-IT" dirty="0"/>
+              <a:t> with FAST: FAST </a:t>
+            </a:r>
+            <a:r>
+              <a:rPr lang="it-IT" dirty="0" err="1"/>
+              <a:t>implementation</a:t>
+            </a:r>
+            <a:r>
+              <a:rPr lang="it-IT" dirty="0"/>
+              <a:t> on MATLAB:</a:t>
+            </a:r>
+            <a:endParaRPr lang="en-GB" dirty="0"/>
+          </a:p>
+        </p:txBody>
+      </p:sp>
+      <p:sp>
+        <p:nvSpPr>
+          <p:cNvPr id="4" name="TextBox 3">
+            <a:extLst>
+              <a:ext uri="{FF2B5EF4-FFF2-40B4-BE49-F238E27FC236}">
+                <a16:creationId xmlns:a16="http://schemas.microsoft.com/office/drawing/2014/main" id="{67FC3343-ABED-6AFC-0A62-9DE826629774}"/>
+              </a:ext>
+            </a:extLst>
+          </p:cNvPr>
+          <p:cNvSpPr txBox="1"/>
+          <p:nvPr/>
+        </p:nvSpPr>
+        <p:spPr>
+          <a:xfrm>
+            <a:off x="838200" y="1661749"/>
+            <a:ext cx="3569677" cy="369332"/>
+          </a:xfrm>
+          <a:prstGeom prst="rect">
+            <a:avLst/>
+          </a:prstGeom>
+          <a:noFill/>
+        </p:spPr>
+        <p:txBody>
+          <a:bodyPr wrap="square" rtlCol="0">
+            <a:spAutoFit/>
+          </a:bodyPr>
+          <a:lstStyle/>
+          <a:p>
+            <a:pPr marL="285750" indent="-285750">
+              <a:buFont typeface="Arial" panose="020B0604020202020204" pitchFamily="34" charset="0"/>
+              <a:buChar char="•"/>
+            </a:pPr>
+            <a:r>
+              <a:rPr lang="it-IT" b="1" dirty="0"/>
+              <a:t>Processing</a:t>
+            </a:r>
+            <a:endParaRPr lang="en-GB" b="1" dirty="0"/>
+          </a:p>
+        </p:txBody>
+      </p:sp>
+      <p:pic>
+        <p:nvPicPr>
+          <p:cNvPr id="6" name="Picture 5">
+            <a:extLst>
+              <a:ext uri="{FF2B5EF4-FFF2-40B4-BE49-F238E27FC236}">
+                <a16:creationId xmlns:a16="http://schemas.microsoft.com/office/drawing/2014/main" id="{8FBE1760-BF5B-1256-090E-12EA025B892A}"/>
+              </a:ext>
+            </a:extLst>
+          </p:cNvPr>
+          <p:cNvPicPr>
+            <a:picLocks noChangeAspect="1"/>
+          </p:cNvPicPr>
+          <p:nvPr/>
+        </p:nvPicPr>
+        <p:blipFill>
+          <a:blip r:embed="rId2"/>
+          <a:stretch>
+            <a:fillRect/>
+          </a:stretch>
+        </p:blipFill>
+        <p:spPr>
+          <a:xfrm>
+            <a:off x="1038612" y="2042339"/>
+            <a:ext cx="6886188" cy="1536694"/>
+          </a:xfrm>
+          <a:prstGeom prst="rect">
+            <a:avLst/>
+          </a:prstGeom>
+        </p:spPr>
+      </p:pic>
+      <p:sp>
+        <p:nvSpPr>
+          <p:cNvPr id="7" name="TextBox 6">
+            <a:extLst>
+              <a:ext uri="{FF2B5EF4-FFF2-40B4-BE49-F238E27FC236}">
+                <a16:creationId xmlns:a16="http://schemas.microsoft.com/office/drawing/2014/main" id="{CAA23360-4E17-E19F-25FD-2C46D20D9064}"/>
+              </a:ext>
+            </a:extLst>
+          </p:cNvPr>
+          <p:cNvSpPr txBox="1"/>
+          <p:nvPr/>
+        </p:nvSpPr>
+        <p:spPr>
+          <a:xfrm>
+            <a:off x="838200" y="3590291"/>
+            <a:ext cx="3569677" cy="369332"/>
+          </a:xfrm>
+          <a:prstGeom prst="rect">
+            <a:avLst/>
+          </a:prstGeom>
+          <a:noFill/>
+        </p:spPr>
+        <p:txBody>
+          <a:bodyPr wrap="square" rtlCol="0">
+            <a:spAutoFit/>
+          </a:bodyPr>
+          <a:lstStyle/>
+          <a:p>
+            <a:pPr marL="285750" indent="-285750">
+              <a:buFont typeface="Arial" panose="020B0604020202020204" pitchFamily="34" charset="0"/>
+              <a:buChar char="•"/>
+            </a:pPr>
+            <a:r>
+              <a:rPr lang="it-IT" b="1" dirty="0"/>
+              <a:t>Post Processing</a:t>
+            </a:r>
+            <a:endParaRPr lang="en-GB" b="1" dirty="0"/>
+          </a:p>
+        </p:txBody>
+      </p:sp>
+      <p:pic>
+        <p:nvPicPr>
+          <p:cNvPr id="13" name="Picture 12">
+            <a:extLst>
+              <a:ext uri="{FF2B5EF4-FFF2-40B4-BE49-F238E27FC236}">
+                <a16:creationId xmlns:a16="http://schemas.microsoft.com/office/drawing/2014/main" id="{04FE9AE4-6758-04D6-BA88-009286A40717}"/>
+              </a:ext>
+            </a:extLst>
+          </p:cNvPr>
+          <p:cNvPicPr>
+            <a:picLocks noChangeAspect="1"/>
+          </p:cNvPicPr>
+          <p:nvPr/>
+        </p:nvPicPr>
+        <p:blipFill>
+          <a:blip r:embed="rId3"/>
+          <a:stretch>
+            <a:fillRect/>
+          </a:stretch>
+        </p:blipFill>
+        <p:spPr>
+          <a:xfrm>
+            <a:off x="1038612" y="3959623"/>
+            <a:ext cx="5236047" cy="1877956"/>
+          </a:xfrm>
+          <a:prstGeom prst="rect">
+            <a:avLst/>
+          </a:prstGeom>
+        </p:spPr>
+      </p:pic>
+      <p:sp>
+        <p:nvSpPr>
+          <p:cNvPr id="14" name="Footer Placeholder 4">
+            <a:extLst>
+              <a:ext uri="{FF2B5EF4-FFF2-40B4-BE49-F238E27FC236}">
+                <a16:creationId xmlns:a16="http://schemas.microsoft.com/office/drawing/2014/main" id="{A9EF36E1-ECB6-CE92-7A8B-C884EB8F631E}"/>
+              </a:ext>
+            </a:extLst>
+          </p:cNvPr>
+          <p:cNvSpPr>
+            <a:spLocks noGrp="1"/>
+          </p:cNvSpPr>
+          <p:nvPr>
+            <p:ph type="ftr" sz="quarter" idx="11"/>
+          </p:nvPr>
+        </p:nvSpPr>
+        <p:spPr>
+          <a:xfrm>
+            <a:off x="2781300" y="6356349"/>
+            <a:ext cx="6629400" cy="365125"/>
+          </a:xfrm>
+        </p:spPr>
+        <p:txBody>
+          <a:bodyPr/>
+          <a:lstStyle/>
+          <a:p>
+            <a:r>
+              <a:rPr lang="en-DE" dirty="0"/>
+              <a:t>Group 3:</a:t>
+            </a:r>
+            <a:r>
+              <a:rPr lang="it-IT" dirty="0"/>
+              <a:t> Federico De Mita, </a:t>
+            </a:r>
+            <a:r>
+              <a:rPr lang="it-IT" dirty="0" err="1"/>
+              <a:t>Waqas</a:t>
+            </a:r>
+            <a:r>
+              <a:rPr lang="it-IT" dirty="0"/>
+              <a:t> Ahmed, Dominic </a:t>
+            </a:r>
+            <a:r>
+              <a:rPr lang="it-IT" dirty="0" err="1"/>
+              <a:t>Annang</a:t>
+            </a:r>
+            <a:r>
+              <a:rPr lang="it-IT" dirty="0"/>
+              <a:t>, Hesham </a:t>
+            </a:r>
+            <a:r>
+              <a:rPr lang="it-IT" dirty="0" err="1"/>
+              <a:t>Magdy</a:t>
+            </a:r>
+            <a:r>
+              <a:rPr lang="it-IT" dirty="0"/>
+              <a:t>, </a:t>
+            </a:r>
+            <a:r>
+              <a:rPr lang="it-IT" dirty="0" err="1"/>
+              <a:t>Muthu</a:t>
+            </a:r>
+            <a:r>
+              <a:rPr lang="it-IT" dirty="0"/>
+              <a:t> </a:t>
+            </a:r>
+            <a:r>
+              <a:rPr lang="it-IT" dirty="0" err="1"/>
+              <a:t>Sivamuthu</a:t>
+            </a:r>
+            <a:r>
+              <a:rPr lang="it-IT" dirty="0"/>
+              <a:t> </a:t>
+            </a:r>
+            <a:r>
+              <a:rPr lang="en-DE" dirty="0"/>
+              <a:t> </a:t>
+            </a:r>
+          </a:p>
+        </p:txBody>
+      </p:sp>
+    </p:spTree>
+    <p:extLst>
+      <p:ext uri="{BB962C8B-B14F-4D97-AF65-F5344CB8AC3E}">
+        <p14:creationId xmlns:p14="http://schemas.microsoft.com/office/powerpoint/2010/main" val="768897572"/>
       </p:ext>
     </p:extLst>
   </p:cSld>
@@ -5496,12 +13854,9 @@
 </file>
 
 <file path=customXml/item1.xml><?xml version="1.0" encoding="utf-8"?>
-<?mso-contentType ?>
-<FormTemplates xmlns="http://schemas.microsoft.com/sharepoint/v3/contenttype/forms">
-  <Display>DocumentLibraryForm</Display>
-  <Edit>DocumentLibraryForm</Edit>
-  <New>DocumentLibraryForm</New>
-</FormTemplates>
+<p:properties xmlns:p="http://schemas.microsoft.com/office/2006/metadata/properties" xmlns:xsi="http://www.w3.org/2001/XMLSchema-instance" xmlns:pc="http://schemas.microsoft.com/office/infopath/2007/PartnerControls">
+  <documentManagement/>
+</p:properties>
 </file>
 
 <file path=customXml/item2.xml><?xml version="1.0" encoding="utf-8"?>
@@ -5631,15 +13986,26 @@
 </file>
 
 <file path=customXml/item3.xml><?xml version="1.0" encoding="utf-8"?>
-<p:properties xmlns:p="http://schemas.microsoft.com/office/2006/metadata/properties" xmlns:xsi="http://www.w3.org/2001/XMLSchema-instance" xmlns:pc="http://schemas.microsoft.com/office/infopath/2007/PartnerControls">
-  <documentManagement/>
-</p:properties>
+<?mso-contentType ?>
+<FormTemplates xmlns="http://schemas.microsoft.com/sharepoint/v3/contenttype/forms">
+  <Display>DocumentLibraryForm</Display>
+  <Edit>DocumentLibraryForm</Edit>
+  <New>DocumentLibraryForm</New>
+</FormTemplates>
 </file>
 
 <file path=customXml/itemProps1.xml><?xml version="1.0" encoding="utf-8"?>
-<ds:datastoreItem xmlns:ds="http://schemas.openxmlformats.org/officeDocument/2006/customXml" ds:itemID="{8C224771-1E3B-4C32-AF2C-191D6D02C4D7}">
+<ds:datastoreItem xmlns:ds="http://schemas.openxmlformats.org/officeDocument/2006/customXml" ds:itemID="{69175621-CD6C-497F-BE7E-1534DFF69F21}">
   <ds:schemaRefs>
-    <ds:schemaRef ds:uri="http://schemas.microsoft.com/sharepoint/v3/contenttype/forms"/>
+    <ds:schemaRef ds:uri="http://purl.org/dc/elements/1.1/"/>
+    <ds:schemaRef ds:uri="http://schemas.microsoft.com/office/2006/documentManagement/types"/>
+    <ds:schemaRef ds:uri="http://schemas.microsoft.com/office/infopath/2007/PartnerControls"/>
+    <ds:schemaRef ds:uri="http://purl.org/dc/dcmitype/"/>
+    <ds:schemaRef ds:uri="http://schemas.openxmlformats.org/package/2006/metadata/core-properties"/>
+    <ds:schemaRef ds:uri="http://schemas.microsoft.com/office/2006/metadata/properties"/>
+    <ds:schemaRef ds:uri="1bb79e81-dc70-43c8-bec3-325dabe99c04"/>
+    <ds:schemaRef ds:uri="http://www.w3.org/XML/1998/namespace"/>
+    <ds:schemaRef ds:uri="http://purl.org/dc/terms/"/>
   </ds:schemaRefs>
 </ds:datastoreItem>
 </file>
@@ -5663,17 +14029,9 @@
 </file>
 
 <file path=customXml/itemProps3.xml><?xml version="1.0" encoding="utf-8"?>
-<ds:datastoreItem xmlns:ds="http://schemas.openxmlformats.org/officeDocument/2006/customXml" ds:itemID="{69175621-CD6C-497F-BE7E-1534DFF69F21}">
+<ds:datastoreItem xmlns:ds="http://schemas.openxmlformats.org/officeDocument/2006/customXml" ds:itemID="{8C224771-1E3B-4C32-AF2C-191D6D02C4D7}">
   <ds:schemaRefs>
-    <ds:schemaRef ds:uri="http://purl.org/dc/elements/1.1/"/>
-    <ds:schemaRef ds:uri="http://schemas.microsoft.com/office/2006/documentManagement/types"/>
-    <ds:schemaRef ds:uri="http://schemas.microsoft.com/office/infopath/2007/PartnerControls"/>
-    <ds:schemaRef ds:uri="http://purl.org/dc/dcmitype/"/>
-    <ds:schemaRef ds:uri="http://schemas.openxmlformats.org/package/2006/metadata/core-properties"/>
-    <ds:schemaRef ds:uri="http://schemas.microsoft.com/office/2006/metadata/properties"/>
-    <ds:schemaRef ds:uri="1bb79e81-dc70-43c8-bec3-325dabe99c04"/>
-    <ds:schemaRef ds:uri="http://www.w3.org/XML/1998/namespace"/>
-    <ds:schemaRef ds:uri="http://purl.org/dc/terms/"/>
+    <ds:schemaRef ds:uri="http://schemas.microsoft.com/sharepoint/v3/contenttype/forms"/>
   </ds:schemaRefs>
 </ds:datastoreItem>
 </file>